--- a/demo/ppt/presentation.pptx
+++ b/demo/ppt/presentation.pptx
@@ -20,6 +20,8 @@
     <p:sldId id="268" r:id="rId19"/>
     <p:sldId id="269" r:id="rId20"/>
     <p:sldId id="270" r:id="rId21"/>
+    <p:sldId id="271" r:id="rId22"/>
+    <p:sldId id="272" r:id="rId23"/>
   </p:sldIdLst>
   <p:sldSz cx="12191695" cy="6858000" type="screen4x3"/>
   <p:notesSz cx="6858000" cy="9144000"/>
@@ -3801,7 +3803,7 @@
                 </a:solidFill>
                 <a:latin typeface="Segoe UI"/>
               </a:rPr>
-              <a:t>09 • KUBERNETES, HELM &amp; GITOPS</a:t>
+              <a:t>09 • INFRASTRUCTURE AS CODE</a:t>
             </a:r>
           </a:p>
         </p:txBody>
@@ -3843,7 +3845,7 @@
                 </a:solidFill>
                 <a:latin typeface="Segoe UI"/>
               </a:rPr>
-              <a:t>Declarative delivery with probes and self-healing</a:t>
+              <a:t>Terraform describes the AWS foundation</a:t>
             </a:r>
           </a:p>
         </p:txBody>
@@ -3885,7 +3887,7 @@
                 </a:solidFill>
                 <a:latin typeface="Segoe UI"/>
               </a:rPr>
-              <a:t>helm/devtrack packages the app; ArgoCD keeps the cluster in sync with Git.</a:t>
+              <a:t>Region ap-southeast-2 (Sydney) • terraform init → validate → plan → apply → destroy</a:t>
             </a:r>
           </a:p>
         </p:txBody>
@@ -3969,7 +3971,7 @@
                 </a:solidFill>
                 <a:latin typeface="Segoe UI"/>
               </a:rPr>
-              <a:t>10 / 15</a:t>
+              <a:t>10 / 17</a:t>
             </a:r>
           </a:p>
         </p:txBody>
@@ -3995,7 +3997,7 @@
           </a:solidFill>
           <a:ln w="12700">
             <a:solidFill>
-              <a:srgbClr val="4F46E5"/>
+              <a:srgbClr val="0EA5E9"/>
             </a:solidFill>
           </a:ln>
           <a:effectLst/>
@@ -4055,11 +4057,11 @@
             <a:r>
               <a:rPr sz="1400" b="1">
                 <a:solidFill>
-                  <a:srgbClr val="4F46E5"/>
-                </a:solidFill>
-                <a:latin typeface="Segoe UI"/>
-              </a:rPr>
-              <a:t>EKS  •  namespace: devtrack</a:t>
+                  <a:srgbClr val="0EA5E9"/>
+                </a:solidFill>
+                <a:latin typeface="Segoe UI"/>
+              </a:rPr>
+              <a:t>VPC  •  10.0.0.0/16</a:t>
             </a:r>
           </a:p>
         </p:txBody>
@@ -4072,63 +4074,8 @@
         </p:nvSpPr>
         <p:spPr>
           <a:xfrm>
-            <a:off x="2377440" y="2331720"/>
-            <a:ext cx="3108960" cy="548640"/>
-          </a:xfrm>
-          <a:prstGeom prst="roundRect">
-            <a:avLst>
-              <a:gd name="adj" fmla="val 8000"/>
-            </a:avLst>
-          </a:prstGeom>
-          <a:solidFill>
-            <a:srgbClr val="EEF0FF"/>
-          </a:solidFill>
-          <a:ln>
-            <a:noFill/>
-          </a:ln>
-          <a:effectLst/>
-        </p:spPr>
-        <p:style>
-          <a:lnRef idx="1">
-            <a:schemeClr val="accent1"/>
-          </a:lnRef>
-          <a:fillRef idx="3">
-            <a:schemeClr val="accent1"/>
-          </a:fillRef>
-          <a:effectRef idx="2">
-            <a:schemeClr val="accent1"/>
-          </a:effectRef>
-          <a:fontRef idx="minor">
-            <a:schemeClr val="lt1"/>
-          </a:fontRef>
-        </p:style>
-        <p:txBody>
-          <a:bodyPr rtlCol="0" anchor="ctr" wrap="square" lIns="73152" rIns="73152"/>
-          <a:lstStyle/>
-          <a:p>
-            <a:pPr algn="ctr"/>
-            <a:r>
-              <a:rPr sz="1100" b="1">
-                <a:solidFill>
-                  <a:srgbClr val="4F46E5"/>
-                </a:solidFill>
-                <a:latin typeface="Segoe UI"/>
-              </a:rPr>
-              <a:t>Ingress NGINX  ( /  ·  /api  ·  /docs )</a:t>
-            </a:r>
-          </a:p>
-        </p:txBody>
-      </p:sp>
-      <p:sp>
-        <p:nvSpPr>
-          <p:cNvPr id="11" name="Rounded Rectangle 10"/>
-          <p:cNvSpPr/>
-          <p:nvPr/>
-        </p:nvSpPr>
-        <p:spPr>
-          <a:xfrm>
-            <a:off x="822960" y="3383280"/>
-            <a:ext cx="1828800" cy="1691640"/>
+            <a:off x="822960" y="2286000"/>
+            <a:ext cx="3063240" cy="3749039"/>
           </a:xfrm>
           <a:prstGeom prst="roundRect">
             <a:avLst>
@@ -4160,31 +4107,51 @@
           </a:fontRef>
         </p:style>
         <p:txBody>
-          <a:bodyPr rtlCol="0" anchor="ctr" wrap="square" lIns="73152" rIns="73152"/>
+          <a:bodyPr rtlCol="0" anchor="ctr"/>
           <a:lstStyle/>
           <a:p>
             <a:pPr algn="ctr"/>
-            <a:r>
-              <a:rPr sz="1300" b="1">
-                <a:solidFill>
-                  <a:srgbClr val="1C1F2E"/>
-                </a:solidFill>
-                <a:latin typeface="Segoe UI"/>
-              </a:rPr>
-              <a:t>Frontend</a:t>
-            </a:r>
-          </a:p>
-          <a:p>
-            <a:pPr algn="ctr"/>
-            <a:r>
-              <a:rPr sz="1000" b="0">
+          </a:p>
+        </p:txBody>
+      </p:sp>
+      <p:sp>
+        <p:nvSpPr>
+          <p:cNvPr id="11" name="TextBox 10"/>
+          <p:cNvSpPr txBox="1"/>
+          <p:nvPr/>
+        </p:nvSpPr>
+        <p:spPr>
+          <a:xfrm>
+            <a:off x="1005840" y="2377440"/>
+            <a:ext cx="1828800" cy="274320"/>
+          </a:xfrm>
+          <a:prstGeom prst="rect">
+            <a:avLst/>
+          </a:prstGeom>
+          <a:noFill/>
+        </p:spPr>
+        <p:txBody>
+          <a:bodyPr wrap="square" anchor="t" lIns="18288" rIns="18288" tIns="18288" bIns="18288">
+            <a:spAutoFit/>
+          </a:bodyPr>
+          <a:lstStyle/>
+          <a:p>
+            <a:pPr algn="l">
+              <a:lnSpc>
+                <a:spcPct val="110000"/>
+              </a:lnSpc>
+              <a:spcAft>
+                <a:spcPts val="400"/>
+              </a:spcAft>
+            </a:pPr>
+            <a:r>
+              <a:rPr sz="1100" b="1">
                 <a:solidFill>
                   <a:srgbClr val="6B7086"/>
                 </a:solidFill>
                 <a:latin typeface="Segoe UI"/>
               </a:rPr>
-              <a:t>3 replicas
-Service :80 → :8080</a:t>
+              <a:t>AZ a</a:t>
             </a:r>
           </a:p>
         </p:txBody>
@@ -4197,8 +4164,178 @@
         </p:nvSpPr>
         <p:spPr>
           <a:xfrm>
-            <a:off x="3063240" y="3383280"/>
-            <a:ext cx="1828800" cy="1691640"/>
+            <a:off x="1005840" y="2743200"/>
+            <a:ext cx="2697480" cy="1051560"/>
+          </a:xfrm>
+          <a:prstGeom prst="roundRect">
+            <a:avLst>
+              <a:gd name="adj" fmla="val 8000"/>
+            </a:avLst>
+          </a:prstGeom>
+          <a:solidFill>
+            <a:srgbClr val="E0F2FE"/>
+          </a:solidFill>
+          <a:ln>
+            <a:noFill/>
+          </a:ln>
+          <a:effectLst/>
+        </p:spPr>
+        <p:style>
+          <a:lnRef idx="1">
+            <a:schemeClr val="accent1"/>
+          </a:lnRef>
+          <a:fillRef idx="3">
+            <a:schemeClr val="accent1"/>
+          </a:fillRef>
+          <a:effectRef idx="2">
+            <a:schemeClr val="accent1"/>
+          </a:effectRef>
+          <a:fontRef idx="minor">
+            <a:schemeClr val="lt1"/>
+          </a:fontRef>
+        </p:style>
+        <p:txBody>
+          <a:bodyPr rtlCol="0" anchor="ctr" wrap="square" lIns="73152" rIns="73152"/>
+          <a:lstStyle/>
+          <a:p>
+            <a:pPr algn="ctr"/>
+            <a:r>
+              <a:rPr sz="1200" b="1">
+                <a:solidFill>
+                  <a:srgbClr val="1C1F2E"/>
+                </a:solidFill>
+                <a:latin typeface="Segoe UI"/>
+              </a:rPr>
+              <a:t>Public subnet</a:t>
+            </a:r>
+          </a:p>
+          <a:p>
+            <a:pPr algn="ctr"/>
+            <a:r>
+              <a:rPr sz="1100" b="0">
+                <a:solidFill>
+                  <a:srgbClr val="6B7086"/>
+                </a:solidFill>
+                <a:latin typeface="Consolas"/>
+              </a:rPr>
+              <a:t>10.0.1.0/24</a:t>
+            </a:r>
+          </a:p>
+          <a:p>
+            <a:pPr algn="ctr"/>
+            <a:r>
+              <a:rPr sz="1000" b="0">
+                <a:solidFill>
+                  <a:srgbClr val="6B7086"/>
+                </a:solidFill>
+                <a:latin typeface="Segoe UI"/>
+              </a:rPr>
+              <a:t>IGW + NAT gateway</a:t>
+            </a:r>
+          </a:p>
+        </p:txBody>
+      </p:sp>
+      <p:sp>
+        <p:nvSpPr>
+          <p:cNvPr id="13" name="Rounded Rectangle 12"/>
+          <p:cNvSpPr/>
+          <p:nvPr/>
+        </p:nvSpPr>
+        <p:spPr>
+          <a:xfrm>
+            <a:off x="1005840" y="3977639"/>
+            <a:ext cx="2697480" cy="1874519"/>
+          </a:xfrm>
+          <a:prstGeom prst="roundRect">
+            <a:avLst>
+              <a:gd name="adj" fmla="val 8000"/>
+            </a:avLst>
+          </a:prstGeom>
+          <a:solidFill>
+            <a:srgbClr val="D1FAE5"/>
+          </a:solidFill>
+          <a:ln>
+            <a:noFill/>
+          </a:ln>
+          <a:effectLst/>
+        </p:spPr>
+        <p:style>
+          <a:lnRef idx="1">
+            <a:schemeClr val="accent1"/>
+          </a:lnRef>
+          <a:fillRef idx="3">
+            <a:schemeClr val="accent1"/>
+          </a:fillRef>
+          <a:effectRef idx="2">
+            <a:schemeClr val="accent1"/>
+          </a:effectRef>
+          <a:fontRef idx="minor">
+            <a:schemeClr val="lt1"/>
+          </a:fontRef>
+        </p:style>
+        <p:txBody>
+          <a:bodyPr rtlCol="0" anchor="ctr" wrap="square" lIns="73152" rIns="73152"/>
+          <a:lstStyle/>
+          <a:p>
+            <a:pPr algn="ctr"/>
+            <a:r>
+              <a:rPr sz="1200" b="1">
+                <a:solidFill>
+                  <a:srgbClr val="1C1F2E"/>
+                </a:solidFill>
+                <a:latin typeface="Segoe UI"/>
+              </a:rPr>
+              <a:t>Private subnet</a:t>
+            </a:r>
+          </a:p>
+          <a:p>
+            <a:pPr algn="ctr"/>
+            <a:r>
+              <a:rPr sz="1100" b="0">
+                <a:solidFill>
+                  <a:srgbClr val="6B7086"/>
+                </a:solidFill>
+                <a:latin typeface="Consolas"/>
+              </a:rPr>
+              <a:t>10.0.10.0/24</a:t>
+            </a:r>
+          </a:p>
+          <a:p>
+            <a:pPr algn="ctr"/>
+            <a:r>
+              <a:rPr sz="1000" b="0">
+                <a:solidFill>
+                  <a:srgbClr val="6B7086"/>
+                </a:solidFill>
+                <a:latin typeface="Segoe UI"/>
+              </a:rPr>
+              <a:t>EKS worker nodes</a:t>
+            </a:r>
+          </a:p>
+          <a:p>
+            <a:pPr algn="ctr"/>
+            <a:r>
+              <a:rPr sz="1000" b="0">
+                <a:solidFill>
+                  <a:srgbClr val="6B7086"/>
+                </a:solidFill>
+                <a:latin typeface="Segoe UI"/>
+              </a:rPr>
+              <a:t>t3.medium (AL2023)</a:t>
+            </a:r>
+          </a:p>
+        </p:txBody>
+      </p:sp>
+      <p:sp>
+        <p:nvSpPr>
+          <p:cNvPr id="14" name="Rounded Rectangle 13"/>
+          <p:cNvSpPr/>
+          <p:nvPr/>
+        </p:nvSpPr>
+        <p:spPr>
+          <a:xfrm>
+            <a:off x="4069080" y="2286000"/>
+            <a:ext cx="3063240" cy="3749039"/>
           </a:xfrm>
           <a:prstGeom prst="roundRect">
             <a:avLst>
@@ -4230,224 +4367,23 @@
           </a:fontRef>
         </p:style>
         <p:txBody>
-          <a:bodyPr rtlCol="0" anchor="ctr" wrap="square" lIns="73152" rIns="73152"/>
+          <a:bodyPr rtlCol="0" anchor="ctr"/>
           <a:lstStyle/>
           <a:p>
             <a:pPr algn="ctr"/>
-            <a:r>
-              <a:rPr sz="1300" b="1">
-                <a:solidFill>
-                  <a:srgbClr val="1C1F2E"/>
-                </a:solidFill>
-                <a:latin typeface="Segoe UI"/>
-              </a:rPr>
-              <a:t>Backend</a:t>
-            </a:r>
-          </a:p>
-          <a:p>
-            <a:pPr algn="ctr"/>
-            <a:r>
-              <a:rPr sz="1000" b="0">
-                <a:solidFill>
-                  <a:srgbClr val="6B7086"/>
-                </a:solidFill>
-                <a:latin typeface="Segoe UI"/>
-              </a:rPr>
-              <a:t>2 replicas
-/health · /ready probes
-Service :8000</a:t>
-            </a:r>
-          </a:p>
-        </p:txBody>
-      </p:sp>
-      <p:sp>
-        <p:nvSpPr>
-          <p:cNvPr id="13" name="Rounded Rectangle 12"/>
-          <p:cNvSpPr/>
-          <p:nvPr/>
-        </p:nvSpPr>
-        <p:spPr>
-          <a:xfrm>
-            <a:off x="5303520" y="3383280"/>
-            <a:ext cx="1828800" cy="1691640"/>
-          </a:xfrm>
-          <a:prstGeom prst="roundRect">
-            <a:avLst>
-              <a:gd name="adj" fmla="val 8000"/>
-            </a:avLst>
-          </a:prstGeom>
-          <a:solidFill>
-            <a:srgbClr val="F4F5FB"/>
-          </a:solidFill>
-          <a:ln w="12700">
-            <a:solidFill>
-              <a:srgbClr val="E4E6EF"/>
-            </a:solidFill>
-          </a:ln>
-          <a:effectLst/>
-        </p:spPr>
-        <p:style>
-          <a:lnRef idx="1">
-            <a:schemeClr val="accent1"/>
-          </a:lnRef>
-          <a:fillRef idx="3">
-            <a:schemeClr val="accent1"/>
-          </a:fillRef>
-          <a:effectRef idx="2">
-            <a:schemeClr val="accent1"/>
-          </a:effectRef>
-          <a:fontRef idx="minor">
-            <a:schemeClr val="lt1"/>
-          </a:fontRef>
-        </p:style>
-        <p:txBody>
-          <a:bodyPr rtlCol="0" anchor="ctr" wrap="square" lIns="73152" rIns="73152"/>
-          <a:lstStyle/>
-          <a:p>
-            <a:pPr algn="ctr"/>
-            <a:r>
-              <a:rPr sz="1300" b="1">
-                <a:solidFill>
-                  <a:srgbClr val="1C1F2E"/>
-                </a:solidFill>
-                <a:latin typeface="Segoe UI"/>
-              </a:rPr>
-              <a:t>PostgreSQL</a:t>
-            </a:r>
-          </a:p>
-          <a:p>
-            <a:pPr algn="ctr"/>
-            <a:r>
-              <a:rPr sz="1000" b="0">
-                <a:solidFill>
-                  <a:srgbClr val="6B7086"/>
-                </a:solidFill>
-                <a:latin typeface="Segoe UI"/>
-              </a:rPr>
-              <a:t>1 replica + PVC
-Service :5432</a:t>
-            </a:r>
-          </a:p>
-        </p:txBody>
-      </p:sp>
-      <p:cxnSp>
-        <p:nvCxnSpPr>
-          <p:cNvPr id="14" name="Connector 13"/>
-          <p:cNvCxnSpPr/>
-          <p:nvPr/>
-        </p:nvCxnSpPr>
-        <p:spPr>
-          <a:xfrm flipH="1">
-            <a:off x="1737360" y="2880360"/>
-            <a:ext cx="1554480" cy="484632"/>
-          </a:xfrm>
-          <a:prstGeom prst="line">
-            <a:avLst/>
-          </a:prstGeom>
-          <a:ln w="22225">
-            <a:solidFill>
-              <a:srgbClr val="4F46E5"/>
-            </a:solidFill>
-            <a:tailEnd type="triangle"/>
-          </a:ln>
-        </p:spPr>
-        <p:style>
-          <a:lnRef idx="2">
-            <a:schemeClr val="accent1"/>
-          </a:lnRef>
-          <a:fillRef idx="0">
-            <a:schemeClr val="accent1"/>
-          </a:fillRef>
-          <a:effectRef idx="1">
-            <a:schemeClr val="accent1"/>
-          </a:effectRef>
-          <a:fontRef idx="minor">
-            <a:schemeClr val="tx1"/>
-          </a:fontRef>
-        </p:style>
-      </p:cxnSp>
-      <p:cxnSp>
-        <p:nvCxnSpPr>
-          <p:cNvPr id="15" name="Connector 14"/>
-          <p:cNvCxnSpPr/>
-          <p:nvPr/>
-        </p:nvCxnSpPr>
-        <p:spPr>
-          <a:xfrm>
-            <a:off x="3931920" y="2880360"/>
-            <a:ext cx="45719" cy="484632"/>
-          </a:xfrm>
-          <a:prstGeom prst="line">
-            <a:avLst/>
-          </a:prstGeom>
-          <a:ln w="22225">
-            <a:solidFill>
-              <a:srgbClr val="4F46E5"/>
-            </a:solidFill>
-            <a:tailEnd type="triangle"/>
-          </a:ln>
-        </p:spPr>
-        <p:style>
-          <a:lnRef idx="2">
-            <a:schemeClr val="accent1"/>
-          </a:lnRef>
-          <a:fillRef idx="0">
-            <a:schemeClr val="accent1"/>
-          </a:fillRef>
-          <a:effectRef idx="1">
-            <a:schemeClr val="accent1"/>
-          </a:effectRef>
-          <a:fontRef idx="minor">
-            <a:schemeClr val="tx1"/>
-          </a:fontRef>
-        </p:style>
-      </p:cxnSp>
-      <p:cxnSp>
-        <p:nvCxnSpPr>
-          <p:cNvPr id="16" name="Connector 15"/>
-          <p:cNvCxnSpPr/>
-          <p:nvPr/>
-        </p:nvCxnSpPr>
-        <p:spPr>
-          <a:xfrm>
-            <a:off x="4910328" y="4224528"/>
-            <a:ext cx="374904" cy="0"/>
-          </a:xfrm>
-          <a:prstGeom prst="line">
-            <a:avLst/>
-          </a:prstGeom>
-          <a:ln w="22225">
-            <a:solidFill>
-              <a:srgbClr val="6B7086"/>
-            </a:solidFill>
-            <a:tailEnd type="triangle"/>
-          </a:ln>
-        </p:spPr>
-        <p:style>
-          <a:lnRef idx="2">
-            <a:schemeClr val="accent1"/>
-          </a:lnRef>
-          <a:fillRef idx="0">
-            <a:schemeClr val="accent1"/>
-          </a:fillRef>
-          <a:effectRef idx="1">
-            <a:schemeClr val="accent1"/>
-          </a:effectRef>
-          <a:fontRef idx="minor">
-            <a:schemeClr val="tx1"/>
-          </a:fontRef>
-        </p:style>
-      </p:cxnSp>
-      <p:sp>
-        <p:nvSpPr>
-          <p:cNvPr id="17" name="TextBox 16"/>
+          </a:p>
+        </p:txBody>
+      </p:sp>
+      <p:sp>
+        <p:nvSpPr>
+          <p:cNvPr id="15" name="TextBox 14"/>
           <p:cNvSpPr txBox="1"/>
           <p:nvPr/>
         </p:nvSpPr>
         <p:spPr>
           <a:xfrm>
-            <a:off x="822960" y="5303520"/>
-            <a:ext cx="6309360" cy="822960"/>
+            <a:off x="4251960" y="2377440"/>
+            <a:ext cx="1828800" cy="274320"/>
           </a:xfrm>
           <a:prstGeom prst="rect">
             <a:avLst/>
@@ -4469,26 +4405,226 @@
               </a:spcAft>
             </a:pPr>
             <a:r>
+              <a:rPr sz="1100" b="1">
+                <a:solidFill>
+                  <a:srgbClr val="6B7086"/>
+                </a:solidFill>
+                <a:latin typeface="Segoe UI"/>
+              </a:rPr>
+              <a:t>AZ b</a:t>
+            </a:r>
+          </a:p>
+        </p:txBody>
+      </p:sp>
+      <p:sp>
+        <p:nvSpPr>
+          <p:cNvPr id="16" name="Rounded Rectangle 15"/>
+          <p:cNvSpPr/>
+          <p:nvPr/>
+        </p:nvSpPr>
+        <p:spPr>
+          <a:xfrm>
+            <a:off x="4251960" y="2743200"/>
+            <a:ext cx="2697480" cy="1051560"/>
+          </a:xfrm>
+          <a:prstGeom prst="roundRect">
+            <a:avLst>
+              <a:gd name="adj" fmla="val 8000"/>
+            </a:avLst>
+          </a:prstGeom>
+          <a:solidFill>
+            <a:srgbClr val="E0F2FE"/>
+          </a:solidFill>
+          <a:ln>
+            <a:noFill/>
+          </a:ln>
+          <a:effectLst/>
+        </p:spPr>
+        <p:style>
+          <a:lnRef idx="1">
+            <a:schemeClr val="accent1"/>
+          </a:lnRef>
+          <a:fillRef idx="3">
+            <a:schemeClr val="accent1"/>
+          </a:fillRef>
+          <a:effectRef idx="2">
+            <a:schemeClr val="accent1"/>
+          </a:effectRef>
+          <a:fontRef idx="minor">
+            <a:schemeClr val="lt1"/>
+          </a:fontRef>
+        </p:style>
+        <p:txBody>
+          <a:bodyPr rtlCol="0" anchor="ctr" wrap="square" lIns="73152" rIns="73152"/>
+          <a:lstStyle/>
+          <a:p>
+            <a:pPr algn="ctr"/>
+            <a:r>
+              <a:rPr sz="1200" b="1">
+                <a:solidFill>
+                  <a:srgbClr val="1C1F2E"/>
+                </a:solidFill>
+                <a:latin typeface="Segoe UI"/>
+              </a:rPr>
+              <a:t>Public subnet</a:t>
+            </a:r>
+          </a:p>
+          <a:p>
+            <a:pPr algn="ctr"/>
+            <a:r>
+              <a:rPr sz="1100" b="0">
+                <a:solidFill>
+                  <a:srgbClr val="6B7086"/>
+                </a:solidFill>
+                <a:latin typeface="Consolas"/>
+              </a:rPr>
+              <a:t>10.0.2.0/24</a:t>
+            </a:r>
+          </a:p>
+          <a:p>
+            <a:pPr algn="ctr"/>
+            <a:r>
               <a:rPr sz="1000" b="0">
                 <a:solidFill>
                   <a:srgbClr val="6B7086"/>
                 </a:solidFill>
                 <a:latin typeface="Segoe UI"/>
               </a:rPr>
-              <a:t>ConfigMap + Secret inject DATABASE_URL • RollingUpdate maxUnavailable 0 • non-root security contexts • resource requests and limits on every container</a:t>
-            </a:r>
-          </a:p>
-        </p:txBody>
-      </p:sp>
-      <p:sp>
-        <p:nvSpPr>
-          <p:cNvPr id="18" name="Rounded Rectangle 17"/>
+              <a:t>IGW</a:t>
+            </a:r>
+          </a:p>
+        </p:txBody>
+      </p:sp>
+      <p:sp>
+        <p:nvSpPr>
+          <p:cNvPr id="17" name="Rounded Rectangle 16"/>
           <p:cNvSpPr/>
           <p:nvPr/>
         </p:nvSpPr>
         <p:spPr>
           <a:xfrm>
+            <a:off x="4251960" y="3977639"/>
+            <a:ext cx="2697480" cy="1874519"/>
+          </a:xfrm>
+          <a:prstGeom prst="roundRect">
+            <a:avLst>
+              <a:gd name="adj" fmla="val 8000"/>
+            </a:avLst>
+          </a:prstGeom>
+          <a:solidFill>
+            <a:srgbClr val="D1FAE5"/>
+          </a:solidFill>
+          <a:ln>
+            <a:noFill/>
+          </a:ln>
+          <a:effectLst/>
+        </p:spPr>
+        <p:style>
+          <a:lnRef idx="1">
+            <a:schemeClr val="accent1"/>
+          </a:lnRef>
+          <a:fillRef idx="3">
+            <a:schemeClr val="accent1"/>
+          </a:fillRef>
+          <a:effectRef idx="2">
+            <a:schemeClr val="accent1"/>
+          </a:effectRef>
+          <a:fontRef idx="minor">
+            <a:schemeClr val="lt1"/>
+          </a:fontRef>
+        </p:style>
+        <p:txBody>
+          <a:bodyPr rtlCol="0" anchor="ctr" wrap="square" lIns="73152" rIns="73152"/>
+          <a:lstStyle/>
+          <a:p>
+            <a:pPr algn="ctr"/>
+            <a:r>
+              <a:rPr sz="1200" b="1">
+                <a:solidFill>
+                  <a:srgbClr val="1C1F2E"/>
+                </a:solidFill>
+                <a:latin typeface="Segoe UI"/>
+              </a:rPr>
+              <a:t>Private subnet</a:t>
+            </a:r>
+          </a:p>
+          <a:p>
+            <a:pPr algn="ctr"/>
+            <a:r>
+              <a:rPr sz="1100" b="0">
+                <a:solidFill>
+                  <a:srgbClr val="6B7086"/>
+                </a:solidFill>
+                <a:latin typeface="Consolas"/>
+              </a:rPr>
+              <a:t>10.0.11.0/24</a:t>
+            </a:r>
+          </a:p>
+          <a:p>
+            <a:pPr algn="ctr"/>
+            <a:r>
+              <a:rPr sz="1000" b="0">
+                <a:solidFill>
+                  <a:srgbClr val="6B7086"/>
+                </a:solidFill>
+                <a:latin typeface="Segoe UI"/>
+              </a:rPr>
+              <a:t>EKS worker nodes</a:t>
+            </a:r>
+          </a:p>
+          <a:p>
+            <a:pPr algn="ctr"/>
+            <a:r>
+              <a:rPr sz="1000" b="0">
+                <a:solidFill>
+                  <a:srgbClr val="6B7086"/>
+                </a:solidFill>
+                <a:latin typeface="Segoe UI"/>
+              </a:rPr>
+              <a:t>t3.medium (AL2023)</a:t>
+            </a:r>
+          </a:p>
+        </p:txBody>
+      </p:sp>
+      <p:pic>
+        <p:nvPicPr>
+          <p:cNvPr id="18" name="Picture 17" descr="M7-terraform-validate.png"/>
+          <p:cNvPicPr>
+            <a:picLocks noChangeAspect="1"/>
+          </p:cNvPicPr>
+          <p:nvPr/>
+        </p:nvPicPr>
+        <p:blipFill>
+          <a:blip r:embed="rId2"/>
+          <a:srcRect b="3692"/>
+          <a:stretch>
+            <a:fillRect/>
+          </a:stretch>
+        </p:blipFill>
+        <p:spPr>
+          <a:xfrm>
             <a:off x="7589520" y="1737360"/>
+            <a:ext cx="4069080" cy="2148840"/>
+          </a:xfrm>
+          <a:prstGeom prst="rect">
+            <a:avLst/>
+          </a:prstGeom>
+          <a:ln w="12700">
+            <a:solidFill>
+              <a:srgbClr val="E4E6EF"/>
+            </a:solidFill>
+          </a:ln>
+        </p:spPr>
+      </p:pic>
+      <p:sp>
+        <p:nvSpPr>
+          <p:cNvPr id="19" name="Rounded Rectangle 18"/>
+          <p:cNvSpPr/>
+          <p:nvPr/>
+        </p:nvSpPr>
+        <p:spPr>
+          <a:xfrm>
+            <a:off x="7589520" y="4114800"/>
             <a:ext cx="4069080" cy="2148840"/>
           </a:xfrm>
           <a:prstGeom prst="roundRect">
@@ -4545,7 +4681,7 @@
                 </a:solidFill>
                 <a:latin typeface="Segoe UI"/>
               </a:rPr>
-              <a:t>Pods, services &amp; Helm release</a:t>
+              <a:t>EKS cluster &amp; VPC in the AWS console</a:t>
             </a:r>
           </a:p>
           <a:p>
@@ -4557,90 +4693,8 @@
                 </a:solidFill>
                 <a:latin typeface="Consolas"/>
               </a:rPr>
-              <a:t>kubectl get pods,svc -n devtrack
-helm list -n devtrack</a:t>
-            </a:r>
-          </a:p>
-        </p:txBody>
-      </p:sp>
-      <p:sp>
-        <p:nvSpPr>
-          <p:cNvPr id="19" name="Rounded Rectangle 18"/>
-          <p:cNvSpPr/>
-          <p:nvPr/>
-        </p:nvSpPr>
-        <p:spPr>
-          <a:xfrm>
-            <a:off x="7589520" y="4114800"/>
-            <a:ext cx="4069080" cy="2148840"/>
-          </a:xfrm>
-          <a:prstGeom prst="roundRect">
-            <a:avLst>
-              <a:gd name="adj" fmla="val 8000"/>
-            </a:avLst>
-          </a:prstGeom>
-          <a:solidFill>
-            <a:srgbClr val="FFFFFF"/>
-          </a:solidFill>
-          <a:ln w="12700">
-            <a:solidFill>
-              <a:srgbClr val="B4B8D0"/>
-            </a:solidFill>
-            <a:prstDash val="lgDash"/>
-          </a:ln>
-          <a:effectLst/>
-        </p:spPr>
-        <p:style>
-          <a:lnRef idx="1">
-            <a:schemeClr val="accent1"/>
-          </a:lnRef>
-          <a:fillRef idx="3">
-            <a:schemeClr val="accent1"/>
-          </a:fillRef>
-          <a:effectRef idx="2">
-            <a:schemeClr val="accent1"/>
-          </a:effectRef>
-          <a:fontRef idx="minor">
-            <a:schemeClr val="lt1"/>
-          </a:fontRef>
-        </p:style>
-        <p:txBody>
-          <a:bodyPr rtlCol="0" anchor="ctr" wrap="square" lIns="73152" rIns="73152"/>
-          <a:lstStyle/>
-          <a:p>
-            <a:pPr algn="ctr"/>
-            <a:r>
-              <a:rPr sz="1400" b="1">
-                <a:solidFill>
-                  <a:srgbClr val="4F46E5"/>
-                </a:solidFill>
-                <a:latin typeface="Segoe UI"/>
-              </a:rPr>
-              <a:t>📷  Add your screenshot</a:t>
-            </a:r>
-          </a:p>
-          <a:p>
-            <a:pPr algn="ctr"/>
-            <a:r>
-              <a:rPr sz="1200" b="0">
-                <a:solidFill>
-                  <a:srgbClr val="1C1F2E"/>
-                </a:solidFill>
-                <a:latin typeface="Segoe UI"/>
-              </a:rPr>
-              <a:t>App through the AWS Ingress / NLB</a:t>
-            </a:r>
-          </a:p>
-          <a:p>
-            <a:pPr algn="ctr"/>
-            <a:r>
-              <a:rPr sz="1100" b="0">
-                <a:solidFill>
-                  <a:srgbClr val="6B7086"/>
-                </a:solidFill>
-                <a:latin typeface="Consolas"/>
-              </a:rPr>
-              <a:t>kubectl get ingress -n devtrack</a:t>
+              <a:t>terraform plan / apply
+(needs AWS credentials)</a:t>
             </a:r>
           </a:p>
         </p:txBody>
@@ -4752,7 +4806,7 @@
                 </a:solidFill>
                 <a:latin typeface="Segoe UI"/>
               </a:rPr>
-              <a:t>10 • OBSERVABILITY</a:t>
+              <a:t>10 • KUBERNETES &amp; HELM</a:t>
             </a:r>
           </a:p>
         </p:txBody>
@@ -4794,7 +4848,7 @@
                 </a:solidFill>
                 <a:latin typeface="Segoe UI"/>
               </a:rPr>
-              <a:t>Instrumented in code, scraped by Prometheus, shown in Grafana</a:t>
+              <a:t>Declarative delivery with probes and self-healing</a:t>
             </a:r>
           </a:p>
         </p:txBody>
@@ -4807,8 +4861,8 @@
         </p:nvSpPr>
         <p:spPr>
           <a:xfrm>
-            <a:off x="548640" y="6446520"/>
-            <a:ext cx="5486400" cy="274320"/>
+            <a:off x="548640" y="1188720"/>
+            <a:ext cx="11155680" cy="365760"/>
           </a:xfrm>
           <a:prstGeom prst="rect">
             <a:avLst/>
@@ -4830,6 +4884,48 @@
               </a:spcAft>
             </a:pPr>
             <a:r>
+              <a:rPr sz="1400" b="0">
+                <a:solidFill>
+                  <a:srgbClr val="6B7086"/>
+                </a:solidFill>
+                <a:latin typeface="Segoe UI"/>
+              </a:rPr>
+              <a:t>Shown on a local 3-node kind cluster running the CI-built GHCR images; the same chart targets EKS.</a:t>
+            </a:r>
+          </a:p>
+        </p:txBody>
+      </p:sp>
+      <p:sp>
+        <p:nvSpPr>
+          <p:cNvPr id="6" name="TextBox 5"/>
+          <p:cNvSpPr txBox="1"/>
+          <p:nvPr/>
+        </p:nvSpPr>
+        <p:spPr>
+          <a:xfrm>
+            <a:off x="548640" y="6446520"/>
+            <a:ext cx="5486400" cy="274320"/>
+          </a:xfrm>
+          <a:prstGeom prst="rect">
+            <a:avLst/>
+          </a:prstGeom>
+          <a:noFill/>
+        </p:spPr>
+        <p:txBody>
+          <a:bodyPr wrap="square" anchor="t" lIns="18288" rIns="18288" tIns="18288" bIns="18288">
+            <a:spAutoFit/>
+          </a:bodyPr>
+          <a:lstStyle/>
+          <a:p>
+            <a:pPr algn="l">
+              <a:lnSpc>
+                <a:spcPct val="110000"/>
+              </a:lnSpc>
+              <a:spcAft>
+                <a:spcPts val="400"/>
+              </a:spcAft>
+            </a:pPr>
+            <a:r>
               <a:rPr sz="900" b="0">
                 <a:solidFill>
                   <a:srgbClr val="6B7086"/>
@@ -4843,7 +4939,7 @@
       </p:sp>
       <p:sp>
         <p:nvSpPr>
-          <p:cNvPr id="6" name="TextBox 5"/>
+          <p:cNvPr id="7" name="TextBox 6"/>
           <p:cNvSpPr txBox="1"/>
           <p:nvPr/>
         </p:nvSpPr>
@@ -4878,21 +4974,21 @@
                 </a:solidFill>
                 <a:latin typeface="Segoe UI"/>
               </a:rPr>
-              <a:t>11 / 15</a:t>
-            </a:r>
-          </a:p>
-        </p:txBody>
-      </p:sp>
-      <p:sp>
-        <p:nvSpPr>
-          <p:cNvPr id="7" name="Rounded Rectangle 6"/>
+              <a:t>11 / 17</a:t>
+            </a:r>
+          </a:p>
+        </p:txBody>
+      </p:sp>
+      <p:sp>
+        <p:nvSpPr>
+          <p:cNvPr id="8" name="Rounded Rectangle 7"/>
           <p:cNvSpPr/>
           <p:nvPr/>
         </p:nvSpPr>
         <p:spPr>
           <a:xfrm>
-            <a:off x="548640" y="1600200"/>
-            <a:ext cx="4206240" cy="1417320"/>
+            <a:off x="548640" y="1737360"/>
+            <a:ext cx="6766560" cy="4526280"/>
           </a:xfrm>
           <a:prstGeom prst="roundRect">
             <a:avLst>
@@ -4904,7 +5000,7 @@
           </a:solidFill>
           <a:ln w="12700">
             <a:solidFill>
-              <a:srgbClr val="E4E6EF"/>
+              <a:srgbClr val="4F46E5"/>
             </a:solidFill>
           </a:ln>
           <a:effectLst/>
@@ -4933,58 +5029,14 @@
       </p:sp>
       <p:sp>
         <p:nvSpPr>
-          <p:cNvPr id="8" name="Rectangle 7"/>
-          <p:cNvSpPr/>
-          <p:nvPr/>
-        </p:nvSpPr>
-        <p:spPr>
-          <a:xfrm>
-            <a:off x="548640" y="1764792"/>
-            <a:ext cx="54864" cy="1088136"/>
-          </a:xfrm>
-          <a:prstGeom prst="rect">
-            <a:avLst/>
-          </a:prstGeom>
-          <a:solidFill>
-            <a:srgbClr val="4F46E5"/>
-          </a:solidFill>
-          <a:ln>
-            <a:noFill/>
-          </a:ln>
-          <a:effectLst/>
-        </p:spPr>
-        <p:style>
-          <a:lnRef idx="1">
-            <a:schemeClr val="accent1"/>
-          </a:lnRef>
-          <a:fillRef idx="3">
-            <a:schemeClr val="accent1"/>
-          </a:fillRef>
-          <a:effectRef idx="2">
-            <a:schemeClr val="accent1"/>
-          </a:effectRef>
-          <a:fontRef idx="minor">
-            <a:schemeClr val="lt1"/>
-          </a:fontRef>
-        </p:style>
-        <p:txBody>
-          <a:bodyPr rtlCol="0" anchor="ctr"/>
-          <a:lstStyle/>
-          <a:p>
-            <a:pPr algn="ctr"/>
-          </a:p>
-        </p:txBody>
-      </p:sp>
-      <p:sp>
-        <p:nvSpPr>
           <p:cNvPr id="9" name="TextBox 8"/>
           <p:cNvSpPr txBox="1"/>
           <p:nvPr/>
         </p:nvSpPr>
         <p:spPr>
           <a:xfrm>
-            <a:off x="777240" y="1737360"/>
-            <a:ext cx="3840479" cy="365760"/>
+            <a:off x="777240" y="1828800"/>
+            <a:ext cx="5486400" cy="365760"/>
           </a:xfrm>
           <a:prstGeom prst="rect">
             <a:avLst/>
@@ -5008,67 +5060,25 @@
             <a:r>
               <a:rPr sz="1400" b="1">
                 <a:solidFill>
-                  <a:srgbClr val="1C1F2E"/>
-                </a:solidFill>
-                <a:latin typeface="Segoe UI"/>
-              </a:rPr>
-              <a:t>Instrument</a:t>
-            </a:r>
-          </a:p>
-        </p:txBody>
-      </p:sp>
-      <p:sp>
-        <p:nvSpPr>
-          <p:cNvPr id="10" name="TextBox 9"/>
-          <p:cNvSpPr txBox="1"/>
-          <p:nvPr/>
-        </p:nvSpPr>
-        <p:spPr>
-          <a:xfrm>
-            <a:off x="777240" y="2103120"/>
-            <a:ext cx="3840479" cy="822960"/>
-          </a:xfrm>
-          <a:prstGeom prst="rect">
-            <a:avLst/>
-          </a:prstGeom>
-          <a:noFill/>
-        </p:spPr>
-        <p:txBody>
-          <a:bodyPr wrap="square" anchor="t" lIns="18288" rIns="18288" tIns="18288" bIns="18288">
-            <a:spAutoFit/>
-          </a:bodyPr>
-          <a:lstStyle/>
-          <a:p>
-            <a:pPr algn="l">
-              <a:lnSpc>
-                <a:spcPct val="115000"/>
-              </a:lnSpc>
-              <a:spcAft>
-                <a:spcPts val="400"/>
-              </a:spcAft>
-            </a:pPr>
-            <a:r>
-              <a:rPr sz="1100" b="0">
-                <a:solidFill>
-                  <a:srgbClr val="6B7086"/>
-                </a:solidFill>
-                <a:latin typeface="Segoe UI"/>
-              </a:rPr>
-              <a:t>FastAPI middleware records devtrack_http_requests_total and a latency histogram per route template.</a:t>
-            </a:r>
-          </a:p>
-        </p:txBody>
-      </p:sp>
-      <p:sp>
-        <p:nvSpPr>
-          <p:cNvPr id="11" name="Rounded Rectangle 10"/>
+                  <a:srgbClr val="4F46E5"/>
+                </a:solidFill>
+                <a:latin typeface="Segoe UI"/>
+              </a:rPr>
+              <a:t>Cluster  •  namespace: devtrack</a:t>
+            </a:r>
+          </a:p>
+        </p:txBody>
+      </p:sp>
+      <p:sp>
+        <p:nvSpPr>
+          <p:cNvPr id="10" name="Rounded Rectangle 9"/>
           <p:cNvSpPr/>
           <p:nvPr/>
         </p:nvSpPr>
         <p:spPr>
           <a:xfrm>
-            <a:off x="548640" y="3172968"/>
-            <a:ext cx="4206240" cy="1417320"/>
+            <a:off x="2377440" y="2331720"/>
+            <a:ext cx="3108960" cy="548640"/>
           </a:xfrm>
           <a:prstGeom prst="roundRect">
             <a:avLst>
@@ -5076,7 +5086,62 @@
             </a:avLst>
           </a:prstGeom>
           <a:solidFill>
-            <a:srgbClr val="FFFFFF"/>
+            <a:srgbClr val="EEF0FF"/>
+          </a:solidFill>
+          <a:ln>
+            <a:noFill/>
+          </a:ln>
+          <a:effectLst/>
+        </p:spPr>
+        <p:style>
+          <a:lnRef idx="1">
+            <a:schemeClr val="accent1"/>
+          </a:lnRef>
+          <a:fillRef idx="3">
+            <a:schemeClr val="accent1"/>
+          </a:fillRef>
+          <a:effectRef idx="2">
+            <a:schemeClr val="accent1"/>
+          </a:effectRef>
+          <a:fontRef idx="minor">
+            <a:schemeClr val="lt1"/>
+          </a:fontRef>
+        </p:style>
+        <p:txBody>
+          <a:bodyPr rtlCol="0" anchor="ctr" wrap="square" lIns="73152" rIns="73152"/>
+          <a:lstStyle/>
+          <a:p>
+            <a:pPr algn="ctr"/>
+            <a:r>
+              <a:rPr sz="1100" b="1">
+                <a:solidFill>
+                  <a:srgbClr val="4F46E5"/>
+                </a:solidFill>
+                <a:latin typeface="Segoe UI"/>
+              </a:rPr>
+              <a:t>Ingress NGINX  ( /  ·  /api  ·  /docs )</a:t>
+            </a:r>
+          </a:p>
+        </p:txBody>
+      </p:sp>
+      <p:sp>
+        <p:nvSpPr>
+          <p:cNvPr id="11" name="Rounded Rectangle 10"/>
+          <p:cNvSpPr/>
+          <p:nvPr/>
+        </p:nvSpPr>
+        <p:spPr>
+          <a:xfrm>
+            <a:off x="822960" y="3383280"/>
+            <a:ext cx="1828800" cy="1691640"/>
+          </a:xfrm>
+          <a:prstGeom prst="roundRect">
+            <a:avLst>
+              <a:gd name="adj" fmla="val 8000"/>
+            </a:avLst>
+          </a:prstGeom>
+          <a:solidFill>
+            <a:srgbClr val="F4F5FB"/>
           </a:solidFill>
           <a:ln w="12700">
             <a:solidFill>
@@ -5100,32 +5165,58 @@
           </a:fontRef>
         </p:style>
         <p:txBody>
-          <a:bodyPr rtlCol="0" anchor="ctr"/>
+          <a:bodyPr rtlCol="0" anchor="ctr" wrap="square" lIns="73152" rIns="73152"/>
           <a:lstStyle/>
           <a:p>
             <a:pPr algn="ctr"/>
-          </a:p>
-        </p:txBody>
-      </p:sp>
-      <p:sp>
-        <p:nvSpPr>
-          <p:cNvPr id="12" name="Rectangle 11"/>
+            <a:r>
+              <a:rPr sz="1300" b="1">
+                <a:solidFill>
+                  <a:srgbClr val="1C1F2E"/>
+                </a:solidFill>
+                <a:latin typeface="Segoe UI"/>
+              </a:rPr>
+              <a:t>Frontend</a:t>
+            </a:r>
+          </a:p>
+          <a:p>
+            <a:pPr algn="ctr"/>
+            <a:r>
+              <a:rPr sz="1000" b="0">
+                <a:solidFill>
+                  <a:srgbClr val="6B7086"/>
+                </a:solidFill>
+                <a:latin typeface="Segoe UI"/>
+              </a:rPr>
+              <a:t>3 replicas
+Service :80 → :8080</a:t>
+            </a:r>
+          </a:p>
+        </p:txBody>
+      </p:sp>
+      <p:sp>
+        <p:nvSpPr>
+          <p:cNvPr id="12" name="Rounded Rectangle 11"/>
           <p:cNvSpPr/>
           <p:nvPr/>
         </p:nvSpPr>
         <p:spPr>
           <a:xfrm>
-            <a:off x="548640" y="3337560"/>
-            <a:ext cx="54864" cy="1088136"/>
-          </a:xfrm>
-          <a:prstGeom prst="rect">
-            <a:avLst/>
+            <a:off x="3063240" y="3383280"/>
+            <a:ext cx="1828800" cy="1691640"/>
+          </a:xfrm>
+          <a:prstGeom prst="roundRect">
+            <a:avLst>
+              <a:gd name="adj" fmla="val 8000"/>
+            </a:avLst>
           </a:prstGeom>
           <a:solidFill>
-            <a:srgbClr val="F59E0B"/>
+            <a:srgbClr val="F4F5FB"/>
           </a:solidFill>
-          <a:ln>
-            <a:noFill/>
+          <a:ln w="12700">
+            <a:solidFill>
+              <a:srgbClr val="E4E6EF"/>
+            </a:solidFill>
           </a:ln>
           <a:effectLst/>
         </p:spPr>
@@ -5144,23 +5235,224 @@
           </a:fontRef>
         </p:style>
         <p:txBody>
-          <a:bodyPr rtlCol="0" anchor="ctr"/>
+          <a:bodyPr rtlCol="0" anchor="ctr" wrap="square" lIns="73152" rIns="73152"/>
           <a:lstStyle/>
           <a:p>
             <a:pPr algn="ctr"/>
-          </a:p>
-        </p:txBody>
-      </p:sp>
-      <p:sp>
-        <p:nvSpPr>
-          <p:cNvPr id="13" name="TextBox 12"/>
+            <a:r>
+              <a:rPr sz="1300" b="1">
+                <a:solidFill>
+                  <a:srgbClr val="1C1F2E"/>
+                </a:solidFill>
+                <a:latin typeface="Segoe UI"/>
+              </a:rPr>
+              <a:t>Backend</a:t>
+            </a:r>
+          </a:p>
+          <a:p>
+            <a:pPr algn="ctr"/>
+            <a:r>
+              <a:rPr sz="1000" b="0">
+                <a:solidFill>
+                  <a:srgbClr val="6B7086"/>
+                </a:solidFill>
+                <a:latin typeface="Segoe UI"/>
+              </a:rPr>
+              <a:t>2 replicas
+/health · /ready probes
+Service :8000</a:t>
+            </a:r>
+          </a:p>
+        </p:txBody>
+      </p:sp>
+      <p:sp>
+        <p:nvSpPr>
+          <p:cNvPr id="13" name="Rounded Rectangle 12"/>
+          <p:cNvSpPr/>
+          <p:nvPr/>
+        </p:nvSpPr>
+        <p:spPr>
+          <a:xfrm>
+            <a:off x="5303520" y="3383280"/>
+            <a:ext cx="1828800" cy="1691640"/>
+          </a:xfrm>
+          <a:prstGeom prst="roundRect">
+            <a:avLst>
+              <a:gd name="adj" fmla="val 8000"/>
+            </a:avLst>
+          </a:prstGeom>
+          <a:solidFill>
+            <a:srgbClr val="F4F5FB"/>
+          </a:solidFill>
+          <a:ln w="12700">
+            <a:solidFill>
+              <a:srgbClr val="E4E6EF"/>
+            </a:solidFill>
+          </a:ln>
+          <a:effectLst/>
+        </p:spPr>
+        <p:style>
+          <a:lnRef idx="1">
+            <a:schemeClr val="accent1"/>
+          </a:lnRef>
+          <a:fillRef idx="3">
+            <a:schemeClr val="accent1"/>
+          </a:fillRef>
+          <a:effectRef idx="2">
+            <a:schemeClr val="accent1"/>
+          </a:effectRef>
+          <a:fontRef idx="minor">
+            <a:schemeClr val="lt1"/>
+          </a:fontRef>
+        </p:style>
+        <p:txBody>
+          <a:bodyPr rtlCol="0" anchor="ctr" wrap="square" lIns="73152" rIns="73152"/>
+          <a:lstStyle/>
+          <a:p>
+            <a:pPr algn="ctr"/>
+            <a:r>
+              <a:rPr sz="1300" b="1">
+                <a:solidFill>
+                  <a:srgbClr val="1C1F2E"/>
+                </a:solidFill>
+                <a:latin typeface="Segoe UI"/>
+              </a:rPr>
+              <a:t>PostgreSQL</a:t>
+            </a:r>
+          </a:p>
+          <a:p>
+            <a:pPr algn="ctr"/>
+            <a:r>
+              <a:rPr sz="1000" b="0">
+                <a:solidFill>
+                  <a:srgbClr val="6B7086"/>
+                </a:solidFill>
+                <a:latin typeface="Segoe UI"/>
+              </a:rPr>
+              <a:t>1 replica + PVC
+Service :5432</a:t>
+            </a:r>
+          </a:p>
+        </p:txBody>
+      </p:sp>
+      <p:cxnSp>
+        <p:nvCxnSpPr>
+          <p:cNvPr id="14" name="Connector 13"/>
+          <p:cNvCxnSpPr/>
+          <p:nvPr/>
+        </p:nvCxnSpPr>
+        <p:spPr>
+          <a:xfrm flipH="1">
+            <a:off x="1737360" y="2880360"/>
+            <a:ext cx="1554480" cy="484632"/>
+          </a:xfrm>
+          <a:prstGeom prst="line">
+            <a:avLst/>
+          </a:prstGeom>
+          <a:ln w="22225">
+            <a:solidFill>
+              <a:srgbClr val="4F46E5"/>
+            </a:solidFill>
+            <a:tailEnd type="triangle"/>
+          </a:ln>
+        </p:spPr>
+        <p:style>
+          <a:lnRef idx="2">
+            <a:schemeClr val="accent1"/>
+          </a:lnRef>
+          <a:fillRef idx="0">
+            <a:schemeClr val="accent1"/>
+          </a:fillRef>
+          <a:effectRef idx="1">
+            <a:schemeClr val="accent1"/>
+          </a:effectRef>
+          <a:fontRef idx="minor">
+            <a:schemeClr val="tx1"/>
+          </a:fontRef>
+        </p:style>
+      </p:cxnSp>
+      <p:cxnSp>
+        <p:nvCxnSpPr>
+          <p:cNvPr id="15" name="Connector 14"/>
+          <p:cNvCxnSpPr/>
+          <p:nvPr/>
+        </p:nvCxnSpPr>
+        <p:spPr>
+          <a:xfrm>
+            <a:off x="3931920" y="2880360"/>
+            <a:ext cx="45719" cy="484632"/>
+          </a:xfrm>
+          <a:prstGeom prst="line">
+            <a:avLst/>
+          </a:prstGeom>
+          <a:ln w="22225">
+            <a:solidFill>
+              <a:srgbClr val="4F46E5"/>
+            </a:solidFill>
+            <a:tailEnd type="triangle"/>
+          </a:ln>
+        </p:spPr>
+        <p:style>
+          <a:lnRef idx="2">
+            <a:schemeClr val="accent1"/>
+          </a:lnRef>
+          <a:fillRef idx="0">
+            <a:schemeClr val="accent1"/>
+          </a:fillRef>
+          <a:effectRef idx="1">
+            <a:schemeClr val="accent1"/>
+          </a:effectRef>
+          <a:fontRef idx="minor">
+            <a:schemeClr val="tx1"/>
+          </a:fontRef>
+        </p:style>
+      </p:cxnSp>
+      <p:cxnSp>
+        <p:nvCxnSpPr>
+          <p:cNvPr id="16" name="Connector 15"/>
+          <p:cNvCxnSpPr/>
+          <p:nvPr/>
+        </p:nvCxnSpPr>
+        <p:spPr>
+          <a:xfrm>
+            <a:off x="4910328" y="4224528"/>
+            <a:ext cx="374904" cy="0"/>
+          </a:xfrm>
+          <a:prstGeom prst="line">
+            <a:avLst/>
+          </a:prstGeom>
+          <a:ln w="22225">
+            <a:solidFill>
+              <a:srgbClr val="6B7086"/>
+            </a:solidFill>
+            <a:tailEnd type="triangle"/>
+          </a:ln>
+        </p:spPr>
+        <p:style>
+          <a:lnRef idx="2">
+            <a:schemeClr val="accent1"/>
+          </a:lnRef>
+          <a:fillRef idx="0">
+            <a:schemeClr val="accent1"/>
+          </a:fillRef>
+          <a:effectRef idx="1">
+            <a:schemeClr val="accent1"/>
+          </a:effectRef>
+          <a:fontRef idx="minor">
+            <a:schemeClr val="tx1"/>
+          </a:fontRef>
+        </p:style>
+      </p:cxnSp>
+      <p:sp>
+        <p:nvSpPr>
+          <p:cNvPr id="17" name="TextBox 16"/>
           <p:cNvSpPr txBox="1"/>
           <p:nvPr/>
         </p:nvSpPr>
         <p:spPr>
           <a:xfrm>
-            <a:off x="777240" y="3310127"/>
-            <a:ext cx="3840479" cy="365760"/>
+            <a:off x="822960" y="5303520"/>
+            <a:ext cx="6309360" cy="822960"/>
           </a:xfrm>
           <a:prstGeom prst="rect">
             <a:avLst/>
@@ -5182,254 +5474,64 @@
               </a:spcAft>
             </a:pPr>
             <a:r>
-              <a:rPr sz="1400" b="1">
-                <a:solidFill>
-                  <a:srgbClr val="1C1F2E"/>
-                </a:solidFill>
-                <a:latin typeface="Segoe UI"/>
-              </a:rPr>
-              <a:t>Collect</a:t>
-            </a:r>
-          </a:p>
-        </p:txBody>
-      </p:sp>
-      <p:sp>
-        <p:nvSpPr>
-          <p:cNvPr id="14" name="TextBox 13"/>
-          <p:cNvSpPr txBox="1"/>
-          <p:nvPr/>
-        </p:nvSpPr>
-        <p:spPr>
-          <a:xfrm>
-            <a:off x="777240" y="3675887"/>
-            <a:ext cx="3840479" cy="822960"/>
-          </a:xfrm>
-          <a:prstGeom prst="rect">
-            <a:avLst/>
-          </a:prstGeom>
-          <a:noFill/>
-        </p:spPr>
-        <p:txBody>
-          <a:bodyPr wrap="square" anchor="t" lIns="18288" rIns="18288" tIns="18288" bIns="18288">
-            <a:spAutoFit/>
-          </a:bodyPr>
-          <a:lstStyle/>
-          <a:p>
-            <a:pPr algn="l">
-              <a:lnSpc>
-                <a:spcPct val="115000"/>
-              </a:lnSpc>
-              <a:spcAft>
-                <a:spcPts val="400"/>
-              </a:spcAft>
-            </a:pPr>
-            <a:r>
-              <a:rPr sz="1100" b="0">
+              <a:rPr sz="1000" b="0">
                 <a:solidFill>
                   <a:srgbClr val="6B7086"/>
                 </a:solidFill>
                 <a:latin typeface="Segoe UI"/>
               </a:rPr>
-              <a:t>Prometheus scrapes devtrack-backend:8000/metrics every 15 seconds via the cluster service.</a:t>
-            </a:r>
-          </a:p>
-        </p:txBody>
-      </p:sp>
-      <p:sp>
-        <p:nvSpPr>
-          <p:cNvPr id="15" name="Rounded Rectangle 14"/>
-          <p:cNvSpPr/>
-          <p:nvPr/>
-        </p:nvSpPr>
-        <p:spPr>
-          <a:xfrm>
-            <a:off x="548640" y="4745736"/>
-            <a:ext cx="4206240" cy="1417320"/>
-          </a:xfrm>
-          <a:prstGeom prst="roundRect">
-            <a:avLst>
-              <a:gd name="adj" fmla="val 8000"/>
-            </a:avLst>
-          </a:prstGeom>
-          <a:solidFill>
-            <a:srgbClr val="FFFFFF"/>
-          </a:solidFill>
+              <a:t>Rolling update to the new SHA completed with 0 restarts • backend waits for PostgreSQL before migrating • non-root containers • requests and limits on every container</a:t>
+            </a:r>
+          </a:p>
+        </p:txBody>
+      </p:sp>
+      <p:pic>
+        <p:nvPicPr>
+          <p:cNvPr id="18" name="Picture 17" descr="M8-kubernetes-pods.png"/>
+          <p:cNvPicPr>
+            <a:picLocks noChangeAspect="1"/>
+          </p:cNvPicPr>
+          <p:nvPr/>
+        </p:nvPicPr>
+        <p:blipFill>
+          <a:blip r:embed="rId2"/>
+          <a:stretch>
+            <a:fillRect/>
+          </a:stretch>
+        </p:blipFill>
+        <p:spPr>
+          <a:xfrm>
+            <a:off x="7589520" y="2087822"/>
+            <a:ext cx="4069080" cy="1447914"/>
+          </a:xfrm>
+          <a:prstGeom prst="rect">
+            <a:avLst/>
+          </a:prstGeom>
           <a:ln w="12700">
             <a:solidFill>
               <a:srgbClr val="E4E6EF"/>
             </a:solidFill>
           </a:ln>
-          <a:effectLst/>
-        </p:spPr>
-        <p:style>
-          <a:lnRef idx="1">
-            <a:schemeClr val="accent1"/>
-          </a:lnRef>
-          <a:fillRef idx="3">
-            <a:schemeClr val="accent1"/>
-          </a:fillRef>
-          <a:effectRef idx="2">
-            <a:schemeClr val="accent1"/>
-          </a:effectRef>
-          <a:fontRef idx="minor">
-            <a:schemeClr val="lt1"/>
-          </a:fontRef>
-        </p:style>
-        <p:txBody>
-          <a:bodyPr rtlCol="0" anchor="ctr"/>
-          <a:lstStyle/>
-          <a:p>
-            <a:pPr algn="ctr"/>
-          </a:p>
-        </p:txBody>
-      </p:sp>
-      <p:sp>
-        <p:nvSpPr>
-          <p:cNvPr id="16" name="Rectangle 15"/>
-          <p:cNvSpPr/>
-          <p:nvPr/>
-        </p:nvSpPr>
-        <p:spPr>
-          <a:xfrm>
-            <a:off x="548640" y="4910327"/>
-            <a:ext cx="54864" cy="1088136"/>
-          </a:xfrm>
-          <a:prstGeom prst="rect">
-            <a:avLst/>
-          </a:prstGeom>
-          <a:solidFill>
-            <a:srgbClr val="10B981"/>
-          </a:solidFill>
-          <a:ln>
-            <a:noFill/>
-          </a:ln>
-          <a:effectLst/>
-        </p:spPr>
-        <p:style>
-          <a:lnRef idx="1">
-            <a:schemeClr val="accent1"/>
-          </a:lnRef>
-          <a:fillRef idx="3">
-            <a:schemeClr val="accent1"/>
-          </a:fillRef>
-          <a:effectRef idx="2">
-            <a:schemeClr val="accent1"/>
-          </a:effectRef>
-          <a:fontRef idx="minor">
-            <a:schemeClr val="lt1"/>
-          </a:fontRef>
-        </p:style>
-        <p:txBody>
-          <a:bodyPr rtlCol="0" anchor="ctr"/>
-          <a:lstStyle/>
-          <a:p>
-            <a:pPr algn="ctr"/>
-          </a:p>
-        </p:txBody>
-      </p:sp>
-      <p:sp>
-        <p:nvSpPr>
-          <p:cNvPr id="17" name="TextBox 16"/>
-          <p:cNvSpPr txBox="1"/>
-          <p:nvPr/>
-        </p:nvSpPr>
-        <p:spPr>
-          <a:xfrm>
-            <a:off x="777240" y="4882896"/>
-            <a:ext cx="3840479" cy="365760"/>
-          </a:xfrm>
-          <a:prstGeom prst="rect">
-            <a:avLst/>
-          </a:prstGeom>
-          <a:noFill/>
-        </p:spPr>
-        <p:txBody>
-          <a:bodyPr wrap="square" anchor="t" lIns="18288" rIns="18288" tIns="18288" bIns="18288">
-            <a:spAutoFit/>
-          </a:bodyPr>
-          <a:lstStyle/>
-          <a:p>
-            <a:pPr algn="l">
-              <a:lnSpc>
-                <a:spcPct val="110000"/>
-              </a:lnSpc>
-              <a:spcAft>
-                <a:spcPts val="400"/>
-              </a:spcAft>
-            </a:pPr>
-            <a:r>
-              <a:rPr sz="1400" b="1">
-                <a:solidFill>
-                  <a:srgbClr val="1C1F2E"/>
-                </a:solidFill>
-                <a:latin typeface="Segoe UI"/>
-              </a:rPr>
-              <a:t>Visualise</a:t>
-            </a:r>
-          </a:p>
-        </p:txBody>
-      </p:sp>
-      <p:sp>
-        <p:nvSpPr>
-          <p:cNvPr id="18" name="TextBox 17"/>
-          <p:cNvSpPr txBox="1"/>
-          <p:nvPr/>
-        </p:nvSpPr>
-        <p:spPr>
-          <a:xfrm>
-            <a:off x="777240" y="5248655"/>
-            <a:ext cx="3840479" cy="822960"/>
-          </a:xfrm>
-          <a:prstGeom prst="rect">
-            <a:avLst/>
-          </a:prstGeom>
-          <a:noFill/>
-        </p:spPr>
-        <p:txBody>
-          <a:bodyPr wrap="square" anchor="t" lIns="18288" rIns="18288" tIns="18288" bIns="18288">
-            <a:spAutoFit/>
-          </a:bodyPr>
-          <a:lstStyle/>
-          <a:p>
-            <a:pPr algn="l">
-              <a:lnSpc>
-                <a:spcPct val="115000"/>
-              </a:lnSpc>
-              <a:spcAft>
-                <a:spcPts val="400"/>
-              </a:spcAft>
-            </a:pPr>
-            <a:r>
-              <a:rPr sz="1100" b="0">
-                <a:solidFill>
-                  <a:srgbClr val="6B7086"/>
-                </a:solidFill>
-                <a:latin typeface="Segoe UI"/>
-              </a:rPr>
-              <a:t>Grafana dashboard: availability, request rate, P95/P99 latency, 5xx errors, memory and CPU.</a:t>
-            </a:r>
-          </a:p>
-        </p:txBody>
-      </p:sp>
+        </p:spPr>
+      </p:pic>
       <p:pic>
         <p:nvPicPr>
-          <p:cNvPr id="19" name="Picture 18" descr="M9-backend-metrics.png"/>
+          <p:cNvPr id="19" name="Picture 18" descr="M8-helm-release.png"/>
           <p:cNvPicPr>
             <a:picLocks noChangeAspect="1"/>
           </p:cNvPicPr>
           <p:nvPr/>
         </p:nvPicPr>
         <p:blipFill>
-          <a:blip r:embed="rId2"/>
-          <a:srcRect b="52451"/>
+          <a:blip r:embed="rId3"/>
           <a:stretch>
             <a:fillRect/>
           </a:stretch>
         </p:blipFill>
         <p:spPr>
           <a:xfrm>
-            <a:off x="4983480" y="1600200"/>
-            <a:ext cx="6675120" cy="2240280"/>
+            <a:off x="7589520" y="4394053"/>
+            <a:ext cx="4069080" cy="1590332"/>
           </a:xfrm>
           <a:prstGeom prst="rect">
             <a:avLst/>
@@ -5441,172 +5543,6 @@
           </a:ln>
         </p:spPr>
       </p:pic>
-      <p:sp>
-        <p:nvSpPr>
-          <p:cNvPr id="20" name="Rounded Rectangle 19"/>
-          <p:cNvSpPr/>
-          <p:nvPr/>
-        </p:nvSpPr>
-        <p:spPr>
-          <a:xfrm>
-            <a:off x="4983480" y="4023360"/>
-            <a:ext cx="3246120" cy="2240280"/>
-          </a:xfrm>
-          <a:prstGeom prst="roundRect">
-            <a:avLst>
-              <a:gd name="adj" fmla="val 8000"/>
-            </a:avLst>
-          </a:prstGeom>
-          <a:solidFill>
-            <a:srgbClr val="FFFFFF"/>
-          </a:solidFill>
-          <a:ln w="12700">
-            <a:solidFill>
-              <a:srgbClr val="B4B8D0"/>
-            </a:solidFill>
-            <a:prstDash val="lgDash"/>
-          </a:ln>
-          <a:effectLst/>
-        </p:spPr>
-        <p:style>
-          <a:lnRef idx="1">
-            <a:schemeClr val="accent1"/>
-          </a:lnRef>
-          <a:fillRef idx="3">
-            <a:schemeClr val="accent1"/>
-          </a:fillRef>
-          <a:effectRef idx="2">
-            <a:schemeClr val="accent1"/>
-          </a:effectRef>
-          <a:fontRef idx="minor">
-            <a:schemeClr val="lt1"/>
-          </a:fontRef>
-        </p:style>
-        <p:txBody>
-          <a:bodyPr rtlCol="0" anchor="ctr" wrap="square" lIns="73152" rIns="73152"/>
-          <a:lstStyle/>
-          <a:p>
-            <a:pPr algn="ctr"/>
-            <a:r>
-              <a:rPr sz="1400" b="1">
-                <a:solidFill>
-                  <a:srgbClr val="4F46E5"/>
-                </a:solidFill>
-                <a:latin typeface="Segoe UI"/>
-              </a:rPr>
-              <a:t>📷  Add your screenshot</a:t>
-            </a:r>
-          </a:p>
-          <a:p>
-            <a:pPr algn="ctr"/>
-            <a:r>
-              <a:rPr sz="1200" b="0">
-                <a:solidFill>
-                  <a:srgbClr val="1C1F2E"/>
-                </a:solidFill>
-                <a:latin typeface="Segoe UI"/>
-              </a:rPr>
-              <a:t>Prometheus targets UP</a:t>
-            </a:r>
-          </a:p>
-          <a:p>
-            <a:pPr algn="ctr"/>
-            <a:r>
-              <a:rPr sz="1100" b="0">
-                <a:solidFill>
-                  <a:srgbClr val="6B7086"/>
-                </a:solidFill>
-                <a:latin typeface="Consolas"/>
-              </a:rPr>
-              <a:t>kubectl port-forward
--n monitoring svc/prometheus 9090</a:t>
-            </a:r>
-          </a:p>
-        </p:txBody>
-      </p:sp>
-      <p:sp>
-        <p:nvSpPr>
-          <p:cNvPr id="21" name="Rounded Rectangle 20"/>
-          <p:cNvSpPr/>
-          <p:nvPr/>
-        </p:nvSpPr>
-        <p:spPr>
-          <a:xfrm>
-            <a:off x="8412480" y="4023360"/>
-            <a:ext cx="3246120" cy="2240280"/>
-          </a:xfrm>
-          <a:prstGeom prst="roundRect">
-            <a:avLst>
-              <a:gd name="adj" fmla="val 8000"/>
-            </a:avLst>
-          </a:prstGeom>
-          <a:solidFill>
-            <a:srgbClr val="FFFFFF"/>
-          </a:solidFill>
-          <a:ln w="12700">
-            <a:solidFill>
-              <a:srgbClr val="B4B8D0"/>
-            </a:solidFill>
-            <a:prstDash val="lgDash"/>
-          </a:ln>
-          <a:effectLst/>
-        </p:spPr>
-        <p:style>
-          <a:lnRef idx="1">
-            <a:schemeClr val="accent1"/>
-          </a:lnRef>
-          <a:fillRef idx="3">
-            <a:schemeClr val="accent1"/>
-          </a:fillRef>
-          <a:effectRef idx="2">
-            <a:schemeClr val="accent1"/>
-          </a:effectRef>
-          <a:fontRef idx="minor">
-            <a:schemeClr val="lt1"/>
-          </a:fontRef>
-        </p:style>
-        <p:txBody>
-          <a:bodyPr rtlCol="0" anchor="ctr" wrap="square" lIns="73152" rIns="73152"/>
-          <a:lstStyle/>
-          <a:p>
-            <a:pPr algn="ctr"/>
-            <a:r>
-              <a:rPr sz="1400" b="1">
-                <a:solidFill>
-                  <a:srgbClr val="4F46E5"/>
-                </a:solidFill>
-                <a:latin typeface="Segoe UI"/>
-              </a:rPr>
-              <a:t>📷  Add your screenshot</a:t>
-            </a:r>
-          </a:p>
-          <a:p>
-            <a:pPr algn="ctr"/>
-            <a:r>
-              <a:rPr sz="1200" b="0">
-                <a:solidFill>
-                  <a:srgbClr val="1C1F2E"/>
-                </a:solidFill>
-                <a:latin typeface="Segoe UI"/>
-              </a:rPr>
-              <a:t>Grafana dashboard</a:t>
-            </a:r>
-          </a:p>
-          <a:p>
-            <a:pPr algn="ctr"/>
-            <a:r>
-              <a:rPr sz="1100" b="0">
-                <a:solidFill>
-                  <a:srgbClr val="6B7086"/>
-                </a:solidFill>
-                <a:latin typeface="Consolas"/>
-              </a:rPr>
-              <a:t>kubectl port-forward
--n monitoring svc/grafana 3001:3000</a:t>
-            </a:r>
-          </a:p>
-        </p:txBody>
-      </p:sp>
     </p:spTree>
   </p:cSld>
   <p:clrMapOvr>
@@ -5714,7 +5650,7 @@
                 </a:solidFill>
                 <a:latin typeface="Segoe UI"/>
               </a:rPr>
-              <a:t>11 • TROUBLESHOOTING &amp; RESILIENCE</a:t>
+              <a:t>11 • OBSERVABILITY</a:t>
             </a:r>
           </a:p>
         </p:txBody>
@@ -5756,7 +5692,7 @@
                 </a:solidFill>
                 <a:latin typeface="Segoe UI"/>
               </a:rPr>
-              <a:t>Diagnose from evidence, then fix the cause</a:t>
+              <a:t>Instrumented in code, scraped by Prometheus, shown in Grafana</a:t>
             </a:r>
           </a:p>
         </p:txBody>
@@ -5769,8 +5705,8 @@
         </p:nvSpPr>
         <p:spPr>
           <a:xfrm>
-            <a:off x="548640" y="1188720"/>
-            <a:ext cx="11155680" cy="365760"/>
+            <a:off x="548640" y="6446520"/>
+            <a:ext cx="5486400" cy="274320"/>
           </a:xfrm>
           <a:prstGeom prst="rect">
             <a:avLst/>
@@ -5792,13 +5728,13 @@
               </a:spcAft>
             </a:pPr>
             <a:r>
-              <a:rPr sz="1400" b="0">
+              <a:rPr sz="900" b="0">
                 <a:solidFill>
                   <a:srgbClr val="6B7086"/>
                 </a:solidFill>
                 <a:latin typeface="Segoe UI"/>
               </a:rPr>
-              <a:t>Two controlled failure drills for the live demo.</a:t>
+              <a:t>DevTrack Todo  •  Jinesh Gandhi  •  DevOps Capstone</a:t>
             </a:r>
           </a:p>
         </p:txBody>
@@ -5806,48 +5742,6 @@
       <p:sp>
         <p:nvSpPr>
           <p:cNvPr id="6" name="TextBox 5"/>
-          <p:cNvSpPr txBox="1"/>
-          <p:nvPr/>
-        </p:nvSpPr>
-        <p:spPr>
-          <a:xfrm>
-            <a:off x="548640" y="6446520"/>
-            <a:ext cx="5486400" cy="274320"/>
-          </a:xfrm>
-          <a:prstGeom prst="rect">
-            <a:avLst/>
-          </a:prstGeom>
-          <a:noFill/>
-        </p:spPr>
-        <p:txBody>
-          <a:bodyPr wrap="square" anchor="t" lIns="18288" rIns="18288" tIns="18288" bIns="18288">
-            <a:spAutoFit/>
-          </a:bodyPr>
-          <a:lstStyle/>
-          <a:p>
-            <a:pPr algn="l">
-              <a:lnSpc>
-                <a:spcPct val="110000"/>
-              </a:lnSpc>
-              <a:spcAft>
-                <a:spcPts val="400"/>
-              </a:spcAft>
-            </a:pPr>
-            <a:r>
-              <a:rPr sz="900" b="0">
-                <a:solidFill>
-                  <a:srgbClr val="6B7086"/>
-                </a:solidFill>
-                <a:latin typeface="Segoe UI"/>
-              </a:rPr>
-              <a:t>DevTrack Todo  •  Jinesh Gandhi  •  DevOps Capstone</a:t>
-            </a:r>
-          </a:p>
-        </p:txBody>
-      </p:sp>
-      <p:sp>
-        <p:nvSpPr>
-          <p:cNvPr id="7" name="TextBox 6"/>
           <p:cNvSpPr txBox="1"/>
           <p:nvPr/>
         </p:nvSpPr>
@@ -5882,21 +5776,21 @@
                 </a:solidFill>
                 <a:latin typeface="Segoe UI"/>
               </a:rPr>
-              <a:t>12 / 15</a:t>
-            </a:r>
-          </a:p>
-        </p:txBody>
-      </p:sp>
-      <p:sp>
-        <p:nvSpPr>
-          <p:cNvPr id="8" name="Rounded Rectangle 7"/>
+              <a:t>12 / 17</a:t>
+            </a:r>
+          </a:p>
+        </p:txBody>
+      </p:sp>
+      <p:sp>
+        <p:nvSpPr>
+          <p:cNvPr id="7" name="Rounded Rectangle 6"/>
           <p:cNvSpPr/>
           <p:nvPr/>
         </p:nvSpPr>
         <p:spPr>
           <a:xfrm>
-            <a:off x="548640" y="1737360"/>
-            <a:ext cx="5440680" cy="4069080"/>
+            <a:off x="548640" y="1600200"/>
+            <a:ext cx="4206240" cy="1417320"/>
           </a:xfrm>
           <a:prstGeom prst="roundRect">
             <a:avLst>
@@ -5937,20 +5831,20 @@
       </p:sp>
       <p:sp>
         <p:nvSpPr>
-          <p:cNvPr id="9" name="Rectangle 8"/>
+          <p:cNvPr id="8" name="Rectangle 7"/>
           <p:cNvSpPr/>
           <p:nvPr/>
         </p:nvSpPr>
         <p:spPr>
           <a:xfrm>
-            <a:off x="548640" y="1737360"/>
-            <a:ext cx="5440680" cy="73152"/>
+            <a:off x="548640" y="1764792"/>
+            <a:ext cx="54864" cy="1088136"/>
           </a:xfrm>
           <a:prstGeom prst="rect">
             <a:avLst/>
           </a:prstGeom>
           <a:solidFill>
-            <a:srgbClr val="EF4444"/>
+            <a:srgbClr val="4F46E5"/>
           </a:solidFill>
           <a:ln>
             <a:noFill/>
@@ -5981,14 +5875,14 @@
       </p:sp>
       <p:sp>
         <p:nvSpPr>
-          <p:cNvPr id="10" name="TextBox 9"/>
+          <p:cNvPr id="9" name="TextBox 8"/>
           <p:cNvSpPr txBox="1"/>
           <p:nvPr/>
         </p:nvSpPr>
         <p:spPr>
           <a:xfrm>
-            <a:off x="822959" y="1965960"/>
-            <a:ext cx="4937760" cy="365760"/>
+            <a:off x="777240" y="1737360"/>
+            <a:ext cx="3840479" cy="365760"/>
           </a:xfrm>
           <a:prstGeom prst="rect">
             <a:avLst/>
@@ -6010,82 +5904,27 @@
               </a:spcAft>
             </a:pPr>
             <a:r>
-              <a:rPr sz="1700" b="1">
+              <a:rPr sz="1400" b="1">
                 <a:solidFill>
                   <a:srgbClr val="1C1F2E"/>
                 </a:solidFill>
                 <a:latin typeface="Segoe UI"/>
               </a:rPr>
-              <a:t>Drill 1 • ImagePullBackOff</a:t>
-            </a:r>
-          </a:p>
-        </p:txBody>
-      </p:sp>
-      <p:sp>
-        <p:nvSpPr>
-          <p:cNvPr id="11" name="Rounded Rectangle 10"/>
-          <p:cNvSpPr/>
-          <p:nvPr/>
-        </p:nvSpPr>
-        <p:spPr>
-          <a:xfrm>
-            <a:off x="822959" y="2560320"/>
-            <a:ext cx="1097280" cy="310896"/>
-          </a:xfrm>
-          <a:prstGeom prst="roundRect">
-            <a:avLst>
-              <a:gd name="adj" fmla="val 50000"/>
-            </a:avLst>
-          </a:prstGeom>
-          <a:solidFill>
-            <a:srgbClr val="F4F5FB"/>
-          </a:solidFill>
-          <a:ln>
-            <a:noFill/>
-          </a:ln>
-          <a:effectLst/>
-        </p:spPr>
-        <p:style>
-          <a:lnRef idx="1">
-            <a:schemeClr val="accent1"/>
-          </a:lnRef>
-          <a:fillRef idx="3">
-            <a:schemeClr val="accent1"/>
-          </a:fillRef>
-          <a:effectRef idx="2">
-            <a:schemeClr val="accent1"/>
-          </a:effectRef>
-          <a:fontRef idx="minor">
-            <a:schemeClr val="lt1"/>
-          </a:fontRef>
-        </p:style>
-        <p:txBody>
-          <a:bodyPr rtlCol="0" anchor="ctr" wrap="square" lIns="73152" rIns="73152"/>
-          <a:lstStyle/>
-          <a:p>
-            <a:pPr algn="ctr"/>
-            <a:r>
-              <a:rPr sz="1100" b="1">
-                <a:solidFill>
-                  <a:srgbClr val="EF4444"/>
-                </a:solidFill>
-                <a:latin typeface="Segoe UI"/>
-              </a:rPr>
-              <a:t>Inject</a:t>
-            </a:r>
-          </a:p>
-        </p:txBody>
-      </p:sp>
-      <p:sp>
-        <p:nvSpPr>
-          <p:cNvPr id="12" name="TextBox 11"/>
+              <a:t>Instrument</a:t>
+            </a:r>
+          </a:p>
+        </p:txBody>
+      </p:sp>
+      <p:sp>
+        <p:nvSpPr>
+          <p:cNvPr id="10" name="TextBox 9"/>
           <p:cNvSpPr txBox="1"/>
           <p:nvPr/>
         </p:nvSpPr>
         <p:spPr>
           <a:xfrm>
-            <a:off x="2103120" y="2542032"/>
-            <a:ext cx="3657600" cy="822960"/>
+            <a:off x="777240" y="2103120"/>
+            <a:ext cx="3840479" cy="822960"/>
           </a:xfrm>
           <a:prstGeom prst="rect">
             <a:avLst/>
@@ -6100,325 +5939,34 @@
           <a:p>
             <a:pPr algn="l">
               <a:lnSpc>
-                <a:spcPct val="110000"/>
+                <a:spcPct val="115000"/>
               </a:lnSpc>
               <a:spcAft>
                 <a:spcPts val="400"/>
               </a:spcAft>
             </a:pPr>
             <a:r>
-              <a:rPr sz="1200" b="0">
-                <a:solidFill>
-                  <a:srgbClr val="1C1F2E"/>
-                </a:solidFill>
-                <a:latin typeface="Segoe UI"/>
-              </a:rPr>
-              <a:t>Deploy the backend with a tag that does not exist in GHCR.</a:t>
-            </a:r>
-          </a:p>
-        </p:txBody>
-      </p:sp>
-      <p:sp>
-        <p:nvSpPr>
-          <p:cNvPr id="13" name="Rounded Rectangle 12"/>
+              <a:rPr sz="1100" b="0">
+                <a:solidFill>
+                  <a:srgbClr val="6B7086"/>
+                </a:solidFill>
+                <a:latin typeface="Segoe UI"/>
+              </a:rPr>
+              <a:t>FastAPI middleware records devtrack_http_requests_total and a latency histogram per route template.</a:t>
+            </a:r>
+          </a:p>
+        </p:txBody>
+      </p:sp>
+      <p:sp>
+        <p:nvSpPr>
+          <p:cNvPr id="11" name="Rounded Rectangle 10"/>
           <p:cNvSpPr/>
           <p:nvPr/>
         </p:nvSpPr>
         <p:spPr>
           <a:xfrm>
-            <a:off x="822959" y="3364991"/>
-            <a:ext cx="1097280" cy="310896"/>
-          </a:xfrm>
-          <a:prstGeom prst="roundRect">
-            <a:avLst>
-              <a:gd name="adj" fmla="val 50000"/>
-            </a:avLst>
-          </a:prstGeom>
-          <a:solidFill>
-            <a:srgbClr val="F4F5FB"/>
-          </a:solidFill>
-          <a:ln>
-            <a:noFill/>
-          </a:ln>
-          <a:effectLst/>
-        </p:spPr>
-        <p:style>
-          <a:lnRef idx="1">
-            <a:schemeClr val="accent1"/>
-          </a:lnRef>
-          <a:fillRef idx="3">
-            <a:schemeClr val="accent1"/>
-          </a:fillRef>
-          <a:effectRef idx="2">
-            <a:schemeClr val="accent1"/>
-          </a:effectRef>
-          <a:fontRef idx="minor">
-            <a:schemeClr val="lt1"/>
-          </a:fontRef>
-        </p:style>
-        <p:txBody>
-          <a:bodyPr rtlCol="0" anchor="ctr" wrap="square" lIns="73152" rIns="73152"/>
-          <a:lstStyle/>
-          <a:p>
-            <a:pPr algn="ctr"/>
-            <a:r>
-              <a:rPr sz="1100" b="1">
-                <a:solidFill>
-                  <a:srgbClr val="EF4444"/>
-                </a:solidFill>
-                <a:latin typeface="Segoe UI"/>
-              </a:rPr>
-              <a:t>Observe</a:t>
-            </a:r>
-          </a:p>
-        </p:txBody>
-      </p:sp>
-      <p:sp>
-        <p:nvSpPr>
-          <p:cNvPr id="14" name="TextBox 13"/>
-          <p:cNvSpPr txBox="1"/>
-          <p:nvPr/>
-        </p:nvSpPr>
-        <p:spPr>
-          <a:xfrm>
-            <a:off x="2103120" y="3346703"/>
-            <a:ext cx="3657600" cy="822960"/>
-          </a:xfrm>
-          <a:prstGeom prst="rect">
-            <a:avLst/>
-          </a:prstGeom>
-          <a:noFill/>
-        </p:spPr>
-        <p:txBody>
-          <a:bodyPr wrap="square" anchor="t" lIns="18288" rIns="18288" tIns="18288" bIns="18288">
-            <a:spAutoFit/>
-          </a:bodyPr>
-          <a:lstStyle/>
-          <a:p>
-            <a:pPr algn="l">
-              <a:lnSpc>
-                <a:spcPct val="110000"/>
-              </a:lnSpc>
-              <a:spcAft>
-                <a:spcPts val="400"/>
-              </a:spcAft>
-            </a:pPr>
-            <a:r>
-              <a:rPr sz="1200" b="0">
-                <a:solidFill>
-                  <a:srgbClr val="1C1F2E"/>
-                </a:solidFill>
-                <a:latin typeface="Segoe UI"/>
-              </a:rPr>
-              <a:t>kubectl get pods → ErrImagePull / ImagePullBackOff</a:t>
-            </a:r>
-          </a:p>
-        </p:txBody>
-      </p:sp>
-      <p:sp>
-        <p:nvSpPr>
-          <p:cNvPr id="15" name="Rounded Rectangle 14"/>
-          <p:cNvSpPr/>
-          <p:nvPr/>
-        </p:nvSpPr>
-        <p:spPr>
-          <a:xfrm>
-            <a:off x="822959" y="4169663"/>
-            <a:ext cx="1097280" cy="310896"/>
-          </a:xfrm>
-          <a:prstGeom prst="roundRect">
-            <a:avLst>
-              <a:gd name="adj" fmla="val 50000"/>
-            </a:avLst>
-          </a:prstGeom>
-          <a:solidFill>
-            <a:srgbClr val="F4F5FB"/>
-          </a:solidFill>
-          <a:ln>
-            <a:noFill/>
-          </a:ln>
-          <a:effectLst/>
-        </p:spPr>
-        <p:style>
-          <a:lnRef idx="1">
-            <a:schemeClr val="accent1"/>
-          </a:lnRef>
-          <a:fillRef idx="3">
-            <a:schemeClr val="accent1"/>
-          </a:fillRef>
-          <a:effectRef idx="2">
-            <a:schemeClr val="accent1"/>
-          </a:effectRef>
-          <a:fontRef idx="minor">
-            <a:schemeClr val="lt1"/>
-          </a:fontRef>
-        </p:style>
-        <p:txBody>
-          <a:bodyPr rtlCol="0" anchor="ctr" wrap="square" lIns="73152" rIns="73152"/>
-          <a:lstStyle/>
-          <a:p>
-            <a:pPr algn="ctr"/>
-            <a:r>
-              <a:rPr sz="1100" b="1">
-                <a:solidFill>
-                  <a:srgbClr val="EF4444"/>
-                </a:solidFill>
-                <a:latin typeface="Segoe UI"/>
-              </a:rPr>
-              <a:t>Diagnose</a:t>
-            </a:r>
-          </a:p>
-        </p:txBody>
-      </p:sp>
-      <p:sp>
-        <p:nvSpPr>
-          <p:cNvPr id="16" name="TextBox 15"/>
-          <p:cNvSpPr txBox="1"/>
-          <p:nvPr/>
-        </p:nvSpPr>
-        <p:spPr>
-          <a:xfrm>
-            <a:off x="2103120" y="4151376"/>
-            <a:ext cx="3657600" cy="822960"/>
-          </a:xfrm>
-          <a:prstGeom prst="rect">
-            <a:avLst/>
-          </a:prstGeom>
-          <a:noFill/>
-        </p:spPr>
-        <p:txBody>
-          <a:bodyPr wrap="square" anchor="t" lIns="18288" rIns="18288" tIns="18288" bIns="18288">
-            <a:spAutoFit/>
-          </a:bodyPr>
-          <a:lstStyle/>
-          <a:p>
-            <a:pPr algn="l">
-              <a:lnSpc>
-                <a:spcPct val="110000"/>
-              </a:lnSpc>
-              <a:spcAft>
-                <a:spcPts val="400"/>
-              </a:spcAft>
-            </a:pPr>
-            <a:r>
-              <a:rPr sz="1200" b="0">
-                <a:solidFill>
-                  <a:srgbClr val="1C1F2E"/>
-                </a:solidFill>
-                <a:latin typeface="Segoe UI"/>
-              </a:rPr>
-              <a:t>kubectl describe pod → events show 'manifest unknown'</a:t>
-            </a:r>
-          </a:p>
-        </p:txBody>
-      </p:sp>
-      <p:sp>
-        <p:nvSpPr>
-          <p:cNvPr id="17" name="Rounded Rectangle 16"/>
-          <p:cNvSpPr/>
-          <p:nvPr/>
-        </p:nvSpPr>
-        <p:spPr>
-          <a:xfrm>
-            <a:off x="822959" y="4974336"/>
-            <a:ext cx="1097280" cy="310896"/>
-          </a:xfrm>
-          <a:prstGeom prst="roundRect">
-            <a:avLst>
-              <a:gd name="adj" fmla="val 50000"/>
-            </a:avLst>
-          </a:prstGeom>
-          <a:solidFill>
-            <a:srgbClr val="F4F5FB"/>
-          </a:solidFill>
-          <a:ln>
-            <a:noFill/>
-          </a:ln>
-          <a:effectLst/>
-        </p:spPr>
-        <p:style>
-          <a:lnRef idx="1">
-            <a:schemeClr val="accent1"/>
-          </a:lnRef>
-          <a:fillRef idx="3">
-            <a:schemeClr val="accent1"/>
-          </a:fillRef>
-          <a:effectRef idx="2">
-            <a:schemeClr val="accent1"/>
-          </a:effectRef>
-          <a:fontRef idx="minor">
-            <a:schemeClr val="lt1"/>
-          </a:fontRef>
-        </p:style>
-        <p:txBody>
-          <a:bodyPr rtlCol="0" anchor="ctr" wrap="square" lIns="73152" rIns="73152"/>
-          <a:lstStyle/>
-          <a:p>
-            <a:pPr algn="ctr"/>
-            <a:r>
-              <a:rPr sz="1100" b="1">
-                <a:solidFill>
-                  <a:srgbClr val="EF4444"/>
-                </a:solidFill>
-                <a:latin typeface="Segoe UI"/>
-              </a:rPr>
-              <a:t>Fix</a:t>
-            </a:r>
-          </a:p>
-        </p:txBody>
-      </p:sp>
-      <p:sp>
-        <p:nvSpPr>
-          <p:cNvPr id="18" name="TextBox 17"/>
-          <p:cNvSpPr txBox="1"/>
-          <p:nvPr/>
-        </p:nvSpPr>
-        <p:spPr>
-          <a:xfrm>
-            <a:off x="2103120" y="4956048"/>
-            <a:ext cx="3657600" cy="822960"/>
-          </a:xfrm>
-          <a:prstGeom prst="rect">
-            <a:avLst/>
-          </a:prstGeom>
-          <a:noFill/>
-        </p:spPr>
-        <p:txBody>
-          <a:bodyPr wrap="square" anchor="t" lIns="18288" rIns="18288" tIns="18288" bIns="18288">
-            <a:spAutoFit/>
-          </a:bodyPr>
-          <a:lstStyle/>
-          <a:p>
-            <a:pPr algn="l">
-              <a:lnSpc>
-                <a:spcPct val="110000"/>
-              </a:lnSpc>
-              <a:spcAft>
-                <a:spcPts val="400"/>
-              </a:spcAft>
-            </a:pPr>
-            <a:r>
-              <a:rPr sz="1200" b="0">
-                <a:solidFill>
-                  <a:srgbClr val="1C1F2E"/>
-                </a:solidFill>
-                <a:latin typeface="Segoe UI"/>
-              </a:rPr>
-              <a:t>kubectl set image … :&lt;valid-sha&gt; or helm rollback</a:t>
-            </a:r>
-          </a:p>
-        </p:txBody>
-      </p:sp>
-      <p:sp>
-        <p:nvSpPr>
-          <p:cNvPr id="19" name="Rounded Rectangle 18"/>
-          <p:cNvSpPr/>
-          <p:nvPr/>
-        </p:nvSpPr>
-        <p:spPr>
-          <a:xfrm>
-            <a:off x="6217920" y="1737360"/>
-            <a:ext cx="5440680" cy="4069080"/>
+            <a:off x="548640" y="3172968"/>
+            <a:ext cx="4206240" cy="1417320"/>
           </a:xfrm>
           <a:prstGeom prst="roundRect">
             <a:avLst>
@@ -6459,14 +6007,14 @@
       </p:sp>
       <p:sp>
         <p:nvSpPr>
-          <p:cNvPr id="20" name="Rectangle 19"/>
+          <p:cNvPr id="12" name="Rectangle 11"/>
           <p:cNvSpPr/>
           <p:nvPr/>
         </p:nvSpPr>
         <p:spPr>
           <a:xfrm>
-            <a:off x="6217920" y="1737360"/>
-            <a:ext cx="5440680" cy="73152"/>
+            <a:off x="548640" y="3337560"/>
+            <a:ext cx="54864" cy="1088136"/>
           </a:xfrm>
           <a:prstGeom prst="rect">
             <a:avLst/>
@@ -6503,14 +6051,14 @@
       </p:sp>
       <p:sp>
         <p:nvSpPr>
-          <p:cNvPr id="21" name="TextBox 20"/>
+          <p:cNvPr id="13" name="TextBox 12"/>
           <p:cNvSpPr txBox="1"/>
           <p:nvPr/>
         </p:nvSpPr>
         <p:spPr>
           <a:xfrm>
-            <a:off x="6492240" y="1965960"/>
-            <a:ext cx="4937760" cy="365760"/>
+            <a:off x="777240" y="3310127"/>
+            <a:ext cx="3840479" cy="365760"/>
           </a:xfrm>
           <a:prstGeom prst="rect">
             <a:avLst/>
@@ -6532,35 +6080,123 @@
               </a:spcAft>
             </a:pPr>
             <a:r>
-              <a:rPr sz="1700" b="1">
+              <a:rPr sz="1400" b="1">
                 <a:solidFill>
                   <a:srgbClr val="1C1F2E"/>
                 </a:solidFill>
                 <a:latin typeface="Segoe UI"/>
               </a:rPr>
-              <a:t>Drill 2 • Service with no endpoints</a:t>
-            </a:r>
-          </a:p>
-        </p:txBody>
-      </p:sp>
-      <p:sp>
-        <p:nvSpPr>
-          <p:cNvPr id="22" name="Rounded Rectangle 21"/>
+              <a:t>Collect</a:t>
+            </a:r>
+          </a:p>
+        </p:txBody>
+      </p:sp>
+      <p:sp>
+        <p:nvSpPr>
+          <p:cNvPr id="14" name="TextBox 13"/>
+          <p:cNvSpPr txBox="1"/>
+          <p:nvPr/>
+        </p:nvSpPr>
+        <p:spPr>
+          <a:xfrm>
+            <a:off x="777240" y="3675887"/>
+            <a:ext cx="3840479" cy="822960"/>
+          </a:xfrm>
+          <a:prstGeom prst="rect">
+            <a:avLst/>
+          </a:prstGeom>
+          <a:noFill/>
+        </p:spPr>
+        <p:txBody>
+          <a:bodyPr wrap="square" anchor="t" lIns="18288" rIns="18288" tIns="18288" bIns="18288">
+            <a:spAutoFit/>
+          </a:bodyPr>
+          <a:lstStyle/>
+          <a:p>
+            <a:pPr algn="l">
+              <a:lnSpc>
+                <a:spcPct val="115000"/>
+              </a:lnSpc>
+              <a:spcAft>
+                <a:spcPts val="400"/>
+              </a:spcAft>
+            </a:pPr>
+            <a:r>
+              <a:rPr sz="1100" b="0">
+                <a:solidFill>
+                  <a:srgbClr val="6B7086"/>
+                </a:solidFill>
+                <a:latin typeface="Segoe UI"/>
+              </a:rPr>
+              <a:t>Prometheus scrapes devtrack-backend:8000/metrics every 15 seconds — target UP (1/1).</a:t>
+            </a:r>
+          </a:p>
+        </p:txBody>
+      </p:sp>
+      <p:sp>
+        <p:nvSpPr>
+          <p:cNvPr id="15" name="Rounded Rectangle 14"/>
           <p:cNvSpPr/>
           <p:nvPr/>
         </p:nvSpPr>
         <p:spPr>
           <a:xfrm>
-            <a:off x="6492240" y="2560320"/>
-            <a:ext cx="1097280" cy="310896"/>
+            <a:off x="548640" y="4745736"/>
+            <a:ext cx="4206240" cy="1417320"/>
           </a:xfrm>
           <a:prstGeom prst="roundRect">
             <a:avLst>
-              <a:gd name="adj" fmla="val 50000"/>
+              <a:gd name="adj" fmla="val 8000"/>
             </a:avLst>
           </a:prstGeom>
           <a:solidFill>
-            <a:srgbClr val="F4F5FB"/>
+            <a:srgbClr val="FFFFFF"/>
+          </a:solidFill>
+          <a:ln w="12700">
+            <a:solidFill>
+              <a:srgbClr val="E4E6EF"/>
+            </a:solidFill>
+          </a:ln>
+          <a:effectLst/>
+        </p:spPr>
+        <p:style>
+          <a:lnRef idx="1">
+            <a:schemeClr val="accent1"/>
+          </a:lnRef>
+          <a:fillRef idx="3">
+            <a:schemeClr val="accent1"/>
+          </a:fillRef>
+          <a:effectRef idx="2">
+            <a:schemeClr val="accent1"/>
+          </a:effectRef>
+          <a:fontRef idx="minor">
+            <a:schemeClr val="lt1"/>
+          </a:fontRef>
+        </p:style>
+        <p:txBody>
+          <a:bodyPr rtlCol="0" anchor="ctr"/>
+          <a:lstStyle/>
+          <a:p>
+            <a:pPr algn="ctr"/>
+          </a:p>
+        </p:txBody>
+      </p:sp>
+      <p:sp>
+        <p:nvSpPr>
+          <p:cNvPr id="16" name="Rectangle 15"/>
+          <p:cNvSpPr/>
+          <p:nvPr/>
+        </p:nvSpPr>
+        <p:spPr>
+          <a:xfrm>
+            <a:off x="548640" y="4910327"/>
+            <a:ext cx="54864" cy="1088136"/>
+          </a:xfrm>
+          <a:prstGeom prst="rect">
+            <a:avLst/>
+          </a:prstGeom>
+          <a:solidFill>
+            <a:srgbClr val="10B981"/>
           </a:solidFill>
           <a:ln>
             <a:noFill/>
@@ -6582,32 +6218,23 @@
           </a:fontRef>
         </p:style>
         <p:txBody>
-          <a:bodyPr rtlCol="0" anchor="ctr" wrap="square" lIns="73152" rIns="73152"/>
+          <a:bodyPr rtlCol="0" anchor="ctr"/>
           <a:lstStyle/>
           <a:p>
             <a:pPr algn="ctr"/>
-            <a:r>
-              <a:rPr sz="1100" b="1">
-                <a:solidFill>
-                  <a:srgbClr val="F59E0B"/>
-                </a:solidFill>
-                <a:latin typeface="Segoe UI"/>
-              </a:rPr>
-              <a:t>Inject</a:t>
-            </a:r>
-          </a:p>
-        </p:txBody>
-      </p:sp>
-      <p:sp>
-        <p:nvSpPr>
-          <p:cNvPr id="23" name="TextBox 22"/>
+          </a:p>
+        </p:txBody>
+      </p:sp>
+      <p:sp>
+        <p:nvSpPr>
+          <p:cNvPr id="17" name="TextBox 16"/>
           <p:cNvSpPr txBox="1"/>
           <p:nvPr/>
         </p:nvSpPr>
         <p:spPr>
           <a:xfrm>
-            <a:off x="7772400" y="2542032"/>
-            <a:ext cx="3657600" cy="822960"/>
+            <a:off x="777240" y="4882896"/>
+            <a:ext cx="3840479" cy="365760"/>
           </a:xfrm>
           <a:prstGeom prst="rect">
             <a:avLst/>
@@ -6629,82 +6256,27 @@
               </a:spcAft>
             </a:pPr>
             <a:r>
-              <a:rPr sz="1200" b="0">
+              <a:rPr sz="1400" b="1">
                 <a:solidFill>
                   <a:srgbClr val="1C1F2E"/>
                 </a:solidFill>
                 <a:latin typeface="Segoe UI"/>
               </a:rPr>
-              <a:t>Change the Service selector so it matches no Pod labels.</a:t>
-            </a:r>
-          </a:p>
-        </p:txBody>
-      </p:sp>
-      <p:sp>
-        <p:nvSpPr>
-          <p:cNvPr id="24" name="Rounded Rectangle 23"/>
-          <p:cNvSpPr/>
-          <p:nvPr/>
-        </p:nvSpPr>
-        <p:spPr>
-          <a:xfrm>
-            <a:off x="6492240" y="3364991"/>
-            <a:ext cx="1097280" cy="310896"/>
-          </a:xfrm>
-          <a:prstGeom prst="roundRect">
-            <a:avLst>
-              <a:gd name="adj" fmla="val 50000"/>
-            </a:avLst>
-          </a:prstGeom>
-          <a:solidFill>
-            <a:srgbClr val="F4F5FB"/>
-          </a:solidFill>
-          <a:ln>
-            <a:noFill/>
-          </a:ln>
-          <a:effectLst/>
-        </p:spPr>
-        <p:style>
-          <a:lnRef idx="1">
-            <a:schemeClr val="accent1"/>
-          </a:lnRef>
-          <a:fillRef idx="3">
-            <a:schemeClr val="accent1"/>
-          </a:fillRef>
-          <a:effectRef idx="2">
-            <a:schemeClr val="accent1"/>
-          </a:effectRef>
-          <a:fontRef idx="minor">
-            <a:schemeClr val="lt1"/>
-          </a:fontRef>
-        </p:style>
-        <p:txBody>
-          <a:bodyPr rtlCol="0" anchor="ctr" wrap="square" lIns="73152" rIns="73152"/>
-          <a:lstStyle/>
-          <a:p>
-            <a:pPr algn="ctr"/>
-            <a:r>
-              <a:rPr sz="1100" b="1">
-                <a:solidFill>
-                  <a:srgbClr val="F59E0B"/>
-                </a:solidFill>
-                <a:latin typeface="Segoe UI"/>
-              </a:rPr>
-              <a:t>Observe</a:t>
-            </a:r>
-          </a:p>
-        </p:txBody>
-      </p:sp>
-      <p:sp>
-        <p:nvSpPr>
-          <p:cNvPr id="25" name="TextBox 24"/>
+              <a:t>Visualise</a:t>
+            </a:r>
+          </a:p>
+        </p:txBody>
+      </p:sp>
+      <p:sp>
+        <p:nvSpPr>
+          <p:cNvPr id="18" name="TextBox 17"/>
           <p:cNvSpPr txBox="1"/>
           <p:nvPr/>
         </p:nvSpPr>
         <p:spPr>
           <a:xfrm>
-            <a:off x="7772400" y="3346703"/>
-            <a:ext cx="3657600" cy="822960"/>
+            <a:off x="777240" y="5248655"/>
+            <a:ext cx="3840479" cy="822960"/>
           </a:xfrm>
           <a:prstGeom prst="rect">
             <a:avLst/>
@@ -6719,260 +6291,114 @@
           <a:p>
             <a:pPr algn="l">
               <a:lnSpc>
-                <a:spcPct val="110000"/>
+                <a:spcPct val="115000"/>
               </a:lnSpc>
               <a:spcAft>
                 <a:spcPts val="400"/>
               </a:spcAft>
             </a:pPr>
             <a:r>
-              <a:rPr sz="1200" b="0">
-                <a:solidFill>
-                  <a:srgbClr val="1C1F2E"/>
-                </a:solidFill>
-                <a:latin typeface="Segoe UI"/>
-              </a:rPr>
-              <a:t>Frontend loads but /api calls fail (502/503).</a:t>
-            </a:r>
-          </a:p>
-        </p:txBody>
-      </p:sp>
-      <p:sp>
-        <p:nvSpPr>
-          <p:cNvPr id="26" name="Rounded Rectangle 25"/>
-          <p:cNvSpPr/>
-          <p:nvPr/>
-        </p:nvSpPr>
-        <p:spPr>
-          <a:xfrm>
-            <a:off x="6492240" y="4169663"/>
-            <a:ext cx="1097280" cy="310896"/>
-          </a:xfrm>
-          <a:prstGeom prst="roundRect">
-            <a:avLst>
-              <a:gd name="adj" fmla="val 50000"/>
-            </a:avLst>
-          </a:prstGeom>
-          <a:solidFill>
-            <a:srgbClr val="F4F5FB"/>
-          </a:solidFill>
-          <a:ln>
-            <a:noFill/>
+              <a:rPr sz="1100" b="0">
+                <a:solidFill>
+                  <a:srgbClr val="6B7086"/>
+                </a:solidFill>
+                <a:latin typeface="Segoe UI"/>
+              </a:rPr>
+              <a:t>Grafana dashboard: availability, request rate, P95 latency, 5xx errors, memory and CPU.</a:t>
+            </a:r>
+          </a:p>
+        </p:txBody>
+      </p:sp>
+      <p:pic>
+        <p:nvPicPr>
+          <p:cNvPr id="19" name="Picture 18" descr="M9-grafana-dashboard.png"/>
+          <p:cNvPicPr>
+            <a:picLocks noChangeAspect="1"/>
+          </p:cNvPicPr>
+          <p:nvPr/>
+        </p:nvPicPr>
+        <p:blipFill>
+          <a:blip r:embed="rId2"/>
+          <a:srcRect b="33151"/>
+          <a:stretch>
+            <a:fillRect/>
+          </a:stretch>
+        </p:blipFill>
+        <p:spPr>
+          <a:xfrm>
+            <a:off x="4983480" y="1600200"/>
+            <a:ext cx="6675120" cy="2788920"/>
+          </a:xfrm>
+          <a:prstGeom prst="rect">
+            <a:avLst/>
+          </a:prstGeom>
+          <a:ln w="12700">
+            <a:solidFill>
+              <a:srgbClr val="E4E6EF"/>
+            </a:solidFill>
           </a:ln>
-          <a:effectLst/>
-        </p:spPr>
-        <p:style>
-          <a:lnRef idx="1">
-            <a:schemeClr val="accent1"/>
-          </a:lnRef>
-          <a:fillRef idx="3">
-            <a:schemeClr val="accent1"/>
-          </a:fillRef>
-          <a:effectRef idx="2">
-            <a:schemeClr val="accent1"/>
-          </a:effectRef>
-          <a:fontRef idx="minor">
-            <a:schemeClr val="lt1"/>
-          </a:fontRef>
-        </p:style>
-        <p:txBody>
-          <a:bodyPr rtlCol="0" anchor="ctr" wrap="square" lIns="73152" rIns="73152"/>
-          <a:lstStyle/>
-          <a:p>
-            <a:pPr algn="ctr"/>
-            <a:r>
-              <a:rPr sz="1100" b="1">
-                <a:solidFill>
-                  <a:srgbClr val="F59E0B"/>
-                </a:solidFill>
-                <a:latin typeface="Segoe UI"/>
-              </a:rPr>
-              <a:t>Diagnose</a:t>
-            </a:r>
-          </a:p>
-        </p:txBody>
-      </p:sp>
-      <p:sp>
-        <p:nvSpPr>
-          <p:cNvPr id="27" name="TextBox 26"/>
-          <p:cNvSpPr txBox="1"/>
-          <p:nvPr/>
-        </p:nvSpPr>
-        <p:spPr>
-          <a:xfrm>
-            <a:off x="7772400" y="4151376"/>
-            <a:ext cx="3657600" cy="822960"/>
-          </a:xfrm>
-          <a:prstGeom prst="rect">
-            <a:avLst/>
-          </a:prstGeom>
-          <a:noFill/>
-        </p:spPr>
-        <p:txBody>
-          <a:bodyPr wrap="square" anchor="t" lIns="18288" rIns="18288" tIns="18288" bIns="18288">
-            <a:spAutoFit/>
-          </a:bodyPr>
-          <a:lstStyle/>
-          <a:p>
-            <a:pPr algn="l">
-              <a:lnSpc>
-                <a:spcPct val="110000"/>
-              </a:lnSpc>
-              <a:spcAft>
-                <a:spcPts val="400"/>
-              </a:spcAft>
-            </a:pPr>
-            <a:r>
-              <a:rPr sz="1200" b="0">
-                <a:solidFill>
-                  <a:srgbClr val="1C1F2E"/>
-                </a:solidFill>
-                <a:latin typeface="Segoe UI"/>
-              </a:rPr>
-              <a:t>kubectl get endpoints → &lt;none&gt;; get pods --show-labels</a:t>
-            </a:r>
-          </a:p>
-        </p:txBody>
-      </p:sp>
-      <p:sp>
-        <p:nvSpPr>
-          <p:cNvPr id="28" name="Rounded Rectangle 27"/>
-          <p:cNvSpPr/>
-          <p:nvPr/>
-        </p:nvSpPr>
-        <p:spPr>
-          <a:xfrm>
-            <a:off x="6492240" y="4974336"/>
-            <a:ext cx="1097280" cy="310896"/>
-          </a:xfrm>
-          <a:prstGeom prst="roundRect">
-            <a:avLst>
-              <a:gd name="adj" fmla="val 50000"/>
-            </a:avLst>
-          </a:prstGeom>
-          <a:solidFill>
-            <a:srgbClr val="F4F5FB"/>
-          </a:solidFill>
-          <a:ln>
-            <a:noFill/>
+        </p:spPr>
+      </p:pic>
+      <p:pic>
+        <p:nvPicPr>
+          <p:cNvPr id="20" name="Picture 19" descr="M9-prometheus-targets.png"/>
+          <p:cNvPicPr>
+            <a:picLocks noChangeAspect="1"/>
+          </p:cNvPicPr>
+          <p:nvPr/>
+        </p:nvPicPr>
+        <p:blipFill>
+          <a:blip r:embed="rId3"/>
+          <a:srcRect b="16620"/>
+          <a:stretch>
+            <a:fillRect/>
+          </a:stretch>
+        </p:blipFill>
+        <p:spPr>
+          <a:xfrm>
+            <a:off x="4983480" y="4572000"/>
+            <a:ext cx="3246120" cy="1691640"/>
+          </a:xfrm>
+          <a:prstGeom prst="rect">
+            <a:avLst/>
+          </a:prstGeom>
+          <a:ln w="12700">
+            <a:solidFill>
+              <a:srgbClr val="E4E6EF"/>
+            </a:solidFill>
           </a:ln>
-          <a:effectLst/>
-        </p:spPr>
-        <p:style>
-          <a:lnRef idx="1">
-            <a:schemeClr val="accent1"/>
-          </a:lnRef>
-          <a:fillRef idx="3">
-            <a:schemeClr val="accent1"/>
-          </a:fillRef>
-          <a:effectRef idx="2">
-            <a:schemeClr val="accent1"/>
-          </a:effectRef>
-          <a:fontRef idx="minor">
-            <a:schemeClr val="lt1"/>
-          </a:fontRef>
-        </p:style>
-        <p:txBody>
-          <a:bodyPr rtlCol="0" anchor="ctr" wrap="square" lIns="73152" rIns="73152"/>
-          <a:lstStyle/>
-          <a:p>
-            <a:pPr algn="ctr"/>
-            <a:r>
-              <a:rPr sz="1100" b="1">
-                <a:solidFill>
-                  <a:srgbClr val="F59E0B"/>
-                </a:solidFill>
-                <a:latin typeface="Segoe UI"/>
-              </a:rPr>
-              <a:t>Fix</a:t>
-            </a:r>
-          </a:p>
-        </p:txBody>
-      </p:sp>
-      <p:sp>
-        <p:nvSpPr>
-          <p:cNvPr id="29" name="TextBox 28"/>
-          <p:cNvSpPr txBox="1"/>
-          <p:nvPr/>
-        </p:nvSpPr>
-        <p:spPr>
-          <a:xfrm>
-            <a:off x="7772400" y="4956048"/>
-            <a:ext cx="3657600" cy="822960"/>
-          </a:xfrm>
-          <a:prstGeom prst="rect">
-            <a:avLst/>
-          </a:prstGeom>
-          <a:noFill/>
-        </p:spPr>
-        <p:txBody>
-          <a:bodyPr wrap="square" anchor="t" lIns="18288" rIns="18288" tIns="18288" bIns="18288">
-            <a:spAutoFit/>
-          </a:bodyPr>
-          <a:lstStyle/>
-          <a:p>
-            <a:pPr algn="l">
-              <a:lnSpc>
-                <a:spcPct val="110000"/>
-              </a:lnSpc>
-              <a:spcAft>
-                <a:spcPts val="400"/>
-              </a:spcAft>
-            </a:pPr>
-            <a:r>
-              <a:rPr sz="1200" b="0">
-                <a:solidFill>
-                  <a:srgbClr val="1C1F2E"/>
-                </a:solidFill>
-                <a:latin typeface="Segoe UI"/>
-              </a:rPr>
-              <a:t>Restore selector app.kubernetes.io/name: devtrack-backend</a:t>
-            </a:r>
-          </a:p>
-        </p:txBody>
-      </p:sp>
-      <p:sp>
-        <p:nvSpPr>
-          <p:cNvPr id="30" name="TextBox 29"/>
-          <p:cNvSpPr txBox="1"/>
-          <p:nvPr/>
-        </p:nvSpPr>
-        <p:spPr>
-          <a:xfrm>
-            <a:off x="548640" y="5989320"/>
-            <a:ext cx="10972800" cy="274320"/>
-          </a:xfrm>
-          <a:prstGeom prst="rect">
-            <a:avLst/>
-          </a:prstGeom>
-          <a:noFill/>
-        </p:spPr>
-        <p:txBody>
-          <a:bodyPr wrap="square" anchor="t" lIns="18288" rIns="18288" tIns="18288" bIns="18288">
-            <a:spAutoFit/>
-          </a:bodyPr>
-          <a:lstStyle/>
-          <a:p>
-            <a:pPr algn="l">
-              <a:lnSpc>
-                <a:spcPct val="110000"/>
-              </a:lnSpc>
-              <a:spcAft>
-                <a:spcPts val="400"/>
-              </a:spcAft>
-            </a:pPr>
-            <a:r>
-              <a:rPr sz="1100" b="0">
-                <a:solidFill>
-                  <a:srgbClr val="6B7086"/>
-                </a:solidFill>
-                <a:latin typeface="Segoe UI"/>
-              </a:rPr>
-              <a:t>Readiness probe bonus: stop PostgreSQL and /ready returns 503, so Kubernetes stops routing traffic to that Pod.</a:t>
-            </a:r>
-          </a:p>
-        </p:txBody>
-      </p:sp>
+        </p:spPr>
+      </p:pic>
+      <p:pic>
+        <p:nvPicPr>
+          <p:cNvPr id="21" name="Picture 20" descr="M9-prometheus-query.png"/>
+          <p:cNvPicPr>
+            <a:picLocks noChangeAspect="1"/>
+          </p:cNvPicPr>
+          <p:nvPr/>
+        </p:nvPicPr>
+        <p:blipFill>
+          <a:blip r:embed="rId4"/>
+          <a:srcRect b="16620"/>
+          <a:stretch>
+            <a:fillRect/>
+          </a:stretch>
+        </p:blipFill>
+        <p:spPr>
+          <a:xfrm>
+            <a:off x="8412480" y="4572000"/>
+            <a:ext cx="3246120" cy="1691640"/>
+          </a:xfrm>
+          <a:prstGeom prst="rect">
+            <a:avLst/>
+          </a:prstGeom>
+          <a:ln w="12700">
+            <a:solidFill>
+              <a:srgbClr val="E4E6EF"/>
+            </a:solidFill>
+          </a:ln>
+        </p:spPr>
+      </p:pic>
     </p:spTree>
   </p:cSld>
   <p:clrMapOvr>
@@ -7080,7 +6506,7 @@
                 </a:solidFill>
                 <a:latin typeface="Segoe UI"/>
               </a:rPr>
-              <a:t>12 • VERIFICATION</a:t>
+              <a:t>12 • TROUBLESHOOTING &amp; RESILIENCE</a:t>
             </a:r>
           </a:p>
         </p:txBody>
@@ -7122,7 +6548,7 @@
                 </a:solidFill>
                 <a:latin typeface="Segoe UI"/>
               </a:rPr>
-              <a:t>Evidence captured so far</a:t>
+              <a:t>Diagnose from evidence, then fix the cause</a:t>
             </a:r>
           </a:p>
         </p:txBody>
@@ -7164,7 +6590,7 @@
                 </a:solidFill>
                 <a:latin typeface="Segoe UI"/>
               </a:rPr>
-              <a:t>Local results below were produced on 16 October 2026; cloud evidence is added after the AWS deployment.</a:t>
+              <a:t>Both drills were executed on the cluster — the terminal evidence is on the next slide.</a:t>
             </a:r>
           </a:p>
         </p:txBody>
@@ -7248,21 +6674,113 @@
                 </a:solidFill>
                 <a:latin typeface="Segoe UI"/>
               </a:rPr>
-              <a:t>13 / 15</a:t>
-            </a:r>
-          </a:p>
-        </p:txBody>
-      </p:sp>
-      <p:sp>
-        <p:nvSpPr>
-          <p:cNvPr id="8" name="TextBox 7"/>
+              <a:t>13 / 17</a:t>
+            </a:r>
+          </a:p>
+        </p:txBody>
+      </p:sp>
+      <p:sp>
+        <p:nvSpPr>
+          <p:cNvPr id="8" name="Rounded Rectangle 7"/>
+          <p:cNvSpPr/>
+          <p:nvPr/>
+        </p:nvSpPr>
+        <p:spPr>
+          <a:xfrm>
+            <a:off x="548640" y="1737360"/>
+            <a:ext cx="5440680" cy="4069080"/>
+          </a:xfrm>
+          <a:prstGeom prst="roundRect">
+            <a:avLst>
+              <a:gd name="adj" fmla="val 8000"/>
+            </a:avLst>
+          </a:prstGeom>
+          <a:solidFill>
+            <a:srgbClr val="FFFFFF"/>
+          </a:solidFill>
+          <a:ln w="12700">
+            <a:solidFill>
+              <a:srgbClr val="E4E6EF"/>
+            </a:solidFill>
+          </a:ln>
+          <a:effectLst/>
+        </p:spPr>
+        <p:style>
+          <a:lnRef idx="1">
+            <a:schemeClr val="accent1"/>
+          </a:lnRef>
+          <a:fillRef idx="3">
+            <a:schemeClr val="accent1"/>
+          </a:fillRef>
+          <a:effectRef idx="2">
+            <a:schemeClr val="accent1"/>
+          </a:effectRef>
+          <a:fontRef idx="minor">
+            <a:schemeClr val="lt1"/>
+          </a:fontRef>
+        </p:style>
+        <p:txBody>
+          <a:bodyPr rtlCol="0" anchor="ctr"/>
+          <a:lstStyle/>
+          <a:p>
+            <a:pPr algn="ctr"/>
+          </a:p>
+        </p:txBody>
+      </p:sp>
+      <p:sp>
+        <p:nvSpPr>
+          <p:cNvPr id="9" name="Rectangle 8"/>
+          <p:cNvSpPr/>
+          <p:nvPr/>
+        </p:nvSpPr>
+        <p:spPr>
+          <a:xfrm>
+            <a:off x="548640" y="1737360"/>
+            <a:ext cx="5440680" cy="73152"/>
+          </a:xfrm>
+          <a:prstGeom prst="rect">
+            <a:avLst/>
+          </a:prstGeom>
+          <a:solidFill>
+            <a:srgbClr val="EF4444"/>
+          </a:solidFill>
+          <a:ln>
+            <a:noFill/>
+          </a:ln>
+          <a:effectLst/>
+        </p:spPr>
+        <p:style>
+          <a:lnRef idx="1">
+            <a:schemeClr val="accent1"/>
+          </a:lnRef>
+          <a:fillRef idx="3">
+            <a:schemeClr val="accent1"/>
+          </a:fillRef>
+          <a:effectRef idx="2">
+            <a:schemeClr val="accent1"/>
+          </a:effectRef>
+          <a:fontRef idx="minor">
+            <a:schemeClr val="lt1"/>
+          </a:fontRef>
+        </p:style>
+        <p:txBody>
+          <a:bodyPr rtlCol="0" anchor="ctr"/>
+          <a:lstStyle/>
+          <a:p>
+            <a:pPr algn="ctr"/>
+          </a:p>
+        </p:txBody>
+      </p:sp>
+      <p:sp>
+        <p:nvSpPr>
+          <p:cNvPr id="10" name="TextBox 9"/>
           <p:cNvSpPr txBox="1"/>
           <p:nvPr/>
         </p:nvSpPr>
         <p:spPr>
           <a:xfrm>
-            <a:off x="548640" y="1737360"/>
-            <a:ext cx="5486400" cy="365760"/>
+            <a:off x="822959" y="1965960"/>
+            <a:ext cx="4937760" cy="365760"/>
           </a:xfrm>
           <a:prstGeom prst="rect">
             <a:avLst/>
@@ -7284,27 +6802,27 @@
               </a:spcAft>
             </a:pPr>
             <a:r>
-              <a:rPr sz="1600" b="1">
-                <a:solidFill>
-                  <a:srgbClr val="10B981"/>
-                </a:solidFill>
-                <a:latin typeface="Segoe UI"/>
-              </a:rPr>
-              <a:t>Verified locally</a:t>
-            </a:r>
-          </a:p>
-        </p:txBody>
-      </p:sp>
-      <p:sp>
-        <p:nvSpPr>
-          <p:cNvPr id="9" name="Rounded Rectangle 8"/>
+              <a:rPr sz="1700" b="1">
+                <a:solidFill>
+                  <a:srgbClr val="1C1F2E"/>
+                </a:solidFill>
+                <a:latin typeface="Segoe UI"/>
+              </a:rPr>
+              <a:t>Drill 1 • ImagePullBackOff</a:t>
+            </a:r>
+          </a:p>
+        </p:txBody>
+      </p:sp>
+      <p:sp>
+        <p:nvSpPr>
+          <p:cNvPr id="11" name="Rounded Rectangle 10"/>
           <p:cNvSpPr/>
           <p:nvPr/>
         </p:nvSpPr>
         <p:spPr>
           <a:xfrm>
-            <a:off x="548640" y="2240279"/>
-            <a:ext cx="329184" cy="329184"/>
+            <a:off x="822959" y="2560320"/>
+            <a:ext cx="1097280" cy="310896"/>
           </a:xfrm>
           <a:prstGeom prst="roundRect">
             <a:avLst>
@@ -7312,7 +6830,7 @@
             </a:avLst>
           </a:prstGeom>
           <a:solidFill>
-            <a:srgbClr val="D1FAE5"/>
+            <a:srgbClr val="F4F5FB"/>
           </a:solidFill>
           <a:ln>
             <a:noFill/>
@@ -7339,27 +6857,27 @@
           <a:p>
             <a:pPr algn="ctr"/>
             <a:r>
-              <a:rPr sz="1200" b="1">
-                <a:solidFill>
-                  <a:srgbClr val="10B981"/>
-                </a:solidFill>
-                <a:latin typeface="Segoe UI"/>
-              </a:rPr>
-              <a:t>✓</a:t>
-            </a:r>
-          </a:p>
-        </p:txBody>
-      </p:sp>
-      <p:sp>
-        <p:nvSpPr>
-          <p:cNvPr id="10" name="TextBox 9"/>
+              <a:rPr sz="1100" b="1">
+                <a:solidFill>
+                  <a:srgbClr val="EF4444"/>
+                </a:solidFill>
+                <a:latin typeface="Segoe UI"/>
+              </a:rPr>
+              <a:t>Inject</a:t>
+            </a:r>
+          </a:p>
+        </p:txBody>
+      </p:sp>
+      <p:sp>
+        <p:nvSpPr>
+          <p:cNvPr id="12" name="TextBox 11"/>
           <p:cNvSpPr txBox="1"/>
           <p:nvPr/>
         </p:nvSpPr>
         <p:spPr>
           <a:xfrm>
-            <a:off x="1005840" y="2194560"/>
-            <a:ext cx="4937760" cy="731520"/>
+            <a:off x="2103120" y="2542032"/>
+            <a:ext cx="3657600" cy="822960"/>
           </a:xfrm>
           <a:prstGeom prst="rect">
             <a:avLst/>
@@ -7374,53 +6892,131 @@
           <a:p>
             <a:pPr algn="l">
               <a:lnSpc>
-                <a:spcPct val="100000"/>
+                <a:spcPct val="110000"/>
               </a:lnSpc>
               <a:spcAft>
                 <a:spcPts val="400"/>
               </a:spcAft>
             </a:pPr>
             <a:r>
-              <a:rPr sz="1300" b="1">
+              <a:rPr sz="1200" b="0">
                 <a:solidFill>
                   <a:srgbClr val="1C1F2E"/>
                 </a:solidFill>
                 <a:latin typeface="Segoe UI"/>
               </a:rPr>
-              <a:t>Application</a:t>
-            </a:r>
-          </a:p>
+              <a:t>Start a pod whose image tag does not exist in GHCR.</a:t>
+            </a:r>
+          </a:p>
+        </p:txBody>
+      </p:sp>
+      <p:sp>
+        <p:nvSpPr>
+          <p:cNvPr id="13" name="Rounded Rectangle 12"/>
+          <p:cNvSpPr/>
+          <p:nvPr/>
+        </p:nvSpPr>
+        <p:spPr>
+          <a:xfrm>
+            <a:off x="822959" y="3364991"/>
+            <a:ext cx="1097280" cy="310896"/>
+          </a:xfrm>
+          <a:prstGeom prst="roundRect">
+            <a:avLst>
+              <a:gd name="adj" fmla="val 50000"/>
+            </a:avLst>
+          </a:prstGeom>
+          <a:solidFill>
+            <a:srgbClr val="F4F5FB"/>
+          </a:solidFill>
+          <a:ln>
+            <a:noFill/>
+          </a:ln>
+          <a:effectLst/>
+        </p:spPr>
+        <p:style>
+          <a:lnRef idx="1">
+            <a:schemeClr val="accent1"/>
+          </a:lnRef>
+          <a:fillRef idx="3">
+            <a:schemeClr val="accent1"/>
+          </a:fillRef>
+          <a:effectRef idx="2">
+            <a:schemeClr val="accent1"/>
+          </a:effectRef>
+          <a:fontRef idx="minor">
+            <a:schemeClr val="lt1"/>
+          </a:fontRef>
+        </p:style>
+        <p:txBody>
+          <a:bodyPr rtlCol="0" anchor="ctr" wrap="square" lIns="73152" rIns="73152"/>
+          <a:lstStyle/>
+          <a:p>
+            <a:pPr algn="ctr"/>
+            <a:r>
+              <a:rPr sz="1100" b="1">
+                <a:solidFill>
+                  <a:srgbClr val="EF4444"/>
+                </a:solidFill>
+                <a:latin typeface="Segoe UI"/>
+              </a:rPr>
+              <a:t>Observe</a:t>
+            </a:r>
+          </a:p>
+        </p:txBody>
+      </p:sp>
+      <p:sp>
+        <p:nvSpPr>
+          <p:cNvPr id="14" name="TextBox 13"/>
+          <p:cNvSpPr txBox="1"/>
+          <p:nvPr/>
+        </p:nvSpPr>
+        <p:spPr>
+          <a:xfrm>
+            <a:off x="2103120" y="3346703"/>
+            <a:ext cx="3657600" cy="822960"/>
+          </a:xfrm>
+          <a:prstGeom prst="rect">
+            <a:avLst/>
+          </a:prstGeom>
+          <a:noFill/>
+        </p:spPr>
+        <p:txBody>
+          <a:bodyPr wrap="square" anchor="t" lIns="18288" rIns="18288" tIns="18288" bIns="18288">
+            <a:spAutoFit/>
+          </a:bodyPr>
+          <a:lstStyle/>
           <a:p>
             <a:pPr algn="l">
               <a:lnSpc>
-                <a:spcPct val="100000"/>
+                <a:spcPct val="110000"/>
               </a:lnSpc>
               <a:spcAft>
                 <a:spcPts val="400"/>
               </a:spcAft>
             </a:pPr>
             <a:r>
-              <a:rPr sz="1100" b="0">
-                <a:solidFill>
-                  <a:srgbClr val="6B7086"/>
-                </a:solidFill>
-                <a:latin typeface="Segoe UI"/>
-              </a:rPr>
-              <a:t>Todo CRUD, filters, stats and edit flow work through the Nginx /api proxy</a:t>
-            </a:r>
-          </a:p>
-        </p:txBody>
-      </p:sp>
-      <p:sp>
-        <p:nvSpPr>
-          <p:cNvPr id="11" name="Rounded Rectangle 10"/>
+              <a:rPr sz="1200" b="0">
+                <a:solidFill>
+                  <a:srgbClr val="1C1F2E"/>
+                </a:solidFill>
+                <a:latin typeface="Segoe UI"/>
+              </a:rPr>
+              <a:t>kubectl get pod → ErrImagePull / ImagePullBackOff</a:t>
+            </a:r>
+          </a:p>
+        </p:txBody>
+      </p:sp>
+      <p:sp>
+        <p:nvSpPr>
+          <p:cNvPr id="15" name="Rounded Rectangle 14"/>
           <p:cNvSpPr/>
           <p:nvPr/>
         </p:nvSpPr>
         <p:spPr>
           <a:xfrm>
-            <a:off x="548640" y="3026663"/>
-            <a:ext cx="329184" cy="329184"/>
+            <a:off x="822959" y="4169663"/>
+            <a:ext cx="1097280" cy="310896"/>
           </a:xfrm>
           <a:prstGeom prst="roundRect">
             <a:avLst>
@@ -7428,7 +7024,7 @@
             </a:avLst>
           </a:prstGeom>
           <a:solidFill>
-            <a:srgbClr val="D1FAE5"/>
+            <a:srgbClr val="F4F5FB"/>
           </a:solidFill>
           <a:ln>
             <a:noFill/>
@@ -7455,27 +7051,27 @@
           <a:p>
             <a:pPr algn="ctr"/>
             <a:r>
-              <a:rPr sz="1200" b="1">
-                <a:solidFill>
-                  <a:srgbClr val="10B981"/>
-                </a:solidFill>
-                <a:latin typeface="Segoe UI"/>
-              </a:rPr>
-              <a:t>✓</a:t>
-            </a:r>
-          </a:p>
-        </p:txBody>
-      </p:sp>
-      <p:sp>
-        <p:nvSpPr>
-          <p:cNvPr id="12" name="TextBox 11"/>
+              <a:rPr sz="1100" b="1">
+                <a:solidFill>
+                  <a:srgbClr val="EF4444"/>
+                </a:solidFill>
+                <a:latin typeface="Segoe UI"/>
+              </a:rPr>
+              <a:t>Diagnose</a:t>
+            </a:r>
+          </a:p>
+        </p:txBody>
+      </p:sp>
+      <p:sp>
+        <p:nvSpPr>
+          <p:cNvPr id="16" name="TextBox 15"/>
           <p:cNvSpPr txBox="1"/>
           <p:nvPr/>
         </p:nvSpPr>
         <p:spPr>
           <a:xfrm>
-            <a:off x="1005840" y="2980944"/>
-            <a:ext cx="4937760" cy="731520"/>
+            <a:off x="2103120" y="4151376"/>
+            <a:ext cx="3657600" cy="822960"/>
           </a:xfrm>
           <a:prstGeom prst="rect">
             <a:avLst/>
@@ -7490,61 +7086,185 @@
           <a:p>
             <a:pPr algn="l">
               <a:lnSpc>
-                <a:spcPct val="100000"/>
+                <a:spcPct val="110000"/>
               </a:lnSpc>
               <a:spcAft>
                 <a:spcPts val="400"/>
               </a:spcAft>
             </a:pPr>
             <a:r>
-              <a:rPr sz="1300" b="1">
+              <a:rPr sz="1200" b="0">
                 <a:solidFill>
                   <a:srgbClr val="1C1F2E"/>
                 </a:solidFill>
                 <a:latin typeface="Segoe UI"/>
               </a:rPr>
-              <a:t>Tests</a:t>
-            </a:r>
-          </a:p>
+              <a:t>kubectl describe pod → 'Failed to pull image … NotFound'</a:t>
+            </a:r>
+          </a:p>
+        </p:txBody>
+      </p:sp>
+      <p:sp>
+        <p:nvSpPr>
+          <p:cNvPr id="17" name="Rounded Rectangle 16"/>
+          <p:cNvSpPr/>
+          <p:nvPr/>
+        </p:nvSpPr>
+        <p:spPr>
+          <a:xfrm>
+            <a:off x="822959" y="4974336"/>
+            <a:ext cx="1097280" cy="310896"/>
+          </a:xfrm>
+          <a:prstGeom prst="roundRect">
+            <a:avLst>
+              <a:gd name="adj" fmla="val 50000"/>
+            </a:avLst>
+          </a:prstGeom>
+          <a:solidFill>
+            <a:srgbClr val="F4F5FB"/>
+          </a:solidFill>
+          <a:ln>
+            <a:noFill/>
+          </a:ln>
+          <a:effectLst/>
+        </p:spPr>
+        <p:style>
+          <a:lnRef idx="1">
+            <a:schemeClr val="accent1"/>
+          </a:lnRef>
+          <a:fillRef idx="3">
+            <a:schemeClr val="accent1"/>
+          </a:fillRef>
+          <a:effectRef idx="2">
+            <a:schemeClr val="accent1"/>
+          </a:effectRef>
+          <a:fontRef idx="minor">
+            <a:schemeClr val="lt1"/>
+          </a:fontRef>
+        </p:style>
+        <p:txBody>
+          <a:bodyPr rtlCol="0" anchor="ctr" wrap="square" lIns="73152" rIns="73152"/>
+          <a:lstStyle/>
+          <a:p>
+            <a:pPr algn="ctr"/>
+            <a:r>
+              <a:rPr sz="1100" b="1">
+                <a:solidFill>
+                  <a:srgbClr val="EF4444"/>
+                </a:solidFill>
+                <a:latin typeface="Segoe UI"/>
+              </a:rPr>
+              <a:t>Fix</a:t>
+            </a:r>
+          </a:p>
+        </p:txBody>
+      </p:sp>
+      <p:sp>
+        <p:nvSpPr>
+          <p:cNvPr id="18" name="TextBox 17"/>
+          <p:cNvSpPr txBox="1"/>
+          <p:nvPr/>
+        </p:nvSpPr>
+        <p:spPr>
+          <a:xfrm>
+            <a:off x="2103120" y="4956048"/>
+            <a:ext cx="3657600" cy="822960"/>
+          </a:xfrm>
+          <a:prstGeom prst="rect">
+            <a:avLst/>
+          </a:prstGeom>
+          <a:noFill/>
+        </p:spPr>
+        <p:txBody>
+          <a:bodyPr wrap="square" anchor="t" lIns="18288" rIns="18288" tIns="18288" bIns="18288">
+            <a:spAutoFit/>
+          </a:bodyPr>
+          <a:lstStyle/>
           <a:p>
             <a:pPr algn="l">
               <a:lnSpc>
-                <a:spcPct val="100000"/>
+                <a:spcPct val="110000"/>
               </a:lnSpc>
               <a:spcAft>
                 <a:spcPts val="400"/>
               </a:spcAft>
             </a:pPr>
             <a:r>
-              <a:rPr sz="1100" b="0">
-                <a:solidFill>
-                  <a:srgbClr val="6B7086"/>
-                </a:solidFill>
-                <a:latin typeface="Segoe UI"/>
-              </a:rPr>
-              <a:t>28 / 28 pytest tests pass; Alembic migration matches the models (alembic check)</a:t>
-            </a:r>
-          </a:p>
-        </p:txBody>
-      </p:sp>
-      <p:sp>
-        <p:nvSpPr>
-          <p:cNvPr id="13" name="Rounded Rectangle 12"/>
+              <a:rPr sz="1200" b="0">
+                <a:solidFill>
+                  <a:srgbClr val="1C1F2E"/>
+                </a:solidFill>
+                <a:latin typeface="Segoe UI"/>
+              </a:rPr>
+              <a:t>Recreate it with a real commit-SHA tag published by CI</a:t>
+            </a:r>
+          </a:p>
+        </p:txBody>
+      </p:sp>
+      <p:sp>
+        <p:nvSpPr>
+          <p:cNvPr id="19" name="Rounded Rectangle 18"/>
           <p:cNvSpPr/>
           <p:nvPr/>
         </p:nvSpPr>
         <p:spPr>
           <a:xfrm>
-            <a:off x="548640" y="3813048"/>
-            <a:ext cx="329184" cy="329184"/>
+            <a:off x="6217920" y="1737360"/>
+            <a:ext cx="5440680" cy="4069080"/>
           </a:xfrm>
           <a:prstGeom prst="roundRect">
             <a:avLst>
-              <a:gd name="adj" fmla="val 50000"/>
+              <a:gd name="adj" fmla="val 8000"/>
             </a:avLst>
           </a:prstGeom>
           <a:solidFill>
-            <a:srgbClr val="D1FAE5"/>
+            <a:srgbClr val="FFFFFF"/>
+          </a:solidFill>
+          <a:ln w="12700">
+            <a:solidFill>
+              <a:srgbClr val="E4E6EF"/>
+            </a:solidFill>
+          </a:ln>
+          <a:effectLst/>
+        </p:spPr>
+        <p:style>
+          <a:lnRef idx="1">
+            <a:schemeClr val="accent1"/>
+          </a:lnRef>
+          <a:fillRef idx="3">
+            <a:schemeClr val="accent1"/>
+          </a:fillRef>
+          <a:effectRef idx="2">
+            <a:schemeClr val="accent1"/>
+          </a:effectRef>
+          <a:fontRef idx="minor">
+            <a:schemeClr val="lt1"/>
+          </a:fontRef>
+        </p:style>
+        <p:txBody>
+          <a:bodyPr rtlCol="0" anchor="ctr"/>
+          <a:lstStyle/>
+          <a:p>
+            <a:pPr algn="ctr"/>
+          </a:p>
+        </p:txBody>
+      </p:sp>
+      <p:sp>
+        <p:nvSpPr>
+          <p:cNvPr id="20" name="Rectangle 19"/>
+          <p:cNvSpPr/>
+          <p:nvPr/>
+        </p:nvSpPr>
+        <p:spPr>
+          <a:xfrm>
+            <a:off x="6217920" y="1737360"/>
+            <a:ext cx="5440680" cy="73152"/>
+          </a:xfrm>
+          <a:prstGeom prst="rect">
+            <a:avLst/>
+          </a:prstGeom>
+          <a:solidFill>
+            <a:srgbClr val="F59E0B"/>
           </a:solidFill>
           <a:ln>
             <a:noFill/>
@@ -7566,32 +7286,23 @@
           </a:fontRef>
         </p:style>
         <p:txBody>
-          <a:bodyPr rtlCol="0" anchor="ctr" wrap="square" lIns="73152" rIns="73152"/>
+          <a:bodyPr rtlCol="0" anchor="ctr"/>
           <a:lstStyle/>
           <a:p>
             <a:pPr algn="ctr"/>
-            <a:r>
-              <a:rPr sz="1200" b="1">
-                <a:solidFill>
-                  <a:srgbClr val="10B981"/>
-                </a:solidFill>
-                <a:latin typeface="Segoe UI"/>
-              </a:rPr>
-              <a:t>✓</a:t>
-            </a:r>
-          </a:p>
-        </p:txBody>
-      </p:sp>
-      <p:sp>
-        <p:nvSpPr>
-          <p:cNvPr id="14" name="TextBox 13"/>
+          </a:p>
+        </p:txBody>
+      </p:sp>
+      <p:sp>
+        <p:nvSpPr>
+          <p:cNvPr id="21" name="TextBox 20"/>
           <p:cNvSpPr txBox="1"/>
           <p:nvPr/>
         </p:nvSpPr>
         <p:spPr>
           <a:xfrm>
-            <a:off x="1005840" y="3767328"/>
-            <a:ext cx="4937760" cy="731520"/>
+            <a:off x="6492240" y="1965960"/>
+            <a:ext cx="4937760" cy="365760"/>
           </a:xfrm>
           <a:prstGeom prst="rect">
             <a:avLst/>
@@ -7606,53 +7317,131 @@
           <a:p>
             <a:pPr algn="l">
               <a:lnSpc>
-                <a:spcPct val="100000"/>
+                <a:spcPct val="110000"/>
               </a:lnSpc>
               <a:spcAft>
                 <a:spcPts val="400"/>
               </a:spcAft>
             </a:pPr>
             <a:r>
-              <a:rPr sz="1300" b="1">
+              <a:rPr sz="1700" b="1">
                 <a:solidFill>
                   <a:srgbClr val="1C1F2E"/>
                 </a:solidFill>
                 <a:latin typeface="Segoe UI"/>
               </a:rPr>
-              <a:t>Containers</a:t>
-            </a:r>
-          </a:p>
+              <a:t>Drill 2 • Service with no endpoints</a:t>
+            </a:r>
+          </a:p>
+        </p:txBody>
+      </p:sp>
+      <p:sp>
+        <p:nvSpPr>
+          <p:cNvPr id="22" name="Rounded Rectangle 21"/>
+          <p:cNvSpPr/>
+          <p:nvPr/>
+        </p:nvSpPr>
+        <p:spPr>
+          <a:xfrm>
+            <a:off x="6492240" y="2560320"/>
+            <a:ext cx="1097280" cy="310896"/>
+          </a:xfrm>
+          <a:prstGeom prst="roundRect">
+            <a:avLst>
+              <a:gd name="adj" fmla="val 50000"/>
+            </a:avLst>
+          </a:prstGeom>
+          <a:solidFill>
+            <a:srgbClr val="F4F5FB"/>
+          </a:solidFill>
+          <a:ln>
+            <a:noFill/>
+          </a:ln>
+          <a:effectLst/>
+        </p:spPr>
+        <p:style>
+          <a:lnRef idx="1">
+            <a:schemeClr val="accent1"/>
+          </a:lnRef>
+          <a:fillRef idx="3">
+            <a:schemeClr val="accent1"/>
+          </a:fillRef>
+          <a:effectRef idx="2">
+            <a:schemeClr val="accent1"/>
+          </a:effectRef>
+          <a:fontRef idx="minor">
+            <a:schemeClr val="lt1"/>
+          </a:fontRef>
+        </p:style>
+        <p:txBody>
+          <a:bodyPr rtlCol="0" anchor="ctr" wrap="square" lIns="73152" rIns="73152"/>
+          <a:lstStyle/>
+          <a:p>
+            <a:pPr algn="ctr"/>
+            <a:r>
+              <a:rPr sz="1100" b="1">
+                <a:solidFill>
+                  <a:srgbClr val="F59E0B"/>
+                </a:solidFill>
+                <a:latin typeface="Segoe UI"/>
+              </a:rPr>
+              <a:t>Inject</a:t>
+            </a:r>
+          </a:p>
+        </p:txBody>
+      </p:sp>
+      <p:sp>
+        <p:nvSpPr>
+          <p:cNvPr id="23" name="TextBox 22"/>
+          <p:cNvSpPr txBox="1"/>
+          <p:nvPr/>
+        </p:nvSpPr>
+        <p:spPr>
+          <a:xfrm>
+            <a:off x="7772400" y="2542032"/>
+            <a:ext cx="3657600" cy="822960"/>
+          </a:xfrm>
+          <a:prstGeom prst="rect">
+            <a:avLst/>
+          </a:prstGeom>
+          <a:noFill/>
+        </p:spPr>
+        <p:txBody>
+          <a:bodyPr wrap="square" anchor="t" lIns="18288" rIns="18288" tIns="18288" bIns="18288">
+            <a:spAutoFit/>
+          </a:bodyPr>
+          <a:lstStyle/>
           <a:p>
             <a:pPr algn="l">
               <a:lnSpc>
-                <a:spcPct val="100000"/>
+                <a:spcPct val="110000"/>
               </a:lnSpc>
               <a:spcAft>
                 <a:spcPts val="400"/>
               </a:spcAft>
             </a:pPr>
             <a:r>
-              <a:rPr sz="1100" b="0">
-                <a:solidFill>
-                  <a:srgbClr val="6B7086"/>
-                </a:solidFill>
-                <a:latin typeface="Segoe UI"/>
-              </a:rPr>
-              <a:t>3-service Compose stack healthy; migration applied on start</a:t>
-            </a:r>
-          </a:p>
-        </p:txBody>
-      </p:sp>
-      <p:sp>
-        <p:nvSpPr>
-          <p:cNvPr id="15" name="Rounded Rectangle 14"/>
+              <a:rPr sz="1200" b="0">
+                <a:solidFill>
+                  <a:srgbClr val="1C1F2E"/>
+                </a:solidFill>
+                <a:latin typeface="Segoe UI"/>
+              </a:rPr>
+              <a:t>Service selector typo: app=lab-wbe instead of lab-web.</a:t>
+            </a:r>
+          </a:p>
+        </p:txBody>
+      </p:sp>
+      <p:sp>
+        <p:nvSpPr>
+          <p:cNvPr id="24" name="Rounded Rectangle 23"/>
           <p:cNvSpPr/>
           <p:nvPr/>
         </p:nvSpPr>
         <p:spPr>
           <a:xfrm>
-            <a:off x="548640" y="4599432"/>
-            <a:ext cx="329184" cy="329184"/>
+            <a:off x="6492240" y="3364991"/>
+            <a:ext cx="1097280" cy="310896"/>
           </a:xfrm>
           <a:prstGeom prst="roundRect">
             <a:avLst>
@@ -7660,7 +7449,7 @@
             </a:avLst>
           </a:prstGeom>
           <a:solidFill>
-            <a:srgbClr val="D1FAE5"/>
+            <a:srgbClr val="F4F5FB"/>
           </a:solidFill>
           <a:ln>
             <a:noFill/>
@@ -7687,27 +7476,27 @@
           <a:p>
             <a:pPr algn="ctr"/>
             <a:r>
-              <a:rPr sz="1200" b="1">
-                <a:solidFill>
-                  <a:srgbClr val="10B981"/>
-                </a:solidFill>
-                <a:latin typeface="Segoe UI"/>
-              </a:rPr>
-              <a:t>✓</a:t>
-            </a:r>
-          </a:p>
-        </p:txBody>
-      </p:sp>
-      <p:sp>
-        <p:nvSpPr>
-          <p:cNvPr id="16" name="TextBox 15"/>
+              <a:rPr sz="1100" b="1">
+                <a:solidFill>
+                  <a:srgbClr val="F59E0B"/>
+                </a:solidFill>
+                <a:latin typeface="Segoe UI"/>
+              </a:rPr>
+              <a:t>Observe</a:t>
+            </a:r>
+          </a:p>
+        </p:txBody>
+      </p:sp>
+      <p:sp>
+        <p:nvSpPr>
+          <p:cNvPr id="25" name="TextBox 24"/>
           <p:cNvSpPr txBox="1"/>
           <p:nvPr/>
         </p:nvSpPr>
         <p:spPr>
           <a:xfrm>
-            <a:off x="1005840" y="4553712"/>
-            <a:ext cx="4937760" cy="731520"/>
+            <a:off x="7772400" y="3346703"/>
+            <a:ext cx="3657600" cy="822960"/>
           </a:xfrm>
           <a:prstGeom prst="rect">
             <a:avLst/>
@@ -7722,53 +7511,131 @@
           <a:p>
             <a:pPr algn="l">
               <a:lnSpc>
-                <a:spcPct val="100000"/>
+                <a:spcPct val="110000"/>
               </a:lnSpc>
               <a:spcAft>
                 <a:spcPts val="400"/>
               </a:spcAft>
             </a:pPr>
             <a:r>
-              <a:rPr sz="1300" b="1">
+              <a:rPr sz="1200" b="0">
                 <a:solidFill>
                   <a:srgbClr val="1C1F2E"/>
                 </a:solidFill>
                 <a:latin typeface="Segoe UI"/>
               </a:rPr>
-              <a:t>Security</a:t>
-            </a:r>
-          </a:p>
+              <a:t>curl http://lab-web fails; endpoints show &lt;none&gt;</a:t>
+            </a:r>
+          </a:p>
+        </p:txBody>
+      </p:sp>
+      <p:sp>
+        <p:nvSpPr>
+          <p:cNvPr id="26" name="Rounded Rectangle 25"/>
+          <p:cNvSpPr/>
+          <p:nvPr/>
+        </p:nvSpPr>
+        <p:spPr>
+          <a:xfrm>
+            <a:off x="6492240" y="4169663"/>
+            <a:ext cx="1097280" cy="310896"/>
+          </a:xfrm>
+          <a:prstGeom prst="roundRect">
+            <a:avLst>
+              <a:gd name="adj" fmla="val 50000"/>
+            </a:avLst>
+          </a:prstGeom>
+          <a:solidFill>
+            <a:srgbClr val="F4F5FB"/>
+          </a:solidFill>
+          <a:ln>
+            <a:noFill/>
+          </a:ln>
+          <a:effectLst/>
+        </p:spPr>
+        <p:style>
+          <a:lnRef idx="1">
+            <a:schemeClr val="accent1"/>
+          </a:lnRef>
+          <a:fillRef idx="3">
+            <a:schemeClr val="accent1"/>
+          </a:fillRef>
+          <a:effectRef idx="2">
+            <a:schemeClr val="accent1"/>
+          </a:effectRef>
+          <a:fontRef idx="minor">
+            <a:schemeClr val="lt1"/>
+          </a:fontRef>
+        </p:style>
+        <p:txBody>
+          <a:bodyPr rtlCol="0" anchor="ctr" wrap="square" lIns="73152" rIns="73152"/>
+          <a:lstStyle/>
+          <a:p>
+            <a:pPr algn="ctr"/>
+            <a:r>
+              <a:rPr sz="1100" b="1">
+                <a:solidFill>
+                  <a:srgbClr val="F59E0B"/>
+                </a:solidFill>
+                <a:latin typeface="Segoe UI"/>
+              </a:rPr>
+              <a:t>Diagnose</a:t>
+            </a:r>
+          </a:p>
+        </p:txBody>
+      </p:sp>
+      <p:sp>
+        <p:nvSpPr>
+          <p:cNvPr id="27" name="TextBox 26"/>
+          <p:cNvSpPr txBox="1"/>
+          <p:nvPr/>
+        </p:nvSpPr>
+        <p:spPr>
+          <a:xfrm>
+            <a:off x="7772400" y="4151376"/>
+            <a:ext cx="3657600" cy="822960"/>
+          </a:xfrm>
+          <a:prstGeom prst="rect">
+            <a:avLst/>
+          </a:prstGeom>
+          <a:noFill/>
+        </p:spPr>
+        <p:txBody>
+          <a:bodyPr wrap="square" anchor="t" lIns="18288" rIns="18288" tIns="18288" bIns="18288">
+            <a:spAutoFit/>
+          </a:bodyPr>
+          <a:lstStyle/>
           <a:p>
             <a:pPr algn="l">
               <a:lnSpc>
-                <a:spcPct val="100000"/>
+                <a:spcPct val="110000"/>
               </a:lnSpc>
               <a:spcAft>
                 <a:spcPts val="400"/>
               </a:spcAft>
             </a:pPr>
             <a:r>
-              <a:rPr sz="1100" b="0">
-                <a:solidFill>
-                  <a:srgbClr val="6B7086"/>
-                </a:solidFill>
-                <a:latin typeface="Segoe UI"/>
-              </a:rPr>
-              <a:t>Trivy: 0 HIGH / 0 CRITICAL in backend and frontend images</a:t>
-            </a:r>
-          </a:p>
-        </p:txBody>
-      </p:sp>
-      <p:sp>
-        <p:nvSpPr>
-          <p:cNvPr id="17" name="Rounded Rectangle 16"/>
+              <a:rPr sz="1200" b="0">
+                <a:solidFill>
+                  <a:srgbClr val="1C1F2E"/>
+                </a:solidFill>
+                <a:latin typeface="Segoe UI"/>
+              </a:rPr>
+              <a:t>Compare the Service selector with pod --show-labels</a:t>
+            </a:r>
+          </a:p>
+        </p:txBody>
+      </p:sp>
+      <p:sp>
+        <p:nvSpPr>
+          <p:cNvPr id="28" name="Rounded Rectangle 27"/>
           <p:cNvSpPr/>
           <p:nvPr/>
         </p:nvSpPr>
         <p:spPr>
           <a:xfrm>
-            <a:off x="548640" y="5385816"/>
-            <a:ext cx="329184" cy="329184"/>
+            <a:off x="6492240" y="4974336"/>
+            <a:ext cx="1097280" cy="310896"/>
           </a:xfrm>
           <a:prstGeom prst="roundRect">
             <a:avLst>
@@ -7776,7 +7643,7 @@
             </a:avLst>
           </a:prstGeom>
           <a:solidFill>
-            <a:srgbClr val="D1FAE5"/>
+            <a:srgbClr val="F4F5FB"/>
           </a:solidFill>
           <a:ln>
             <a:noFill/>
@@ -7803,27 +7670,27 @@
           <a:p>
             <a:pPr algn="ctr"/>
             <a:r>
-              <a:rPr sz="1200" b="1">
-                <a:solidFill>
-                  <a:srgbClr val="10B981"/>
-                </a:solidFill>
-                <a:latin typeface="Segoe UI"/>
-              </a:rPr>
-              <a:t>✓</a:t>
-            </a:r>
-          </a:p>
-        </p:txBody>
-      </p:sp>
-      <p:sp>
-        <p:nvSpPr>
-          <p:cNvPr id="18" name="TextBox 17"/>
+              <a:rPr sz="1100" b="1">
+                <a:solidFill>
+                  <a:srgbClr val="F59E0B"/>
+                </a:solidFill>
+                <a:latin typeface="Segoe UI"/>
+              </a:rPr>
+              <a:t>Fix</a:t>
+            </a:r>
+          </a:p>
+        </p:txBody>
+      </p:sp>
+      <p:sp>
+        <p:nvSpPr>
+          <p:cNvPr id="29" name="TextBox 28"/>
           <p:cNvSpPr txBox="1"/>
           <p:nvPr/>
         </p:nvSpPr>
         <p:spPr>
           <a:xfrm>
-            <a:off x="1005840" y="5340096"/>
-            <a:ext cx="4937760" cy="731520"/>
+            <a:off x="7772400" y="4956048"/>
+            <a:ext cx="3657600" cy="822960"/>
           </a:xfrm>
           <a:prstGeom prst="rect">
             <a:avLst/>
@@ -7838,26 +7705,49 @@
           <a:p>
             <a:pPr algn="l">
               <a:lnSpc>
-                <a:spcPct val="100000"/>
+                <a:spcPct val="110000"/>
               </a:lnSpc>
               <a:spcAft>
                 <a:spcPts val="400"/>
               </a:spcAft>
             </a:pPr>
             <a:r>
-              <a:rPr sz="1300" b="1">
+              <a:rPr sz="1200" b="0">
                 <a:solidFill>
                   <a:srgbClr val="1C1F2E"/>
                 </a:solidFill>
                 <a:latin typeface="Segoe UI"/>
               </a:rPr>
-              <a:t>Probes &amp; metrics</a:t>
-            </a:r>
-          </a:p>
+              <a:t>kubectl patch the selector → endpoints appear, HTTP 200</a:t>
+            </a:r>
+          </a:p>
+        </p:txBody>
+      </p:sp>
+      <p:sp>
+        <p:nvSpPr>
+          <p:cNvPr id="30" name="TextBox 29"/>
+          <p:cNvSpPr txBox="1"/>
+          <p:nvPr/>
+        </p:nvSpPr>
+        <p:spPr>
+          <a:xfrm>
+            <a:off x="548640" y="5989320"/>
+            <a:ext cx="10972800" cy="274320"/>
+          </a:xfrm>
+          <a:prstGeom prst="rect">
+            <a:avLst/>
+          </a:prstGeom>
+          <a:noFill/>
+        </p:spPr>
+        <p:txBody>
+          <a:bodyPr wrap="square" anchor="t" lIns="18288" rIns="18288" tIns="18288" bIns="18288">
+            <a:spAutoFit/>
+          </a:bodyPr>
+          <a:lstStyle/>
           <a:p>
             <a:pPr algn="l">
               <a:lnSpc>
-                <a:spcPct val="100000"/>
+                <a:spcPct val="110000"/>
               </a:lnSpc>
               <a:spcAft>
                 <a:spcPts val="400"/>
@@ -7870,40 +7760,11 @@
                 </a:solidFill>
                 <a:latin typeface="Segoe UI"/>
               </a:rPr>
-              <a:t>/health, /ready (DB check) and /metrics respond correctly</a:t>
-            </a:r>
-          </a:p>
-        </p:txBody>
-      </p:sp>
-      <p:pic>
-        <p:nvPicPr>
-          <p:cNvPr id="19" name="Picture 18" descr="M4-health-readiness-api.png"/>
-          <p:cNvPicPr>
-            <a:picLocks noChangeAspect="1"/>
-          </p:cNvPicPr>
-          <p:nvPr/>
-        </p:nvPicPr>
-        <p:blipFill>
-          <a:blip r:embed="rId2"/>
-          <a:stretch>
-            <a:fillRect/>
-          </a:stretch>
-        </p:blipFill>
-        <p:spPr>
-          <a:xfrm>
-            <a:off x="6309360" y="2299887"/>
-            <a:ext cx="5349240" cy="3401225"/>
-          </a:xfrm>
-          <a:prstGeom prst="rect">
-            <a:avLst/>
-          </a:prstGeom>
-          <a:ln w="12700">
-            <a:solidFill>
-              <a:srgbClr val="E4E6EF"/>
-            </a:solidFill>
-          </a:ln>
-        </p:spPr>
-      </p:pic>
+              <a:t>Found while drilling: Nginx crashed when the backend name was unresolvable — fixed by resolving it per request.</a:t>
+            </a:r>
+          </a:p>
+        </p:txBody>
+      </p:sp>
     </p:spTree>
   </p:cSld>
   <p:clrMapOvr>
@@ -8011,7 +7872,7 @@
                 </a:solidFill>
                 <a:latin typeface="Segoe UI"/>
               </a:rPr>
-              <a:t>13 • CONCLUSION &amp; NEXT STEPS</a:t>
+              <a:t>13 • DRILLS, EXECUTED</a:t>
             </a:r>
           </a:p>
         </p:txBody>
@@ -8053,7 +7914,7 @@
                 </a:solidFill>
                 <a:latin typeface="Segoe UI"/>
               </a:rPr>
-              <a:t>From commit to observed workload</a:t>
+              <a:t>Real output from the troubleshooting-lab namespace</a:t>
             </a:r>
           </a:p>
         </p:txBody>
@@ -8137,7 +7998,1650 @@
                 </a:solidFill>
                 <a:latin typeface="Segoe UI"/>
               </a:rPr>
-              <a:t>14 / 15</a:t>
+              <a:t>14 / 17</a:t>
+            </a:r>
+          </a:p>
+        </p:txBody>
+      </p:sp>
+      <p:pic>
+        <p:nvPicPr>
+          <p:cNvPr id="7" name="Picture 6" descr="M10-troubleshooting-imagepullbackoff.png"/>
+          <p:cNvPicPr>
+            <a:picLocks noChangeAspect="1"/>
+          </p:cNvPicPr>
+          <p:nvPr/>
+        </p:nvPicPr>
+        <p:blipFill>
+          <a:blip r:embed="rId2"/>
+          <a:stretch>
+            <a:fillRect/>
+          </a:stretch>
+        </p:blipFill>
+        <p:spPr>
+          <a:xfrm>
+            <a:off x="548640" y="2178538"/>
+            <a:ext cx="5532120" cy="3323882"/>
+          </a:xfrm>
+          <a:prstGeom prst="rect">
+            <a:avLst/>
+          </a:prstGeom>
+          <a:ln w="12700">
+            <a:solidFill>
+              <a:srgbClr val="E4E6EF"/>
+            </a:solidFill>
+          </a:ln>
+        </p:spPr>
+      </p:pic>
+      <p:pic>
+        <p:nvPicPr>
+          <p:cNvPr id="8" name="Picture 7" descr="M10-troubleshooting-service-selector.png"/>
+          <p:cNvPicPr>
+            <a:picLocks noChangeAspect="1"/>
+          </p:cNvPicPr>
+          <p:nvPr/>
+        </p:nvPicPr>
+        <p:blipFill>
+          <a:blip r:embed="rId3"/>
+          <a:stretch>
+            <a:fillRect/>
+          </a:stretch>
+        </p:blipFill>
+        <p:spPr>
+          <a:xfrm>
+            <a:off x="6263640" y="2172538"/>
+            <a:ext cx="5394960" cy="3335883"/>
+          </a:xfrm>
+          <a:prstGeom prst="rect">
+            <a:avLst/>
+          </a:prstGeom>
+          <a:ln w="12700">
+            <a:solidFill>
+              <a:srgbClr val="E4E6EF"/>
+            </a:solidFill>
+          </a:ln>
+        </p:spPr>
+      </p:pic>
+    </p:spTree>
+  </p:cSld>
+  <p:clrMapOvr>
+    <a:masterClrMapping/>
+  </p:clrMapOvr>
+</p:sld>
+</file>
+
+<file path=ppt/slides/slide15.xml><?xml version="1.0" encoding="utf-8"?>
+<p:sld xmlns:a="http://schemas.openxmlformats.org/drawingml/2006/main" xmlns:p="http://schemas.openxmlformats.org/presentationml/2006/main" xmlns:r="http://schemas.openxmlformats.org/officeDocument/2006/relationships">
+  <p:cSld>
+    <p:bg>
+      <p:bgPr>
+        <a:solidFill>
+          <a:srgbClr val="F4F5FB"/>
+        </a:solidFill>
+        <a:effectLst/>
+      </p:bgPr>
+    </p:bg>
+    <p:spTree>
+      <p:nvGrpSpPr>
+        <p:cNvPr id="1" name=""/>
+        <p:cNvGrpSpPr/>
+        <p:nvPr/>
+      </p:nvGrpSpPr>
+      <p:grpSpPr/>
+      <p:sp>
+        <p:nvSpPr>
+          <p:cNvPr id="2" name="Rectangle 1"/>
+          <p:cNvSpPr/>
+          <p:nvPr/>
+        </p:nvSpPr>
+        <p:spPr>
+          <a:xfrm>
+            <a:off x="0" y="0"/>
+            <a:ext cx="109728" cy="6858000"/>
+          </a:xfrm>
+          <a:prstGeom prst="rect">
+            <a:avLst/>
+          </a:prstGeom>
+          <a:solidFill>
+            <a:srgbClr val="4F46E5"/>
+          </a:solidFill>
+          <a:ln>
+            <a:noFill/>
+          </a:ln>
+          <a:effectLst/>
+        </p:spPr>
+        <p:style>
+          <a:lnRef idx="1">
+            <a:schemeClr val="accent1"/>
+          </a:lnRef>
+          <a:fillRef idx="3">
+            <a:schemeClr val="accent1"/>
+          </a:fillRef>
+          <a:effectRef idx="2">
+            <a:schemeClr val="accent1"/>
+          </a:effectRef>
+          <a:fontRef idx="minor">
+            <a:schemeClr val="lt1"/>
+          </a:fontRef>
+        </p:style>
+        <p:txBody>
+          <a:bodyPr rtlCol="0" anchor="ctr"/>
+          <a:lstStyle/>
+          <a:p>
+            <a:pPr algn="ctr"/>
+          </a:p>
+        </p:txBody>
+      </p:sp>
+      <p:sp>
+        <p:nvSpPr>
+          <p:cNvPr id="3" name="TextBox 2"/>
+          <p:cNvSpPr txBox="1"/>
+          <p:nvPr/>
+        </p:nvSpPr>
+        <p:spPr>
+          <a:xfrm>
+            <a:off x="548640" y="347472"/>
+            <a:ext cx="8229600" cy="274320"/>
+          </a:xfrm>
+          <a:prstGeom prst="rect">
+            <a:avLst/>
+          </a:prstGeom>
+          <a:noFill/>
+        </p:spPr>
+        <p:txBody>
+          <a:bodyPr wrap="square" anchor="t" lIns="18288" rIns="18288" tIns="18288" bIns="18288">
+            <a:spAutoFit/>
+          </a:bodyPr>
+          <a:lstStyle/>
+          <a:p>
+            <a:pPr algn="l">
+              <a:lnSpc>
+                <a:spcPct val="110000"/>
+              </a:lnSpc>
+              <a:spcAft>
+                <a:spcPts val="400"/>
+              </a:spcAft>
+            </a:pPr>
+            <a:r>
+              <a:rPr sz="1100" b="1">
+                <a:solidFill>
+                  <a:srgbClr val="4F46E5"/>
+                </a:solidFill>
+                <a:latin typeface="Segoe UI"/>
+              </a:rPr>
+              <a:t>14 • VERIFICATION</a:t>
+            </a:r>
+          </a:p>
+        </p:txBody>
+      </p:sp>
+      <p:sp>
+        <p:nvSpPr>
+          <p:cNvPr id="4" name="TextBox 3"/>
+          <p:cNvSpPr txBox="1"/>
+          <p:nvPr/>
+        </p:nvSpPr>
+        <p:spPr>
+          <a:xfrm>
+            <a:off x="548640" y="603504"/>
+            <a:ext cx="11155680" cy="548640"/>
+          </a:xfrm>
+          <a:prstGeom prst="rect">
+            <a:avLst/>
+          </a:prstGeom>
+          <a:noFill/>
+        </p:spPr>
+        <p:txBody>
+          <a:bodyPr wrap="square" anchor="t" lIns="18288" rIns="18288" tIns="18288" bIns="18288">
+            <a:spAutoFit/>
+          </a:bodyPr>
+          <a:lstStyle/>
+          <a:p>
+            <a:pPr algn="l">
+              <a:lnSpc>
+                <a:spcPct val="110000"/>
+              </a:lnSpc>
+              <a:spcAft>
+                <a:spcPts val="400"/>
+              </a:spcAft>
+            </a:pPr>
+            <a:r>
+              <a:rPr sz="2800" b="1">
+                <a:solidFill>
+                  <a:srgbClr val="1C1F2E"/>
+                </a:solidFill>
+                <a:latin typeface="Segoe UI"/>
+              </a:rPr>
+              <a:t>Evidence captured on 16 October 2026</a:t>
+            </a:r>
+          </a:p>
+        </p:txBody>
+      </p:sp>
+      <p:sp>
+        <p:nvSpPr>
+          <p:cNvPr id="5" name="TextBox 4"/>
+          <p:cNvSpPr txBox="1"/>
+          <p:nvPr/>
+        </p:nvSpPr>
+        <p:spPr>
+          <a:xfrm>
+            <a:off x="548640" y="1188720"/>
+            <a:ext cx="11155680" cy="365760"/>
+          </a:xfrm>
+          <a:prstGeom prst="rect">
+            <a:avLst/>
+          </a:prstGeom>
+          <a:noFill/>
+        </p:spPr>
+        <p:txBody>
+          <a:bodyPr wrap="square" anchor="t" lIns="18288" rIns="18288" tIns="18288" bIns="18288">
+            <a:spAutoFit/>
+          </a:bodyPr>
+          <a:lstStyle/>
+          <a:p>
+            <a:pPr algn="l">
+              <a:lnSpc>
+                <a:spcPct val="110000"/>
+              </a:lnSpc>
+              <a:spcAft>
+                <a:spcPts val="400"/>
+              </a:spcAft>
+            </a:pPr>
+            <a:r>
+              <a:rPr sz="1400" b="0">
+                <a:solidFill>
+                  <a:srgbClr val="6B7086"/>
+                </a:solidFill>
+                <a:latin typeface="Segoe UI"/>
+              </a:rPr>
+              <a:t>Everything below was run for real; only the AWS EKS deployment still needs cloud credentials.</a:t>
+            </a:r>
+          </a:p>
+        </p:txBody>
+      </p:sp>
+      <p:sp>
+        <p:nvSpPr>
+          <p:cNvPr id="6" name="TextBox 5"/>
+          <p:cNvSpPr txBox="1"/>
+          <p:nvPr/>
+        </p:nvSpPr>
+        <p:spPr>
+          <a:xfrm>
+            <a:off x="548640" y="6446520"/>
+            <a:ext cx="5486400" cy="274320"/>
+          </a:xfrm>
+          <a:prstGeom prst="rect">
+            <a:avLst/>
+          </a:prstGeom>
+          <a:noFill/>
+        </p:spPr>
+        <p:txBody>
+          <a:bodyPr wrap="square" anchor="t" lIns="18288" rIns="18288" tIns="18288" bIns="18288">
+            <a:spAutoFit/>
+          </a:bodyPr>
+          <a:lstStyle/>
+          <a:p>
+            <a:pPr algn="l">
+              <a:lnSpc>
+                <a:spcPct val="110000"/>
+              </a:lnSpc>
+              <a:spcAft>
+                <a:spcPts val="400"/>
+              </a:spcAft>
+            </a:pPr>
+            <a:r>
+              <a:rPr sz="900" b="0">
+                <a:solidFill>
+                  <a:srgbClr val="6B7086"/>
+                </a:solidFill>
+                <a:latin typeface="Segoe UI"/>
+              </a:rPr>
+              <a:t>DevTrack Todo  •  Jinesh Gandhi  •  DevOps Capstone</a:t>
+            </a:r>
+          </a:p>
+        </p:txBody>
+      </p:sp>
+      <p:sp>
+        <p:nvSpPr>
+          <p:cNvPr id="7" name="TextBox 6"/>
+          <p:cNvSpPr txBox="1"/>
+          <p:nvPr/>
+        </p:nvSpPr>
+        <p:spPr>
+          <a:xfrm>
+            <a:off x="10698480" y="6446520"/>
+            <a:ext cx="1005840" cy="274320"/>
+          </a:xfrm>
+          <a:prstGeom prst="rect">
+            <a:avLst/>
+          </a:prstGeom>
+          <a:noFill/>
+        </p:spPr>
+        <p:txBody>
+          <a:bodyPr wrap="square" anchor="t" lIns="18288" rIns="18288" tIns="18288" bIns="18288">
+            <a:spAutoFit/>
+          </a:bodyPr>
+          <a:lstStyle/>
+          <a:p>
+            <a:pPr algn="r">
+              <a:lnSpc>
+                <a:spcPct val="110000"/>
+              </a:lnSpc>
+              <a:spcAft>
+                <a:spcPts val="400"/>
+              </a:spcAft>
+            </a:pPr>
+            <a:r>
+              <a:rPr sz="900" b="0">
+                <a:solidFill>
+                  <a:srgbClr val="6B7086"/>
+                </a:solidFill>
+                <a:latin typeface="Segoe UI"/>
+              </a:rPr>
+              <a:t>15 / 17</a:t>
+            </a:r>
+          </a:p>
+        </p:txBody>
+      </p:sp>
+      <p:sp>
+        <p:nvSpPr>
+          <p:cNvPr id="8" name="Rounded Rectangle 7"/>
+          <p:cNvSpPr/>
+          <p:nvPr/>
+        </p:nvSpPr>
+        <p:spPr>
+          <a:xfrm>
+            <a:off x="548640" y="1728216"/>
+            <a:ext cx="292608" cy="292608"/>
+          </a:xfrm>
+          <a:prstGeom prst="roundRect">
+            <a:avLst>
+              <a:gd name="adj" fmla="val 50000"/>
+            </a:avLst>
+          </a:prstGeom>
+          <a:solidFill>
+            <a:srgbClr val="D1FAE5"/>
+          </a:solidFill>
+          <a:ln>
+            <a:noFill/>
+          </a:ln>
+          <a:effectLst/>
+        </p:spPr>
+        <p:style>
+          <a:lnRef idx="1">
+            <a:schemeClr val="accent1"/>
+          </a:lnRef>
+          <a:fillRef idx="3">
+            <a:schemeClr val="accent1"/>
+          </a:fillRef>
+          <a:effectRef idx="2">
+            <a:schemeClr val="accent1"/>
+          </a:effectRef>
+          <a:fontRef idx="minor">
+            <a:schemeClr val="lt1"/>
+          </a:fontRef>
+        </p:style>
+        <p:txBody>
+          <a:bodyPr rtlCol="0" anchor="ctr" wrap="square" lIns="73152" rIns="73152"/>
+          <a:lstStyle/>
+          <a:p>
+            <a:pPr algn="ctr"/>
+            <a:r>
+              <a:rPr sz="1100" b="1">
+                <a:solidFill>
+                  <a:srgbClr val="10B981"/>
+                </a:solidFill>
+                <a:latin typeface="Segoe UI"/>
+              </a:rPr>
+              <a:t>✓</a:t>
+            </a:r>
+          </a:p>
+        </p:txBody>
+      </p:sp>
+      <p:sp>
+        <p:nvSpPr>
+          <p:cNvPr id="9" name="TextBox 8"/>
+          <p:cNvSpPr txBox="1"/>
+          <p:nvPr/>
+        </p:nvSpPr>
+        <p:spPr>
+          <a:xfrm>
+            <a:off x="960120" y="1691640"/>
+            <a:ext cx="5120640" cy="548640"/>
+          </a:xfrm>
+          <a:prstGeom prst="rect">
+            <a:avLst/>
+          </a:prstGeom>
+          <a:noFill/>
+        </p:spPr>
+        <p:txBody>
+          <a:bodyPr wrap="square" anchor="t" lIns="18288" rIns="18288" tIns="18288" bIns="18288">
+            <a:spAutoFit/>
+          </a:bodyPr>
+          <a:lstStyle/>
+          <a:p>
+            <a:pPr algn="l">
+              <a:lnSpc>
+                <a:spcPct val="95000"/>
+              </a:lnSpc>
+              <a:spcAft>
+                <a:spcPts val="400"/>
+              </a:spcAft>
+            </a:pPr>
+            <a:r>
+              <a:rPr sz="1200" b="1">
+                <a:solidFill>
+                  <a:srgbClr val="1C1F2E"/>
+                </a:solidFill>
+                <a:latin typeface="Segoe UI"/>
+              </a:rPr>
+              <a:t>Application</a:t>
+            </a:r>
+          </a:p>
+          <a:p>
+            <a:pPr algn="l">
+              <a:lnSpc>
+                <a:spcPct val="95000"/>
+              </a:lnSpc>
+              <a:spcAft>
+                <a:spcPts val="400"/>
+              </a:spcAft>
+            </a:pPr>
+            <a:r>
+              <a:rPr sz="1000" b="0">
+                <a:solidFill>
+                  <a:srgbClr val="6B7086"/>
+                </a:solidFill>
+                <a:latin typeface="Segoe UI"/>
+              </a:rPr>
+              <a:t>Todo CRUD, filters and stats through Nginx and the Ingress</a:t>
+            </a:r>
+          </a:p>
+        </p:txBody>
+      </p:sp>
+      <p:sp>
+        <p:nvSpPr>
+          <p:cNvPr id="10" name="Rounded Rectangle 9"/>
+          <p:cNvSpPr/>
+          <p:nvPr/>
+        </p:nvSpPr>
+        <p:spPr>
+          <a:xfrm>
+            <a:off x="548640" y="2276856"/>
+            <a:ext cx="292608" cy="292608"/>
+          </a:xfrm>
+          <a:prstGeom prst="roundRect">
+            <a:avLst>
+              <a:gd name="adj" fmla="val 50000"/>
+            </a:avLst>
+          </a:prstGeom>
+          <a:solidFill>
+            <a:srgbClr val="D1FAE5"/>
+          </a:solidFill>
+          <a:ln>
+            <a:noFill/>
+          </a:ln>
+          <a:effectLst/>
+        </p:spPr>
+        <p:style>
+          <a:lnRef idx="1">
+            <a:schemeClr val="accent1"/>
+          </a:lnRef>
+          <a:fillRef idx="3">
+            <a:schemeClr val="accent1"/>
+          </a:fillRef>
+          <a:effectRef idx="2">
+            <a:schemeClr val="accent1"/>
+          </a:effectRef>
+          <a:fontRef idx="minor">
+            <a:schemeClr val="lt1"/>
+          </a:fontRef>
+        </p:style>
+        <p:txBody>
+          <a:bodyPr rtlCol="0" anchor="ctr" wrap="square" lIns="73152" rIns="73152"/>
+          <a:lstStyle/>
+          <a:p>
+            <a:pPr algn="ctr"/>
+            <a:r>
+              <a:rPr sz="1100" b="1">
+                <a:solidFill>
+                  <a:srgbClr val="10B981"/>
+                </a:solidFill>
+                <a:latin typeface="Segoe UI"/>
+              </a:rPr>
+              <a:t>✓</a:t>
+            </a:r>
+          </a:p>
+        </p:txBody>
+      </p:sp>
+      <p:sp>
+        <p:nvSpPr>
+          <p:cNvPr id="11" name="TextBox 10"/>
+          <p:cNvSpPr txBox="1"/>
+          <p:nvPr/>
+        </p:nvSpPr>
+        <p:spPr>
+          <a:xfrm>
+            <a:off x="960120" y="2240280"/>
+            <a:ext cx="5120640" cy="548640"/>
+          </a:xfrm>
+          <a:prstGeom prst="rect">
+            <a:avLst/>
+          </a:prstGeom>
+          <a:noFill/>
+        </p:spPr>
+        <p:txBody>
+          <a:bodyPr wrap="square" anchor="t" lIns="18288" rIns="18288" tIns="18288" bIns="18288">
+            <a:spAutoFit/>
+          </a:bodyPr>
+          <a:lstStyle/>
+          <a:p>
+            <a:pPr algn="l">
+              <a:lnSpc>
+                <a:spcPct val="95000"/>
+              </a:lnSpc>
+              <a:spcAft>
+                <a:spcPts val="400"/>
+              </a:spcAft>
+            </a:pPr>
+            <a:r>
+              <a:rPr sz="1200" b="1">
+                <a:solidFill>
+                  <a:srgbClr val="1C1F2E"/>
+                </a:solidFill>
+                <a:latin typeface="Segoe UI"/>
+              </a:rPr>
+              <a:t>Tests</a:t>
+            </a:r>
+          </a:p>
+          <a:p>
+            <a:pPr algn="l">
+              <a:lnSpc>
+                <a:spcPct val="95000"/>
+              </a:lnSpc>
+              <a:spcAft>
+                <a:spcPts val="400"/>
+              </a:spcAft>
+            </a:pPr>
+            <a:r>
+              <a:rPr sz="1000" b="0">
+                <a:solidFill>
+                  <a:srgbClr val="6B7086"/>
+                </a:solidFill>
+                <a:latin typeface="Segoe UI"/>
+              </a:rPr>
+              <a:t>28 / 28 pytest; migration matches models; CI on PostgreSQL</a:t>
+            </a:r>
+          </a:p>
+        </p:txBody>
+      </p:sp>
+      <p:sp>
+        <p:nvSpPr>
+          <p:cNvPr id="12" name="Rounded Rectangle 11"/>
+          <p:cNvSpPr/>
+          <p:nvPr/>
+        </p:nvSpPr>
+        <p:spPr>
+          <a:xfrm>
+            <a:off x="548640" y="2825496"/>
+            <a:ext cx="292608" cy="292608"/>
+          </a:xfrm>
+          <a:prstGeom prst="roundRect">
+            <a:avLst>
+              <a:gd name="adj" fmla="val 50000"/>
+            </a:avLst>
+          </a:prstGeom>
+          <a:solidFill>
+            <a:srgbClr val="D1FAE5"/>
+          </a:solidFill>
+          <a:ln>
+            <a:noFill/>
+          </a:ln>
+          <a:effectLst/>
+        </p:spPr>
+        <p:style>
+          <a:lnRef idx="1">
+            <a:schemeClr val="accent1"/>
+          </a:lnRef>
+          <a:fillRef idx="3">
+            <a:schemeClr val="accent1"/>
+          </a:fillRef>
+          <a:effectRef idx="2">
+            <a:schemeClr val="accent1"/>
+          </a:effectRef>
+          <a:fontRef idx="minor">
+            <a:schemeClr val="lt1"/>
+          </a:fontRef>
+        </p:style>
+        <p:txBody>
+          <a:bodyPr rtlCol="0" anchor="ctr" wrap="square" lIns="73152" rIns="73152"/>
+          <a:lstStyle/>
+          <a:p>
+            <a:pPr algn="ctr"/>
+            <a:r>
+              <a:rPr sz="1100" b="1">
+                <a:solidFill>
+                  <a:srgbClr val="10B981"/>
+                </a:solidFill>
+                <a:latin typeface="Segoe UI"/>
+              </a:rPr>
+              <a:t>✓</a:t>
+            </a:r>
+          </a:p>
+        </p:txBody>
+      </p:sp>
+      <p:sp>
+        <p:nvSpPr>
+          <p:cNvPr id="13" name="TextBox 12"/>
+          <p:cNvSpPr txBox="1"/>
+          <p:nvPr/>
+        </p:nvSpPr>
+        <p:spPr>
+          <a:xfrm>
+            <a:off x="960120" y="2788920"/>
+            <a:ext cx="5120640" cy="548640"/>
+          </a:xfrm>
+          <a:prstGeom prst="rect">
+            <a:avLst/>
+          </a:prstGeom>
+          <a:noFill/>
+        </p:spPr>
+        <p:txBody>
+          <a:bodyPr wrap="square" anchor="t" lIns="18288" rIns="18288" tIns="18288" bIns="18288">
+            <a:spAutoFit/>
+          </a:bodyPr>
+          <a:lstStyle/>
+          <a:p>
+            <a:pPr algn="l">
+              <a:lnSpc>
+                <a:spcPct val="95000"/>
+              </a:lnSpc>
+              <a:spcAft>
+                <a:spcPts val="400"/>
+              </a:spcAft>
+            </a:pPr>
+            <a:r>
+              <a:rPr sz="1200" b="1">
+                <a:solidFill>
+                  <a:srgbClr val="1C1F2E"/>
+                </a:solidFill>
+                <a:latin typeface="Segoe UI"/>
+              </a:rPr>
+              <a:t>Security</a:t>
+            </a:r>
+          </a:p>
+          <a:p>
+            <a:pPr algn="l">
+              <a:lnSpc>
+                <a:spcPct val="95000"/>
+              </a:lnSpc>
+              <a:spcAft>
+                <a:spcPts val="400"/>
+              </a:spcAft>
+            </a:pPr>
+            <a:r>
+              <a:rPr sz="1000" b="0">
+                <a:solidFill>
+                  <a:srgbClr val="6B7086"/>
+                </a:solidFill>
+                <a:latin typeface="Segoe UI"/>
+              </a:rPr>
+              <a:t>Trivy 0 HIGH / 0 CRITICAL locally and as a CI gate</a:t>
+            </a:r>
+          </a:p>
+        </p:txBody>
+      </p:sp>
+      <p:sp>
+        <p:nvSpPr>
+          <p:cNvPr id="14" name="Rounded Rectangle 13"/>
+          <p:cNvSpPr/>
+          <p:nvPr/>
+        </p:nvSpPr>
+        <p:spPr>
+          <a:xfrm>
+            <a:off x="548640" y="3374136"/>
+            <a:ext cx="292608" cy="292608"/>
+          </a:xfrm>
+          <a:prstGeom prst="roundRect">
+            <a:avLst>
+              <a:gd name="adj" fmla="val 50000"/>
+            </a:avLst>
+          </a:prstGeom>
+          <a:solidFill>
+            <a:srgbClr val="D1FAE5"/>
+          </a:solidFill>
+          <a:ln>
+            <a:noFill/>
+          </a:ln>
+          <a:effectLst/>
+        </p:spPr>
+        <p:style>
+          <a:lnRef idx="1">
+            <a:schemeClr val="accent1"/>
+          </a:lnRef>
+          <a:fillRef idx="3">
+            <a:schemeClr val="accent1"/>
+          </a:fillRef>
+          <a:effectRef idx="2">
+            <a:schemeClr val="accent1"/>
+          </a:effectRef>
+          <a:fontRef idx="minor">
+            <a:schemeClr val="lt1"/>
+          </a:fontRef>
+        </p:style>
+        <p:txBody>
+          <a:bodyPr rtlCol="0" anchor="ctr" wrap="square" lIns="73152" rIns="73152"/>
+          <a:lstStyle/>
+          <a:p>
+            <a:pPr algn="ctr"/>
+            <a:r>
+              <a:rPr sz="1100" b="1">
+                <a:solidFill>
+                  <a:srgbClr val="10B981"/>
+                </a:solidFill>
+                <a:latin typeface="Segoe UI"/>
+              </a:rPr>
+              <a:t>✓</a:t>
+            </a:r>
+          </a:p>
+        </p:txBody>
+      </p:sp>
+      <p:sp>
+        <p:nvSpPr>
+          <p:cNvPr id="15" name="TextBox 14"/>
+          <p:cNvSpPr txBox="1"/>
+          <p:nvPr/>
+        </p:nvSpPr>
+        <p:spPr>
+          <a:xfrm>
+            <a:off x="960120" y="3337560"/>
+            <a:ext cx="5120640" cy="548640"/>
+          </a:xfrm>
+          <a:prstGeom prst="rect">
+            <a:avLst/>
+          </a:prstGeom>
+          <a:noFill/>
+        </p:spPr>
+        <p:txBody>
+          <a:bodyPr wrap="square" anchor="t" lIns="18288" rIns="18288" tIns="18288" bIns="18288">
+            <a:spAutoFit/>
+          </a:bodyPr>
+          <a:lstStyle/>
+          <a:p>
+            <a:pPr algn="l">
+              <a:lnSpc>
+                <a:spcPct val="95000"/>
+              </a:lnSpc>
+              <a:spcAft>
+                <a:spcPts val="400"/>
+              </a:spcAft>
+            </a:pPr>
+            <a:r>
+              <a:rPr sz="1200" b="1">
+                <a:solidFill>
+                  <a:srgbClr val="1C1F2E"/>
+                </a:solidFill>
+                <a:latin typeface="Segoe UI"/>
+              </a:rPr>
+              <a:t>CI/CD &amp; registry</a:t>
+            </a:r>
+          </a:p>
+          <a:p>
+            <a:pPr algn="l">
+              <a:lnSpc>
+                <a:spcPct val="95000"/>
+              </a:lnSpc>
+              <a:spcAft>
+                <a:spcPts val="400"/>
+              </a:spcAft>
+            </a:pPr>
+            <a:r>
+              <a:rPr sz="1000" b="0">
+                <a:solidFill>
+                  <a:srgbClr val="6B7086"/>
+                </a:solidFill>
+                <a:latin typeface="Segoe UI"/>
+              </a:rPr>
+              <a:t>All 5 jobs green; SHA-tagged images public in GHCR</a:t>
+            </a:r>
+          </a:p>
+        </p:txBody>
+      </p:sp>
+      <p:sp>
+        <p:nvSpPr>
+          <p:cNvPr id="16" name="Rounded Rectangle 15"/>
+          <p:cNvSpPr/>
+          <p:nvPr/>
+        </p:nvSpPr>
+        <p:spPr>
+          <a:xfrm>
+            <a:off x="548640" y="3922776"/>
+            <a:ext cx="292608" cy="292608"/>
+          </a:xfrm>
+          <a:prstGeom prst="roundRect">
+            <a:avLst>
+              <a:gd name="adj" fmla="val 50000"/>
+            </a:avLst>
+          </a:prstGeom>
+          <a:solidFill>
+            <a:srgbClr val="D1FAE5"/>
+          </a:solidFill>
+          <a:ln>
+            <a:noFill/>
+          </a:ln>
+          <a:effectLst/>
+        </p:spPr>
+        <p:style>
+          <a:lnRef idx="1">
+            <a:schemeClr val="accent1"/>
+          </a:lnRef>
+          <a:fillRef idx="3">
+            <a:schemeClr val="accent1"/>
+          </a:fillRef>
+          <a:effectRef idx="2">
+            <a:schemeClr val="accent1"/>
+          </a:effectRef>
+          <a:fontRef idx="minor">
+            <a:schemeClr val="lt1"/>
+          </a:fontRef>
+        </p:style>
+        <p:txBody>
+          <a:bodyPr rtlCol="0" anchor="ctr" wrap="square" lIns="73152" rIns="73152"/>
+          <a:lstStyle/>
+          <a:p>
+            <a:pPr algn="ctr"/>
+            <a:r>
+              <a:rPr sz="1100" b="1">
+                <a:solidFill>
+                  <a:srgbClr val="10B981"/>
+                </a:solidFill>
+                <a:latin typeface="Segoe UI"/>
+              </a:rPr>
+              <a:t>✓</a:t>
+            </a:r>
+          </a:p>
+        </p:txBody>
+      </p:sp>
+      <p:sp>
+        <p:nvSpPr>
+          <p:cNvPr id="17" name="TextBox 16"/>
+          <p:cNvSpPr txBox="1"/>
+          <p:nvPr/>
+        </p:nvSpPr>
+        <p:spPr>
+          <a:xfrm>
+            <a:off x="960120" y="3886200"/>
+            <a:ext cx="5120640" cy="548640"/>
+          </a:xfrm>
+          <a:prstGeom prst="rect">
+            <a:avLst/>
+          </a:prstGeom>
+          <a:noFill/>
+        </p:spPr>
+        <p:txBody>
+          <a:bodyPr wrap="square" anchor="t" lIns="18288" rIns="18288" tIns="18288" bIns="18288">
+            <a:spAutoFit/>
+          </a:bodyPr>
+          <a:lstStyle/>
+          <a:p>
+            <a:pPr algn="l">
+              <a:lnSpc>
+                <a:spcPct val="95000"/>
+              </a:lnSpc>
+              <a:spcAft>
+                <a:spcPts val="400"/>
+              </a:spcAft>
+            </a:pPr>
+            <a:r>
+              <a:rPr sz="1200" b="1">
+                <a:solidFill>
+                  <a:srgbClr val="1C1F2E"/>
+                </a:solidFill>
+                <a:latin typeface="Segoe UI"/>
+              </a:rPr>
+              <a:t>GitOps</a:t>
+            </a:r>
+          </a:p>
+          <a:p>
+            <a:pPr algn="l">
+              <a:lnSpc>
+                <a:spcPct val="95000"/>
+              </a:lnSpc>
+              <a:spcAft>
+                <a:spcPts val="400"/>
+              </a:spcAft>
+            </a:pPr>
+            <a:r>
+              <a:rPr sz="1000" b="0">
+                <a:solidFill>
+                  <a:srgbClr val="6B7086"/>
+                </a:solidFill>
+                <a:latin typeface="Segoe UI"/>
+              </a:rPr>
+              <a:t>Bot commits pin each new SHA in the Helm values</a:t>
+            </a:r>
+          </a:p>
+        </p:txBody>
+      </p:sp>
+      <p:sp>
+        <p:nvSpPr>
+          <p:cNvPr id="18" name="Rounded Rectangle 17"/>
+          <p:cNvSpPr/>
+          <p:nvPr/>
+        </p:nvSpPr>
+        <p:spPr>
+          <a:xfrm>
+            <a:off x="548640" y="4471416"/>
+            <a:ext cx="292608" cy="292608"/>
+          </a:xfrm>
+          <a:prstGeom prst="roundRect">
+            <a:avLst>
+              <a:gd name="adj" fmla="val 50000"/>
+            </a:avLst>
+          </a:prstGeom>
+          <a:solidFill>
+            <a:srgbClr val="D1FAE5"/>
+          </a:solidFill>
+          <a:ln>
+            <a:noFill/>
+          </a:ln>
+          <a:effectLst/>
+        </p:spPr>
+        <p:style>
+          <a:lnRef idx="1">
+            <a:schemeClr val="accent1"/>
+          </a:lnRef>
+          <a:fillRef idx="3">
+            <a:schemeClr val="accent1"/>
+          </a:fillRef>
+          <a:effectRef idx="2">
+            <a:schemeClr val="accent1"/>
+          </a:effectRef>
+          <a:fontRef idx="minor">
+            <a:schemeClr val="lt1"/>
+          </a:fontRef>
+        </p:style>
+        <p:txBody>
+          <a:bodyPr rtlCol="0" anchor="ctr" wrap="square" lIns="73152" rIns="73152"/>
+          <a:lstStyle/>
+          <a:p>
+            <a:pPr algn="ctr"/>
+            <a:r>
+              <a:rPr sz="1100" b="1">
+                <a:solidFill>
+                  <a:srgbClr val="10B981"/>
+                </a:solidFill>
+                <a:latin typeface="Segoe UI"/>
+              </a:rPr>
+              <a:t>✓</a:t>
+            </a:r>
+          </a:p>
+        </p:txBody>
+      </p:sp>
+      <p:sp>
+        <p:nvSpPr>
+          <p:cNvPr id="19" name="TextBox 18"/>
+          <p:cNvSpPr txBox="1"/>
+          <p:nvPr/>
+        </p:nvSpPr>
+        <p:spPr>
+          <a:xfrm>
+            <a:off x="960120" y="4434840"/>
+            <a:ext cx="5120640" cy="548640"/>
+          </a:xfrm>
+          <a:prstGeom prst="rect">
+            <a:avLst/>
+          </a:prstGeom>
+          <a:noFill/>
+        </p:spPr>
+        <p:txBody>
+          <a:bodyPr wrap="square" anchor="t" lIns="18288" rIns="18288" tIns="18288" bIns="18288">
+            <a:spAutoFit/>
+          </a:bodyPr>
+          <a:lstStyle/>
+          <a:p>
+            <a:pPr algn="l">
+              <a:lnSpc>
+                <a:spcPct val="95000"/>
+              </a:lnSpc>
+              <a:spcAft>
+                <a:spcPts val="400"/>
+              </a:spcAft>
+            </a:pPr>
+            <a:r>
+              <a:rPr sz="1200" b="1">
+                <a:solidFill>
+                  <a:srgbClr val="1C1F2E"/>
+                </a:solidFill>
+                <a:latin typeface="Segoe UI"/>
+              </a:rPr>
+              <a:t>Kubernetes</a:t>
+            </a:r>
+          </a:p>
+          <a:p>
+            <a:pPr algn="l">
+              <a:lnSpc>
+                <a:spcPct val="95000"/>
+              </a:lnSpc>
+              <a:spcAft>
+                <a:spcPts val="400"/>
+              </a:spcAft>
+            </a:pPr>
+            <a:r>
+              <a:rPr sz="1000" b="0">
+                <a:solidFill>
+                  <a:srgbClr val="6B7086"/>
+                </a:solidFill>
+                <a:latin typeface="Segoe UI"/>
+              </a:rPr>
+              <a:t>Helm release on 3-node cluster pulling GHCR images, 0 restarts</a:t>
+            </a:r>
+          </a:p>
+        </p:txBody>
+      </p:sp>
+      <p:sp>
+        <p:nvSpPr>
+          <p:cNvPr id="20" name="Rounded Rectangle 19"/>
+          <p:cNvSpPr/>
+          <p:nvPr/>
+        </p:nvSpPr>
+        <p:spPr>
+          <a:xfrm>
+            <a:off x="548640" y="5020055"/>
+            <a:ext cx="292608" cy="292608"/>
+          </a:xfrm>
+          <a:prstGeom prst="roundRect">
+            <a:avLst>
+              <a:gd name="adj" fmla="val 50000"/>
+            </a:avLst>
+          </a:prstGeom>
+          <a:solidFill>
+            <a:srgbClr val="D1FAE5"/>
+          </a:solidFill>
+          <a:ln>
+            <a:noFill/>
+          </a:ln>
+          <a:effectLst/>
+        </p:spPr>
+        <p:style>
+          <a:lnRef idx="1">
+            <a:schemeClr val="accent1"/>
+          </a:lnRef>
+          <a:fillRef idx="3">
+            <a:schemeClr val="accent1"/>
+          </a:fillRef>
+          <a:effectRef idx="2">
+            <a:schemeClr val="accent1"/>
+          </a:effectRef>
+          <a:fontRef idx="minor">
+            <a:schemeClr val="lt1"/>
+          </a:fontRef>
+        </p:style>
+        <p:txBody>
+          <a:bodyPr rtlCol="0" anchor="ctr" wrap="square" lIns="73152" rIns="73152"/>
+          <a:lstStyle/>
+          <a:p>
+            <a:pPr algn="ctr"/>
+            <a:r>
+              <a:rPr sz="1100" b="1">
+                <a:solidFill>
+                  <a:srgbClr val="10B981"/>
+                </a:solidFill>
+                <a:latin typeface="Segoe UI"/>
+              </a:rPr>
+              <a:t>✓</a:t>
+            </a:r>
+          </a:p>
+        </p:txBody>
+      </p:sp>
+      <p:sp>
+        <p:nvSpPr>
+          <p:cNvPr id="21" name="TextBox 20"/>
+          <p:cNvSpPr txBox="1"/>
+          <p:nvPr/>
+        </p:nvSpPr>
+        <p:spPr>
+          <a:xfrm>
+            <a:off x="960120" y="4983479"/>
+            <a:ext cx="5120640" cy="548640"/>
+          </a:xfrm>
+          <a:prstGeom prst="rect">
+            <a:avLst/>
+          </a:prstGeom>
+          <a:noFill/>
+        </p:spPr>
+        <p:txBody>
+          <a:bodyPr wrap="square" anchor="t" lIns="18288" rIns="18288" tIns="18288" bIns="18288">
+            <a:spAutoFit/>
+          </a:bodyPr>
+          <a:lstStyle/>
+          <a:p>
+            <a:pPr algn="l">
+              <a:lnSpc>
+                <a:spcPct val="95000"/>
+              </a:lnSpc>
+              <a:spcAft>
+                <a:spcPts val="400"/>
+              </a:spcAft>
+            </a:pPr>
+            <a:r>
+              <a:rPr sz="1200" b="1">
+                <a:solidFill>
+                  <a:srgbClr val="1C1F2E"/>
+                </a:solidFill>
+                <a:latin typeface="Segoe UI"/>
+              </a:rPr>
+              <a:t>Observability</a:t>
+            </a:r>
+          </a:p>
+          <a:p>
+            <a:pPr algn="l">
+              <a:lnSpc>
+                <a:spcPct val="95000"/>
+              </a:lnSpc>
+              <a:spcAft>
+                <a:spcPts val="400"/>
+              </a:spcAft>
+            </a:pPr>
+            <a:r>
+              <a:rPr sz="1000" b="0">
+                <a:solidFill>
+                  <a:srgbClr val="6B7086"/>
+                </a:solidFill>
+                <a:latin typeface="Segoe UI"/>
+              </a:rPr>
+              <a:t>Prometheus target UP; Grafana panels populated</a:t>
+            </a:r>
+          </a:p>
+        </p:txBody>
+      </p:sp>
+      <p:sp>
+        <p:nvSpPr>
+          <p:cNvPr id="22" name="Rounded Rectangle 21"/>
+          <p:cNvSpPr/>
+          <p:nvPr/>
+        </p:nvSpPr>
+        <p:spPr>
+          <a:xfrm>
+            <a:off x="548640" y="5568696"/>
+            <a:ext cx="292608" cy="292608"/>
+          </a:xfrm>
+          <a:prstGeom prst="roundRect">
+            <a:avLst>
+              <a:gd name="adj" fmla="val 50000"/>
+            </a:avLst>
+          </a:prstGeom>
+          <a:solidFill>
+            <a:srgbClr val="D1FAE5"/>
+          </a:solidFill>
+          <a:ln>
+            <a:noFill/>
+          </a:ln>
+          <a:effectLst/>
+        </p:spPr>
+        <p:style>
+          <a:lnRef idx="1">
+            <a:schemeClr val="accent1"/>
+          </a:lnRef>
+          <a:fillRef idx="3">
+            <a:schemeClr val="accent1"/>
+          </a:fillRef>
+          <a:effectRef idx="2">
+            <a:schemeClr val="accent1"/>
+          </a:effectRef>
+          <a:fontRef idx="minor">
+            <a:schemeClr val="lt1"/>
+          </a:fontRef>
+        </p:style>
+        <p:txBody>
+          <a:bodyPr rtlCol="0" anchor="ctr" wrap="square" lIns="73152" rIns="73152"/>
+          <a:lstStyle/>
+          <a:p>
+            <a:pPr algn="ctr"/>
+            <a:r>
+              <a:rPr sz="1100" b="1">
+                <a:solidFill>
+                  <a:srgbClr val="10B981"/>
+                </a:solidFill>
+                <a:latin typeface="Segoe UI"/>
+              </a:rPr>
+              <a:t>✓</a:t>
+            </a:r>
+          </a:p>
+        </p:txBody>
+      </p:sp>
+      <p:sp>
+        <p:nvSpPr>
+          <p:cNvPr id="23" name="TextBox 22"/>
+          <p:cNvSpPr txBox="1"/>
+          <p:nvPr/>
+        </p:nvSpPr>
+        <p:spPr>
+          <a:xfrm>
+            <a:off x="960120" y="5532120"/>
+            <a:ext cx="5120640" cy="548640"/>
+          </a:xfrm>
+          <a:prstGeom prst="rect">
+            <a:avLst/>
+          </a:prstGeom>
+          <a:noFill/>
+        </p:spPr>
+        <p:txBody>
+          <a:bodyPr wrap="square" anchor="t" lIns="18288" rIns="18288" tIns="18288" bIns="18288">
+            <a:spAutoFit/>
+          </a:bodyPr>
+          <a:lstStyle/>
+          <a:p>
+            <a:pPr algn="l">
+              <a:lnSpc>
+                <a:spcPct val="95000"/>
+              </a:lnSpc>
+              <a:spcAft>
+                <a:spcPts val="400"/>
+              </a:spcAft>
+            </a:pPr>
+            <a:r>
+              <a:rPr sz="1200" b="1">
+                <a:solidFill>
+                  <a:srgbClr val="1C1F2E"/>
+                </a:solidFill>
+                <a:latin typeface="Segoe UI"/>
+              </a:rPr>
+              <a:t>Terraform</a:t>
+            </a:r>
+          </a:p>
+          <a:p>
+            <a:pPr algn="l">
+              <a:lnSpc>
+                <a:spcPct val="95000"/>
+              </a:lnSpc>
+              <a:spcAft>
+                <a:spcPts val="400"/>
+              </a:spcAft>
+            </a:pPr>
+            <a:r>
+              <a:rPr sz="1000" b="0">
+                <a:solidFill>
+                  <a:srgbClr val="6B7086"/>
+                </a:solidFill>
+                <a:latin typeface="Segoe UI"/>
+              </a:rPr>
+              <a:t>init, fmt -check and validate pass</a:t>
+            </a:r>
+          </a:p>
+        </p:txBody>
+      </p:sp>
+      <p:pic>
+        <p:nvPicPr>
+          <p:cNvPr id="24" name="Picture 23" descr="M8-ingress-application.png"/>
+          <p:cNvPicPr>
+            <a:picLocks noChangeAspect="1"/>
+          </p:cNvPicPr>
+          <p:nvPr/>
+        </p:nvPicPr>
+        <p:blipFill>
+          <a:blip r:embed="rId2"/>
+          <a:srcRect b="171"/>
+          <a:stretch>
+            <a:fillRect/>
+          </a:stretch>
+        </p:blipFill>
+        <p:spPr>
+          <a:xfrm>
+            <a:off x="6309360" y="1691640"/>
+            <a:ext cx="5349240" cy="3337560"/>
+          </a:xfrm>
+          <a:prstGeom prst="rect">
+            <a:avLst/>
+          </a:prstGeom>
+          <a:ln w="12700">
+            <a:solidFill>
+              <a:srgbClr val="E4E6EF"/>
+            </a:solidFill>
+          </a:ln>
+        </p:spPr>
+      </p:pic>
+      <p:sp>
+        <p:nvSpPr>
+          <p:cNvPr id="25" name="TextBox 24"/>
+          <p:cNvSpPr txBox="1"/>
+          <p:nvPr/>
+        </p:nvSpPr>
+        <p:spPr>
+          <a:xfrm>
+            <a:off x="6309360" y="5074920"/>
+            <a:ext cx="5349240" cy="274320"/>
+          </a:xfrm>
+          <a:prstGeom prst="rect">
+            <a:avLst/>
+          </a:prstGeom>
+          <a:noFill/>
+        </p:spPr>
+        <p:txBody>
+          <a:bodyPr wrap="square" anchor="t" lIns="18288" rIns="18288" tIns="18288" bIns="18288">
+            <a:spAutoFit/>
+          </a:bodyPr>
+          <a:lstStyle/>
+          <a:p>
+            <a:pPr algn="l">
+              <a:lnSpc>
+                <a:spcPct val="110000"/>
+              </a:lnSpc>
+              <a:spcAft>
+                <a:spcPts val="400"/>
+              </a:spcAft>
+            </a:pPr>
+            <a:r>
+              <a:rPr sz="1000" b="0">
+                <a:solidFill>
+                  <a:srgbClr val="6B7086"/>
+                </a:solidFill>
+                <a:latin typeface="Segoe UI"/>
+              </a:rPr>
+              <a:t>App served through the Ingress (localhost:8081 on the local cluster)</a:t>
+            </a:r>
+          </a:p>
+        </p:txBody>
+      </p:sp>
+      <p:sp>
+        <p:nvSpPr>
+          <p:cNvPr id="26" name="Rounded Rectangle 25"/>
+          <p:cNvSpPr/>
+          <p:nvPr/>
+        </p:nvSpPr>
+        <p:spPr>
+          <a:xfrm>
+            <a:off x="6309360" y="5440680"/>
+            <a:ext cx="5349240" cy="822960"/>
+          </a:xfrm>
+          <a:prstGeom prst="roundRect">
+            <a:avLst>
+              <a:gd name="adj" fmla="val 8000"/>
+            </a:avLst>
+          </a:prstGeom>
+          <a:solidFill>
+            <a:srgbClr val="FEF3C7"/>
+          </a:solidFill>
+          <a:ln>
+            <a:noFill/>
+          </a:ln>
+          <a:effectLst/>
+        </p:spPr>
+        <p:style>
+          <a:lnRef idx="1">
+            <a:schemeClr val="accent1"/>
+          </a:lnRef>
+          <a:fillRef idx="3">
+            <a:schemeClr val="accent1"/>
+          </a:fillRef>
+          <a:effectRef idx="2">
+            <a:schemeClr val="accent1"/>
+          </a:effectRef>
+          <a:fontRef idx="minor">
+            <a:schemeClr val="lt1"/>
+          </a:fontRef>
+        </p:style>
+        <p:txBody>
+          <a:bodyPr rtlCol="0" anchor="ctr" wrap="square" lIns="73152" rIns="73152"/>
+          <a:lstStyle/>
+          <a:p>
+            <a:pPr algn="l"/>
+            <a:r>
+              <a:rPr sz="1200" b="1">
+                <a:solidFill>
+                  <a:srgbClr val="92400E"/>
+                </a:solidFill>
+                <a:latin typeface="Segoe UI"/>
+              </a:rPr>
+              <a:t>Pending: AWS EKS</a:t>
+            </a:r>
+          </a:p>
+          <a:p>
+            <a:pPr algn="l"/>
+            <a:r>
+              <a:rPr sz="1000" b="0">
+                <a:solidFill>
+                  <a:srgbClr val="92400E"/>
+                </a:solidFill>
+                <a:latin typeface="Segoe UI"/>
+              </a:rPr>
+              <a:t>terraform plan / apply needs AWS credentials; then the same Helm chart deploys with storageClass gp2.</a:t>
+            </a:r>
+          </a:p>
+        </p:txBody>
+      </p:sp>
+    </p:spTree>
+  </p:cSld>
+  <p:clrMapOvr>
+    <a:masterClrMapping/>
+  </p:clrMapOvr>
+</p:sld>
+</file>
+
+<file path=ppt/slides/slide16.xml><?xml version="1.0" encoding="utf-8"?>
+<p:sld xmlns:a="http://schemas.openxmlformats.org/drawingml/2006/main" xmlns:p="http://schemas.openxmlformats.org/presentationml/2006/main" xmlns:r="http://schemas.openxmlformats.org/officeDocument/2006/relationships">
+  <p:cSld>
+    <p:bg>
+      <p:bgPr>
+        <a:solidFill>
+          <a:srgbClr val="F4F5FB"/>
+        </a:solidFill>
+        <a:effectLst/>
+      </p:bgPr>
+    </p:bg>
+    <p:spTree>
+      <p:nvGrpSpPr>
+        <p:cNvPr id="1" name=""/>
+        <p:cNvGrpSpPr/>
+        <p:nvPr/>
+      </p:nvGrpSpPr>
+      <p:grpSpPr/>
+      <p:sp>
+        <p:nvSpPr>
+          <p:cNvPr id="2" name="Rectangle 1"/>
+          <p:cNvSpPr/>
+          <p:nvPr/>
+        </p:nvSpPr>
+        <p:spPr>
+          <a:xfrm>
+            <a:off x="0" y="0"/>
+            <a:ext cx="109728" cy="6858000"/>
+          </a:xfrm>
+          <a:prstGeom prst="rect">
+            <a:avLst/>
+          </a:prstGeom>
+          <a:solidFill>
+            <a:srgbClr val="4F46E5"/>
+          </a:solidFill>
+          <a:ln>
+            <a:noFill/>
+          </a:ln>
+          <a:effectLst/>
+        </p:spPr>
+        <p:style>
+          <a:lnRef idx="1">
+            <a:schemeClr val="accent1"/>
+          </a:lnRef>
+          <a:fillRef idx="3">
+            <a:schemeClr val="accent1"/>
+          </a:fillRef>
+          <a:effectRef idx="2">
+            <a:schemeClr val="accent1"/>
+          </a:effectRef>
+          <a:fontRef idx="minor">
+            <a:schemeClr val="lt1"/>
+          </a:fontRef>
+        </p:style>
+        <p:txBody>
+          <a:bodyPr rtlCol="0" anchor="ctr"/>
+          <a:lstStyle/>
+          <a:p>
+            <a:pPr algn="ctr"/>
+          </a:p>
+        </p:txBody>
+      </p:sp>
+      <p:sp>
+        <p:nvSpPr>
+          <p:cNvPr id="3" name="TextBox 2"/>
+          <p:cNvSpPr txBox="1"/>
+          <p:nvPr/>
+        </p:nvSpPr>
+        <p:spPr>
+          <a:xfrm>
+            <a:off x="548640" y="347472"/>
+            <a:ext cx="8229600" cy="274320"/>
+          </a:xfrm>
+          <a:prstGeom prst="rect">
+            <a:avLst/>
+          </a:prstGeom>
+          <a:noFill/>
+        </p:spPr>
+        <p:txBody>
+          <a:bodyPr wrap="square" anchor="t" lIns="18288" rIns="18288" tIns="18288" bIns="18288">
+            <a:spAutoFit/>
+          </a:bodyPr>
+          <a:lstStyle/>
+          <a:p>
+            <a:pPr algn="l">
+              <a:lnSpc>
+                <a:spcPct val="110000"/>
+              </a:lnSpc>
+              <a:spcAft>
+                <a:spcPts val="400"/>
+              </a:spcAft>
+            </a:pPr>
+            <a:r>
+              <a:rPr sz="1100" b="1">
+                <a:solidFill>
+                  <a:srgbClr val="4F46E5"/>
+                </a:solidFill>
+                <a:latin typeface="Segoe UI"/>
+              </a:rPr>
+              <a:t>15 • CONCLUSION &amp; NEXT STEPS</a:t>
+            </a:r>
+          </a:p>
+        </p:txBody>
+      </p:sp>
+      <p:sp>
+        <p:nvSpPr>
+          <p:cNvPr id="4" name="TextBox 3"/>
+          <p:cNvSpPr txBox="1"/>
+          <p:nvPr/>
+        </p:nvSpPr>
+        <p:spPr>
+          <a:xfrm>
+            <a:off x="548640" y="603504"/>
+            <a:ext cx="11155680" cy="548640"/>
+          </a:xfrm>
+          <a:prstGeom prst="rect">
+            <a:avLst/>
+          </a:prstGeom>
+          <a:noFill/>
+        </p:spPr>
+        <p:txBody>
+          <a:bodyPr wrap="square" anchor="t" lIns="18288" rIns="18288" tIns="18288" bIns="18288">
+            <a:spAutoFit/>
+          </a:bodyPr>
+          <a:lstStyle/>
+          <a:p>
+            <a:pPr algn="l">
+              <a:lnSpc>
+                <a:spcPct val="110000"/>
+              </a:lnSpc>
+              <a:spcAft>
+                <a:spcPts val="400"/>
+              </a:spcAft>
+            </a:pPr>
+            <a:r>
+              <a:rPr sz="2800" b="1">
+                <a:solidFill>
+                  <a:srgbClr val="1C1F2E"/>
+                </a:solidFill>
+                <a:latin typeface="Segoe UI"/>
+              </a:rPr>
+              <a:t>From commit to observed workload</a:t>
+            </a:r>
+          </a:p>
+        </p:txBody>
+      </p:sp>
+      <p:sp>
+        <p:nvSpPr>
+          <p:cNvPr id="5" name="TextBox 4"/>
+          <p:cNvSpPr txBox="1"/>
+          <p:nvPr/>
+        </p:nvSpPr>
+        <p:spPr>
+          <a:xfrm>
+            <a:off x="548640" y="6446520"/>
+            <a:ext cx="5486400" cy="274320"/>
+          </a:xfrm>
+          <a:prstGeom prst="rect">
+            <a:avLst/>
+          </a:prstGeom>
+          <a:noFill/>
+        </p:spPr>
+        <p:txBody>
+          <a:bodyPr wrap="square" anchor="t" lIns="18288" rIns="18288" tIns="18288" bIns="18288">
+            <a:spAutoFit/>
+          </a:bodyPr>
+          <a:lstStyle/>
+          <a:p>
+            <a:pPr algn="l">
+              <a:lnSpc>
+                <a:spcPct val="110000"/>
+              </a:lnSpc>
+              <a:spcAft>
+                <a:spcPts val="400"/>
+              </a:spcAft>
+            </a:pPr>
+            <a:r>
+              <a:rPr sz="900" b="0">
+                <a:solidFill>
+                  <a:srgbClr val="6B7086"/>
+                </a:solidFill>
+                <a:latin typeface="Segoe UI"/>
+              </a:rPr>
+              <a:t>DevTrack Todo  •  Jinesh Gandhi  •  DevOps Capstone</a:t>
+            </a:r>
+          </a:p>
+        </p:txBody>
+      </p:sp>
+      <p:sp>
+        <p:nvSpPr>
+          <p:cNvPr id="6" name="TextBox 5"/>
+          <p:cNvSpPr txBox="1"/>
+          <p:nvPr/>
+        </p:nvSpPr>
+        <p:spPr>
+          <a:xfrm>
+            <a:off x="10698480" y="6446520"/>
+            <a:ext cx="1005840" cy="274320"/>
+          </a:xfrm>
+          <a:prstGeom prst="rect">
+            <a:avLst/>
+          </a:prstGeom>
+          <a:noFill/>
+        </p:spPr>
+        <p:txBody>
+          <a:bodyPr wrap="square" anchor="t" lIns="18288" rIns="18288" tIns="18288" bIns="18288">
+            <a:spAutoFit/>
+          </a:bodyPr>
+          <a:lstStyle/>
+          <a:p>
+            <a:pPr algn="r">
+              <a:lnSpc>
+                <a:spcPct val="110000"/>
+              </a:lnSpc>
+              <a:spcAft>
+                <a:spcPts val="400"/>
+              </a:spcAft>
+            </a:pPr>
+            <a:r>
+              <a:rPr sz="900" b="0">
+                <a:solidFill>
+                  <a:srgbClr val="6B7086"/>
+                </a:solidFill>
+                <a:latin typeface="Segoe UI"/>
+              </a:rPr>
+              <a:t>16 / 17</a:t>
             </a:r>
           </a:p>
         </p:txBody>
@@ -8665,7 +10169,7 @@
                 </a:solidFill>
                 <a:latin typeface="Segoe UI"/>
               </a:rPr>
-              <a:t>Terraform-provisioned EKS, Helm release, Ingress, probes, Prometheus and Grafana.</a:t>
+              <a:t>Helm release on Kubernetes with Ingress, probes, Prometheus and Grafana; EKS defined in Terraform.</a:t>
             </a:r>
           </a:p>
         </p:txBody>
@@ -9092,7 +10596,7 @@
 </p:sld>
 </file>
 
-<file path=ppt/slides/slide15.xml><?xml version="1.0" encoding="utf-8"?>
+<file path=ppt/slides/slide17.xml><?xml version="1.0" encoding="utf-8"?>
 <p:sld xmlns:a="http://schemas.openxmlformats.org/drawingml/2006/main" xmlns:p="http://schemas.openxmlformats.org/presentationml/2006/main" xmlns:r="http://schemas.openxmlformats.org/officeDocument/2006/relationships">
   <p:cSld>
     <p:bg>
@@ -9970,7 +11474,7 @@
                 </a:solidFill>
                 <a:latin typeface="Segoe UI"/>
               </a:rPr>
-              <a:t>2 / 15</a:t>
+              <a:t>2 / 17</a:t>
             </a:r>
           </a:p>
         </p:txBody>
@@ -11348,7 +12852,7 @@
                 </a:solidFill>
                 <a:latin typeface="Segoe UI"/>
               </a:rPr>
-              <a:t>3 / 15</a:t>
+              <a:t>3 / 17</a:t>
             </a:r>
           </a:p>
         </p:txBody>
@@ -12354,7 +13858,7 @@
                 </a:solidFill>
                 <a:latin typeface="Segoe UI"/>
               </a:rPr>
-              <a:t>4 / 15</a:t>
+              <a:t>4 / 17</a:t>
             </a:r>
           </a:p>
         </p:txBody>
@@ -14518,7 +16022,7 @@
                 </a:solidFill>
                 <a:latin typeface="Segoe UI"/>
               </a:rPr>
-              <a:t>5 / 15</a:t>
+              <a:t>5 / 17</a:t>
             </a:r>
           </a:p>
         </p:txBody>
@@ -16812,7 +18316,7 @@
                 </a:solidFill>
                 <a:latin typeface="Segoe UI"/>
               </a:rPr>
-              <a:t>6 / 15</a:t>
+              <a:t>6 / 17</a:t>
             </a:r>
           </a:p>
         </p:txBody>
@@ -18420,7 +19924,7 @@
                 </a:solidFill>
                 <a:latin typeface="Segoe UI"/>
               </a:rPr>
-              <a:t>7 / 15</a:t>
+              <a:t>7 / 17</a:t>
             </a:r>
           </a:p>
         </p:txBody>
@@ -19281,7 +20785,7 @@
                 </a:solidFill>
                 <a:latin typeface="Segoe UI"/>
               </a:rPr>
-              <a:t>.github/workflows/ci.yml — nothing is pushed unless tests, build and the security scan pass.</a:t>
+              <a:t>.github/workflows/ci.yml — run #3 on commit 85c2edf: all five jobs green in 1 m 44 s.</a:t>
             </a:r>
           </a:p>
         </p:txBody>
@@ -19365,7 +20869,7 @@
                 </a:solidFill>
                 <a:latin typeface="Segoe UI"/>
               </a:rPr>
-              <a:t>8 / 15</a:t>
+              <a:t>8 / 17</a:t>
             </a:r>
           </a:p>
         </p:txBody>
@@ -20594,14 +22098,14 @@
                 <a:latin typeface="Segoe UI"/>
               </a:rPr>
               <a:t>pin SHA in Helm
-ArgoCD sync</a:t>
+values (GitOps)</a:t>
             </a:r>
           </a:p>
         </p:txBody>
       </p:sp>
       <p:pic>
         <p:nvPicPr>
-          <p:cNvPr id="37" name="Picture 36" descr="M6-trivy-scan.png"/>
+          <p:cNvPr id="37" name="Picture 36" descr="M5-github-actions-success.png"/>
           <p:cNvPicPr>
             <a:picLocks noChangeAspect="1"/>
           </p:cNvPicPr>
@@ -20609,14 +22113,15 @@
         </p:nvPicPr>
         <p:blipFill>
           <a:blip r:embed="rId2"/>
+          <a:srcRect b="18017"/>
           <a:stretch>
             <a:fillRect/>
           </a:stretch>
         </p:blipFill>
         <p:spPr>
           <a:xfrm>
-            <a:off x="548640" y="3719779"/>
-            <a:ext cx="6035040" cy="2253081"/>
+            <a:off x="548640" y="3429000"/>
+            <a:ext cx="5532120" cy="2834640"/>
           </a:xfrm>
           <a:prstGeom prst="rect">
             <a:avLst/>
@@ -20628,88 +22133,35 @@
           </a:ln>
         </p:spPr>
       </p:pic>
-      <p:sp>
-        <p:nvSpPr>
-          <p:cNvPr id="38" name="Rounded Rectangle 37"/>
-          <p:cNvSpPr/>
-          <p:nvPr/>
-        </p:nvSpPr>
-        <p:spPr>
-          <a:xfrm>
-            <a:off x="6812280" y="3429000"/>
-            <a:ext cx="4846320" cy="2834640"/>
-          </a:xfrm>
-          <a:prstGeom prst="roundRect">
-            <a:avLst>
-              <a:gd name="adj" fmla="val 8000"/>
-            </a:avLst>
-          </a:prstGeom>
-          <a:solidFill>
-            <a:srgbClr val="FFFFFF"/>
-          </a:solidFill>
+      <p:pic>
+        <p:nvPicPr>
+          <p:cNvPr id="38" name="Picture 37" descr="M6-trivy-scan.png"/>
+          <p:cNvPicPr>
+            <a:picLocks noChangeAspect="1"/>
+          </p:cNvPicPr>
+          <p:nvPr/>
+        </p:nvPicPr>
+        <p:blipFill>
+          <a:blip r:embed="rId3"/>
+          <a:stretch>
+            <a:fillRect/>
+          </a:stretch>
+        </p:blipFill>
+        <p:spPr>
+          <a:xfrm>
+            <a:off x="6263640" y="3839260"/>
+            <a:ext cx="5394960" cy="2014118"/>
+          </a:xfrm>
+          <a:prstGeom prst="rect">
+            <a:avLst/>
+          </a:prstGeom>
           <a:ln w="12700">
             <a:solidFill>
-              <a:srgbClr val="B4B8D0"/>
+              <a:srgbClr val="E4E6EF"/>
             </a:solidFill>
-            <a:prstDash val="lgDash"/>
           </a:ln>
-          <a:effectLst/>
-        </p:spPr>
-        <p:style>
-          <a:lnRef idx="1">
-            <a:schemeClr val="accent1"/>
-          </a:lnRef>
-          <a:fillRef idx="3">
-            <a:schemeClr val="accent1"/>
-          </a:fillRef>
-          <a:effectRef idx="2">
-            <a:schemeClr val="accent1"/>
-          </a:effectRef>
-          <a:fontRef idx="minor">
-            <a:schemeClr val="lt1"/>
-          </a:fontRef>
-        </p:style>
-        <p:txBody>
-          <a:bodyPr rtlCol="0" anchor="ctr" wrap="square" lIns="73152" rIns="73152"/>
-          <a:lstStyle/>
-          <a:p>
-            <a:pPr algn="ctr"/>
-            <a:r>
-              <a:rPr sz="1400" b="1">
-                <a:solidFill>
-                  <a:srgbClr val="4F46E5"/>
-                </a:solidFill>
-                <a:latin typeface="Segoe UI"/>
-              </a:rPr>
-              <a:t>📷  Add your screenshot</a:t>
-            </a:r>
-          </a:p>
-          <a:p>
-            <a:pPr algn="ctr"/>
-            <a:r>
-              <a:rPr sz="1200" b="0">
-                <a:solidFill>
-                  <a:srgbClr val="1C1F2E"/>
-                </a:solidFill>
-                <a:latin typeface="Segoe UI"/>
-              </a:rPr>
-              <a:t>Green GitHub Actions run + GHCR packages</a:t>
-            </a:r>
-          </a:p>
-          <a:p>
-            <a:pPr algn="ctr"/>
-            <a:r>
-              <a:rPr sz="1100" b="0">
-                <a:solidFill>
-                  <a:srgbClr val="6B7086"/>
-                </a:solidFill>
-                <a:latin typeface="Consolas"/>
-              </a:rPr>
-              <a:t>github.com/jineshgandhi79/Devops-capstone/actions</a:t>
-            </a:r>
-          </a:p>
-        </p:txBody>
-      </p:sp>
+        </p:spPr>
+      </p:pic>
     </p:spTree>
   </p:cSld>
   <p:clrMapOvr>
@@ -20817,7 +22269,7 @@
                 </a:solidFill>
                 <a:latin typeface="Segoe UI"/>
               </a:rPr>
-              <a:t>08 • INFRASTRUCTURE AS CODE</a:t>
+              <a:t>08 • REGISTRY &amp; GITOPS</a:t>
             </a:r>
           </a:p>
         </p:txBody>
@@ -20859,7 +22311,7 @@
                 </a:solidFill>
                 <a:latin typeface="Segoe UI"/>
               </a:rPr>
-              <a:t>Terraform builds the AWS foundation</a:t>
+              <a:t>Every green run publishes and pins an immutable image</a:t>
             </a:r>
           </a:p>
         </p:txBody>
@@ -20901,7 +22353,7 @@
                 </a:solidFill>
                 <a:latin typeface="Segoe UI"/>
               </a:rPr>
-              <a:t>Region ap-southeast-2 (Sydney) • terraform init → plan → apply → destroy</a:t>
+              <a:t>CI pushes ghcr.io/jineshgandhi79/devtrack-*:&lt;sha&gt;, then github-actions[bot] commits that SHA to helm/devtrack/values.yaml.</a:t>
             </a:r>
           </a:p>
         </p:txBody>
@@ -20985,1325 +22437,69 @@
                 </a:solidFill>
                 <a:latin typeface="Segoe UI"/>
               </a:rPr>
-              <a:t>9 / 15</a:t>
-            </a:r>
-          </a:p>
-        </p:txBody>
-      </p:sp>
-      <p:sp>
-        <p:nvSpPr>
-          <p:cNvPr id="8" name="Rounded Rectangle 7"/>
-          <p:cNvSpPr/>
-          <p:nvPr/>
-        </p:nvSpPr>
-        <p:spPr>
-          <a:xfrm>
-            <a:off x="548640" y="1737360"/>
-            <a:ext cx="6766560" cy="4526280"/>
-          </a:xfrm>
-          <a:prstGeom prst="roundRect">
-            <a:avLst>
-              <a:gd name="adj" fmla="val 8000"/>
-            </a:avLst>
-          </a:prstGeom>
-          <a:solidFill>
-            <a:srgbClr val="FFFFFF"/>
-          </a:solidFill>
-          <a:ln w="12700">
-            <a:solidFill>
-              <a:srgbClr val="0EA5E9"/>
-            </a:solidFill>
-          </a:ln>
-          <a:effectLst/>
-        </p:spPr>
-        <p:style>
-          <a:lnRef idx="1">
-            <a:schemeClr val="accent1"/>
-          </a:lnRef>
-          <a:fillRef idx="3">
-            <a:schemeClr val="accent1"/>
-          </a:fillRef>
-          <a:effectRef idx="2">
-            <a:schemeClr val="accent1"/>
-          </a:effectRef>
-          <a:fontRef idx="minor">
-            <a:schemeClr val="lt1"/>
-          </a:fontRef>
-        </p:style>
-        <p:txBody>
-          <a:bodyPr rtlCol="0" anchor="ctr"/>
-          <a:lstStyle/>
-          <a:p>
-            <a:pPr algn="ctr"/>
-          </a:p>
-        </p:txBody>
-      </p:sp>
-      <p:sp>
-        <p:nvSpPr>
-          <p:cNvPr id="9" name="TextBox 8"/>
-          <p:cNvSpPr txBox="1"/>
-          <p:nvPr/>
-        </p:nvSpPr>
-        <p:spPr>
-          <a:xfrm>
-            <a:off x="777240" y="1828800"/>
-            <a:ext cx="5486400" cy="365760"/>
-          </a:xfrm>
-          <a:prstGeom prst="rect">
-            <a:avLst/>
-          </a:prstGeom>
-          <a:noFill/>
-        </p:spPr>
-        <p:txBody>
-          <a:bodyPr wrap="square" anchor="t" lIns="18288" rIns="18288" tIns="18288" bIns="18288">
-            <a:spAutoFit/>
-          </a:bodyPr>
-          <a:lstStyle/>
-          <a:p>
-            <a:pPr algn="l">
-              <a:lnSpc>
-                <a:spcPct val="110000"/>
-              </a:lnSpc>
-              <a:spcAft>
-                <a:spcPts val="400"/>
-              </a:spcAft>
-            </a:pPr>
-            <a:r>
-              <a:rPr sz="1400" b="1">
-                <a:solidFill>
-                  <a:srgbClr val="0EA5E9"/>
-                </a:solidFill>
-                <a:latin typeface="Segoe UI"/>
-              </a:rPr>
-              <a:t>VPC  •  10.0.0.0/16</a:t>
-            </a:r>
-          </a:p>
-        </p:txBody>
-      </p:sp>
-      <p:sp>
-        <p:nvSpPr>
-          <p:cNvPr id="10" name="Rounded Rectangle 9"/>
-          <p:cNvSpPr/>
-          <p:nvPr/>
-        </p:nvSpPr>
-        <p:spPr>
-          <a:xfrm>
-            <a:off x="822960" y="2286000"/>
-            <a:ext cx="3063240" cy="3749039"/>
-          </a:xfrm>
-          <a:prstGeom prst="roundRect">
-            <a:avLst>
-              <a:gd name="adj" fmla="val 8000"/>
-            </a:avLst>
-          </a:prstGeom>
-          <a:solidFill>
-            <a:srgbClr val="F4F5FB"/>
-          </a:solidFill>
+              <a:t>9 / 17</a:t>
+            </a:r>
+          </a:p>
+        </p:txBody>
+      </p:sp>
+      <p:pic>
+        <p:nvPicPr>
+          <p:cNvPr id="8" name="Picture 7" descr="M3-github-commit-history.png"/>
+          <p:cNvPicPr>
+            <a:picLocks noChangeAspect="1"/>
+          </p:cNvPicPr>
+          <p:nvPr/>
+        </p:nvPicPr>
+        <p:blipFill>
+          <a:blip r:embed="rId2"/>
+          <a:stretch>
+            <a:fillRect/>
+          </a:stretch>
+        </p:blipFill>
+        <p:spPr>
+          <a:xfrm>
+            <a:off x="548640" y="2271712"/>
+            <a:ext cx="5532120" cy="3457574"/>
+          </a:xfrm>
+          <a:prstGeom prst="rect">
+            <a:avLst/>
+          </a:prstGeom>
           <a:ln w="12700">
             <a:solidFill>
               <a:srgbClr val="E4E6EF"/>
             </a:solidFill>
           </a:ln>
-          <a:effectLst/>
-        </p:spPr>
-        <p:style>
-          <a:lnRef idx="1">
-            <a:schemeClr val="accent1"/>
-          </a:lnRef>
-          <a:fillRef idx="3">
-            <a:schemeClr val="accent1"/>
-          </a:fillRef>
-          <a:effectRef idx="2">
-            <a:schemeClr val="accent1"/>
-          </a:effectRef>
-          <a:fontRef idx="minor">
-            <a:schemeClr val="lt1"/>
-          </a:fontRef>
-        </p:style>
-        <p:txBody>
-          <a:bodyPr rtlCol="0" anchor="ctr"/>
-          <a:lstStyle/>
-          <a:p>
-            <a:pPr algn="ctr"/>
-          </a:p>
-        </p:txBody>
-      </p:sp>
-      <p:sp>
-        <p:nvSpPr>
-          <p:cNvPr id="11" name="TextBox 10"/>
-          <p:cNvSpPr txBox="1"/>
-          <p:nvPr/>
-        </p:nvSpPr>
-        <p:spPr>
-          <a:xfrm>
-            <a:off x="1005840" y="2377440"/>
-            <a:ext cx="1828800" cy="274320"/>
-          </a:xfrm>
-          <a:prstGeom prst="rect">
-            <a:avLst/>
-          </a:prstGeom>
-          <a:noFill/>
-        </p:spPr>
-        <p:txBody>
-          <a:bodyPr wrap="square" anchor="t" lIns="18288" rIns="18288" tIns="18288" bIns="18288">
-            <a:spAutoFit/>
-          </a:bodyPr>
-          <a:lstStyle/>
-          <a:p>
-            <a:pPr algn="l">
-              <a:lnSpc>
-                <a:spcPct val="110000"/>
-              </a:lnSpc>
-              <a:spcAft>
-                <a:spcPts val="400"/>
-              </a:spcAft>
-            </a:pPr>
-            <a:r>
-              <a:rPr sz="1100" b="1">
-                <a:solidFill>
-                  <a:srgbClr val="6B7086"/>
-                </a:solidFill>
-                <a:latin typeface="Segoe UI"/>
-              </a:rPr>
-              <a:t>AZ a</a:t>
-            </a:r>
-          </a:p>
-        </p:txBody>
-      </p:sp>
-      <p:sp>
-        <p:nvSpPr>
-          <p:cNvPr id="12" name="Rounded Rectangle 11"/>
-          <p:cNvSpPr/>
-          <p:nvPr/>
-        </p:nvSpPr>
-        <p:spPr>
-          <a:xfrm>
-            <a:off x="1005840" y="2743200"/>
-            <a:ext cx="2697480" cy="1051560"/>
-          </a:xfrm>
-          <a:prstGeom prst="roundRect">
-            <a:avLst>
-              <a:gd name="adj" fmla="val 8000"/>
-            </a:avLst>
-          </a:prstGeom>
-          <a:solidFill>
-            <a:srgbClr val="E0F2FE"/>
-          </a:solidFill>
-          <a:ln>
-            <a:noFill/>
-          </a:ln>
-          <a:effectLst/>
-        </p:spPr>
-        <p:style>
-          <a:lnRef idx="1">
-            <a:schemeClr val="accent1"/>
-          </a:lnRef>
-          <a:fillRef idx="3">
-            <a:schemeClr val="accent1"/>
-          </a:fillRef>
-          <a:effectRef idx="2">
-            <a:schemeClr val="accent1"/>
-          </a:effectRef>
-          <a:fontRef idx="minor">
-            <a:schemeClr val="lt1"/>
-          </a:fontRef>
-        </p:style>
-        <p:txBody>
-          <a:bodyPr rtlCol="0" anchor="ctr" wrap="square" lIns="73152" rIns="73152"/>
-          <a:lstStyle/>
-          <a:p>
-            <a:pPr algn="ctr"/>
-            <a:r>
-              <a:rPr sz="1200" b="1">
-                <a:solidFill>
-                  <a:srgbClr val="1C1F2E"/>
-                </a:solidFill>
-                <a:latin typeface="Segoe UI"/>
-              </a:rPr>
-              <a:t>Public subnet</a:t>
-            </a:r>
-          </a:p>
-          <a:p>
-            <a:pPr algn="ctr"/>
-            <a:r>
-              <a:rPr sz="1100" b="0">
-                <a:solidFill>
-                  <a:srgbClr val="6B7086"/>
-                </a:solidFill>
-                <a:latin typeface="Consolas"/>
-              </a:rPr>
-              <a:t>10.0.1.0/24</a:t>
-            </a:r>
-          </a:p>
-          <a:p>
-            <a:pPr algn="ctr"/>
-            <a:r>
-              <a:rPr sz="1000" b="0">
-                <a:solidFill>
-                  <a:srgbClr val="6B7086"/>
-                </a:solidFill>
-                <a:latin typeface="Segoe UI"/>
-              </a:rPr>
-              <a:t>IGW + NAT gateway</a:t>
-            </a:r>
-          </a:p>
-        </p:txBody>
-      </p:sp>
-      <p:sp>
-        <p:nvSpPr>
-          <p:cNvPr id="13" name="Rounded Rectangle 12"/>
-          <p:cNvSpPr/>
-          <p:nvPr/>
-        </p:nvSpPr>
-        <p:spPr>
-          <a:xfrm>
-            <a:off x="1005840" y="3977639"/>
-            <a:ext cx="2697480" cy="1874519"/>
-          </a:xfrm>
-          <a:prstGeom prst="roundRect">
-            <a:avLst>
-              <a:gd name="adj" fmla="val 8000"/>
-            </a:avLst>
-          </a:prstGeom>
-          <a:solidFill>
-            <a:srgbClr val="D1FAE5"/>
-          </a:solidFill>
-          <a:ln>
-            <a:noFill/>
-          </a:ln>
-          <a:effectLst/>
-        </p:spPr>
-        <p:style>
-          <a:lnRef idx="1">
-            <a:schemeClr val="accent1"/>
-          </a:lnRef>
-          <a:fillRef idx="3">
-            <a:schemeClr val="accent1"/>
-          </a:fillRef>
-          <a:effectRef idx="2">
-            <a:schemeClr val="accent1"/>
-          </a:effectRef>
-          <a:fontRef idx="minor">
-            <a:schemeClr val="lt1"/>
-          </a:fontRef>
-        </p:style>
-        <p:txBody>
-          <a:bodyPr rtlCol="0" anchor="ctr" wrap="square" lIns="73152" rIns="73152"/>
-          <a:lstStyle/>
-          <a:p>
-            <a:pPr algn="ctr"/>
-            <a:r>
-              <a:rPr sz="1200" b="1">
-                <a:solidFill>
-                  <a:srgbClr val="1C1F2E"/>
-                </a:solidFill>
-                <a:latin typeface="Segoe UI"/>
-              </a:rPr>
-              <a:t>Private subnet</a:t>
-            </a:r>
-          </a:p>
-          <a:p>
-            <a:pPr algn="ctr"/>
-            <a:r>
-              <a:rPr sz="1100" b="0">
-                <a:solidFill>
-                  <a:srgbClr val="6B7086"/>
-                </a:solidFill>
-                <a:latin typeface="Consolas"/>
-              </a:rPr>
-              <a:t>10.0.10.0/24</a:t>
-            </a:r>
-          </a:p>
-          <a:p>
-            <a:pPr algn="ctr"/>
-            <a:r>
-              <a:rPr sz="1000" b="0">
-                <a:solidFill>
-                  <a:srgbClr val="6B7086"/>
-                </a:solidFill>
-                <a:latin typeface="Segoe UI"/>
-              </a:rPr>
-              <a:t>EKS worker nodes</a:t>
-            </a:r>
-          </a:p>
-          <a:p>
-            <a:pPr algn="ctr"/>
-            <a:r>
-              <a:rPr sz="1000" b="0">
-                <a:solidFill>
-                  <a:srgbClr val="6B7086"/>
-                </a:solidFill>
-                <a:latin typeface="Segoe UI"/>
-              </a:rPr>
-              <a:t>t3.medium (AL2023)</a:t>
-            </a:r>
-          </a:p>
-        </p:txBody>
-      </p:sp>
-      <p:sp>
-        <p:nvSpPr>
-          <p:cNvPr id="14" name="Rounded Rectangle 13"/>
-          <p:cNvSpPr/>
-          <p:nvPr/>
-        </p:nvSpPr>
-        <p:spPr>
-          <a:xfrm>
-            <a:off x="4069080" y="2286000"/>
-            <a:ext cx="3063240" cy="3749039"/>
-          </a:xfrm>
-          <a:prstGeom prst="roundRect">
-            <a:avLst>
-              <a:gd name="adj" fmla="val 8000"/>
-            </a:avLst>
-          </a:prstGeom>
-          <a:solidFill>
-            <a:srgbClr val="F4F5FB"/>
-          </a:solidFill>
+        </p:spPr>
+      </p:pic>
+      <p:pic>
+        <p:nvPicPr>
+          <p:cNvPr id="9" name="Picture 8" descr="M5-ghcr-packages.png"/>
+          <p:cNvPicPr>
+            <a:picLocks noChangeAspect="1"/>
+          </p:cNvPicPr>
+          <p:nvPr/>
+        </p:nvPicPr>
+        <p:blipFill>
+          <a:blip r:embed="rId3"/>
+          <a:stretch>
+            <a:fillRect/>
+          </a:stretch>
+        </p:blipFill>
+        <p:spPr>
+          <a:xfrm>
+            <a:off x="6263640" y="2314575"/>
+            <a:ext cx="5394960" cy="3371850"/>
+          </a:xfrm>
+          <a:prstGeom prst="rect">
+            <a:avLst/>
+          </a:prstGeom>
           <a:ln w="12700">
             <a:solidFill>
               <a:srgbClr val="E4E6EF"/>
             </a:solidFill>
           </a:ln>
-          <a:effectLst/>
-        </p:spPr>
-        <p:style>
-          <a:lnRef idx="1">
-            <a:schemeClr val="accent1"/>
-          </a:lnRef>
-          <a:fillRef idx="3">
-            <a:schemeClr val="accent1"/>
-          </a:fillRef>
-          <a:effectRef idx="2">
-            <a:schemeClr val="accent1"/>
-          </a:effectRef>
-          <a:fontRef idx="minor">
-            <a:schemeClr val="lt1"/>
-          </a:fontRef>
-        </p:style>
-        <p:txBody>
-          <a:bodyPr rtlCol="0" anchor="ctr"/>
-          <a:lstStyle/>
-          <a:p>
-            <a:pPr algn="ctr"/>
-          </a:p>
-        </p:txBody>
-      </p:sp>
-      <p:sp>
-        <p:nvSpPr>
-          <p:cNvPr id="15" name="TextBox 14"/>
-          <p:cNvSpPr txBox="1"/>
-          <p:nvPr/>
-        </p:nvSpPr>
-        <p:spPr>
-          <a:xfrm>
-            <a:off x="4251960" y="2377440"/>
-            <a:ext cx="1828800" cy="274320"/>
-          </a:xfrm>
-          <a:prstGeom prst="rect">
-            <a:avLst/>
-          </a:prstGeom>
-          <a:noFill/>
-        </p:spPr>
-        <p:txBody>
-          <a:bodyPr wrap="square" anchor="t" lIns="18288" rIns="18288" tIns="18288" bIns="18288">
-            <a:spAutoFit/>
-          </a:bodyPr>
-          <a:lstStyle/>
-          <a:p>
-            <a:pPr algn="l">
-              <a:lnSpc>
-                <a:spcPct val="110000"/>
-              </a:lnSpc>
-              <a:spcAft>
-                <a:spcPts val="400"/>
-              </a:spcAft>
-            </a:pPr>
-            <a:r>
-              <a:rPr sz="1100" b="1">
-                <a:solidFill>
-                  <a:srgbClr val="6B7086"/>
-                </a:solidFill>
-                <a:latin typeface="Segoe UI"/>
-              </a:rPr>
-              <a:t>AZ b</a:t>
-            </a:r>
-          </a:p>
-        </p:txBody>
-      </p:sp>
-      <p:sp>
-        <p:nvSpPr>
-          <p:cNvPr id="16" name="Rounded Rectangle 15"/>
-          <p:cNvSpPr/>
-          <p:nvPr/>
-        </p:nvSpPr>
-        <p:spPr>
-          <a:xfrm>
-            <a:off x="4251960" y="2743200"/>
-            <a:ext cx="2697480" cy="1051560"/>
-          </a:xfrm>
-          <a:prstGeom prst="roundRect">
-            <a:avLst>
-              <a:gd name="adj" fmla="val 8000"/>
-            </a:avLst>
-          </a:prstGeom>
-          <a:solidFill>
-            <a:srgbClr val="E0F2FE"/>
-          </a:solidFill>
-          <a:ln>
-            <a:noFill/>
-          </a:ln>
-          <a:effectLst/>
-        </p:spPr>
-        <p:style>
-          <a:lnRef idx="1">
-            <a:schemeClr val="accent1"/>
-          </a:lnRef>
-          <a:fillRef idx="3">
-            <a:schemeClr val="accent1"/>
-          </a:fillRef>
-          <a:effectRef idx="2">
-            <a:schemeClr val="accent1"/>
-          </a:effectRef>
-          <a:fontRef idx="minor">
-            <a:schemeClr val="lt1"/>
-          </a:fontRef>
-        </p:style>
-        <p:txBody>
-          <a:bodyPr rtlCol="0" anchor="ctr" wrap="square" lIns="73152" rIns="73152"/>
-          <a:lstStyle/>
-          <a:p>
-            <a:pPr algn="ctr"/>
-            <a:r>
-              <a:rPr sz="1200" b="1">
-                <a:solidFill>
-                  <a:srgbClr val="1C1F2E"/>
-                </a:solidFill>
-                <a:latin typeface="Segoe UI"/>
-              </a:rPr>
-              <a:t>Public subnet</a:t>
-            </a:r>
-          </a:p>
-          <a:p>
-            <a:pPr algn="ctr"/>
-            <a:r>
-              <a:rPr sz="1100" b="0">
-                <a:solidFill>
-                  <a:srgbClr val="6B7086"/>
-                </a:solidFill>
-                <a:latin typeface="Consolas"/>
-              </a:rPr>
-              <a:t>10.0.2.0/24</a:t>
-            </a:r>
-          </a:p>
-          <a:p>
-            <a:pPr algn="ctr"/>
-            <a:r>
-              <a:rPr sz="1000" b="0">
-                <a:solidFill>
-                  <a:srgbClr val="6B7086"/>
-                </a:solidFill>
-                <a:latin typeface="Segoe UI"/>
-              </a:rPr>
-              <a:t>IGW</a:t>
-            </a:r>
-          </a:p>
-        </p:txBody>
-      </p:sp>
-      <p:sp>
-        <p:nvSpPr>
-          <p:cNvPr id="17" name="Rounded Rectangle 16"/>
-          <p:cNvSpPr/>
-          <p:nvPr/>
-        </p:nvSpPr>
-        <p:spPr>
-          <a:xfrm>
-            <a:off x="4251960" y="3977639"/>
-            <a:ext cx="2697480" cy="1874519"/>
-          </a:xfrm>
-          <a:prstGeom prst="roundRect">
-            <a:avLst>
-              <a:gd name="adj" fmla="val 8000"/>
-            </a:avLst>
-          </a:prstGeom>
-          <a:solidFill>
-            <a:srgbClr val="D1FAE5"/>
-          </a:solidFill>
-          <a:ln>
-            <a:noFill/>
-          </a:ln>
-          <a:effectLst/>
-        </p:spPr>
-        <p:style>
-          <a:lnRef idx="1">
-            <a:schemeClr val="accent1"/>
-          </a:lnRef>
-          <a:fillRef idx="3">
-            <a:schemeClr val="accent1"/>
-          </a:fillRef>
-          <a:effectRef idx="2">
-            <a:schemeClr val="accent1"/>
-          </a:effectRef>
-          <a:fontRef idx="minor">
-            <a:schemeClr val="lt1"/>
-          </a:fontRef>
-        </p:style>
-        <p:txBody>
-          <a:bodyPr rtlCol="0" anchor="ctr" wrap="square" lIns="73152" rIns="73152"/>
-          <a:lstStyle/>
-          <a:p>
-            <a:pPr algn="ctr"/>
-            <a:r>
-              <a:rPr sz="1200" b="1">
-                <a:solidFill>
-                  <a:srgbClr val="1C1F2E"/>
-                </a:solidFill>
-                <a:latin typeface="Segoe UI"/>
-              </a:rPr>
-              <a:t>Private subnet</a:t>
-            </a:r>
-          </a:p>
-          <a:p>
-            <a:pPr algn="ctr"/>
-            <a:r>
-              <a:rPr sz="1100" b="0">
-                <a:solidFill>
-                  <a:srgbClr val="6B7086"/>
-                </a:solidFill>
-                <a:latin typeface="Consolas"/>
-              </a:rPr>
-              <a:t>10.0.11.0/24</a:t>
-            </a:r>
-          </a:p>
-          <a:p>
-            <a:pPr algn="ctr"/>
-            <a:r>
-              <a:rPr sz="1000" b="0">
-                <a:solidFill>
-                  <a:srgbClr val="6B7086"/>
-                </a:solidFill>
-                <a:latin typeface="Segoe UI"/>
-              </a:rPr>
-              <a:t>EKS worker nodes</a:t>
-            </a:r>
-          </a:p>
-          <a:p>
-            <a:pPr algn="ctr"/>
-            <a:r>
-              <a:rPr sz="1000" b="0">
-                <a:solidFill>
-                  <a:srgbClr val="6B7086"/>
-                </a:solidFill>
-                <a:latin typeface="Segoe UI"/>
-              </a:rPr>
-              <a:t>t3.medium (AL2023)</a:t>
-            </a:r>
-          </a:p>
-        </p:txBody>
-      </p:sp>
-      <p:sp>
-        <p:nvSpPr>
-          <p:cNvPr id="18" name="Rounded Rectangle 17"/>
-          <p:cNvSpPr/>
-          <p:nvPr/>
-        </p:nvSpPr>
-        <p:spPr>
-          <a:xfrm>
-            <a:off x="7589520" y="1737360"/>
-            <a:ext cx="4069080" cy="1005840"/>
-          </a:xfrm>
-          <a:prstGeom prst="roundRect">
-            <a:avLst>
-              <a:gd name="adj" fmla="val 8000"/>
-            </a:avLst>
-          </a:prstGeom>
-          <a:solidFill>
-            <a:srgbClr val="FFFFFF"/>
-          </a:solidFill>
-          <a:ln w="12700">
-            <a:solidFill>
-              <a:srgbClr val="E4E6EF"/>
-            </a:solidFill>
-          </a:ln>
-          <a:effectLst/>
-        </p:spPr>
-        <p:style>
-          <a:lnRef idx="1">
-            <a:schemeClr val="accent1"/>
-          </a:lnRef>
-          <a:fillRef idx="3">
-            <a:schemeClr val="accent1"/>
-          </a:fillRef>
-          <a:effectRef idx="2">
-            <a:schemeClr val="accent1"/>
-          </a:effectRef>
-          <a:fontRef idx="minor">
-            <a:schemeClr val="lt1"/>
-          </a:fontRef>
-        </p:style>
-        <p:txBody>
-          <a:bodyPr rtlCol="0" anchor="ctr"/>
-          <a:lstStyle/>
-          <a:p>
-            <a:pPr algn="ctr"/>
-          </a:p>
-        </p:txBody>
-      </p:sp>
-      <p:sp>
-        <p:nvSpPr>
-          <p:cNvPr id="19" name="Rectangle 18"/>
-          <p:cNvSpPr/>
-          <p:nvPr/>
-        </p:nvSpPr>
-        <p:spPr>
-          <a:xfrm>
-            <a:off x="7589520" y="1901952"/>
-            <a:ext cx="54864" cy="676656"/>
-          </a:xfrm>
-          <a:prstGeom prst="rect">
-            <a:avLst/>
-          </a:prstGeom>
-          <a:solidFill>
-            <a:srgbClr val="0EA5E9"/>
-          </a:solidFill>
-          <a:ln>
-            <a:noFill/>
-          </a:ln>
-          <a:effectLst/>
-        </p:spPr>
-        <p:style>
-          <a:lnRef idx="1">
-            <a:schemeClr val="accent1"/>
-          </a:lnRef>
-          <a:fillRef idx="3">
-            <a:schemeClr val="accent1"/>
-          </a:fillRef>
-          <a:effectRef idx="2">
-            <a:schemeClr val="accent1"/>
-          </a:effectRef>
-          <a:fontRef idx="minor">
-            <a:schemeClr val="lt1"/>
-          </a:fontRef>
-        </p:style>
-        <p:txBody>
-          <a:bodyPr rtlCol="0" anchor="ctr"/>
-          <a:lstStyle/>
-          <a:p>
-            <a:pPr algn="ctr"/>
-          </a:p>
-        </p:txBody>
-      </p:sp>
-      <p:sp>
-        <p:nvSpPr>
-          <p:cNvPr id="20" name="TextBox 19"/>
-          <p:cNvSpPr txBox="1"/>
-          <p:nvPr/>
-        </p:nvSpPr>
-        <p:spPr>
-          <a:xfrm>
-            <a:off x="7818120" y="1874519"/>
-            <a:ext cx="3703320" cy="365760"/>
-          </a:xfrm>
-          <a:prstGeom prst="rect">
-            <a:avLst/>
-          </a:prstGeom>
-          <a:noFill/>
-        </p:spPr>
-        <p:txBody>
-          <a:bodyPr wrap="square" anchor="t" lIns="18288" rIns="18288" tIns="18288" bIns="18288">
-            <a:spAutoFit/>
-          </a:bodyPr>
-          <a:lstStyle/>
-          <a:p>
-            <a:pPr algn="l">
-              <a:lnSpc>
-                <a:spcPct val="110000"/>
-              </a:lnSpc>
-              <a:spcAft>
-                <a:spcPts val="400"/>
-              </a:spcAft>
-            </a:pPr>
-            <a:r>
-              <a:rPr sz="1300" b="1">
-                <a:solidFill>
-                  <a:srgbClr val="1C1F2E"/>
-                </a:solidFill>
-                <a:latin typeface="Segoe UI"/>
-              </a:rPr>
-              <a:t>EKS control plane</a:t>
-            </a:r>
-          </a:p>
-        </p:txBody>
-      </p:sp>
-      <p:sp>
-        <p:nvSpPr>
-          <p:cNvPr id="21" name="TextBox 20"/>
-          <p:cNvSpPr txBox="1"/>
-          <p:nvPr/>
-        </p:nvSpPr>
-        <p:spPr>
-          <a:xfrm>
-            <a:off x="7818120" y="2240280"/>
-            <a:ext cx="3703320" cy="411480"/>
-          </a:xfrm>
-          <a:prstGeom prst="rect">
-            <a:avLst/>
-          </a:prstGeom>
-          <a:noFill/>
-        </p:spPr>
-        <p:txBody>
-          <a:bodyPr wrap="square" anchor="t" lIns="18288" rIns="18288" tIns="18288" bIns="18288">
-            <a:spAutoFit/>
-          </a:bodyPr>
-          <a:lstStyle/>
-          <a:p>
-            <a:pPr algn="l">
-              <a:lnSpc>
-                <a:spcPct val="115000"/>
-              </a:lnSpc>
-              <a:spcAft>
-                <a:spcPts val="400"/>
-              </a:spcAft>
-            </a:pPr>
-            <a:r>
-              <a:rPr sz="1000" b="0">
-                <a:solidFill>
-                  <a:srgbClr val="6B7086"/>
-                </a:solidFill>
-                <a:latin typeface="Segoe UI"/>
-              </a:rPr>
-              <a:t>devtrack-eks-cluster with least-privilege IAM roles</a:t>
-            </a:r>
-          </a:p>
-        </p:txBody>
-      </p:sp>
-      <p:sp>
-        <p:nvSpPr>
-          <p:cNvPr id="22" name="Rounded Rectangle 21"/>
-          <p:cNvSpPr/>
-          <p:nvPr/>
-        </p:nvSpPr>
-        <p:spPr>
-          <a:xfrm>
-            <a:off x="7589520" y="2880360"/>
-            <a:ext cx="4069080" cy="1005840"/>
-          </a:xfrm>
-          <a:prstGeom prst="roundRect">
-            <a:avLst>
-              <a:gd name="adj" fmla="val 8000"/>
-            </a:avLst>
-          </a:prstGeom>
-          <a:solidFill>
-            <a:srgbClr val="FFFFFF"/>
-          </a:solidFill>
-          <a:ln w="12700">
-            <a:solidFill>
-              <a:srgbClr val="E4E6EF"/>
-            </a:solidFill>
-          </a:ln>
-          <a:effectLst/>
-        </p:spPr>
-        <p:style>
-          <a:lnRef idx="1">
-            <a:schemeClr val="accent1"/>
-          </a:lnRef>
-          <a:fillRef idx="3">
-            <a:schemeClr val="accent1"/>
-          </a:fillRef>
-          <a:effectRef idx="2">
-            <a:schemeClr val="accent1"/>
-          </a:effectRef>
-          <a:fontRef idx="minor">
-            <a:schemeClr val="lt1"/>
-          </a:fontRef>
-        </p:style>
-        <p:txBody>
-          <a:bodyPr rtlCol="0" anchor="ctr"/>
-          <a:lstStyle/>
-          <a:p>
-            <a:pPr algn="ctr"/>
-          </a:p>
-        </p:txBody>
-      </p:sp>
-      <p:sp>
-        <p:nvSpPr>
-          <p:cNvPr id="23" name="Rectangle 22"/>
-          <p:cNvSpPr/>
-          <p:nvPr/>
-        </p:nvSpPr>
-        <p:spPr>
-          <a:xfrm>
-            <a:off x="7589520" y="3044952"/>
-            <a:ext cx="54864" cy="676656"/>
-          </a:xfrm>
-          <a:prstGeom prst="rect">
-            <a:avLst/>
-          </a:prstGeom>
-          <a:solidFill>
-            <a:srgbClr val="10B981"/>
-          </a:solidFill>
-          <a:ln>
-            <a:noFill/>
-          </a:ln>
-          <a:effectLst/>
-        </p:spPr>
-        <p:style>
-          <a:lnRef idx="1">
-            <a:schemeClr val="accent1"/>
-          </a:lnRef>
-          <a:fillRef idx="3">
-            <a:schemeClr val="accent1"/>
-          </a:fillRef>
-          <a:effectRef idx="2">
-            <a:schemeClr val="accent1"/>
-          </a:effectRef>
-          <a:fontRef idx="minor">
-            <a:schemeClr val="lt1"/>
-          </a:fontRef>
-        </p:style>
-        <p:txBody>
-          <a:bodyPr rtlCol="0" anchor="ctr"/>
-          <a:lstStyle/>
-          <a:p>
-            <a:pPr algn="ctr"/>
-          </a:p>
-        </p:txBody>
-      </p:sp>
-      <p:sp>
-        <p:nvSpPr>
-          <p:cNvPr id="24" name="TextBox 23"/>
-          <p:cNvSpPr txBox="1"/>
-          <p:nvPr/>
-        </p:nvSpPr>
-        <p:spPr>
-          <a:xfrm>
-            <a:off x="7818120" y="3017520"/>
-            <a:ext cx="3703320" cy="365760"/>
-          </a:xfrm>
-          <a:prstGeom prst="rect">
-            <a:avLst/>
-          </a:prstGeom>
-          <a:noFill/>
-        </p:spPr>
-        <p:txBody>
-          <a:bodyPr wrap="square" anchor="t" lIns="18288" rIns="18288" tIns="18288" bIns="18288">
-            <a:spAutoFit/>
-          </a:bodyPr>
-          <a:lstStyle/>
-          <a:p>
-            <a:pPr algn="l">
-              <a:lnSpc>
-                <a:spcPct val="110000"/>
-              </a:lnSpc>
-              <a:spcAft>
-                <a:spcPts val="400"/>
-              </a:spcAft>
-            </a:pPr>
-            <a:r>
-              <a:rPr sz="1300" b="1">
-                <a:solidFill>
-                  <a:srgbClr val="1C1F2E"/>
-                </a:solidFill>
-                <a:latin typeface="Segoe UI"/>
-              </a:rPr>
-              <a:t>Managed node group</a:t>
-            </a:r>
-          </a:p>
-        </p:txBody>
-      </p:sp>
-      <p:sp>
-        <p:nvSpPr>
-          <p:cNvPr id="25" name="TextBox 24"/>
-          <p:cNvSpPr txBox="1"/>
-          <p:nvPr/>
-        </p:nvSpPr>
-        <p:spPr>
-          <a:xfrm>
-            <a:off x="7818120" y="3383280"/>
-            <a:ext cx="3703320" cy="411480"/>
-          </a:xfrm>
-          <a:prstGeom prst="rect">
-            <a:avLst/>
-          </a:prstGeom>
-          <a:noFill/>
-        </p:spPr>
-        <p:txBody>
-          <a:bodyPr wrap="square" anchor="t" lIns="18288" rIns="18288" tIns="18288" bIns="18288">
-            <a:spAutoFit/>
-          </a:bodyPr>
-          <a:lstStyle/>
-          <a:p>
-            <a:pPr algn="l">
-              <a:lnSpc>
-                <a:spcPct val="115000"/>
-              </a:lnSpc>
-              <a:spcAft>
-                <a:spcPts val="400"/>
-              </a:spcAft>
-            </a:pPr>
-            <a:r>
-              <a:rPr sz="1000" b="0">
-                <a:solidFill>
-                  <a:srgbClr val="6B7086"/>
-                </a:solidFill>
-                <a:latin typeface="Segoe UI"/>
-              </a:rPr>
-              <a:t>Auto-scaling 1–3 t3.medium nodes in private subnets</a:t>
-            </a:r>
-          </a:p>
-        </p:txBody>
-      </p:sp>
-      <p:sp>
-        <p:nvSpPr>
-          <p:cNvPr id="26" name="Rounded Rectangle 25"/>
-          <p:cNvSpPr/>
-          <p:nvPr/>
-        </p:nvSpPr>
-        <p:spPr>
-          <a:xfrm>
-            <a:off x="7589520" y="4023360"/>
-            <a:ext cx="4069080" cy="1005840"/>
-          </a:xfrm>
-          <a:prstGeom prst="roundRect">
-            <a:avLst>
-              <a:gd name="adj" fmla="val 8000"/>
-            </a:avLst>
-          </a:prstGeom>
-          <a:solidFill>
-            <a:srgbClr val="FFFFFF"/>
-          </a:solidFill>
-          <a:ln w="12700">
-            <a:solidFill>
-              <a:srgbClr val="E4E6EF"/>
-            </a:solidFill>
-          </a:ln>
-          <a:effectLst/>
-        </p:spPr>
-        <p:style>
-          <a:lnRef idx="1">
-            <a:schemeClr val="accent1"/>
-          </a:lnRef>
-          <a:fillRef idx="3">
-            <a:schemeClr val="accent1"/>
-          </a:fillRef>
-          <a:effectRef idx="2">
-            <a:schemeClr val="accent1"/>
-          </a:effectRef>
-          <a:fontRef idx="minor">
-            <a:schemeClr val="lt1"/>
-          </a:fontRef>
-        </p:style>
-        <p:txBody>
-          <a:bodyPr rtlCol="0" anchor="ctr"/>
-          <a:lstStyle/>
-          <a:p>
-            <a:pPr algn="ctr"/>
-          </a:p>
-        </p:txBody>
-      </p:sp>
-      <p:sp>
-        <p:nvSpPr>
-          <p:cNvPr id="27" name="Rectangle 26"/>
-          <p:cNvSpPr/>
-          <p:nvPr/>
-        </p:nvSpPr>
-        <p:spPr>
-          <a:xfrm>
-            <a:off x="7589520" y="4187952"/>
-            <a:ext cx="54864" cy="676656"/>
-          </a:xfrm>
-          <a:prstGeom prst="rect">
-            <a:avLst/>
-          </a:prstGeom>
-          <a:solidFill>
-            <a:srgbClr val="F59E0B"/>
-          </a:solidFill>
-          <a:ln>
-            <a:noFill/>
-          </a:ln>
-          <a:effectLst/>
-        </p:spPr>
-        <p:style>
-          <a:lnRef idx="1">
-            <a:schemeClr val="accent1"/>
-          </a:lnRef>
-          <a:fillRef idx="3">
-            <a:schemeClr val="accent1"/>
-          </a:fillRef>
-          <a:effectRef idx="2">
-            <a:schemeClr val="accent1"/>
-          </a:effectRef>
-          <a:fontRef idx="minor">
-            <a:schemeClr val="lt1"/>
-          </a:fontRef>
-        </p:style>
-        <p:txBody>
-          <a:bodyPr rtlCol="0" anchor="ctr"/>
-          <a:lstStyle/>
-          <a:p>
-            <a:pPr algn="ctr"/>
-          </a:p>
-        </p:txBody>
-      </p:sp>
-      <p:sp>
-        <p:nvSpPr>
-          <p:cNvPr id="28" name="TextBox 27"/>
-          <p:cNvSpPr txBox="1"/>
-          <p:nvPr/>
-        </p:nvSpPr>
-        <p:spPr>
-          <a:xfrm>
-            <a:off x="7818120" y="4160520"/>
-            <a:ext cx="3703320" cy="365760"/>
-          </a:xfrm>
-          <a:prstGeom prst="rect">
-            <a:avLst/>
-          </a:prstGeom>
-          <a:noFill/>
-        </p:spPr>
-        <p:txBody>
-          <a:bodyPr wrap="square" anchor="t" lIns="18288" rIns="18288" tIns="18288" bIns="18288">
-            <a:spAutoFit/>
-          </a:bodyPr>
-          <a:lstStyle/>
-          <a:p>
-            <a:pPr algn="l">
-              <a:lnSpc>
-                <a:spcPct val="110000"/>
-              </a:lnSpc>
-              <a:spcAft>
-                <a:spcPts val="400"/>
-              </a:spcAft>
-            </a:pPr>
-            <a:r>
-              <a:rPr sz="1300" b="1">
-                <a:solidFill>
-                  <a:srgbClr val="1C1F2E"/>
-                </a:solidFill>
-                <a:latin typeface="Segoe UI"/>
-              </a:rPr>
-              <a:t>EBS CSI add-on</a:t>
-            </a:r>
-          </a:p>
-        </p:txBody>
-      </p:sp>
-      <p:sp>
-        <p:nvSpPr>
-          <p:cNvPr id="29" name="TextBox 28"/>
-          <p:cNvSpPr txBox="1"/>
-          <p:nvPr/>
-        </p:nvSpPr>
-        <p:spPr>
-          <a:xfrm>
-            <a:off x="7818120" y="4526280"/>
-            <a:ext cx="3703320" cy="411480"/>
-          </a:xfrm>
-          <a:prstGeom prst="rect">
-            <a:avLst/>
-          </a:prstGeom>
-          <a:noFill/>
-        </p:spPr>
-        <p:txBody>
-          <a:bodyPr wrap="square" anchor="t" lIns="18288" rIns="18288" tIns="18288" bIns="18288">
-            <a:spAutoFit/>
-          </a:bodyPr>
-          <a:lstStyle/>
-          <a:p>
-            <a:pPr algn="l">
-              <a:lnSpc>
-                <a:spcPct val="115000"/>
-              </a:lnSpc>
-              <a:spcAft>
-                <a:spcPts val="400"/>
-              </a:spcAft>
-            </a:pPr>
-            <a:r>
-              <a:rPr sz="1000" b="0">
-                <a:solidFill>
-                  <a:srgbClr val="6B7086"/>
-                </a:solidFill>
-                <a:latin typeface="Segoe UI"/>
-              </a:rPr>
-              <a:t>Dynamic gp2 volumes for the PostgreSQL PVC (IRSA)</a:t>
-            </a:r>
-          </a:p>
-        </p:txBody>
-      </p:sp>
-      <p:sp>
-        <p:nvSpPr>
-          <p:cNvPr id="30" name="Rounded Rectangle 29"/>
-          <p:cNvSpPr/>
-          <p:nvPr/>
-        </p:nvSpPr>
-        <p:spPr>
-          <a:xfrm>
-            <a:off x="7589520" y="5166360"/>
-            <a:ext cx="4069080" cy="1005840"/>
-          </a:xfrm>
-          <a:prstGeom prst="roundRect">
-            <a:avLst>
-              <a:gd name="adj" fmla="val 8000"/>
-            </a:avLst>
-          </a:prstGeom>
-          <a:solidFill>
-            <a:srgbClr val="FFFFFF"/>
-          </a:solidFill>
-          <a:ln w="12700">
-            <a:solidFill>
-              <a:srgbClr val="E4E6EF"/>
-            </a:solidFill>
-          </a:ln>
-          <a:effectLst/>
-        </p:spPr>
-        <p:style>
-          <a:lnRef idx="1">
-            <a:schemeClr val="accent1"/>
-          </a:lnRef>
-          <a:fillRef idx="3">
-            <a:schemeClr val="accent1"/>
-          </a:fillRef>
-          <a:effectRef idx="2">
-            <a:schemeClr val="accent1"/>
-          </a:effectRef>
-          <a:fontRef idx="minor">
-            <a:schemeClr val="lt1"/>
-          </a:fontRef>
-        </p:style>
-        <p:txBody>
-          <a:bodyPr rtlCol="0" anchor="ctr"/>
-          <a:lstStyle/>
-          <a:p>
-            <a:pPr algn="ctr"/>
-          </a:p>
-        </p:txBody>
-      </p:sp>
-      <p:sp>
-        <p:nvSpPr>
-          <p:cNvPr id="31" name="Rectangle 30"/>
-          <p:cNvSpPr/>
-          <p:nvPr/>
-        </p:nvSpPr>
-        <p:spPr>
-          <a:xfrm>
-            <a:off x="7589520" y="5330952"/>
-            <a:ext cx="54864" cy="676656"/>
-          </a:xfrm>
-          <a:prstGeom prst="rect">
-            <a:avLst/>
-          </a:prstGeom>
-          <a:solidFill>
-            <a:srgbClr val="EF4444"/>
-          </a:solidFill>
-          <a:ln>
-            <a:noFill/>
-          </a:ln>
-          <a:effectLst/>
-        </p:spPr>
-        <p:style>
-          <a:lnRef idx="1">
-            <a:schemeClr val="accent1"/>
-          </a:lnRef>
-          <a:fillRef idx="3">
-            <a:schemeClr val="accent1"/>
-          </a:fillRef>
-          <a:effectRef idx="2">
-            <a:schemeClr val="accent1"/>
-          </a:effectRef>
-          <a:fontRef idx="minor">
-            <a:schemeClr val="lt1"/>
-          </a:fontRef>
-        </p:style>
-        <p:txBody>
-          <a:bodyPr rtlCol="0" anchor="ctr"/>
-          <a:lstStyle/>
-          <a:p>
-            <a:pPr algn="ctr"/>
-          </a:p>
-        </p:txBody>
-      </p:sp>
-      <p:sp>
-        <p:nvSpPr>
-          <p:cNvPr id="32" name="TextBox 31"/>
-          <p:cNvSpPr txBox="1"/>
-          <p:nvPr/>
-        </p:nvSpPr>
-        <p:spPr>
-          <a:xfrm>
-            <a:off x="7818120" y="5303520"/>
-            <a:ext cx="3703320" cy="365760"/>
-          </a:xfrm>
-          <a:prstGeom prst="rect">
-            <a:avLst/>
-          </a:prstGeom>
-          <a:noFill/>
-        </p:spPr>
-        <p:txBody>
-          <a:bodyPr wrap="square" anchor="t" lIns="18288" rIns="18288" tIns="18288" bIns="18288">
-            <a:spAutoFit/>
-          </a:bodyPr>
-          <a:lstStyle/>
-          <a:p>
-            <a:pPr algn="l">
-              <a:lnSpc>
-                <a:spcPct val="110000"/>
-              </a:lnSpc>
-              <a:spcAft>
-                <a:spcPts val="400"/>
-              </a:spcAft>
-            </a:pPr>
-            <a:r>
-              <a:rPr sz="1300" b="1">
-                <a:solidFill>
-                  <a:srgbClr val="1C1F2E"/>
-                </a:solidFill>
-                <a:latin typeface="Segoe UI"/>
-              </a:rPr>
-              <a:t>Cost control</a:t>
-            </a:r>
-          </a:p>
-        </p:txBody>
-      </p:sp>
-      <p:sp>
-        <p:nvSpPr>
-          <p:cNvPr id="33" name="TextBox 32"/>
-          <p:cNvSpPr txBox="1"/>
-          <p:nvPr/>
-        </p:nvSpPr>
-        <p:spPr>
-          <a:xfrm>
-            <a:off x="7818120" y="5669280"/>
-            <a:ext cx="3703320" cy="411480"/>
-          </a:xfrm>
-          <a:prstGeom prst="rect">
-            <a:avLst/>
-          </a:prstGeom>
-          <a:noFill/>
-        </p:spPr>
-        <p:txBody>
-          <a:bodyPr wrap="square" anchor="t" lIns="18288" rIns="18288" tIns="18288" bIns="18288">
-            <a:spAutoFit/>
-          </a:bodyPr>
-          <a:lstStyle/>
-          <a:p>
-            <a:pPr algn="l">
-              <a:lnSpc>
-                <a:spcPct val="115000"/>
-              </a:lnSpc>
-              <a:spcAft>
-                <a:spcPts val="400"/>
-              </a:spcAft>
-            </a:pPr>
-            <a:r>
-              <a:rPr sz="1000" b="0">
-                <a:solidFill>
-                  <a:srgbClr val="6B7086"/>
-                </a:solidFill>
-                <a:latin typeface="Segoe UI"/>
-              </a:rPr>
-              <a:t>terraform destroy after the demo removes NAT and nodes</a:t>
-            </a:r>
-          </a:p>
-        </p:txBody>
-      </p:sp>
+        </p:spPr>
+      </p:pic>
     </p:spTree>
   </p:cSld>
   <p:clrMapOvr>

--- a/demo/ppt/presentation.pptx
+++ b/demo/ppt/presentation.pptx
@@ -22,6 +22,7 @@
     <p:sldId id="270" r:id="rId21"/>
     <p:sldId id="271" r:id="rId22"/>
     <p:sldId id="272" r:id="rId23"/>
+    <p:sldId id="273" r:id="rId24"/>
   </p:sldIdLst>
   <p:sldSz cx="12191695" cy="6858000" type="screen4x3"/>
   <p:notesSz cx="6858000" cy="9144000"/>
@@ -3971,7 +3972,7 @@
                 </a:solidFill>
                 <a:latin typeface="Segoe UI"/>
               </a:rPr>
-              <a:t>10 / 17</a:t>
+              <a:t>10 / 18</a:t>
             </a:r>
           </a:p>
         </p:txBody>
@@ -4974,7 +4975,7 @@
                 </a:solidFill>
                 <a:latin typeface="Segoe UI"/>
               </a:rPr>
-              <a:t>11 / 17</a:t>
+              <a:t>11 / 18</a:t>
             </a:r>
           </a:p>
         </p:txBody>
@@ -5650,7 +5651,7 @@
                 </a:solidFill>
                 <a:latin typeface="Segoe UI"/>
               </a:rPr>
-              <a:t>11 • OBSERVABILITY</a:t>
+              <a:t>11 • GITOPS &amp; AUTOSCALING</a:t>
             </a:r>
           </a:p>
         </p:txBody>
@@ -5692,7 +5693,7 @@
                 </a:solidFill>
                 <a:latin typeface="Segoe UI"/>
               </a:rPr>
-              <a:t>Instrumented in code, scraped by Prometheus, shown in Grafana</a:t>
+              <a:t>Git drives the rollout; load drives the replica count</a:t>
             </a:r>
           </a:p>
         </p:txBody>
@@ -5705,8 +5706,8 @@
         </p:nvSpPr>
         <p:spPr>
           <a:xfrm>
-            <a:off x="548640" y="6446520"/>
-            <a:ext cx="5486400" cy="274320"/>
+            <a:off x="548640" y="1188720"/>
+            <a:ext cx="11155680" cy="365760"/>
           </a:xfrm>
           <a:prstGeom prst="rect">
             <a:avLst/>
@@ -5728,6 +5729,48 @@
               </a:spcAft>
             </a:pPr>
             <a:r>
+              <a:rPr sz="1400" b="0">
+                <a:solidFill>
+                  <a:srgbClr val="6B7086"/>
+                </a:solidFill>
+                <a:latin typeface="Segoe UI"/>
+              </a:rPr>
+              <a:t>ArgoCD syncs helm/devtrack from main (bot-pinned SHA); the HPA scaled the backend 2 → 6 under load and back.</a:t>
+            </a:r>
+          </a:p>
+        </p:txBody>
+      </p:sp>
+      <p:sp>
+        <p:nvSpPr>
+          <p:cNvPr id="6" name="TextBox 5"/>
+          <p:cNvSpPr txBox="1"/>
+          <p:nvPr/>
+        </p:nvSpPr>
+        <p:spPr>
+          <a:xfrm>
+            <a:off x="548640" y="6446520"/>
+            <a:ext cx="5486400" cy="274320"/>
+          </a:xfrm>
+          <a:prstGeom prst="rect">
+            <a:avLst/>
+          </a:prstGeom>
+          <a:noFill/>
+        </p:spPr>
+        <p:txBody>
+          <a:bodyPr wrap="square" anchor="t" lIns="18288" rIns="18288" tIns="18288" bIns="18288">
+            <a:spAutoFit/>
+          </a:bodyPr>
+          <a:lstStyle/>
+          <a:p>
+            <a:pPr algn="l">
+              <a:lnSpc>
+                <a:spcPct val="110000"/>
+              </a:lnSpc>
+              <a:spcAft>
+                <a:spcPts val="400"/>
+              </a:spcAft>
+            </a:pPr>
+            <a:r>
               <a:rPr sz="900" b="0">
                 <a:solidFill>
                   <a:srgbClr val="6B7086"/>
@@ -5741,7 +5784,7 @@
       </p:sp>
       <p:sp>
         <p:nvSpPr>
-          <p:cNvPr id="6" name="TextBox 5"/>
+          <p:cNvPr id="7" name="TextBox 6"/>
           <p:cNvSpPr txBox="1"/>
           <p:nvPr/>
         </p:nvSpPr>
@@ -5776,618 +5819,58 @@
                 </a:solidFill>
                 <a:latin typeface="Segoe UI"/>
               </a:rPr>
-              <a:t>12 / 17</a:t>
-            </a:r>
-          </a:p>
-        </p:txBody>
-      </p:sp>
-      <p:sp>
-        <p:nvSpPr>
-          <p:cNvPr id="7" name="Rounded Rectangle 6"/>
-          <p:cNvSpPr/>
-          <p:nvPr/>
-        </p:nvSpPr>
-        <p:spPr>
-          <a:xfrm>
-            <a:off x="548640" y="1600200"/>
-            <a:ext cx="4206240" cy="1417320"/>
-          </a:xfrm>
-          <a:prstGeom prst="roundRect">
-            <a:avLst>
-              <a:gd name="adj" fmla="val 8000"/>
-            </a:avLst>
-          </a:prstGeom>
-          <a:solidFill>
-            <a:srgbClr val="FFFFFF"/>
-          </a:solidFill>
+              <a:t>12 / 18</a:t>
+            </a:r>
+          </a:p>
+        </p:txBody>
+      </p:sp>
+      <p:pic>
+        <p:nvPicPr>
+          <p:cNvPr id="8" name="Picture 7" descr="M8-argocd-devtrack-tree.png"/>
+          <p:cNvPicPr>
+            <a:picLocks noChangeAspect="1"/>
+          </p:cNvPicPr>
+          <p:nvPr/>
+        </p:nvPicPr>
+        <p:blipFill>
+          <a:blip r:embed="rId2"/>
+          <a:stretch>
+            <a:fillRect/>
+          </a:stretch>
+        </p:blipFill>
+        <p:spPr>
+          <a:xfrm>
+            <a:off x="548640" y="2271712"/>
+            <a:ext cx="5532120" cy="3457574"/>
+          </a:xfrm>
+          <a:prstGeom prst="rect">
+            <a:avLst/>
+          </a:prstGeom>
           <a:ln w="12700">
             <a:solidFill>
               <a:srgbClr val="E4E6EF"/>
             </a:solidFill>
           </a:ln>
-          <a:effectLst/>
-        </p:spPr>
-        <p:style>
-          <a:lnRef idx="1">
-            <a:schemeClr val="accent1"/>
-          </a:lnRef>
-          <a:fillRef idx="3">
-            <a:schemeClr val="accent1"/>
-          </a:fillRef>
-          <a:effectRef idx="2">
-            <a:schemeClr val="accent1"/>
-          </a:effectRef>
-          <a:fontRef idx="minor">
-            <a:schemeClr val="lt1"/>
-          </a:fontRef>
-        </p:style>
-        <p:txBody>
-          <a:bodyPr rtlCol="0" anchor="ctr"/>
-          <a:lstStyle/>
-          <a:p>
-            <a:pPr algn="ctr"/>
-          </a:p>
-        </p:txBody>
-      </p:sp>
-      <p:sp>
-        <p:nvSpPr>
-          <p:cNvPr id="8" name="Rectangle 7"/>
-          <p:cNvSpPr/>
-          <p:nvPr/>
-        </p:nvSpPr>
-        <p:spPr>
-          <a:xfrm>
-            <a:off x="548640" y="1764792"/>
-            <a:ext cx="54864" cy="1088136"/>
-          </a:xfrm>
-          <a:prstGeom prst="rect">
-            <a:avLst/>
-          </a:prstGeom>
-          <a:solidFill>
-            <a:srgbClr val="4F46E5"/>
-          </a:solidFill>
-          <a:ln>
-            <a:noFill/>
-          </a:ln>
-          <a:effectLst/>
-        </p:spPr>
-        <p:style>
-          <a:lnRef idx="1">
-            <a:schemeClr val="accent1"/>
-          </a:lnRef>
-          <a:fillRef idx="3">
-            <a:schemeClr val="accent1"/>
-          </a:fillRef>
-          <a:effectRef idx="2">
-            <a:schemeClr val="accent1"/>
-          </a:effectRef>
-          <a:fontRef idx="minor">
-            <a:schemeClr val="lt1"/>
-          </a:fontRef>
-        </p:style>
-        <p:txBody>
-          <a:bodyPr rtlCol="0" anchor="ctr"/>
-          <a:lstStyle/>
-          <a:p>
-            <a:pPr algn="ctr"/>
-          </a:p>
-        </p:txBody>
-      </p:sp>
-      <p:sp>
-        <p:nvSpPr>
-          <p:cNvPr id="9" name="TextBox 8"/>
-          <p:cNvSpPr txBox="1"/>
-          <p:nvPr/>
-        </p:nvSpPr>
-        <p:spPr>
-          <a:xfrm>
-            <a:off x="777240" y="1737360"/>
-            <a:ext cx="3840479" cy="365760"/>
-          </a:xfrm>
-          <a:prstGeom prst="rect">
-            <a:avLst/>
-          </a:prstGeom>
-          <a:noFill/>
-        </p:spPr>
-        <p:txBody>
-          <a:bodyPr wrap="square" anchor="t" lIns="18288" rIns="18288" tIns="18288" bIns="18288">
-            <a:spAutoFit/>
-          </a:bodyPr>
-          <a:lstStyle/>
-          <a:p>
-            <a:pPr algn="l">
-              <a:lnSpc>
-                <a:spcPct val="110000"/>
-              </a:lnSpc>
-              <a:spcAft>
-                <a:spcPts val="400"/>
-              </a:spcAft>
-            </a:pPr>
-            <a:r>
-              <a:rPr sz="1400" b="1">
-                <a:solidFill>
-                  <a:srgbClr val="1C1F2E"/>
-                </a:solidFill>
-                <a:latin typeface="Segoe UI"/>
-              </a:rPr>
-              <a:t>Instrument</a:t>
-            </a:r>
-          </a:p>
-        </p:txBody>
-      </p:sp>
-      <p:sp>
-        <p:nvSpPr>
-          <p:cNvPr id="10" name="TextBox 9"/>
-          <p:cNvSpPr txBox="1"/>
-          <p:nvPr/>
-        </p:nvSpPr>
-        <p:spPr>
-          <a:xfrm>
-            <a:off x="777240" y="2103120"/>
-            <a:ext cx="3840479" cy="822960"/>
-          </a:xfrm>
-          <a:prstGeom prst="rect">
-            <a:avLst/>
-          </a:prstGeom>
-          <a:noFill/>
-        </p:spPr>
-        <p:txBody>
-          <a:bodyPr wrap="square" anchor="t" lIns="18288" rIns="18288" tIns="18288" bIns="18288">
-            <a:spAutoFit/>
-          </a:bodyPr>
-          <a:lstStyle/>
-          <a:p>
-            <a:pPr algn="l">
-              <a:lnSpc>
-                <a:spcPct val="115000"/>
-              </a:lnSpc>
-              <a:spcAft>
-                <a:spcPts val="400"/>
-              </a:spcAft>
-            </a:pPr>
-            <a:r>
-              <a:rPr sz="1100" b="0">
-                <a:solidFill>
-                  <a:srgbClr val="6B7086"/>
-                </a:solidFill>
-                <a:latin typeface="Segoe UI"/>
-              </a:rPr>
-              <a:t>FastAPI middleware records devtrack_http_requests_total and a latency histogram per route template.</a:t>
-            </a:r>
-          </a:p>
-        </p:txBody>
-      </p:sp>
-      <p:sp>
-        <p:nvSpPr>
-          <p:cNvPr id="11" name="Rounded Rectangle 10"/>
-          <p:cNvSpPr/>
-          <p:nvPr/>
-        </p:nvSpPr>
-        <p:spPr>
-          <a:xfrm>
-            <a:off x="548640" y="3172968"/>
-            <a:ext cx="4206240" cy="1417320"/>
-          </a:xfrm>
-          <a:prstGeom prst="roundRect">
-            <a:avLst>
-              <a:gd name="adj" fmla="val 8000"/>
-            </a:avLst>
-          </a:prstGeom>
-          <a:solidFill>
-            <a:srgbClr val="FFFFFF"/>
-          </a:solidFill>
-          <a:ln w="12700">
-            <a:solidFill>
-              <a:srgbClr val="E4E6EF"/>
-            </a:solidFill>
-          </a:ln>
-          <a:effectLst/>
-        </p:spPr>
-        <p:style>
-          <a:lnRef idx="1">
-            <a:schemeClr val="accent1"/>
-          </a:lnRef>
-          <a:fillRef idx="3">
-            <a:schemeClr val="accent1"/>
-          </a:fillRef>
-          <a:effectRef idx="2">
-            <a:schemeClr val="accent1"/>
-          </a:effectRef>
-          <a:fontRef idx="minor">
-            <a:schemeClr val="lt1"/>
-          </a:fontRef>
-        </p:style>
-        <p:txBody>
-          <a:bodyPr rtlCol="0" anchor="ctr"/>
-          <a:lstStyle/>
-          <a:p>
-            <a:pPr algn="ctr"/>
-          </a:p>
-        </p:txBody>
-      </p:sp>
-      <p:sp>
-        <p:nvSpPr>
-          <p:cNvPr id="12" name="Rectangle 11"/>
-          <p:cNvSpPr/>
-          <p:nvPr/>
-        </p:nvSpPr>
-        <p:spPr>
-          <a:xfrm>
-            <a:off x="548640" y="3337560"/>
-            <a:ext cx="54864" cy="1088136"/>
-          </a:xfrm>
-          <a:prstGeom prst="rect">
-            <a:avLst/>
-          </a:prstGeom>
-          <a:solidFill>
-            <a:srgbClr val="F59E0B"/>
-          </a:solidFill>
-          <a:ln>
-            <a:noFill/>
-          </a:ln>
-          <a:effectLst/>
-        </p:spPr>
-        <p:style>
-          <a:lnRef idx="1">
-            <a:schemeClr val="accent1"/>
-          </a:lnRef>
-          <a:fillRef idx="3">
-            <a:schemeClr val="accent1"/>
-          </a:fillRef>
-          <a:effectRef idx="2">
-            <a:schemeClr val="accent1"/>
-          </a:effectRef>
-          <a:fontRef idx="minor">
-            <a:schemeClr val="lt1"/>
-          </a:fontRef>
-        </p:style>
-        <p:txBody>
-          <a:bodyPr rtlCol="0" anchor="ctr"/>
-          <a:lstStyle/>
-          <a:p>
-            <a:pPr algn="ctr"/>
-          </a:p>
-        </p:txBody>
-      </p:sp>
-      <p:sp>
-        <p:nvSpPr>
-          <p:cNvPr id="13" name="TextBox 12"/>
-          <p:cNvSpPr txBox="1"/>
-          <p:nvPr/>
-        </p:nvSpPr>
-        <p:spPr>
-          <a:xfrm>
-            <a:off x="777240" y="3310127"/>
-            <a:ext cx="3840479" cy="365760"/>
-          </a:xfrm>
-          <a:prstGeom prst="rect">
-            <a:avLst/>
-          </a:prstGeom>
-          <a:noFill/>
-        </p:spPr>
-        <p:txBody>
-          <a:bodyPr wrap="square" anchor="t" lIns="18288" rIns="18288" tIns="18288" bIns="18288">
-            <a:spAutoFit/>
-          </a:bodyPr>
-          <a:lstStyle/>
-          <a:p>
-            <a:pPr algn="l">
-              <a:lnSpc>
-                <a:spcPct val="110000"/>
-              </a:lnSpc>
-              <a:spcAft>
-                <a:spcPts val="400"/>
-              </a:spcAft>
-            </a:pPr>
-            <a:r>
-              <a:rPr sz="1400" b="1">
-                <a:solidFill>
-                  <a:srgbClr val="1C1F2E"/>
-                </a:solidFill>
-                <a:latin typeface="Segoe UI"/>
-              </a:rPr>
-              <a:t>Collect</a:t>
-            </a:r>
-          </a:p>
-        </p:txBody>
-      </p:sp>
-      <p:sp>
-        <p:nvSpPr>
-          <p:cNvPr id="14" name="TextBox 13"/>
-          <p:cNvSpPr txBox="1"/>
-          <p:nvPr/>
-        </p:nvSpPr>
-        <p:spPr>
-          <a:xfrm>
-            <a:off x="777240" y="3675887"/>
-            <a:ext cx="3840479" cy="822960"/>
-          </a:xfrm>
-          <a:prstGeom prst="rect">
-            <a:avLst/>
-          </a:prstGeom>
-          <a:noFill/>
-        </p:spPr>
-        <p:txBody>
-          <a:bodyPr wrap="square" anchor="t" lIns="18288" rIns="18288" tIns="18288" bIns="18288">
-            <a:spAutoFit/>
-          </a:bodyPr>
-          <a:lstStyle/>
-          <a:p>
-            <a:pPr algn="l">
-              <a:lnSpc>
-                <a:spcPct val="115000"/>
-              </a:lnSpc>
-              <a:spcAft>
-                <a:spcPts val="400"/>
-              </a:spcAft>
-            </a:pPr>
-            <a:r>
-              <a:rPr sz="1100" b="0">
-                <a:solidFill>
-                  <a:srgbClr val="6B7086"/>
-                </a:solidFill>
-                <a:latin typeface="Segoe UI"/>
-              </a:rPr>
-              <a:t>Prometheus scrapes devtrack-backend:8000/metrics every 15 seconds — target UP (1/1).</a:t>
-            </a:r>
-          </a:p>
-        </p:txBody>
-      </p:sp>
-      <p:sp>
-        <p:nvSpPr>
-          <p:cNvPr id="15" name="Rounded Rectangle 14"/>
-          <p:cNvSpPr/>
-          <p:nvPr/>
-        </p:nvSpPr>
-        <p:spPr>
-          <a:xfrm>
-            <a:off x="548640" y="4745736"/>
-            <a:ext cx="4206240" cy="1417320"/>
-          </a:xfrm>
-          <a:prstGeom prst="roundRect">
-            <a:avLst>
-              <a:gd name="adj" fmla="val 8000"/>
-            </a:avLst>
-          </a:prstGeom>
-          <a:solidFill>
-            <a:srgbClr val="FFFFFF"/>
-          </a:solidFill>
-          <a:ln w="12700">
-            <a:solidFill>
-              <a:srgbClr val="E4E6EF"/>
-            </a:solidFill>
-          </a:ln>
-          <a:effectLst/>
-        </p:spPr>
-        <p:style>
-          <a:lnRef idx="1">
-            <a:schemeClr val="accent1"/>
-          </a:lnRef>
-          <a:fillRef idx="3">
-            <a:schemeClr val="accent1"/>
-          </a:fillRef>
-          <a:effectRef idx="2">
-            <a:schemeClr val="accent1"/>
-          </a:effectRef>
-          <a:fontRef idx="minor">
-            <a:schemeClr val="lt1"/>
-          </a:fontRef>
-        </p:style>
-        <p:txBody>
-          <a:bodyPr rtlCol="0" anchor="ctr"/>
-          <a:lstStyle/>
-          <a:p>
-            <a:pPr algn="ctr"/>
-          </a:p>
-        </p:txBody>
-      </p:sp>
-      <p:sp>
-        <p:nvSpPr>
-          <p:cNvPr id="16" name="Rectangle 15"/>
-          <p:cNvSpPr/>
-          <p:nvPr/>
-        </p:nvSpPr>
-        <p:spPr>
-          <a:xfrm>
-            <a:off x="548640" y="4910327"/>
-            <a:ext cx="54864" cy="1088136"/>
-          </a:xfrm>
-          <a:prstGeom prst="rect">
-            <a:avLst/>
-          </a:prstGeom>
-          <a:solidFill>
-            <a:srgbClr val="10B981"/>
-          </a:solidFill>
-          <a:ln>
-            <a:noFill/>
-          </a:ln>
-          <a:effectLst/>
-        </p:spPr>
-        <p:style>
-          <a:lnRef idx="1">
-            <a:schemeClr val="accent1"/>
-          </a:lnRef>
-          <a:fillRef idx="3">
-            <a:schemeClr val="accent1"/>
-          </a:fillRef>
-          <a:effectRef idx="2">
-            <a:schemeClr val="accent1"/>
-          </a:effectRef>
-          <a:fontRef idx="minor">
-            <a:schemeClr val="lt1"/>
-          </a:fontRef>
-        </p:style>
-        <p:txBody>
-          <a:bodyPr rtlCol="0" anchor="ctr"/>
-          <a:lstStyle/>
-          <a:p>
-            <a:pPr algn="ctr"/>
-          </a:p>
-        </p:txBody>
-      </p:sp>
-      <p:sp>
-        <p:nvSpPr>
-          <p:cNvPr id="17" name="TextBox 16"/>
-          <p:cNvSpPr txBox="1"/>
-          <p:nvPr/>
-        </p:nvSpPr>
-        <p:spPr>
-          <a:xfrm>
-            <a:off x="777240" y="4882896"/>
-            <a:ext cx="3840479" cy="365760"/>
-          </a:xfrm>
-          <a:prstGeom prst="rect">
-            <a:avLst/>
-          </a:prstGeom>
-          <a:noFill/>
-        </p:spPr>
-        <p:txBody>
-          <a:bodyPr wrap="square" anchor="t" lIns="18288" rIns="18288" tIns="18288" bIns="18288">
-            <a:spAutoFit/>
-          </a:bodyPr>
-          <a:lstStyle/>
-          <a:p>
-            <a:pPr algn="l">
-              <a:lnSpc>
-                <a:spcPct val="110000"/>
-              </a:lnSpc>
-              <a:spcAft>
-                <a:spcPts val="400"/>
-              </a:spcAft>
-            </a:pPr>
-            <a:r>
-              <a:rPr sz="1400" b="1">
-                <a:solidFill>
-                  <a:srgbClr val="1C1F2E"/>
-                </a:solidFill>
-                <a:latin typeface="Segoe UI"/>
-              </a:rPr>
-              <a:t>Visualise</a:t>
-            </a:r>
-          </a:p>
-        </p:txBody>
-      </p:sp>
-      <p:sp>
-        <p:nvSpPr>
-          <p:cNvPr id="18" name="TextBox 17"/>
-          <p:cNvSpPr txBox="1"/>
-          <p:nvPr/>
-        </p:nvSpPr>
-        <p:spPr>
-          <a:xfrm>
-            <a:off x="777240" y="5248655"/>
-            <a:ext cx="3840479" cy="822960"/>
-          </a:xfrm>
-          <a:prstGeom prst="rect">
-            <a:avLst/>
-          </a:prstGeom>
-          <a:noFill/>
-        </p:spPr>
-        <p:txBody>
-          <a:bodyPr wrap="square" anchor="t" lIns="18288" rIns="18288" tIns="18288" bIns="18288">
-            <a:spAutoFit/>
-          </a:bodyPr>
-          <a:lstStyle/>
-          <a:p>
-            <a:pPr algn="l">
-              <a:lnSpc>
-                <a:spcPct val="115000"/>
-              </a:lnSpc>
-              <a:spcAft>
-                <a:spcPts val="400"/>
-              </a:spcAft>
-            </a:pPr>
-            <a:r>
-              <a:rPr sz="1100" b="0">
-                <a:solidFill>
-                  <a:srgbClr val="6B7086"/>
-                </a:solidFill>
-                <a:latin typeface="Segoe UI"/>
-              </a:rPr>
-              <a:t>Grafana dashboard: availability, request rate, P95 latency, 5xx errors, memory and CPU.</a:t>
-            </a:r>
-          </a:p>
-        </p:txBody>
-      </p:sp>
+        </p:spPr>
+      </p:pic>
       <p:pic>
         <p:nvPicPr>
-          <p:cNvPr id="19" name="Picture 18" descr="M9-grafana-dashboard.png"/>
+          <p:cNvPr id="9" name="Picture 8" descr="M8-hpa-scaling.png"/>
           <p:cNvPicPr>
             <a:picLocks noChangeAspect="1"/>
           </p:cNvPicPr>
           <p:nvPr/>
         </p:nvPicPr>
         <p:blipFill>
-          <a:blip r:embed="rId2"/>
-          <a:srcRect b="33151"/>
+          <a:blip r:embed="rId3"/>
           <a:stretch>
             <a:fillRect/>
           </a:stretch>
         </p:blipFill>
         <p:spPr>
           <a:xfrm>
-            <a:off x="4983480" y="1600200"/>
-            <a:ext cx="6675120" cy="2788920"/>
-          </a:xfrm>
-          <a:prstGeom prst="rect">
-            <a:avLst/>
-          </a:prstGeom>
-          <a:ln w="12700">
-            <a:solidFill>
-              <a:srgbClr val="E4E6EF"/>
-            </a:solidFill>
-          </a:ln>
-        </p:spPr>
-      </p:pic>
-      <p:pic>
-        <p:nvPicPr>
-          <p:cNvPr id="20" name="Picture 19" descr="M9-prometheus-targets.png"/>
-          <p:cNvPicPr>
-            <a:picLocks noChangeAspect="1"/>
-          </p:cNvPicPr>
-          <p:nvPr/>
-        </p:nvPicPr>
-        <p:blipFill>
-          <a:blip r:embed="rId3"/>
-          <a:srcRect b="16620"/>
-          <a:stretch>
-            <a:fillRect/>
-          </a:stretch>
-        </p:blipFill>
-        <p:spPr>
-          <a:xfrm>
-            <a:off x="4983480" y="4572000"/>
-            <a:ext cx="3246120" cy="1691640"/>
-          </a:xfrm>
-          <a:prstGeom prst="rect">
-            <a:avLst/>
-          </a:prstGeom>
-          <a:ln w="12700">
-            <a:solidFill>
-              <a:srgbClr val="E4E6EF"/>
-            </a:solidFill>
-          </a:ln>
-        </p:spPr>
-      </p:pic>
-      <p:pic>
-        <p:nvPicPr>
-          <p:cNvPr id="21" name="Picture 20" descr="M9-prometheus-query.png"/>
-          <p:cNvPicPr>
-            <a:picLocks noChangeAspect="1"/>
-          </p:cNvPicPr>
-          <p:nvPr/>
-        </p:nvPicPr>
-        <p:blipFill>
-          <a:blip r:embed="rId4"/>
-          <a:srcRect b="16620"/>
-          <a:stretch>
-            <a:fillRect/>
-          </a:stretch>
-        </p:blipFill>
-        <p:spPr>
-          <a:xfrm>
-            <a:off x="8412480" y="4572000"/>
-            <a:ext cx="3246120" cy="1691640"/>
+            <a:off x="6263640" y="2615793"/>
+            <a:ext cx="5394960" cy="2769412"/>
           </a:xfrm>
           <a:prstGeom prst="rect">
             <a:avLst/>
@@ -6506,7 +5989,7 @@
                 </a:solidFill>
                 <a:latin typeface="Segoe UI"/>
               </a:rPr>
-              <a:t>12 • TROUBLESHOOTING &amp; RESILIENCE</a:t>
+              <a:t>12 • OBSERVABILITY</a:t>
             </a:r>
           </a:p>
         </p:txBody>
@@ -6548,7 +6031,7 @@
                 </a:solidFill>
                 <a:latin typeface="Segoe UI"/>
               </a:rPr>
-              <a:t>Diagnose from evidence, then fix the cause</a:t>
+              <a:t>Instrumented in code, scraped by Prometheus, shown in Grafana</a:t>
             </a:r>
           </a:p>
         </p:txBody>
@@ -6561,8 +6044,8 @@
         </p:nvSpPr>
         <p:spPr>
           <a:xfrm>
-            <a:off x="548640" y="1188720"/>
-            <a:ext cx="11155680" cy="365760"/>
+            <a:off x="548640" y="6446520"/>
+            <a:ext cx="5486400" cy="274320"/>
           </a:xfrm>
           <a:prstGeom prst="rect">
             <a:avLst/>
@@ -6584,13 +6067,13 @@
               </a:spcAft>
             </a:pPr>
             <a:r>
-              <a:rPr sz="1400" b="0">
+              <a:rPr sz="900" b="0">
                 <a:solidFill>
                   <a:srgbClr val="6B7086"/>
                 </a:solidFill>
                 <a:latin typeface="Segoe UI"/>
               </a:rPr>
-              <a:t>Both drills were executed on the cluster — the terminal evidence is on the next slide.</a:t>
+              <a:t>DevTrack Todo  •  Jinesh Gandhi  •  DevOps Capstone</a:t>
             </a:r>
           </a:p>
         </p:txBody>
@@ -6598,48 +6081,6 @@
       <p:sp>
         <p:nvSpPr>
           <p:cNvPr id="6" name="TextBox 5"/>
-          <p:cNvSpPr txBox="1"/>
-          <p:nvPr/>
-        </p:nvSpPr>
-        <p:spPr>
-          <a:xfrm>
-            <a:off x="548640" y="6446520"/>
-            <a:ext cx="5486400" cy="274320"/>
-          </a:xfrm>
-          <a:prstGeom prst="rect">
-            <a:avLst/>
-          </a:prstGeom>
-          <a:noFill/>
-        </p:spPr>
-        <p:txBody>
-          <a:bodyPr wrap="square" anchor="t" lIns="18288" rIns="18288" tIns="18288" bIns="18288">
-            <a:spAutoFit/>
-          </a:bodyPr>
-          <a:lstStyle/>
-          <a:p>
-            <a:pPr algn="l">
-              <a:lnSpc>
-                <a:spcPct val="110000"/>
-              </a:lnSpc>
-              <a:spcAft>
-                <a:spcPts val="400"/>
-              </a:spcAft>
-            </a:pPr>
-            <a:r>
-              <a:rPr sz="900" b="0">
-                <a:solidFill>
-                  <a:srgbClr val="6B7086"/>
-                </a:solidFill>
-                <a:latin typeface="Segoe UI"/>
-              </a:rPr>
-              <a:t>DevTrack Todo  •  Jinesh Gandhi  •  DevOps Capstone</a:t>
-            </a:r>
-          </a:p>
-        </p:txBody>
-      </p:sp>
-      <p:sp>
-        <p:nvSpPr>
-          <p:cNvPr id="7" name="TextBox 6"/>
           <p:cNvSpPr txBox="1"/>
           <p:nvPr/>
         </p:nvSpPr>
@@ -6674,21 +6115,21 @@
                 </a:solidFill>
                 <a:latin typeface="Segoe UI"/>
               </a:rPr>
-              <a:t>13 / 17</a:t>
-            </a:r>
-          </a:p>
-        </p:txBody>
-      </p:sp>
-      <p:sp>
-        <p:nvSpPr>
-          <p:cNvPr id="8" name="Rounded Rectangle 7"/>
+              <a:t>13 / 18</a:t>
+            </a:r>
+          </a:p>
+        </p:txBody>
+      </p:sp>
+      <p:sp>
+        <p:nvSpPr>
+          <p:cNvPr id="7" name="Rounded Rectangle 6"/>
           <p:cNvSpPr/>
           <p:nvPr/>
         </p:nvSpPr>
         <p:spPr>
           <a:xfrm>
-            <a:off x="548640" y="1737360"/>
-            <a:ext cx="5440680" cy="4069080"/>
+            <a:off x="548640" y="1600200"/>
+            <a:ext cx="4206240" cy="1417320"/>
           </a:xfrm>
           <a:prstGeom prst="roundRect">
             <a:avLst>
@@ -6729,20 +6170,20 @@
       </p:sp>
       <p:sp>
         <p:nvSpPr>
-          <p:cNvPr id="9" name="Rectangle 8"/>
+          <p:cNvPr id="8" name="Rectangle 7"/>
           <p:cNvSpPr/>
           <p:nvPr/>
         </p:nvSpPr>
         <p:spPr>
           <a:xfrm>
-            <a:off x="548640" y="1737360"/>
-            <a:ext cx="5440680" cy="73152"/>
+            <a:off x="548640" y="1764792"/>
+            <a:ext cx="54864" cy="1088136"/>
           </a:xfrm>
           <a:prstGeom prst="rect">
             <a:avLst/>
           </a:prstGeom>
           <a:solidFill>
-            <a:srgbClr val="EF4444"/>
+            <a:srgbClr val="4F46E5"/>
           </a:solidFill>
           <a:ln>
             <a:noFill/>
@@ -6773,14 +6214,14 @@
       </p:sp>
       <p:sp>
         <p:nvSpPr>
-          <p:cNvPr id="10" name="TextBox 9"/>
+          <p:cNvPr id="9" name="TextBox 8"/>
           <p:cNvSpPr txBox="1"/>
           <p:nvPr/>
         </p:nvSpPr>
         <p:spPr>
           <a:xfrm>
-            <a:off x="822959" y="1965960"/>
-            <a:ext cx="4937760" cy="365760"/>
+            <a:off x="777240" y="1737360"/>
+            <a:ext cx="3840479" cy="365760"/>
           </a:xfrm>
           <a:prstGeom prst="rect">
             <a:avLst/>
@@ -6802,82 +6243,27 @@
               </a:spcAft>
             </a:pPr>
             <a:r>
-              <a:rPr sz="1700" b="1">
+              <a:rPr sz="1400" b="1">
                 <a:solidFill>
                   <a:srgbClr val="1C1F2E"/>
                 </a:solidFill>
                 <a:latin typeface="Segoe UI"/>
               </a:rPr>
-              <a:t>Drill 1 • ImagePullBackOff</a:t>
-            </a:r>
-          </a:p>
-        </p:txBody>
-      </p:sp>
-      <p:sp>
-        <p:nvSpPr>
-          <p:cNvPr id="11" name="Rounded Rectangle 10"/>
-          <p:cNvSpPr/>
-          <p:nvPr/>
-        </p:nvSpPr>
-        <p:spPr>
-          <a:xfrm>
-            <a:off x="822959" y="2560320"/>
-            <a:ext cx="1097280" cy="310896"/>
-          </a:xfrm>
-          <a:prstGeom prst="roundRect">
-            <a:avLst>
-              <a:gd name="adj" fmla="val 50000"/>
-            </a:avLst>
-          </a:prstGeom>
-          <a:solidFill>
-            <a:srgbClr val="F4F5FB"/>
-          </a:solidFill>
-          <a:ln>
-            <a:noFill/>
-          </a:ln>
-          <a:effectLst/>
-        </p:spPr>
-        <p:style>
-          <a:lnRef idx="1">
-            <a:schemeClr val="accent1"/>
-          </a:lnRef>
-          <a:fillRef idx="3">
-            <a:schemeClr val="accent1"/>
-          </a:fillRef>
-          <a:effectRef idx="2">
-            <a:schemeClr val="accent1"/>
-          </a:effectRef>
-          <a:fontRef idx="minor">
-            <a:schemeClr val="lt1"/>
-          </a:fontRef>
-        </p:style>
-        <p:txBody>
-          <a:bodyPr rtlCol="0" anchor="ctr" wrap="square" lIns="73152" rIns="73152"/>
-          <a:lstStyle/>
-          <a:p>
-            <a:pPr algn="ctr"/>
-            <a:r>
-              <a:rPr sz="1100" b="1">
-                <a:solidFill>
-                  <a:srgbClr val="EF4444"/>
-                </a:solidFill>
-                <a:latin typeface="Segoe UI"/>
-              </a:rPr>
-              <a:t>Inject</a:t>
-            </a:r>
-          </a:p>
-        </p:txBody>
-      </p:sp>
-      <p:sp>
-        <p:nvSpPr>
-          <p:cNvPr id="12" name="TextBox 11"/>
+              <a:t>Instrument</a:t>
+            </a:r>
+          </a:p>
+        </p:txBody>
+      </p:sp>
+      <p:sp>
+        <p:nvSpPr>
+          <p:cNvPr id="10" name="TextBox 9"/>
           <p:cNvSpPr txBox="1"/>
           <p:nvPr/>
         </p:nvSpPr>
         <p:spPr>
           <a:xfrm>
-            <a:off x="2103120" y="2542032"/>
-            <a:ext cx="3657600" cy="822960"/>
+            <a:off x="777240" y="2103120"/>
+            <a:ext cx="3840479" cy="822960"/>
           </a:xfrm>
           <a:prstGeom prst="rect">
             <a:avLst/>
@@ -6892,325 +6278,34 @@
           <a:p>
             <a:pPr algn="l">
               <a:lnSpc>
-                <a:spcPct val="110000"/>
+                <a:spcPct val="115000"/>
               </a:lnSpc>
               <a:spcAft>
                 <a:spcPts val="400"/>
               </a:spcAft>
             </a:pPr>
             <a:r>
-              <a:rPr sz="1200" b="0">
-                <a:solidFill>
-                  <a:srgbClr val="1C1F2E"/>
-                </a:solidFill>
-                <a:latin typeface="Segoe UI"/>
-              </a:rPr>
-              <a:t>Start a pod whose image tag does not exist in GHCR.</a:t>
-            </a:r>
-          </a:p>
-        </p:txBody>
-      </p:sp>
-      <p:sp>
-        <p:nvSpPr>
-          <p:cNvPr id="13" name="Rounded Rectangle 12"/>
+              <a:rPr sz="1100" b="0">
+                <a:solidFill>
+                  <a:srgbClr val="6B7086"/>
+                </a:solidFill>
+                <a:latin typeface="Segoe UI"/>
+              </a:rPr>
+              <a:t>FastAPI middleware records devtrack_http_requests_total and a latency histogram per route template.</a:t>
+            </a:r>
+          </a:p>
+        </p:txBody>
+      </p:sp>
+      <p:sp>
+        <p:nvSpPr>
+          <p:cNvPr id="11" name="Rounded Rectangle 10"/>
           <p:cNvSpPr/>
           <p:nvPr/>
         </p:nvSpPr>
         <p:spPr>
           <a:xfrm>
-            <a:off x="822959" y="3364991"/>
-            <a:ext cx="1097280" cy="310896"/>
-          </a:xfrm>
-          <a:prstGeom prst="roundRect">
-            <a:avLst>
-              <a:gd name="adj" fmla="val 50000"/>
-            </a:avLst>
-          </a:prstGeom>
-          <a:solidFill>
-            <a:srgbClr val="F4F5FB"/>
-          </a:solidFill>
-          <a:ln>
-            <a:noFill/>
-          </a:ln>
-          <a:effectLst/>
-        </p:spPr>
-        <p:style>
-          <a:lnRef idx="1">
-            <a:schemeClr val="accent1"/>
-          </a:lnRef>
-          <a:fillRef idx="3">
-            <a:schemeClr val="accent1"/>
-          </a:fillRef>
-          <a:effectRef idx="2">
-            <a:schemeClr val="accent1"/>
-          </a:effectRef>
-          <a:fontRef idx="minor">
-            <a:schemeClr val="lt1"/>
-          </a:fontRef>
-        </p:style>
-        <p:txBody>
-          <a:bodyPr rtlCol="0" anchor="ctr" wrap="square" lIns="73152" rIns="73152"/>
-          <a:lstStyle/>
-          <a:p>
-            <a:pPr algn="ctr"/>
-            <a:r>
-              <a:rPr sz="1100" b="1">
-                <a:solidFill>
-                  <a:srgbClr val="EF4444"/>
-                </a:solidFill>
-                <a:latin typeface="Segoe UI"/>
-              </a:rPr>
-              <a:t>Observe</a:t>
-            </a:r>
-          </a:p>
-        </p:txBody>
-      </p:sp>
-      <p:sp>
-        <p:nvSpPr>
-          <p:cNvPr id="14" name="TextBox 13"/>
-          <p:cNvSpPr txBox="1"/>
-          <p:nvPr/>
-        </p:nvSpPr>
-        <p:spPr>
-          <a:xfrm>
-            <a:off x="2103120" y="3346703"/>
-            <a:ext cx="3657600" cy="822960"/>
-          </a:xfrm>
-          <a:prstGeom prst="rect">
-            <a:avLst/>
-          </a:prstGeom>
-          <a:noFill/>
-        </p:spPr>
-        <p:txBody>
-          <a:bodyPr wrap="square" anchor="t" lIns="18288" rIns="18288" tIns="18288" bIns="18288">
-            <a:spAutoFit/>
-          </a:bodyPr>
-          <a:lstStyle/>
-          <a:p>
-            <a:pPr algn="l">
-              <a:lnSpc>
-                <a:spcPct val="110000"/>
-              </a:lnSpc>
-              <a:spcAft>
-                <a:spcPts val="400"/>
-              </a:spcAft>
-            </a:pPr>
-            <a:r>
-              <a:rPr sz="1200" b="0">
-                <a:solidFill>
-                  <a:srgbClr val="1C1F2E"/>
-                </a:solidFill>
-                <a:latin typeface="Segoe UI"/>
-              </a:rPr>
-              <a:t>kubectl get pod → ErrImagePull / ImagePullBackOff</a:t>
-            </a:r>
-          </a:p>
-        </p:txBody>
-      </p:sp>
-      <p:sp>
-        <p:nvSpPr>
-          <p:cNvPr id="15" name="Rounded Rectangle 14"/>
-          <p:cNvSpPr/>
-          <p:nvPr/>
-        </p:nvSpPr>
-        <p:spPr>
-          <a:xfrm>
-            <a:off x="822959" y="4169663"/>
-            <a:ext cx="1097280" cy="310896"/>
-          </a:xfrm>
-          <a:prstGeom prst="roundRect">
-            <a:avLst>
-              <a:gd name="adj" fmla="val 50000"/>
-            </a:avLst>
-          </a:prstGeom>
-          <a:solidFill>
-            <a:srgbClr val="F4F5FB"/>
-          </a:solidFill>
-          <a:ln>
-            <a:noFill/>
-          </a:ln>
-          <a:effectLst/>
-        </p:spPr>
-        <p:style>
-          <a:lnRef idx="1">
-            <a:schemeClr val="accent1"/>
-          </a:lnRef>
-          <a:fillRef idx="3">
-            <a:schemeClr val="accent1"/>
-          </a:fillRef>
-          <a:effectRef idx="2">
-            <a:schemeClr val="accent1"/>
-          </a:effectRef>
-          <a:fontRef idx="minor">
-            <a:schemeClr val="lt1"/>
-          </a:fontRef>
-        </p:style>
-        <p:txBody>
-          <a:bodyPr rtlCol="0" anchor="ctr" wrap="square" lIns="73152" rIns="73152"/>
-          <a:lstStyle/>
-          <a:p>
-            <a:pPr algn="ctr"/>
-            <a:r>
-              <a:rPr sz="1100" b="1">
-                <a:solidFill>
-                  <a:srgbClr val="EF4444"/>
-                </a:solidFill>
-                <a:latin typeface="Segoe UI"/>
-              </a:rPr>
-              <a:t>Diagnose</a:t>
-            </a:r>
-          </a:p>
-        </p:txBody>
-      </p:sp>
-      <p:sp>
-        <p:nvSpPr>
-          <p:cNvPr id="16" name="TextBox 15"/>
-          <p:cNvSpPr txBox="1"/>
-          <p:nvPr/>
-        </p:nvSpPr>
-        <p:spPr>
-          <a:xfrm>
-            <a:off x="2103120" y="4151376"/>
-            <a:ext cx="3657600" cy="822960"/>
-          </a:xfrm>
-          <a:prstGeom prst="rect">
-            <a:avLst/>
-          </a:prstGeom>
-          <a:noFill/>
-        </p:spPr>
-        <p:txBody>
-          <a:bodyPr wrap="square" anchor="t" lIns="18288" rIns="18288" tIns="18288" bIns="18288">
-            <a:spAutoFit/>
-          </a:bodyPr>
-          <a:lstStyle/>
-          <a:p>
-            <a:pPr algn="l">
-              <a:lnSpc>
-                <a:spcPct val="110000"/>
-              </a:lnSpc>
-              <a:spcAft>
-                <a:spcPts val="400"/>
-              </a:spcAft>
-            </a:pPr>
-            <a:r>
-              <a:rPr sz="1200" b="0">
-                <a:solidFill>
-                  <a:srgbClr val="1C1F2E"/>
-                </a:solidFill>
-                <a:latin typeface="Segoe UI"/>
-              </a:rPr>
-              <a:t>kubectl describe pod → 'Failed to pull image … NotFound'</a:t>
-            </a:r>
-          </a:p>
-        </p:txBody>
-      </p:sp>
-      <p:sp>
-        <p:nvSpPr>
-          <p:cNvPr id="17" name="Rounded Rectangle 16"/>
-          <p:cNvSpPr/>
-          <p:nvPr/>
-        </p:nvSpPr>
-        <p:spPr>
-          <a:xfrm>
-            <a:off x="822959" y="4974336"/>
-            <a:ext cx="1097280" cy="310896"/>
-          </a:xfrm>
-          <a:prstGeom prst="roundRect">
-            <a:avLst>
-              <a:gd name="adj" fmla="val 50000"/>
-            </a:avLst>
-          </a:prstGeom>
-          <a:solidFill>
-            <a:srgbClr val="F4F5FB"/>
-          </a:solidFill>
-          <a:ln>
-            <a:noFill/>
-          </a:ln>
-          <a:effectLst/>
-        </p:spPr>
-        <p:style>
-          <a:lnRef idx="1">
-            <a:schemeClr val="accent1"/>
-          </a:lnRef>
-          <a:fillRef idx="3">
-            <a:schemeClr val="accent1"/>
-          </a:fillRef>
-          <a:effectRef idx="2">
-            <a:schemeClr val="accent1"/>
-          </a:effectRef>
-          <a:fontRef idx="minor">
-            <a:schemeClr val="lt1"/>
-          </a:fontRef>
-        </p:style>
-        <p:txBody>
-          <a:bodyPr rtlCol="0" anchor="ctr" wrap="square" lIns="73152" rIns="73152"/>
-          <a:lstStyle/>
-          <a:p>
-            <a:pPr algn="ctr"/>
-            <a:r>
-              <a:rPr sz="1100" b="1">
-                <a:solidFill>
-                  <a:srgbClr val="EF4444"/>
-                </a:solidFill>
-                <a:latin typeface="Segoe UI"/>
-              </a:rPr>
-              <a:t>Fix</a:t>
-            </a:r>
-          </a:p>
-        </p:txBody>
-      </p:sp>
-      <p:sp>
-        <p:nvSpPr>
-          <p:cNvPr id="18" name="TextBox 17"/>
-          <p:cNvSpPr txBox="1"/>
-          <p:nvPr/>
-        </p:nvSpPr>
-        <p:spPr>
-          <a:xfrm>
-            <a:off x="2103120" y="4956048"/>
-            <a:ext cx="3657600" cy="822960"/>
-          </a:xfrm>
-          <a:prstGeom prst="rect">
-            <a:avLst/>
-          </a:prstGeom>
-          <a:noFill/>
-        </p:spPr>
-        <p:txBody>
-          <a:bodyPr wrap="square" anchor="t" lIns="18288" rIns="18288" tIns="18288" bIns="18288">
-            <a:spAutoFit/>
-          </a:bodyPr>
-          <a:lstStyle/>
-          <a:p>
-            <a:pPr algn="l">
-              <a:lnSpc>
-                <a:spcPct val="110000"/>
-              </a:lnSpc>
-              <a:spcAft>
-                <a:spcPts val="400"/>
-              </a:spcAft>
-            </a:pPr>
-            <a:r>
-              <a:rPr sz="1200" b="0">
-                <a:solidFill>
-                  <a:srgbClr val="1C1F2E"/>
-                </a:solidFill>
-                <a:latin typeface="Segoe UI"/>
-              </a:rPr>
-              <a:t>Recreate it with a real commit-SHA tag published by CI</a:t>
-            </a:r>
-          </a:p>
-        </p:txBody>
-      </p:sp>
-      <p:sp>
-        <p:nvSpPr>
-          <p:cNvPr id="19" name="Rounded Rectangle 18"/>
-          <p:cNvSpPr/>
-          <p:nvPr/>
-        </p:nvSpPr>
-        <p:spPr>
-          <a:xfrm>
-            <a:off x="6217920" y="1737360"/>
-            <a:ext cx="5440680" cy="4069080"/>
+            <a:off x="548640" y="3172968"/>
+            <a:ext cx="4206240" cy="1417320"/>
           </a:xfrm>
           <a:prstGeom prst="roundRect">
             <a:avLst>
@@ -7251,14 +6346,14 @@
       </p:sp>
       <p:sp>
         <p:nvSpPr>
-          <p:cNvPr id="20" name="Rectangle 19"/>
+          <p:cNvPr id="12" name="Rectangle 11"/>
           <p:cNvSpPr/>
           <p:nvPr/>
         </p:nvSpPr>
         <p:spPr>
           <a:xfrm>
-            <a:off x="6217920" y="1737360"/>
-            <a:ext cx="5440680" cy="73152"/>
+            <a:off x="548640" y="3337560"/>
+            <a:ext cx="54864" cy="1088136"/>
           </a:xfrm>
           <a:prstGeom prst="rect">
             <a:avLst/>
@@ -7295,14 +6390,14 @@
       </p:sp>
       <p:sp>
         <p:nvSpPr>
-          <p:cNvPr id="21" name="TextBox 20"/>
+          <p:cNvPr id="13" name="TextBox 12"/>
           <p:cNvSpPr txBox="1"/>
           <p:nvPr/>
         </p:nvSpPr>
         <p:spPr>
           <a:xfrm>
-            <a:off x="6492240" y="1965960"/>
-            <a:ext cx="4937760" cy="365760"/>
+            <a:off x="777240" y="3310127"/>
+            <a:ext cx="3840479" cy="365760"/>
           </a:xfrm>
           <a:prstGeom prst="rect">
             <a:avLst/>
@@ -7324,35 +6419,123 @@
               </a:spcAft>
             </a:pPr>
             <a:r>
-              <a:rPr sz="1700" b="1">
+              <a:rPr sz="1400" b="1">
                 <a:solidFill>
                   <a:srgbClr val="1C1F2E"/>
                 </a:solidFill>
                 <a:latin typeface="Segoe UI"/>
               </a:rPr>
-              <a:t>Drill 2 • Service with no endpoints</a:t>
-            </a:r>
-          </a:p>
-        </p:txBody>
-      </p:sp>
-      <p:sp>
-        <p:nvSpPr>
-          <p:cNvPr id="22" name="Rounded Rectangle 21"/>
+              <a:t>Collect</a:t>
+            </a:r>
+          </a:p>
+        </p:txBody>
+      </p:sp>
+      <p:sp>
+        <p:nvSpPr>
+          <p:cNvPr id="14" name="TextBox 13"/>
+          <p:cNvSpPr txBox="1"/>
+          <p:nvPr/>
+        </p:nvSpPr>
+        <p:spPr>
+          <a:xfrm>
+            <a:off x="777240" y="3675887"/>
+            <a:ext cx="3840479" cy="822960"/>
+          </a:xfrm>
+          <a:prstGeom prst="rect">
+            <a:avLst/>
+          </a:prstGeom>
+          <a:noFill/>
+        </p:spPr>
+        <p:txBody>
+          <a:bodyPr wrap="square" anchor="t" lIns="18288" rIns="18288" tIns="18288" bIns="18288">
+            <a:spAutoFit/>
+          </a:bodyPr>
+          <a:lstStyle/>
+          <a:p>
+            <a:pPr algn="l">
+              <a:lnSpc>
+                <a:spcPct val="115000"/>
+              </a:lnSpc>
+              <a:spcAft>
+                <a:spcPts val="400"/>
+              </a:spcAft>
+            </a:pPr>
+            <a:r>
+              <a:rPr sz="1100" b="0">
+                <a:solidFill>
+                  <a:srgbClr val="6B7086"/>
+                </a:solidFill>
+                <a:latin typeface="Segoe UI"/>
+              </a:rPr>
+              <a:t>Prometheus scrapes devtrack-backend:8000/metrics every 15 seconds — target UP (1/1).</a:t>
+            </a:r>
+          </a:p>
+        </p:txBody>
+      </p:sp>
+      <p:sp>
+        <p:nvSpPr>
+          <p:cNvPr id="15" name="Rounded Rectangle 14"/>
           <p:cNvSpPr/>
           <p:nvPr/>
         </p:nvSpPr>
         <p:spPr>
           <a:xfrm>
-            <a:off x="6492240" y="2560320"/>
-            <a:ext cx="1097280" cy="310896"/>
+            <a:off x="548640" y="4745736"/>
+            <a:ext cx="4206240" cy="1417320"/>
           </a:xfrm>
           <a:prstGeom prst="roundRect">
             <a:avLst>
-              <a:gd name="adj" fmla="val 50000"/>
+              <a:gd name="adj" fmla="val 8000"/>
             </a:avLst>
           </a:prstGeom>
           <a:solidFill>
-            <a:srgbClr val="F4F5FB"/>
+            <a:srgbClr val="FFFFFF"/>
+          </a:solidFill>
+          <a:ln w="12700">
+            <a:solidFill>
+              <a:srgbClr val="E4E6EF"/>
+            </a:solidFill>
+          </a:ln>
+          <a:effectLst/>
+        </p:spPr>
+        <p:style>
+          <a:lnRef idx="1">
+            <a:schemeClr val="accent1"/>
+          </a:lnRef>
+          <a:fillRef idx="3">
+            <a:schemeClr val="accent1"/>
+          </a:fillRef>
+          <a:effectRef idx="2">
+            <a:schemeClr val="accent1"/>
+          </a:effectRef>
+          <a:fontRef idx="minor">
+            <a:schemeClr val="lt1"/>
+          </a:fontRef>
+        </p:style>
+        <p:txBody>
+          <a:bodyPr rtlCol="0" anchor="ctr"/>
+          <a:lstStyle/>
+          <a:p>
+            <a:pPr algn="ctr"/>
+          </a:p>
+        </p:txBody>
+      </p:sp>
+      <p:sp>
+        <p:nvSpPr>
+          <p:cNvPr id="16" name="Rectangle 15"/>
+          <p:cNvSpPr/>
+          <p:nvPr/>
+        </p:nvSpPr>
+        <p:spPr>
+          <a:xfrm>
+            <a:off x="548640" y="4910327"/>
+            <a:ext cx="54864" cy="1088136"/>
+          </a:xfrm>
+          <a:prstGeom prst="rect">
+            <a:avLst/>
+          </a:prstGeom>
+          <a:solidFill>
+            <a:srgbClr val="10B981"/>
           </a:solidFill>
           <a:ln>
             <a:noFill/>
@@ -7374,32 +6557,23 @@
           </a:fontRef>
         </p:style>
         <p:txBody>
-          <a:bodyPr rtlCol="0" anchor="ctr" wrap="square" lIns="73152" rIns="73152"/>
+          <a:bodyPr rtlCol="0" anchor="ctr"/>
           <a:lstStyle/>
           <a:p>
             <a:pPr algn="ctr"/>
-            <a:r>
-              <a:rPr sz="1100" b="1">
-                <a:solidFill>
-                  <a:srgbClr val="F59E0B"/>
-                </a:solidFill>
-                <a:latin typeface="Segoe UI"/>
-              </a:rPr>
-              <a:t>Inject</a:t>
-            </a:r>
-          </a:p>
-        </p:txBody>
-      </p:sp>
-      <p:sp>
-        <p:nvSpPr>
-          <p:cNvPr id="23" name="TextBox 22"/>
+          </a:p>
+        </p:txBody>
+      </p:sp>
+      <p:sp>
+        <p:nvSpPr>
+          <p:cNvPr id="17" name="TextBox 16"/>
           <p:cNvSpPr txBox="1"/>
           <p:nvPr/>
         </p:nvSpPr>
         <p:spPr>
           <a:xfrm>
-            <a:off x="7772400" y="2542032"/>
-            <a:ext cx="3657600" cy="822960"/>
+            <a:off x="777240" y="4882896"/>
+            <a:ext cx="3840479" cy="365760"/>
           </a:xfrm>
           <a:prstGeom prst="rect">
             <a:avLst/>
@@ -7421,82 +6595,27 @@
               </a:spcAft>
             </a:pPr>
             <a:r>
-              <a:rPr sz="1200" b="0">
+              <a:rPr sz="1400" b="1">
                 <a:solidFill>
                   <a:srgbClr val="1C1F2E"/>
                 </a:solidFill>
                 <a:latin typeface="Segoe UI"/>
               </a:rPr>
-              <a:t>Service selector typo: app=lab-wbe instead of lab-web.</a:t>
-            </a:r>
-          </a:p>
-        </p:txBody>
-      </p:sp>
-      <p:sp>
-        <p:nvSpPr>
-          <p:cNvPr id="24" name="Rounded Rectangle 23"/>
-          <p:cNvSpPr/>
-          <p:nvPr/>
-        </p:nvSpPr>
-        <p:spPr>
-          <a:xfrm>
-            <a:off x="6492240" y="3364991"/>
-            <a:ext cx="1097280" cy="310896"/>
-          </a:xfrm>
-          <a:prstGeom prst="roundRect">
-            <a:avLst>
-              <a:gd name="adj" fmla="val 50000"/>
-            </a:avLst>
-          </a:prstGeom>
-          <a:solidFill>
-            <a:srgbClr val="F4F5FB"/>
-          </a:solidFill>
-          <a:ln>
-            <a:noFill/>
-          </a:ln>
-          <a:effectLst/>
-        </p:spPr>
-        <p:style>
-          <a:lnRef idx="1">
-            <a:schemeClr val="accent1"/>
-          </a:lnRef>
-          <a:fillRef idx="3">
-            <a:schemeClr val="accent1"/>
-          </a:fillRef>
-          <a:effectRef idx="2">
-            <a:schemeClr val="accent1"/>
-          </a:effectRef>
-          <a:fontRef idx="minor">
-            <a:schemeClr val="lt1"/>
-          </a:fontRef>
-        </p:style>
-        <p:txBody>
-          <a:bodyPr rtlCol="0" anchor="ctr" wrap="square" lIns="73152" rIns="73152"/>
-          <a:lstStyle/>
-          <a:p>
-            <a:pPr algn="ctr"/>
-            <a:r>
-              <a:rPr sz="1100" b="1">
-                <a:solidFill>
-                  <a:srgbClr val="F59E0B"/>
-                </a:solidFill>
-                <a:latin typeface="Segoe UI"/>
-              </a:rPr>
-              <a:t>Observe</a:t>
-            </a:r>
-          </a:p>
-        </p:txBody>
-      </p:sp>
-      <p:sp>
-        <p:nvSpPr>
-          <p:cNvPr id="25" name="TextBox 24"/>
+              <a:t>Visualise</a:t>
+            </a:r>
+          </a:p>
+        </p:txBody>
+      </p:sp>
+      <p:sp>
+        <p:nvSpPr>
+          <p:cNvPr id="18" name="TextBox 17"/>
           <p:cNvSpPr txBox="1"/>
           <p:nvPr/>
         </p:nvSpPr>
         <p:spPr>
           <a:xfrm>
-            <a:off x="7772400" y="3346703"/>
-            <a:ext cx="3657600" cy="822960"/>
+            <a:off x="777240" y="5248655"/>
+            <a:ext cx="3840479" cy="822960"/>
           </a:xfrm>
           <a:prstGeom prst="rect">
             <a:avLst/>
@@ -7511,260 +6630,114 @@
           <a:p>
             <a:pPr algn="l">
               <a:lnSpc>
-                <a:spcPct val="110000"/>
+                <a:spcPct val="115000"/>
               </a:lnSpc>
               <a:spcAft>
                 <a:spcPts val="400"/>
               </a:spcAft>
             </a:pPr>
             <a:r>
-              <a:rPr sz="1200" b="0">
-                <a:solidFill>
-                  <a:srgbClr val="1C1F2E"/>
-                </a:solidFill>
-                <a:latin typeface="Segoe UI"/>
-              </a:rPr>
-              <a:t>curl http://lab-web fails; endpoints show &lt;none&gt;</a:t>
-            </a:r>
-          </a:p>
-        </p:txBody>
-      </p:sp>
-      <p:sp>
-        <p:nvSpPr>
-          <p:cNvPr id="26" name="Rounded Rectangle 25"/>
-          <p:cNvSpPr/>
-          <p:nvPr/>
-        </p:nvSpPr>
-        <p:spPr>
-          <a:xfrm>
-            <a:off x="6492240" y="4169663"/>
-            <a:ext cx="1097280" cy="310896"/>
-          </a:xfrm>
-          <a:prstGeom prst="roundRect">
-            <a:avLst>
-              <a:gd name="adj" fmla="val 50000"/>
-            </a:avLst>
-          </a:prstGeom>
-          <a:solidFill>
-            <a:srgbClr val="F4F5FB"/>
-          </a:solidFill>
-          <a:ln>
-            <a:noFill/>
+              <a:rPr sz="1100" b="0">
+                <a:solidFill>
+                  <a:srgbClr val="6B7086"/>
+                </a:solidFill>
+                <a:latin typeface="Segoe UI"/>
+              </a:rPr>
+              <a:t>Grafana dashboard: availability, request rate, P95 latency, 5xx errors, memory and CPU.</a:t>
+            </a:r>
+          </a:p>
+        </p:txBody>
+      </p:sp>
+      <p:pic>
+        <p:nvPicPr>
+          <p:cNvPr id="19" name="Picture 18" descr="M9-grafana-dashboard.png"/>
+          <p:cNvPicPr>
+            <a:picLocks noChangeAspect="1"/>
+          </p:cNvPicPr>
+          <p:nvPr/>
+        </p:nvPicPr>
+        <p:blipFill>
+          <a:blip r:embed="rId2"/>
+          <a:srcRect b="33151"/>
+          <a:stretch>
+            <a:fillRect/>
+          </a:stretch>
+        </p:blipFill>
+        <p:spPr>
+          <a:xfrm>
+            <a:off x="4983480" y="1600200"/>
+            <a:ext cx="6675120" cy="2788920"/>
+          </a:xfrm>
+          <a:prstGeom prst="rect">
+            <a:avLst/>
+          </a:prstGeom>
+          <a:ln w="12700">
+            <a:solidFill>
+              <a:srgbClr val="E4E6EF"/>
+            </a:solidFill>
           </a:ln>
-          <a:effectLst/>
-        </p:spPr>
-        <p:style>
-          <a:lnRef idx="1">
-            <a:schemeClr val="accent1"/>
-          </a:lnRef>
-          <a:fillRef idx="3">
-            <a:schemeClr val="accent1"/>
-          </a:fillRef>
-          <a:effectRef idx="2">
-            <a:schemeClr val="accent1"/>
-          </a:effectRef>
-          <a:fontRef idx="minor">
-            <a:schemeClr val="lt1"/>
-          </a:fontRef>
-        </p:style>
-        <p:txBody>
-          <a:bodyPr rtlCol="0" anchor="ctr" wrap="square" lIns="73152" rIns="73152"/>
-          <a:lstStyle/>
-          <a:p>
-            <a:pPr algn="ctr"/>
-            <a:r>
-              <a:rPr sz="1100" b="1">
-                <a:solidFill>
-                  <a:srgbClr val="F59E0B"/>
-                </a:solidFill>
-                <a:latin typeface="Segoe UI"/>
-              </a:rPr>
-              <a:t>Diagnose</a:t>
-            </a:r>
-          </a:p>
-        </p:txBody>
-      </p:sp>
-      <p:sp>
-        <p:nvSpPr>
-          <p:cNvPr id="27" name="TextBox 26"/>
-          <p:cNvSpPr txBox="1"/>
-          <p:nvPr/>
-        </p:nvSpPr>
-        <p:spPr>
-          <a:xfrm>
-            <a:off x="7772400" y="4151376"/>
-            <a:ext cx="3657600" cy="822960"/>
-          </a:xfrm>
-          <a:prstGeom prst="rect">
-            <a:avLst/>
-          </a:prstGeom>
-          <a:noFill/>
-        </p:spPr>
-        <p:txBody>
-          <a:bodyPr wrap="square" anchor="t" lIns="18288" rIns="18288" tIns="18288" bIns="18288">
-            <a:spAutoFit/>
-          </a:bodyPr>
-          <a:lstStyle/>
-          <a:p>
-            <a:pPr algn="l">
-              <a:lnSpc>
-                <a:spcPct val="110000"/>
-              </a:lnSpc>
-              <a:spcAft>
-                <a:spcPts val="400"/>
-              </a:spcAft>
-            </a:pPr>
-            <a:r>
-              <a:rPr sz="1200" b="0">
-                <a:solidFill>
-                  <a:srgbClr val="1C1F2E"/>
-                </a:solidFill>
-                <a:latin typeface="Segoe UI"/>
-              </a:rPr>
-              <a:t>Compare the Service selector with pod --show-labels</a:t>
-            </a:r>
-          </a:p>
-        </p:txBody>
-      </p:sp>
-      <p:sp>
-        <p:nvSpPr>
-          <p:cNvPr id="28" name="Rounded Rectangle 27"/>
-          <p:cNvSpPr/>
-          <p:nvPr/>
-        </p:nvSpPr>
-        <p:spPr>
-          <a:xfrm>
-            <a:off x="6492240" y="4974336"/>
-            <a:ext cx="1097280" cy="310896"/>
-          </a:xfrm>
-          <a:prstGeom prst="roundRect">
-            <a:avLst>
-              <a:gd name="adj" fmla="val 50000"/>
-            </a:avLst>
-          </a:prstGeom>
-          <a:solidFill>
-            <a:srgbClr val="F4F5FB"/>
-          </a:solidFill>
-          <a:ln>
-            <a:noFill/>
+        </p:spPr>
+      </p:pic>
+      <p:pic>
+        <p:nvPicPr>
+          <p:cNvPr id="20" name="Picture 19" descr="M9-prometheus-targets.png"/>
+          <p:cNvPicPr>
+            <a:picLocks noChangeAspect="1"/>
+          </p:cNvPicPr>
+          <p:nvPr/>
+        </p:nvPicPr>
+        <p:blipFill>
+          <a:blip r:embed="rId3"/>
+          <a:srcRect b="16620"/>
+          <a:stretch>
+            <a:fillRect/>
+          </a:stretch>
+        </p:blipFill>
+        <p:spPr>
+          <a:xfrm>
+            <a:off x="4983480" y="4572000"/>
+            <a:ext cx="3246120" cy="1691640"/>
+          </a:xfrm>
+          <a:prstGeom prst="rect">
+            <a:avLst/>
+          </a:prstGeom>
+          <a:ln w="12700">
+            <a:solidFill>
+              <a:srgbClr val="E4E6EF"/>
+            </a:solidFill>
           </a:ln>
-          <a:effectLst/>
-        </p:spPr>
-        <p:style>
-          <a:lnRef idx="1">
-            <a:schemeClr val="accent1"/>
-          </a:lnRef>
-          <a:fillRef idx="3">
-            <a:schemeClr val="accent1"/>
-          </a:fillRef>
-          <a:effectRef idx="2">
-            <a:schemeClr val="accent1"/>
-          </a:effectRef>
-          <a:fontRef idx="minor">
-            <a:schemeClr val="lt1"/>
-          </a:fontRef>
-        </p:style>
-        <p:txBody>
-          <a:bodyPr rtlCol="0" anchor="ctr" wrap="square" lIns="73152" rIns="73152"/>
-          <a:lstStyle/>
-          <a:p>
-            <a:pPr algn="ctr"/>
-            <a:r>
-              <a:rPr sz="1100" b="1">
-                <a:solidFill>
-                  <a:srgbClr val="F59E0B"/>
-                </a:solidFill>
-                <a:latin typeface="Segoe UI"/>
-              </a:rPr>
-              <a:t>Fix</a:t>
-            </a:r>
-          </a:p>
-        </p:txBody>
-      </p:sp>
-      <p:sp>
-        <p:nvSpPr>
-          <p:cNvPr id="29" name="TextBox 28"/>
-          <p:cNvSpPr txBox="1"/>
-          <p:nvPr/>
-        </p:nvSpPr>
-        <p:spPr>
-          <a:xfrm>
-            <a:off x="7772400" y="4956048"/>
-            <a:ext cx="3657600" cy="822960"/>
-          </a:xfrm>
-          <a:prstGeom prst="rect">
-            <a:avLst/>
-          </a:prstGeom>
-          <a:noFill/>
-        </p:spPr>
-        <p:txBody>
-          <a:bodyPr wrap="square" anchor="t" lIns="18288" rIns="18288" tIns="18288" bIns="18288">
-            <a:spAutoFit/>
-          </a:bodyPr>
-          <a:lstStyle/>
-          <a:p>
-            <a:pPr algn="l">
-              <a:lnSpc>
-                <a:spcPct val="110000"/>
-              </a:lnSpc>
-              <a:spcAft>
-                <a:spcPts val="400"/>
-              </a:spcAft>
-            </a:pPr>
-            <a:r>
-              <a:rPr sz="1200" b="0">
-                <a:solidFill>
-                  <a:srgbClr val="1C1F2E"/>
-                </a:solidFill>
-                <a:latin typeface="Segoe UI"/>
-              </a:rPr>
-              <a:t>kubectl patch the selector → endpoints appear, HTTP 200</a:t>
-            </a:r>
-          </a:p>
-        </p:txBody>
-      </p:sp>
-      <p:sp>
-        <p:nvSpPr>
-          <p:cNvPr id="30" name="TextBox 29"/>
-          <p:cNvSpPr txBox="1"/>
-          <p:nvPr/>
-        </p:nvSpPr>
-        <p:spPr>
-          <a:xfrm>
-            <a:off x="548640" y="5989320"/>
-            <a:ext cx="10972800" cy="274320"/>
-          </a:xfrm>
-          <a:prstGeom prst="rect">
-            <a:avLst/>
-          </a:prstGeom>
-          <a:noFill/>
-        </p:spPr>
-        <p:txBody>
-          <a:bodyPr wrap="square" anchor="t" lIns="18288" rIns="18288" tIns="18288" bIns="18288">
-            <a:spAutoFit/>
-          </a:bodyPr>
-          <a:lstStyle/>
-          <a:p>
-            <a:pPr algn="l">
-              <a:lnSpc>
-                <a:spcPct val="110000"/>
-              </a:lnSpc>
-              <a:spcAft>
-                <a:spcPts val="400"/>
-              </a:spcAft>
-            </a:pPr>
-            <a:r>
-              <a:rPr sz="1100" b="0">
-                <a:solidFill>
-                  <a:srgbClr val="6B7086"/>
-                </a:solidFill>
-                <a:latin typeface="Segoe UI"/>
-              </a:rPr>
-              <a:t>Found while drilling: Nginx crashed when the backend name was unresolvable — fixed by resolving it per request.</a:t>
-            </a:r>
-          </a:p>
-        </p:txBody>
-      </p:sp>
+        </p:spPr>
+      </p:pic>
+      <p:pic>
+        <p:nvPicPr>
+          <p:cNvPr id="21" name="Picture 20" descr="M9-prometheus-query.png"/>
+          <p:cNvPicPr>
+            <a:picLocks noChangeAspect="1"/>
+          </p:cNvPicPr>
+          <p:nvPr/>
+        </p:nvPicPr>
+        <p:blipFill>
+          <a:blip r:embed="rId4"/>
+          <a:srcRect b="16620"/>
+          <a:stretch>
+            <a:fillRect/>
+          </a:stretch>
+        </p:blipFill>
+        <p:spPr>
+          <a:xfrm>
+            <a:off x="8412480" y="4572000"/>
+            <a:ext cx="3246120" cy="1691640"/>
+          </a:xfrm>
+          <a:prstGeom prst="rect">
+            <a:avLst/>
+          </a:prstGeom>
+          <a:ln w="12700">
+            <a:solidFill>
+              <a:srgbClr val="E4E6EF"/>
+            </a:solidFill>
+          </a:ln>
+        </p:spPr>
+      </p:pic>
     </p:spTree>
   </p:cSld>
   <p:clrMapOvr>
@@ -7872,7 +6845,7 @@
                 </a:solidFill>
                 <a:latin typeface="Segoe UI"/>
               </a:rPr>
-              <a:t>13 • DRILLS, EXECUTED</a:t>
+              <a:t>13 • TROUBLESHOOTING &amp; RESILIENCE</a:t>
             </a:r>
           </a:p>
         </p:txBody>
@@ -7914,7 +6887,7 @@
                 </a:solidFill>
                 <a:latin typeface="Segoe UI"/>
               </a:rPr>
-              <a:t>Real output from the troubleshooting-lab namespace</a:t>
+              <a:t>Diagnose from evidence, then fix the cause</a:t>
             </a:r>
           </a:p>
         </p:txBody>
@@ -7927,8 +6900,8 @@
         </p:nvSpPr>
         <p:spPr>
           <a:xfrm>
-            <a:off x="548640" y="6446520"/>
-            <a:ext cx="5486400" cy="274320"/>
+            <a:off x="548640" y="1188720"/>
+            <a:ext cx="11155680" cy="365760"/>
           </a:xfrm>
           <a:prstGeom prst="rect">
             <a:avLst/>
@@ -7950,6 +6923,48 @@
               </a:spcAft>
             </a:pPr>
             <a:r>
+              <a:rPr sz="1400" b="0">
+                <a:solidFill>
+                  <a:srgbClr val="6B7086"/>
+                </a:solidFill>
+                <a:latin typeface="Segoe UI"/>
+              </a:rPr>
+              <a:t>Both drills were executed on the cluster — the terminal evidence is on the next slide.</a:t>
+            </a:r>
+          </a:p>
+        </p:txBody>
+      </p:sp>
+      <p:sp>
+        <p:nvSpPr>
+          <p:cNvPr id="6" name="TextBox 5"/>
+          <p:cNvSpPr txBox="1"/>
+          <p:nvPr/>
+        </p:nvSpPr>
+        <p:spPr>
+          <a:xfrm>
+            <a:off x="548640" y="6446520"/>
+            <a:ext cx="5486400" cy="274320"/>
+          </a:xfrm>
+          <a:prstGeom prst="rect">
+            <a:avLst/>
+          </a:prstGeom>
+          <a:noFill/>
+        </p:spPr>
+        <p:txBody>
+          <a:bodyPr wrap="square" anchor="t" lIns="18288" rIns="18288" tIns="18288" bIns="18288">
+            <a:spAutoFit/>
+          </a:bodyPr>
+          <a:lstStyle/>
+          <a:p>
+            <a:pPr algn="l">
+              <a:lnSpc>
+                <a:spcPct val="110000"/>
+              </a:lnSpc>
+              <a:spcAft>
+                <a:spcPts val="400"/>
+              </a:spcAft>
+            </a:pPr>
+            <a:r>
               <a:rPr sz="900" b="0">
                 <a:solidFill>
                   <a:srgbClr val="6B7086"/>
@@ -7963,7 +6978,7 @@
       </p:sp>
       <p:sp>
         <p:nvSpPr>
-          <p:cNvPr id="6" name="TextBox 5"/>
+          <p:cNvPr id="7" name="TextBox 6"/>
           <p:cNvSpPr txBox="1"/>
           <p:nvPr/>
         </p:nvSpPr>
@@ -7998,69 +7013,1097 @@
                 </a:solidFill>
                 <a:latin typeface="Segoe UI"/>
               </a:rPr>
-              <a:t>14 / 17</a:t>
-            </a:r>
-          </a:p>
-        </p:txBody>
-      </p:sp>
-      <p:pic>
-        <p:nvPicPr>
-          <p:cNvPr id="7" name="Picture 6" descr="M10-troubleshooting-imagepullbackoff.png"/>
-          <p:cNvPicPr>
-            <a:picLocks noChangeAspect="1"/>
-          </p:cNvPicPr>
-          <p:nvPr/>
-        </p:nvPicPr>
-        <p:blipFill>
-          <a:blip r:embed="rId2"/>
-          <a:stretch>
-            <a:fillRect/>
-          </a:stretch>
-        </p:blipFill>
-        <p:spPr>
-          <a:xfrm>
-            <a:off x="548640" y="2178538"/>
-            <a:ext cx="5532120" cy="3323882"/>
-          </a:xfrm>
-          <a:prstGeom prst="rect">
-            <a:avLst/>
-          </a:prstGeom>
+              <a:t>14 / 18</a:t>
+            </a:r>
+          </a:p>
+        </p:txBody>
+      </p:sp>
+      <p:sp>
+        <p:nvSpPr>
+          <p:cNvPr id="8" name="Rounded Rectangle 7"/>
+          <p:cNvSpPr/>
+          <p:nvPr/>
+        </p:nvSpPr>
+        <p:spPr>
+          <a:xfrm>
+            <a:off x="548640" y="1737360"/>
+            <a:ext cx="5440680" cy="4069080"/>
+          </a:xfrm>
+          <a:prstGeom prst="roundRect">
+            <a:avLst>
+              <a:gd name="adj" fmla="val 8000"/>
+            </a:avLst>
+          </a:prstGeom>
+          <a:solidFill>
+            <a:srgbClr val="FFFFFF"/>
+          </a:solidFill>
           <a:ln w="12700">
             <a:solidFill>
               <a:srgbClr val="E4E6EF"/>
             </a:solidFill>
           </a:ln>
-        </p:spPr>
-      </p:pic>
-      <p:pic>
-        <p:nvPicPr>
-          <p:cNvPr id="8" name="Picture 7" descr="M10-troubleshooting-service-selector.png"/>
-          <p:cNvPicPr>
-            <a:picLocks noChangeAspect="1"/>
-          </p:cNvPicPr>
-          <p:nvPr/>
-        </p:nvPicPr>
-        <p:blipFill>
-          <a:blip r:embed="rId3"/>
-          <a:stretch>
-            <a:fillRect/>
-          </a:stretch>
-        </p:blipFill>
-        <p:spPr>
-          <a:xfrm>
-            <a:off x="6263640" y="2172538"/>
-            <a:ext cx="5394960" cy="3335883"/>
-          </a:xfrm>
-          <a:prstGeom prst="rect">
-            <a:avLst/>
-          </a:prstGeom>
+          <a:effectLst/>
+        </p:spPr>
+        <p:style>
+          <a:lnRef idx="1">
+            <a:schemeClr val="accent1"/>
+          </a:lnRef>
+          <a:fillRef idx="3">
+            <a:schemeClr val="accent1"/>
+          </a:fillRef>
+          <a:effectRef idx="2">
+            <a:schemeClr val="accent1"/>
+          </a:effectRef>
+          <a:fontRef idx="minor">
+            <a:schemeClr val="lt1"/>
+          </a:fontRef>
+        </p:style>
+        <p:txBody>
+          <a:bodyPr rtlCol="0" anchor="ctr"/>
+          <a:lstStyle/>
+          <a:p>
+            <a:pPr algn="ctr"/>
+          </a:p>
+        </p:txBody>
+      </p:sp>
+      <p:sp>
+        <p:nvSpPr>
+          <p:cNvPr id="9" name="Rectangle 8"/>
+          <p:cNvSpPr/>
+          <p:nvPr/>
+        </p:nvSpPr>
+        <p:spPr>
+          <a:xfrm>
+            <a:off x="548640" y="1737360"/>
+            <a:ext cx="5440680" cy="73152"/>
+          </a:xfrm>
+          <a:prstGeom prst="rect">
+            <a:avLst/>
+          </a:prstGeom>
+          <a:solidFill>
+            <a:srgbClr val="EF4444"/>
+          </a:solidFill>
+          <a:ln>
+            <a:noFill/>
+          </a:ln>
+          <a:effectLst/>
+        </p:spPr>
+        <p:style>
+          <a:lnRef idx="1">
+            <a:schemeClr val="accent1"/>
+          </a:lnRef>
+          <a:fillRef idx="3">
+            <a:schemeClr val="accent1"/>
+          </a:fillRef>
+          <a:effectRef idx="2">
+            <a:schemeClr val="accent1"/>
+          </a:effectRef>
+          <a:fontRef idx="minor">
+            <a:schemeClr val="lt1"/>
+          </a:fontRef>
+        </p:style>
+        <p:txBody>
+          <a:bodyPr rtlCol="0" anchor="ctr"/>
+          <a:lstStyle/>
+          <a:p>
+            <a:pPr algn="ctr"/>
+          </a:p>
+        </p:txBody>
+      </p:sp>
+      <p:sp>
+        <p:nvSpPr>
+          <p:cNvPr id="10" name="TextBox 9"/>
+          <p:cNvSpPr txBox="1"/>
+          <p:nvPr/>
+        </p:nvSpPr>
+        <p:spPr>
+          <a:xfrm>
+            <a:off x="822959" y="1965960"/>
+            <a:ext cx="4937760" cy="365760"/>
+          </a:xfrm>
+          <a:prstGeom prst="rect">
+            <a:avLst/>
+          </a:prstGeom>
+          <a:noFill/>
+        </p:spPr>
+        <p:txBody>
+          <a:bodyPr wrap="square" anchor="t" lIns="18288" rIns="18288" tIns="18288" bIns="18288">
+            <a:spAutoFit/>
+          </a:bodyPr>
+          <a:lstStyle/>
+          <a:p>
+            <a:pPr algn="l">
+              <a:lnSpc>
+                <a:spcPct val="110000"/>
+              </a:lnSpc>
+              <a:spcAft>
+                <a:spcPts val="400"/>
+              </a:spcAft>
+            </a:pPr>
+            <a:r>
+              <a:rPr sz="1700" b="1">
+                <a:solidFill>
+                  <a:srgbClr val="1C1F2E"/>
+                </a:solidFill>
+                <a:latin typeface="Segoe UI"/>
+              </a:rPr>
+              <a:t>Drill 1 • ImagePullBackOff</a:t>
+            </a:r>
+          </a:p>
+        </p:txBody>
+      </p:sp>
+      <p:sp>
+        <p:nvSpPr>
+          <p:cNvPr id="11" name="Rounded Rectangle 10"/>
+          <p:cNvSpPr/>
+          <p:nvPr/>
+        </p:nvSpPr>
+        <p:spPr>
+          <a:xfrm>
+            <a:off x="822959" y="2560320"/>
+            <a:ext cx="1097280" cy="310896"/>
+          </a:xfrm>
+          <a:prstGeom prst="roundRect">
+            <a:avLst>
+              <a:gd name="adj" fmla="val 50000"/>
+            </a:avLst>
+          </a:prstGeom>
+          <a:solidFill>
+            <a:srgbClr val="F4F5FB"/>
+          </a:solidFill>
+          <a:ln>
+            <a:noFill/>
+          </a:ln>
+          <a:effectLst/>
+        </p:spPr>
+        <p:style>
+          <a:lnRef idx="1">
+            <a:schemeClr val="accent1"/>
+          </a:lnRef>
+          <a:fillRef idx="3">
+            <a:schemeClr val="accent1"/>
+          </a:fillRef>
+          <a:effectRef idx="2">
+            <a:schemeClr val="accent1"/>
+          </a:effectRef>
+          <a:fontRef idx="minor">
+            <a:schemeClr val="lt1"/>
+          </a:fontRef>
+        </p:style>
+        <p:txBody>
+          <a:bodyPr rtlCol="0" anchor="ctr" wrap="square" lIns="73152" rIns="73152"/>
+          <a:lstStyle/>
+          <a:p>
+            <a:pPr algn="ctr"/>
+            <a:r>
+              <a:rPr sz="1100" b="1">
+                <a:solidFill>
+                  <a:srgbClr val="EF4444"/>
+                </a:solidFill>
+                <a:latin typeface="Segoe UI"/>
+              </a:rPr>
+              <a:t>Inject</a:t>
+            </a:r>
+          </a:p>
+        </p:txBody>
+      </p:sp>
+      <p:sp>
+        <p:nvSpPr>
+          <p:cNvPr id="12" name="TextBox 11"/>
+          <p:cNvSpPr txBox="1"/>
+          <p:nvPr/>
+        </p:nvSpPr>
+        <p:spPr>
+          <a:xfrm>
+            <a:off x="2103120" y="2542032"/>
+            <a:ext cx="3657600" cy="822960"/>
+          </a:xfrm>
+          <a:prstGeom prst="rect">
+            <a:avLst/>
+          </a:prstGeom>
+          <a:noFill/>
+        </p:spPr>
+        <p:txBody>
+          <a:bodyPr wrap="square" anchor="t" lIns="18288" rIns="18288" tIns="18288" bIns="18288">
+            <a:spAutoFit/>
+          </a:bodyPr>
+          <a:lstStyle/>
+          <a:p>
+            <a:pPr algn="l">
+              <a:lnSpc>
+                <a:spcPct val="110000"/>
+              </a:lnSpc>
+              <a:spcAft>
+                <a:spcPts val="400"/>
+              </a:spcAft>
+            </a:pPr>
+            <a:r>
+              <a:rPr sz="1200" b="0">
+                <a:solidFill>
+                  <a:srgbClr val="1C1F2E"/>
+                </a:solidFill>
+                <a:latin typeface="Segoe UI"/>
+              </a:rPr>
+              <a:t>Start a pod whose image tag does not exist in GHCR.</a:t>
+            </a:r>
+          </a:p>
+        </p:txBody>
+      </p:sp>
+      <p:sp>
+        <p:nvSpPr>
+          <p:cNvPr id="13" name="Rounded Rectangle 12"/>
+          <p:cNvSpPr/>
+          <p:nvPr/>
+        </p:nvSpPr>
+        <p:spPr>
+          <a:xfrm>
+            <a:off x="822959" y="3364991"/>
+            <a:ext cx="1097280" cy="310896"/>
+          </a:xfrm>
+          <a:prstGeom prst="roundRect">
+            <a:avLst>
+              <a:gd name="adj" fmla="val 50000"/>
+            </a:avLst>
+          </a:prstGeom>
+          <a:solidFill>
+            <a:srgbClr val="F4F5FB"/>
+          </a:solidFill>
+          <a:ln>
+            <a:noFill/>
+          </a:ln>
+          <a:effectLst/>
+        </p:spPr>
+        <p:style>
+          <a:lnRef idx="1">
+            <a:schemeClr val="accent1"/>
+          </a:lnRef>
+          <a:fillRef idx="3">
+            <a:schemeClr val="accent1"/>
+          </a:fillRef>
+          <a:effectRef idx="2">
+            <a:schemeClr val="accent1"/>
+          </a:effectRef>
+          <a:fontRef idx="minor">
+            <a:schemeClr val="lt1"/>
+          </a:fontRef>
+        </p:style>
+        <p:txBody>
+          <a:bodyPr rtlCol="0" anchor="ctr" wrap="square" lIns="73152" rIns="73152"/>
+          <a:lstStyle/>
+          <a:p>
+            <a:pPr algn="ctr"/>
+            <a:r>
+              <a:rPr sz="1100" b="1">
+                <a:solidFill>
+                  <a:srgbClr val="EF4444"/>
+                </a:solidFill>
+                <a:latin typeface="Segoe UI"/>
+              </a:rPr>
+              <a:t>Observe</a:t>
+            </a:r>
+          </a:p>
+        </p:txBody>
+      </p:sp>
+      <p:sp>
+        <p:nvSpPr>
+          <p:cNvPr id="14" name="TextBox 13"/>
+          <p:cNvSpPr txBox="1"/>
+          <p:nvPr/>
+        </p:nvSpPr>
+        <p:spPr>
+          <a:xfrm>
+            <a:off x="2103120" y="3346703"/>
+            <a:ext cx="3657600" cy="822960"/>
+          </a:xfrm>
+          <a:prstGeom prst="rect">
+            <a:avLst/>
+          </a:prstGeom>
+          <a:noFill/>
+        </p:spPr>
+        <p:txBody>
+          <a:bodyPr wrap="square" anchor="t" lIns="18288" rIns="18288" tIns="18288" bIns="18288">
+            <a:spAutoFit/>
+          </a:bodyPr>
+          <a:lstStyle/>
+          <a:p>
+            <a:pPr algn="l">
+              <a:lnSpc>
+                <a:spcPct val="110000"/>
+              </a:lnSpc>
+              <a:spcAft>
+                <a:spcPts val="400"/>
+              </a:spcAft>
+            </a:pPr>
+            <a:r>
+              <a:rPr sz="1200" b="0">
+                <a:solidFill>
+                  <a:srgbClr val="1C1F2E"/>
+                </a:solidFill>
+                <a:latin typeface="Segoe UI"/>
+              </a:rPr>
+              <a:t>kubectl get pod → ErrImagePull / ImagePullBackOff</a:t>
+            </a:r>
+          </a:p>
+        </p:txBody>
+      </p:sp>
+      <p:sp>
+        <p:nvSpPr>
+          <p:cNvPr id="15" name="Rounded Rectangle 14"/>
+          <p:cNvSpPr/>
+          <p:nvPr/>
+        </p:nvSpPr>
+        <p:spPr>
+          <a:xfrm>
+            <a:off x="822959" y="4169663"/>
+            <a:ext cx="1097280" cy="310896"/>
+          </a:xfrm>
+          <a:prstGeom prst="roundRect">
+            <a:avLst>
+              <a:gd name="adj" fmla="val 50000"/>
+            </a:avLst>
+          </a:prstGeom>
+          <a:solidFill>
+            <a:srgbClr val="F4F5FB"/>
+          </a:solidFill>
+          <a:ln>
+            <a:noFill/>
+          </a:ln>
+          <a:effectLst/>
+        </p:spPr>
+        <p:style>
+          <a:lnRef idx="1">
+            <a:schemeClr val="accent1"/>
+          </a:lnRef>
+          <a:fillRef idx="3">
+            <a:schemeClr val="accent1"/>
+          </a:fillRef>
+          <a:effectRef idx="2">
+            <a:schemeClr val="accent1"/>
+          </a:effectRef>
+          <a:fontRef idx="minor">
+            <a:schemeClr val="lt1"/>
+          </a:fontRef>
+        </p:style>
+        <p:txBody>
+          <a:bodyPr rtlCol="0" anchor="ctr" wrap="square" lIns="73152" rIns="73152"/>
+          <a:lstStyle/>
+          <a:p>
+            <a:pPr algn="ctr"/>
+            <a:r>
+              <a:rPr sz="1100" b="1">
+                <a:solidFill>
+                  <a:srgbClr val="EF4444"/>
+                </a:solidFill>
+                <a:latin typeface="Segoe UI"/>
+              </a:rPr>
+              <a:t>Diagnose</a:t>
+            </a:r>
+          </a:p>
+        </p:txBody>
+      </p:sp>
+      <p:sp>
+        <p:nvSpPr>
+          <p:cNvPr id="16" name="TextBox 15"/>
+          <p:cNvSpPr txBox="1"/>
+          <p:nvPr/>
+        </p:nvSpPr>
+        <p:spPr>
+          <a:xfrm>
+            <a:off x="2103120" y="4151376"/>
+            <a:ext cx="3657600" cy="822960"/>
+          </a:xfrm>
+          <a:prstGeom prst="rect">
+            <a:avLst/>
+          </a:prstGeom>
+          <a:noFill/>
+        </p:spPr>
+        <p:txBody>
+          <a:bodyPr wrap="square" anchor="t" lIns="18288" rIns="18288" tIns="18288" bIns="18288">
+            <a:spAutoFit/>
+          </a:bodyPr>
+          <a:lstStyle/>
+          <a:p>
+            <a:pPr algn="l">
+              <a:lnSpc>
+                <a:spcPct val="110000"/>
+              </a:lnSpc>
+              <a:spcAft>
+                <a:spcPts val="400"/>
+              </a:spcAft>
+            </a:pPr>
+            <a:r>
+              <a:rPr sz="1200" b="0">
+                <a:solidFill>
+                  <a:srgbClr val="1C1F2E"/>
+                </a:solidFill>
+                <a:latin typeface="Segoe UI"/>
+              </a:rPr>
+              <a:t>kubectl describe pod → 'Failed to pull image … NotFound'</a:t>
+            </a:r>
+          </a:p>
+        </p:txBody>
+      </p:sp>
+      <p:sp>
+        <p:nvSpPr>
+          <p:cNvPr id="17" name="Rounded Rectangle 16"/>
+          <p:cNvSpPr/>
+          <p:nvPr/>
+        </p:nvSpPr>
+        <p:spPr>
+          <a:xfrm>
+            <a:off x="822959" y="4974336"/>
+            <a:ext cx="1097280" cy="310896"/>
+          </a:xfrm>
+          <a:prstGeom prst="roundRect">
+            <a:avLst>
+              <a:gd name="adj" fmla="val 50000"/>
+            </a:avLst>
+          </a:prstGeom>
+          <a:solidFill>
+            <a:srgbClr val="F4F5FB"/>
+          </a:solidFill>
+          <a:ln>
+            <a:noFill/>
+          </a:ln>
+          <a:effectLst/>
+        </p:spPr>
+        <p:style>
+          <a:lnRef idx="1">
+            <a:schemeClr val="accent1"/>
+          </a:lnRef>
+          <a:fillRef idx="3">
+            <a:schemeClr val="accent1"/>
+          </a:fillRef>
+          <a:effectRef idx="2">
+            <a:schemeClr val="accent1"/>
+          </a:effectRef>
+          <a:fontRef idx="minor">
+            <a:schemeClr val="lt1"/>
+          </a:fontRef>
+        </p:style>
+        <p:txBody>
+          <a:bodyPr rtlCol="0" anchor="ctr" wrap="square" lIns="73152" rIns="73152"/>
+          <a:lstStyle/>
+          <a:p>
+            <a:pPr algn="ctr"/>
+            <a:r>
+              <a:rPr sz="1100" b="1">
+                <a:solidFill>
+                  <a:srgbClr val="EF4444"/>
+                </a:solidFill>
+                <a:latin typeface="Segoe UI"/>
+              </a:rPr>
+              <a:t>Fix</a:t>
+            </a:r>
+          </a:p>
+        </p:txBody>
+      </p:sp>
+      <p:sp>
+        <p:nvSpPr>
+          <p:cNvPr id="18" name="TextBox 17"/>
+          <p:cNvSpPr txBox="1"/>
+          <p:nvPr/>
+        </p:nvSpPr>
+        <p:spPr>
+          <a:xfrm>
+            <a:off x="2103120" y="4956048"/>
+            <a:ext cx="3657600" cy="822960"/>
+          </a:xfrm>
+          <a:prstGeom prst="rect">
+            <a:avLst/>
+          </a:prstGeom>
+          <a:noFill/>
+        </p:spPr>
+        <p:txBody>
+          <a:bodyPr wrap="square" anchor="t" lIns="18288" rIns="18288" tIns="18288" bIns="18288">
+            <a:spAutoFit/>
+          </a:bodyPr>
+          <a:lstStyle/>
+          <a:p>
+            <a:pPr algn="l">
+              <a:lnSpc>
+                <a:spcPct val="110000"/>
+              </a:lnSpc>
+              <a:spcAft>
+                <a:spcPts val="400"/>
+              </a:spcAft>
+            </a:pPr>
+            <a:r>
+              <a:rPr sz="1200" b="0">
+                <a:solidFill>
+                  <a:srgbClr val="1C1F2E"/>
+                </a:solidFill>
+                <a:latin typeface="Segoe UI"/>
+              </a:rPr>
+              <a:t>Recreate it with a real commit-SHA tag published by CI</a:t>
+            </a:r>
+          </a:p>
+        </p:txBody>
+      </p:sp>
+      <p:sp>
+        <p:nvSpPr>
+          <p:cNvPr id="19" name="Rounded Rectangle 18"/>
+          <p:cNvSpPr/>
+          <p:nvPr/>
+        </p:nvSpPr>
+        <p:spPr>
+          <a:xfrm>
+            <a:off x="6217920" y="1737360"/>
+            <a:ext cx="5440680" cy="4069080"/>
+          </a:xfrm>
+          <a:prstGeom prst="roundRect">
+            <a:avLst>
+              <a:gd name="adj" fmla="val 8000"/>
+            </a:avLst>
+          </a:prstGeom>
+          <a:solidFill>
+            <a:srgbClr val="FFFFFF"/>
+          </a:solidFill>
           <a:ln w="12700">
             <a:solidFill>
               <a:srgbClr val="E4E6EF"/>
             </a:solidFill>
           </a:ln>
-        </p:spPr>
-      </p:pic>
+          <a:effectLst/>
+        </p:spPr>
+        <p:style>
+          <a:lnRef idx="1">
+            <a:schemeClr val="accent1"/>
+          </a:lnRef>
+          <a:fillRef idx="3">
+            <a:schemeClr val="accent1"/>
+          </a:fillRef>
+          <a:effectRef idx="2">
+            <a:schemeClr val="accent1"/>
+          </a:effectRef>
+          <a:fontRef idx="minor">
+            <a:schemeClr val="lt1"/>
+          </a:fontRef>
+        </p:style>
+        <p:txBody>
+          <a:bodyPr rtlCol="0" anchor="ctr"/>
+          <a:lstStyle/>
+          <a:p>
+            <a:pPr algn="ctr"/>
+          </a:p>
+        </p:txBody>
+      </p:sp>
+      <p:sp>
+        <p:nvSpPr>
+          <p:cNvPr id="20" name="Rectangle 19"/>
+          <p:cNvSpPr/>
+          <p:nvPr/>
+        </p:nvSpPr>
+        <p:spPr>
+          <a:xfrm>
+            <a:off x="6217920" y="1737360"/>
+            <a:ext cx="5440680" cy="73152"/>
+          </a:xfrm>
+          <a:prstGeom prst="rect">
+            <a:avLst/>
+          </a:prstGeom>
+          <a:solidFill>
+            <a:srgbClr val="F59E0B"/>
+          </a:solidFill>
+          <a:ln>
+            <a:noFill/>
+          </a:ln>
+          <a:effectLst/>
+        </p:spPr>
+        <p:style>
+          <a:lnRef idx="1">
+            <a:schemeClr val="accent1"/>
+          </a:lnRef>
+          <a:fillRef idx="3">
+            <a:schemeClr val="accent1"/>
+          </a:fillRef>
+          <a:effectRef idx="2">
+            <a:schemeClr val="accent1"/>
+          </a:effectRef>
+          <a:fontRef idx="minor">
+            <a:schemeClr val="lt1"/>
+          </a:fontRef>
+        </p:style>
+        <p:txBody>
+          <a:bodyPr rtlCol="0" anchor="ctr"/>
+          <a:lstStyle/>
+          <a:p>
+            <a:pPr algn="ctr"/>
+          </a:p>
+        </p:txBody>
+      </p:sp>
+      <p:sp>
+        <p:nvSpPr>
+          <p:cNvPr id="21" name="TextBox 20"/>
+          <p:cNvSpPr txBox="1"/>
+          <p:nvPr/>
+        </p:nvSpPr>
+        <p:spPr>
+          <a:xfrm>
+            <a:off x="6492240" y="1965960"/>
+            <a:ext cx="4937760" cy="365760"/>
+          </a:xfrm>
+          <a:prstGeom prst="rect">
+            <a:avLst/>
+          </a:prstGeom>
+          <a:noFill/>
+        </p:spPr>
+        <p:txBody>
+          <a:bodyPr wrap="square" anchor="t" lIns="18288" rIns="18288" tIns="18288" bIns="18288">
+            <a:spAutoFit/>
+          </a:bodyPr>
+          <a:lstStyle/>
+          <a:p>
+            <a:pPr algn="l">
+              <a:lnSpc>
+                <a:spcPct val="110000"/>
+              </a:lnSpc>
+              <a:spcAft>
+                <a:spcPts val="400"/>
+              </a:spcAft>
+            </a:pPr>
+            <a:r>
+              <a:rPr sz="1700" b="1">
+                <a:solidFill>
+                  <a:srgbClr val="1C1F2E"/>
+                </a:solidFill>
+                <a:latin typeface="Segoe UI"/>
+              </a:rPr>
+              <a:t>Drill 2 • Service with no endpoints</a:t>
+            </a:r>
+          </a:p>
+        </p:txBody>
+      </p:sp>
+      <p:sp>
+        <p:nvSpPr>
+          <p:cNvPr id="22" name="Rounded Rectangle 21"/>
+          <p:cNvSpPr/>
+          <p:nvPr/>
+        </p:nvSpPr>
+        <p:spPr>
+          <a:xfrm>
+            <a:off x="6492240" y="2560320"/>
+            <a:ext cx="1097280" cy="310896"/>
+          </a:xfrm>
+          <a:prstGeom prst="roundRect">
+            <a:avLst>
+              <a:gd name="adj" fmla="val 50000"/>
+            </a:avLst>
+          </a:prstGeom>
+          <a:solidFill>
+            <a:srgbClr val="F4F5FB"/>
+          </a:solidFill>
+          <a:ln>
+            <a:noFill/>
+          </a:ln>
+          <a:effectLst/>
+        </p:spPr>
+        <p:style>
+          <a:lnRef idx="1">
+            <a:schemeClr val="accent1"/>
+          </a:lnRef>
+          <a:fillRef idx="3">
+            <a:schemeClr val="accent1"/>
+          </a:fillRef>
+          <a:effectRef idx="2">
+            <a:schemeClr val="accent1"/>
+          </a:effectRef>
+          <a:fontRef idx="minor">
+            <a:schemeClr val="lt1"/>
+          </a:fontRef>
+        </p:style>
+        <p:txBody>
+          <a:bodyPr rtlCol="0" anchor="ctr" wrap="square" lIns="73152" rIns="73152"/>
+          <a:lstStyle/>
+          <a:p>
+            <a:pPr algn="ctr"/>
+            <a:r>
+              <a:rPr sz="1100" b="1">
+                <a:solidFill>
+                  <a:srgbClr val="F59E0B"/>
+                </a:solidFill>
+                <a:latin typeface="Segoe UI"/>
+              </a:rPr>
+              <a:t>Inject</a:t>
+            </a:r>
+          </a:p>
+        </p:txBody>
+      </p:sp>
+      <p:sp>
+        <p:nvSpPr>
+          <p:cNvPr id="23" name="TextBox 22"/>
+          <p:cNvSpPr txBox="1"/>
+          <p:nvPr/>
+        </p:nvSpPr>
+        <p:spPr>
+          <a:xfrm>
+            <a:off x="7772400" y="2542032"/>
+            <a:ext cx="3657600" cy="822960"/>
+          </a:xfrm>
+          <a:prstGeom prst="rect">
+            <a:avLst/>
+          </a:prstGeom>
+          <a:noFill/>
+        </p:spPr>
+        <p:txBody>
+          <a:bodyPr wrap="square" anchor="t" lIns="18288" rIns="18288" tIns="18288" bIns="18288">
+            <a:spAutoFit/>
+          </a:bodyPr>
+          <a:lstStyle/>
+          <a:p>
+            <a:pPr algn="l">
+              <a:lnSpc>
+                <a:spcPct val="110000"/>
+              </a:lnSpc>
+              <a:spcAft>
+                <a:spcPts val="400"/>
+              </a:spcAft>
+            </a:pPr>
+            <a:r>
+              <a:rPr sz="1200" b="0">
+                <a:solidFill>
+                  <a:srgbClr val="1C1F2E"/>
+                </a:solidFill>
+                <a:latin typeface="Segoe UI"/>
+              </a:rPr>
+              <a:t>Service selector typo: app=lab-wbe instead of lab-web.</a:t>
+            </a:r>
+          </a:p>
+        </p:txBody>
+      </p:sp>
+      <p:sp>
+        <p:nvSpPr>
+          <p:cNvPr id="24" name="Rounded Rectangle 23"/>
+          <p:cNvSpPr/>
+          <p:nvPr/>
+        </p:nvSpPr>
+        <p:spPr>
+          <a:xfrm>
+            <a:off x="6492240" y="3364991"/>
+            <a:ext cx="1097280" cy="310896"/>
+          </a:xfrm>
+          <a:prstGeom prst="roundRect">
+            <a:avLst>
+              <a:gd name="adj" fmla="val 50000"/>
+            </a:avLst>
+          </a:prstGeom>
+          <a:solidFill>
+            <a:srgbClr val="F4F5FB"/>
+          </a:solidFill>
+          <a:ln>
+            <a:noFill/>
+          </a:ln>
+          <a:effectLst/>
+        </p:spPr>
+        <p:style>
+          <a:lnRef idx="1">
+            <a:schemeClr val="accent1"/>
+          </a:lnRef>
+          <a:fillRef idx="3">
+            <a:schemeClr val="accent1"/>
+          </a:fillRef>
+          <a:effectRef idx="2">
+            <a:schemeClr val="accent1"/>
+          </a:effectRef>
+          <a:fontRef idx="minor">
+            <a:schemeClr val="lt1"/>
+          </a:fontRef>
+        </p:style>
+        <p:txBody>
+          <a:bodyPr rtlCol="0" anchor="ctr" wrap="square" lIns="73152" rIns="73152"/>
+          <a:lstStyle/>
+          <a:p>
+            <a:pPr algn="ctr"/>
+            <a:r>
+              <a:rPr sz="1100" b="1">
+                <a:solidFill>
+                  <a:srgbClr val="F59E0B"/>
+                </a:solidFill>
+                <a:latin typeface="Segoe UI"/>
+              </a:rPr>
+              <a:t>Observe</a:t>
+            </a:r>
+          </a:p>
+        </p:txBody>
+      </p:sp>
+      <p:sp>
+        <p:nvSpPr>
+          <p:cNvPr id="25" name="TextBox 24"/>
+          <p:cNvSpPr txBox="1"/>
+          <p:nvPr/>
+        </p:nvSpPr>
+        <p:spPr>
+          <a:xfrm>
+            <a:off x="7772400" y="3346703"/>
+            <a:ext cx="3657600" cy="822960"/>
+          </a:xfrm>
+          <a:prstGeom prst="rect">
+            <a:avLst/>
+          </a:prstGeom>
+          <a:noFill/>
+        </p:spPr>
+        <p:txBody>
+          <a:bodyPr wrap="square" anchor="t" lIns="18288" rIns="18288" tIns="18288" bIns="18288">
+            <a:spAutoFit/>
+          </a:bodyPr>
+          <a:lstStyle/>
+          <a:p>
+            <a:pPr algn="l">
+              <a:lnSpc>
+                <a:spcPct val="110000"/>
+              </a:lnSpc>
+              <a:spcAft>
+                <a:spcPts val="400"/>
+              </a:spcAft>
+            </a:pPr>
+            <a:r>
+              <a:rPr sz="1200" b="0">
+                <a:solidFill>
+                  <a:srgbClr val="1C1F2E"/>
+                </a:solidFill>
+                <a:latin typeface="Segoe UI"/>
+              </a:rPr>
+              <a:t>curl http://lab-web fails; endpoints show &lt;none&gt;</a:t>
+            </a:r>
+          </a:p>
+        </p:txBody>
+      </p:sp>
+      <p:sp>
+        <p:nvSpPr>
+          <p:cNvPr id="26" name="Rounded Rectangle 25"/>
+          <p:cNvSpPr/>
+          <p:nvPr/>
+        </p:nvSpPr>
+        <p:spPr>
+          <a:xfrm>
+            <a:off x="6492240" y="4169663"/>
+            <a:ext cx="1097280" cy="310896"/>
+          </a:xfrm>
+          <a:prstGeom prst="roundRect">
+            <a:avLst>
+              <a:gd name="adj" fmla="val 50000"/>
+            </a:avLst>
+          </a:prstGeom>
+          <a:solidFill>
+            <a:srgbClr val="F4F5FB"/>
+          </a:solidFill>
+          <a:ln>
+            <a:noFill/>
+          </a:ln>
+          <a:effectLst/>
+        </p:spPr>
+        <p:style>
+          <a:lnRef idx="1">
+            <a:schemeClr val="accent1"/>
+          </a:lnRef>
+          <a:fillRef idx="3">
+            <a:schemeClr val="accent1"/>
+          </a:fillRef>
+          <a:effectRef idx="2">
+            <a:schemeClr val="accent1"/>
+          </a:effectRef>
+          <a:fontRef idx="minor">
+            <a:schemeClr val="lt1"/>
+          </a:fontRef>
+        </p:style>
+        <p:txBody>
+          <a:bodyPr rtlCol="0" anchor="ctr" wrap="square" lIns="73152" rIns="73152"/>
+          <a:lstStyle/>
+          <a:p>
+            <a:pPr algn="ctr"/>
+            <a:r>
+              <a:rPr sz="1100" b="1">
+                <a:solidFill>
+                  <a:srgbClr val="F59E0B"/>
+                </a:solidFill>
+                <a:latin typeface="Segoe UI"/>
+              </a:rPr>
+              <a:t>Diagnose</a:t>
+            </a:r>
+          </a:p>
+        </p:txBody>
+      </p:sp>
+      <p:sp>
+        <p:nvSpPr>
+          <p:cNvPr id="27" name="TextBox 26"/>
+          <p:cNvSpPr txBox="1"/>
+          <p:nvPr/>
+        </p:nvSpPr>
+        <p:spPr>
+          <a:xfrm>
+            <a:off x="7772400" y="4151376"/>
+            <a:ext cx="3657600" cy="822960"/>
+          </a:xfrm>
+          <a:prstGeom prst="rect">
+            <a:avLst/>
+          </a:prstGeom>
+          <a:noFill/>
+        </p:spPr>
+        <p:txBody>
+          <a:bodyPr wrap="square" anchor="t" lIns="18288" rIns="18288" tIns="18288" bIns="18288">
+            <a:spAutoFit/>
+          </a:bodyPr>
+          <a:lstStyle/>
+          <a:p>
+            <a:pPr algn="l">
+              <a:lnSpc>
+                <a:spcPct val="110000"/>
+              </a:lnSpc>
+              <a:spcAft>
+                <a:spcPts val="400"/>
+              </a:spcAft>
+            </a:pPr>
+            <a:r>
+              <a:rPr sz="1200" b="0">
+                <a:solidFill>
+                  <a:srgbClr val="1C1F2E"/>
+                </a:solidFill>
+                <a:latin typeface="Segoe UI"/>
+              </a:rPr>
+              <a:t>Compare the Service selector with pod --show-labels</a:t>
+            </a:r>
+          </a:p>
+        </p:txBody>
+      </p:sp>
+      <p:sp>
+        <p:nvSpPr>
+          <p:cNvPr id="28" name="Rounded Rectangle 27"/>
+          <p:cNvSpPr/>
+          <p:nvPr/>
+        </p:nvSpPr>
+        <p:spPr>
+          <a:xfrm>
+            <a:off x="6492240" y="4974336"/>
+            <a:ext cx="1097280" cy="310896"/>
+          </a:xfrm>
+          <a:prstGeom prst="roundRect">
+            <a:avLst>
+              <a:gd name="adj" fmla="val 50000"/>
+            </a:avLst>
+          </a:prstGeom>
+          <a:solidFill>
+            <a:srgbClr val="F4F5FB"/>
+          </a:solidFill>
+          <a:ln>
+            <a:noFill/>
+          </a:ln>
+          <a:effectLst/>
+        </p:spPr>
+        <p:style>
+          <a:lnRef idx="1">
+            <a:schemeClr val="accent1"/>
+          </a:lnRef>
+          <a:fillRef idx="3">
+            <a:schemeClr val="accent1"/>
+          </a:fillRef>
+          <a:effectRef idx="2">
+            <a:schemeClr val="accent1"/>
+          </a:effectRef>
+          <a:fontRef idx="minor">
+            <a:schemeClr val="lt1"/>
+          </a:fontRef>
+        </p:style>
+        <p:txBody>
+          <a:bodyPr rtlCol="0" anchor="ctr" wrap="square" lIns="73152" rIns="73152"/>
+          <a:lstStyle/>
+          <a:p>
+            <a:pPr algn="ctr"/>
+            <a:r>
+              <a:rPr sz="1100" b="1">
+                <a:solidFill>
+                  <a:srgbClr val="F59E0B"/>
+                </a:solidFill>
+                <a:latin typeface="Segoe UI"/>
+              </a:rPr>
+              <a:t>Fix</a:t>
+            </a:r>
+          </a:p>
+        </p:txBody>
+      </p:sp>
+      <p:sp>
+        <p:nvSpPr>
+          <p:cNvPr id="29" name="TextBox 28"/>
+          <p:cNvSpPr txBox="1"/>
+          <p:nvPr/>
+        </p:nvSpPr>
+        <p:spPr>
+          <a:xfrm>
+            <a:off x="7772400" y="4956048"/>
+            <a:ext cx="3657600" cy="822960"/>
+          </a:xfrm>
+          <a:prstGeom prst="rect">
+            <a:avLst/>
+          </a:prstGeom>
+          <a:noFill/>
+        </p:spPr>
+        <p:txBody>
+          <a:bodyPr wrap="square" anchor="t" lIns="18288" rIns="18288" tIns="18288" bIns="18288">
+            <a:spAutoFit/>
+          </a:bodyPr>
+          <a:lstStyle/>
+          <a:p>
+            <a:pPr algn="l">
+              <a:lnSpc>
+                <a:spcPct val="110000"/>
+              </a:lnSpc>
+              <a:spcAft>
+                <a:spcPts val="400"/>
+              </a:spcAft>
+            </a:pPr>
+            <a:r>
+              <a:rPr sz="1200" b="0">
+                <a:solidFill>
+                  <a:srgbClr val="1C1F2E"/>
+                </a:solidFill>
+                <a:latin typeface="Segoe UI"/>
+              </a:rPr>
+              <a:t>kubectl patch the selector → endpoints appear, HTTP 200</a:t>
+            </a:r>
+          </a:p>
+        </p:txBody>
+      </p:sp>
+      <p:sp>
+        <p:nvSpPr>
+          <p:cNvPr id="30" name="TextBox 29"/>
+          <p:cNvSpPr txBox="1"/>
+          <p:nvPr/>
+        </p:nvSpPr>
+        <p:spPr>
+          <a:xfrm>
+            <a:off x="548640" y="5989320"/>
+            <a:ext cx="10972800" cy="274320"/>
+          </a:xfrm>
+          <a:prstGeom prst="rect">
+            <a:avLst/>
+          </a:prstGeom>
+          <a:noFill/>
+        </p:spPr>
+        <p:txBody>
+          <a:bodyPr wrap="square" anchor="t" lIns="18288" rIns="18288" tIns="18288" bIns="18288">
+            <a:spAutoFit/>
+          </a:bodyPr>
+          <a:lstStyle/>
+          <a:p>
+            <a:pPr algn="l">
+              <a:lnSpc>
+                <a:spcPct val="110000"/>
+              </a:lnSpc>
+              <a:spcAft>
+                <a:spcPts val="400"/>
+              </a:spcAft>
+            </a:pPr>
+            <a:r>
+              <a:rPr sz="1100" b="0">
+                <a:solidFill>
+                  <a:srgbClr val="6B7086"/>
+                </a:solidFill>
+                <a:latin typeface="Segoe UI"/>
+              </a:rPr>
+              <a:t>Found while drilling: Nginx crashed when the backend name was unresolvable — fixed by resolving it per request.</a:t>
+            </a:r>
+          </a:p>
+        </p:txBody>
+      </p:sp>
     </p:spTree>
   </p:cSld>
   <p:clrMapOvr>
@@ -8168,7 +8211,7 @@
                 </a:solidFill>
                 <a:latin typeface="Segoe UI"/>
               </a:rPr>
-              <a:t>14 • VERIFICATION</a:t>
+              <a:t>14 • DRILLS, EXECUTED</a:t>
             </a:r>
           </a:p>
         </p:txBody>
@@ -8210,7 +8253,7 @@
                 </a:solidFill>
                 <a:latin typeface="Segoe UI"/>
               </a:rPr>
-              <a:t>Evidence captured on 16 October 2026</a:t>
+              <a:t>Real output from the troubleshooting-lab namespace</a:t>
             </a:r>
           </a:p>
         </p:txBody>
@@ -8223,8 +8266,8 @@
         </p:nvSpPr>
         <p:spPr>
           <a:xfrm>
-            <a:off x="548640" y="1188720"/>
-            <a:ext cx="11155680" cy="365760"/>
+            <a:off x="548640" y="6446520"/>
+            <a:ext cx="5486400" cy="274320"/>
           </a:xfrm>
           <a:prstGeom prst="rect">
             <a:avLst/>
@@ -8246,13 +8289,13 @@
               </a:spcAft>
             </a:pPr>
             <a:r>
-              <a:rPr sz="1400" b="0">
+              <a:rPr sz="900" b="0">
                 <a:solidFill>
                   <a:srgbClr val="6B7086"/>
                 </a:solidFill>
                 <a:latin typeface="Segoe UI"/>
               </a:rPr>
-              <a:t>Everything below was run for real; only the AWS EKS deployment still needs cloud credentials.</a:t>
+              <a:t>DevTrack Todo  •  Jinesh Gandhi  •  DevOps Capstone</a:t>
             </a:r>
           </a:p>
         </p:txBody>
@@ -8260,48 +8303,6 @@
       <p:sp>
         <p:nvSpPr>
           <p:cNvPr id="6" name="TextBox 5"/>
-          <p:cNvSpPr txBox="1"/>
-          <p:nvPr/>
-        </p:nvSpPr>
-        <p:spPr>
-          <a:xfrm>
-            <a:off x="548640" y="6446520"/>
-            <a:ext cx="5486400" cy="274320"/>
-          </a:xfrm>
-          <a:prstGeom prst="rect">
-            <a:avLst/>
-          </a:prstGeom>
-          <a:noFill/>
-        </p:spPr>
-        <p:txBody>
-          <a:bodyPr wrap="square" anchor="t" lIns="18288" rIns="18288" tIns="18288" bIns="18288">
-            <a:spAutoFit/>
-          </a:bodyPr>
-          <a:lstStyle/>
-          <a:p>
-            <a:pPr algn="l">
-              <a:lnSpc>
-                <a:spcPct val="110000"/>
-              </a:lnSpc>
-              <a:spcAft>
-                <a:spcPts val="400"/>
-              </a:spcAft>
-            </a:pPr>
-            <a:r>
-              <a:rPr sz="900" b="0">
-                <a:solidFill>
-                  <a:srgbClr val="6B7086"/>
-                </a:solidFill>
-                <a:latin typeface="Segoe UI"/>
-              </a:rPr>
-              <a:t>DevTrack Todo  •  Jinesh Gandhi  •  DevOps Capstone</a:t>
-            </a:r>
-          </a:p>
-        </p:txBody>
-      </p:sp>
-      <p:sp>
-        <p:nvSpPr>
-          <p:cNvPr id="7" name="TextBox 6"/>
           <p:cNvSpPr txBox="1"/>
           <p:nvPr/>
         </p:nvSpPr>
@@ -8336,942 +8337,14 @@
                 </a:solidFill>
                 <a:latin typeface="Segoe UI"/>
               </a:rPr>
-              <a:t>15 / 17</a:t>
-            </a:r>
-          </a:p>
-        </p:txBody>
-      </p:sp>
-      <p:sp>
-        <p:nvSpPr>
-          <p:cNvPr id="8" name="Rounded Rectangle 7"/>
-          <p:cNvSpPr/>
-          <p:nvPr/>
-        </p:nvSpPr>
-        <p:spPr>
-          <a:xfrm>
-            <a:off x="548640" y="1728216"/>
-            <a:ext cx="292608" cy="292608"/>
-          </a:xfrm>
-          <a:prstGeom prst="roundRect">
-            <a:avLst>
-              <a:gd name="adj" fmla="val 50000"/>
-            </a:avLst>
-          </a:prstGeom>
-          <a:solidFill>
-            <a:srgbClr val="D1FAE5"/>
-          </a:solidFill>
-          <a:ln>
-            <a:noFill/>
-          </a:ln>
-          <a:effectLst/>
-        </p:spPr>
-        <p:style>
-          <a:lnRef idx="1">
-            <a:schemeClr val="accent1"/>
-          </a:lnRef>
-          <a:fillRef idx="3">
-            <a:schemeClr val="accent1"/>
-          </a:fillRef>
-          <a:effectRef idx="2">
-            <a:schemeClr val="accent1"/>
-          </a:effectRef>
-          <a:fontRef idx="minor">
-            <a:schemeClr val="lt1"/>
-          </a:fontRef>
-        </p:style>
-        <p:txBody>
-          <a:bodyPr rtlCol="0" anchor="ctr" wrap="square" lIns="73152" rIns="73152"/>
-          <a:lstStyle/>
-          <a:p>
-            <a:pPr algn="ctr"/>
-            <a:r>
-              <a:rPr sz="1100" b="1">
-                <a:solidFill>
-                  <a:srgbClr val="10B981"/>
-                </a:solidFill>
-                <a:latin typeface="Segoe UI"/>
-              </a:rPr>
-              <a:t>✓</a:t>
-            </a:r>
-          </a:p>
-        </p:txBody>
-      </p:sp>
-      <p:sp>
-        <p:nvSpPr>
-          <p:cNvPr id="9" name="TextBox 8"/>
-          <p:cNvSpPr txBox="1"/>
-          <p:nvPr/>
-        </p:nvSpPr>
-        <p:spPr>
-          <a:xfrm>
-            <a:off x="960120" y="1691640"/>
-            <a:ext cx="5120640" cy="548640"/>
-          </a:xfrm>
-          <a:prstGeom prst="rect">
-            <a:avLst/>
-          </a:prstGeom>
-          <a:noFill/>
-        </p:spPr>
-        <p:txBody>
-          <a:bodyPr wrap="square" anchor="t" lIns="18288" rIns="18288" tIns="18288" bIns="18288">
-            <a:spAutoFit/>
-          </a:bodyPr>
-          <a:lstStyle/>
-          <a:p>
-            <a:pPr algn="l">
-              <a:lnSpc>
-                <a:spcPct val="95000"/>
-              </a:lnSpc>
-              <a:spcAft>
-                <a:spcPts val="400"/>
-              </a:spcAft>
-            </a:pPr>
-            <a:r>
-              <a:rPr sz="1200" b="1">
-                <a:solidFill>
-                  <a:srgbClr val="1C1F2E"/>
-                </a:solidFill>
-                <a:latin typeface="Segoe UI"/>
-              </a:rPr>
-              <a:t>Application</a:t>
-            </a:r>
-          </a:p>
-          <a:p>
-            <a:pPr algn="l">
-              <a:lnSpc>
-                <a:spcPct val="95000"/>
-              </a:lnSpc>
-              <a:spcAft>
-                <a:spcPts val="400"/>
-              </a:spcAft>
-            </a:pPr>
-            <a:r>
-              <a:rPr sz="1000" b="0">
-                <a:solidFill>
-                  <a:srgbClr val="6B7086"/>
-                </a:solidFill>
-                <a:latin typeface="Segoe UI"/>
-              </a:rPr>
-              <a:t>Todo CRUD, filters and stats through Nginx and the Ingress</a:t>
-            </a:r>
-          </a:p>
-        </p:txBody>
-      </p:sp>
-      <p:sp>
-        <p:nvSpPr>
-          <p:cNvPr id="10" name="Rounded Rectangle 9"/>
-          <p:cNvSpPr/>
-          <p:nvPr/>
-        </p:nvSpPr>
-        <p:spPr>
-          <a:xfrm>
-            <a:off x="548640" y="2276856"/>
-            <a:ext cx="292608" cy="292608"/>
-          </a:xfrm>
-          <a:prstGeom prst="roundRect">
-            <a:avLst>
-              <a:gd name="adj" fmla="val 50000"/>
-            </a:avLst>
-          </a:prstGeom>
-          <a:solidFill>
-            <a:srgbClr val="D1FAE5"/>
-          </a:solidFill>
-          <a:ln>
-            <a:noFill/>
-          </a:ln>
-          <a:effectLst/>
-        </p:spPr>
-        <p:style>
-          <a:lnRef idx="1">
-            <a:schemeClr val="accent1"/>
-          </a:lnRef>
-          <a:fillRef idx="3">
-            <a:schemeClr val="accent1"/>
-          </a:fillRef>
-          <a:effectRef idx="2">
-            <a:schemeClr val="accent1"/>
-          </a:effectRef>
-          <a:fontRef idx="minor">
-            <a:schemeClr val="lt1"/>
-          </a:fontRef>
-        </p:style>
-        <p:txBody>
-          <a:bodyPr rtlCol="0" anchor="ctr" wrap="square" lIns="73152" rIns="73152"/>
-          <a:lstStyle/>
-          <a:p>
-            <a:pPr algn="ctr"/>
-            <a:r>
-              <a:rPr sz="1100" b="1">
-                <a:solidFill>
-                  <a:srgbClr val="10B981"/>
-                </a:solidFill>
-                <a:latin typeface="Segoe UI"/>
-              </a:rPr>
-              <a:t>✓</a:t>
-            </a:r>
-          </a:p>
-        </p:txBody>
-      </p:sp>
-      <p:sp>
-        <p:nvSpPr>
-          <p:cNvPr id="11" name="TextBox 10"/>
-          <p:cNvSpPr txBox="1"/>
-          <p:nvPr/>
-        </p:nvSpPr>
-        <p:spPr>
-          <a:xfrm>
-            <a:off x="960120" y="2240280"/>
-            <a:ext cx="5120640" cy="548640"/>
-          </a:xfrm>
-          <a:prstGeom prst="rect">
-            <a:avLst/>
-          </a:prstGeom>
-          <a:noFill/>
-        </p:spPr>
-        <p:txBody>
-          <a:bodyPr wrap="square" anchor="t" lIns="18288" rIns="18288" tIns="18288" bIns="18288">
-            <a:spAutoFit/>
-          </a:bodyPr>
-          <a:lstStyle/>
-          <a:p>
-            <a:pPr algn="l">
-              <a:lnSpc>
-                <a:spcPct val="95000"/>
-              </a:lnSpc>
-              <a:spcAft>
-                <a:spcPts val="400"/>
-              </a:spcAft>
-            </a:pPr>
-            <a:r>
-              <a:rPr sz="1200" b="1">
-                <a:solidFill>
-                  <a:srgbClr val="1C1F2E"/>
-                </a:solidFill>
-                <a:latin typeface="Segoe UI"/>
-              </a:rPr>
-              <a:t>Tests</a:t>
-            </a:r>
-          </a:p>
-          <a:p>
-            <a:pPr algn="l">
-              <a:lnSpc>
-                <a:spcPct val="95000"/>
-              </a:lnSpc>
-              <a:spcAft>
-                <a:spcPts val="400"/>
-              </a:spcAft>
-            </a:pPr>
-            <a:r>
-              <a:rPr sz="1000" b="0">
-                <a:solidFill>
-                  <a:srgbClr val="6B7086"/>
-                </a:solidFill>
-                <a:latin typeface="Segoe UI"/>
-              </a:rPr>
-              <a:t>28 / 28 pytest; migration matches models; CI on PostgreSQL</a:t>
-            </a:r>
-          </a:p>
-        </p:txBody>
-      </p:sp>
-      <p:sp>
-        <p:nvSpPr>
-          <p:cNvPr id="12" name="Rounded Rectangle 11"/>
-          <p:cNvSpPr/>
-          <p:nvPr/>
-        </p:nvSpPr>
-        <p:spPr>
-          <a:xfrm>
-            <a:off x="548640" y="2825496"/>
-            <a:ext cx="292608" cy="292608"/>
-          </a:xfrm>
-          <a:prstGeom prst="roundRect">
-            <a:avLst>
-              <a:gd name="adj" fmla="val 50000"/>
-            </a:avLst>
-          </a:prstGeom>
-          <a:solidFill>
-            <a:srgbClr val="D1FAE5"/>
-          </a:solidFill>
-          <a:ln>
-            <a:noFill/>
-          </a:ln>
-          <a:effectLst/>
-        </p:spPr>
-        <p:style>
-          <a:lnRef idx="1">
-            <a:schemeClr val="accent1"/>
-          </a:lnRef>
-          <a:fillRef idx="3">
-            <a:schemeClr val="accent1"/>
-          </a:fillRef>
-          <a:effectRef idx="2">
-            <a:schemeClr val="accent1"/>
-          </a:effectRef>
-          <a:fontRef idx="minor">
-            <a:schemeClr val="lt1"/>
-          </a:fontRef>
-        </p:style>
-        <p:txBody>
-          <a:bodyPr rtlCol="0" anchor="ctr" wrap="square" lIns="73152" rIns="73152"/>
-          <a:lstStyle/>
-          <a:p>
-            <a:pPr algn="ctr"/>
-            <a:r>
-              <a:rPr sz="1100" b="1">
-                <a:solidFill>
-                  <a:srgbClr val="10B981"/>
-                </a:solidFill>
-                <a:latin typeface="Segoe UI"/>
-              </a:rPr>
-              <a:t>✓</a:t>
-            </a:r>
-          </a:p>
-        </p:txBody>
-      </p:sp>
-      <p:sp>
-        <p:nvSpPr>
-          <p:cNvPr id="13" name="TextBox 12"/>
-          <p:cNvSpPr txBox="1"/>
-          <p:nvPr/>
-        </p:nvSpPr>
-        <p:spPr>
-          <a:xfrm>
-            <a:off x="960120" y="2788920"/>
-            <a:ext cx="5120640" cy="548640"/>
-          </a:xfrm>
-          <a:prstGeom prst="rect">
-            <a:avLst/>
-          </a:prstGeom>
-          <a:noFill/>
-        </p:spPr>
-        <p:txBody>
-          <a:bodyPr wrap="square" anchor="t" lIns="18288" rIns="18288" tIns="18288" bIns="18288">
-            <a:spAutoFit/>
-          </a:bodyPr>
-          <a:lstStyle/>
-          <a:p>
-            <a:pPr algn="l">
-              <a:lnSpc>
-                <a:spcPct val="95000"/>
-              </a:lnSpc>
-              <a:spcAft>
-                <a:spcPts val="400"/>
-              </a:spcAft>
-            </a:pPr>
-            <a:r>
-              <a:rPr sz="1200" b="1">
-                <a:solidFill>
-                  <a:srgbClr val="1C1F2E"/>
-                </a:solidFill>
-                <a:latin typeface="Segoe UI"/>
-              </a:rPr>
-              <a:t>Security</a:t>
-            </a:r>
-          </a:p>
-          <a:p>
-            <a:pPr algn="l">
-              <a:lnSpc>
-                <a:spcPct val="95000"/>
-              </a:lnSpc>
-              <a:spcAft>
-                <a:spcPts val="400"/>
-              </a:spcAft>
-            </a:pPr>
-            <a:r>
-              <a:rPr sz="1000" b="0">
-                <a:solidFill>
-                  <a:srgbClr val="6B7086"/>
-                </a:solidFill>
-                <a:latin typeface="Segoe UI"/>
-              </a:rPr>
-              <a:t>Trivy 0 HIGH / 0 CRITICAL locally and as a CI gate</a:t>
-            </a:r>
-          </a:p>
-        </p:txBody>
-      </p:sp>
-      <p:sp>
-        <p:nvSpPr>
-          <p:cNvPr id="14" name="Rounded Rectangle 13"/>
-          <p:cNvSpPr/>
-          <p:nvPr/>
-        </p:nvSpPr>
-        <p:spPr>
-          <a:xfrm>
-            <a:off x="548640" y="3374136"/>
-            <a:ext cx="292608" cy="292608"/>
-          </a:xfrm>
-          <a:prstGeom prst="roundRect">
-            <a:avLst>
-              <a:gd name="adj" fmla="val 50000"/>
-            </a:avLst>
-          </a:prstGeom>
-          <a:solidFill>
-            <a:srgbClr val="D1FAE5"/>
-          </a:solidFill>
-          <a:ln>
-            <a:noFill/>
-          </a:ln>
-          <a:effectLst/>
-        </p:spPr>
-        <p:style>
-          <a:lnRef idx="1">
-            <a:schemeClr val="accent1"/>
-          </a:lnRef>
-          <a:fillRef idx="3">
-            <a:schemeClr val="accent1"/>
-          </a:fillRef>
-          <a:effectRef idx="2">
-            <a:schemeClr val="accent1"/>
-          </a:effectRef>
-          <a:fontRef idx="minor">
-            <a:schemeClr val="lt1"/>
-          </a:fontRef>
-        </p:style>
-        <p:txBody>
-          <a:bodyPr rtlCol="0" anchor="ctr" wrap="square" lIns="73152" rIns="73152"/>
-          <a:lstStyle/>
-          <a:p>
-            <a:pPr algn="ctr"/>
-            <a:r>
-              <a:rPr sz="1100" b="1">
-                <a:solidFill>
-                  <a:srgbClr val="10B981"/>
-                </a:solidFill>
-                <a:latin typeface="Segoe UI"/>
-              </a:rPr>
-              <a:t>✓</a:t>
-            </a:r>
-          </a:p>
-        </p:txBody>
-      </p:sp>
-      <p:sp>
-        <p:nvSpPr>
-          <p:cNvPr id="15" name="TextBox 14"/>
-          <p:cNvSpPr txBox="1"/>
-          <p:nvPr/>
-        </p:nvSpPr>
-        <p:spPr>
-          <a:xfrm>
-            <a:off x="960120" y="3337560"/>
-            <a:ext cx="5120640" cy="548640"/>
-          </a:xfrm>
-          <a:prstGeom prst="rect">
-            <a:avLst/>
-          </a:prstGeom>
-          <a:noFill/>
-        </p:spPr>
-        <p:txBody>
-          <a:bodyPr wrap="square" anchor="t" lIns="18288" rIns="18288" tIns="18288" bIns="18288">
-            <a:spAutoFit/>
-          </a:bodyPr>
-          <a:lstStyle/>
-          <a:p>
-            <a:pPr algn="l">
-              <a:lnSpc>
-                <a:spcPct val="95000"/>
-              </a:lnSpc>
-              <a:spcAft>
-                <a:spcPts val="400"/>
-              </a:spcAft>
-            </a:pPr>
-            <a:r>
-              <a:rPr sz="1200" b="1">
-                <a:solidFill>
-                  <a:srgbClr val="1C1F2E"/>
-                </a:solidFill>
-                <a:latin typeface="Segoe UI"/>
-              </a:rPr>
-              <a:t>CI/CD &amp; registry</a:t>
-            </a:r>
-          </a:p>
-          <a:p>
-            <a:pPr algn="l">
-              <a:lnSpc>
-                <a:spcPct val="95000"/>
-              </a:lnSpc>
-              <a:spcAft>
-                <a:spcPts val="400"/>
-              </a:spcAft>
-            </a:pPr>
-            <a:r>
-              <a:rPr sz="1000" b="0">
-                <a:solidFill>
-                  <a:srgbClr val="6B7086"/>
-                </a:solidFill>
-                <a:latin typeface="Segoe UI"/>
-              </a:rPr>
-              <a:t>All 5 jobs green; SHA-tagged images public in GHCR</a:t>
-            </a:r>
-          </a:p>
-        </p:txBody>
-      </p:sp>
-      <p:sp>
-        <p:nvSpPr>
-          <p:cNvPr id="16" name="Rounded Rectangle 15"/>
-          <p:cNvSpPr/>
-          <p:nvPr/>
-        </p:nvSpPr>
-        <p:spPr>
-          <a:xfrm>
-            <a:off x="548640" y="3922776"/>
-            <a:ext cx="292608" cy="292608"/>
-          </a:xfrm>
-          <a:prstGeom prst="roundRect">
-            <a:avLst>
-              <a:gd name="adj" fmla="val 50000"/>
-            </a:avLst>
-          </a:prstGeom>
-          <a:solidFill>
-            <a:srgbClr val="D1FAE5"/>
-          </a:solidFill>
-          <a:ln>
-            <a:noFill/>
-          </a:ln>
-          <a:effectLst/>
-        </p:spPr>
-        <p:style>
-          <a:lnRef idx="1">
-            <a:schemeClr val="accent1"/>
-          </a:lnRef>
-          <a:fillRef idx="3">
-            <a:schemeClr val="accent1"/>
-          </a:fillRef>
-          <a:effectRef idx="2">
-            <a:schemeClr val="accent1"/>
-          </a:effectRef>
-          <a:fontRef idx="minor">
-            <a:schemeClr val="lt1"/>
-          </a:fontRef>
-        </p:style>
-        <p:txBody>
-          <a:bodyPr rtlCol="0" anchor="ctr" wrap="square" lIns="73152" rIns="73152"/>
-          <a:lstStyle/>
-          <a:p>
-            <a:pPr algn="ctr"/>
-            <a:r>
-              <a:rPr sz="1100" b="1">
-                <a:solidFill>
-                  <a:srgbClr val="10B981"/>
-                </a:solidFill>
-                <a:latin typeface="Segoe UI"/>
-              </a:rPr>
-              <a:t>✓</a:t>
-            </a:r>
-          </a:p>
-        </p:txBody>
-      </p:sp>
-      <p:sp>
-        <p:nvSpPr>
-          <p:cNvPr id="17" name="TextBox 16"/>
-          <p:cNvSpPr txBox="1"/>
-          <p:nvPr/>
-        </p:nvSpPr>
-        <p:spPr>
-          <a:xfrm>
-            <a:off x="960120" y="3886200"/>
-            <a:ext cx="5120640" cy="548640"/>
-          </a:xfrm>
-          <a:prstGeom prst="rect">
-            <a:avLst/>
-          </a:prstGeom>
-          <a:noFill/>
-        </p:spPr>
-        <p:txBody>
-          <a:bodyPr wrap="square" anchor="t" lIns="18288" rIns="18288" tIns="18288" bIns="18288">
-            <a:spAutoFit/>
-          </a:bodyPr>
-          <a:lstStyle/>
-          <a:p>
-            <a:pPr algn="l">
-              <a:lnSpc>
-                <a:spcPct val="95000"/>
-              </a:lnSpc>
-              <a:spcAft>
-                <a:spcPts val="400"/>
-              </a:spcAft>
-            </a:pPr>
-            <a:r>
-              <a:rPr sz="1200" b="1">
-                <a:solidFill>
-                  <a:srgbClr val="1C1F2E"/>
-                </a:solidFill>
-                <a:latin typeface="Segoe UI"/>
-              </a:rPr>
-              <a:t>GitOps</a:t>
-            </a:r>
-          </a:p>
-          <a:p>
-            <a:pPr algn="l">
-              <a:lnSpc>
-                <a:spcPct val="95000"/>
-              </a:lnSpc>
-              <a:spcAft>
-                <a:spcPts val="400"/>
-              </a:spcAft>
-            </a:pPr>
-            <a:r>
-              <a:rPr sz="1000" b="0">
-                <a:solidFill>
-                  <a:srgbClr val="6B7086"/>
-                </a:solidFill>
-                <a:latin typeface="Segoe UI"/>
-              </a:rPr>
-              <a:t>Bot commits pin each new SHA in the Helm values</a:t>
-            </a:r>
-          </a:p>
-        </p:txBody>
-      </p:sp>
-      <p:sp>
-        <p:nvSpPr>
-          <p:cNvPr id="18" name="Rounded Rectangle 17"/>
-          <p:cNvSpPr/>
-          <p:nvPr/>
-        </p:nvSpPr>
-        <p:spPr>
-          <a:xfrm>
-            <a:off x="548640" y="4471416"/>
-            <a:ext cx="292608" cy="292608"/>
-          </a:xfrm>
-          <a:prstGeom prst="roundRect">
-            <a:avLst>
-              <a:gd name="adj" fmla="val 50000"/>
-            </a:avLst>
-          </a:prstGeom>
-          <a:solidFill>
-            <a:srgbClr val="D1FAE5"/>
-          </a:solidFill>
-          <a:ln>
-            <a:noFill/>
-          </a:ln>
-          <a:effectLst/>
-        </p:spPr>
-        <p:style>
-          <a:lnRef idx="1">
-            <a:schemeClr val="accent1"/>
-          </a:lnRef>
-          <a:fillRef idx="3">
-            <a:schemeClr val="accent1"/>
-          </a:fillRef>
-          <a:effectRef idx="2">
-            <a:schemeClr val="accent1"/>
-          </a:effectRef>
-          <a:fontRef idx="minor">
-            <a:schemeClr val="lt1"/>
-          </a:fontRef>
-        </p:style>
-        <p:txBody>
-          <a:bodyPr rtlCol="0" anchor="ctr" wrap="square" lIns="73152" rIns="73152"/>
-          <a:lstStyle/>
-          <a:p>
-            <a:pPr algn="ctr"/>
-            <a:r>
-              <a:rPr sz="1100" b="1">
-                <a:solidFill>
-                  <a:srgbClr val="10B981"/>
-                </a:solidFill>
-                <a:latin typeface="Segoe UI"/>
-              </a:rPr>
-              <a:t>✓</a:t>
-            </a:r>
-          </a:p>
-        </p:txBody>
-      </p:sp>
-      <p:sp>
-        <p:nvSpPr>
-          <p:cNvPr id="19" name="TextBox 18"/>
-          <p:cNvSpPr txBox="1"/>
-          <p:nvPr/>
-        </p:nvSpPr>
-        <p:spPr>
-          <a:xfrm>
-            <a:off x="960120" y="4434840"/>
-            <a:ext cx="5120640" cy="548640"/>
-          </a:xfrm>
-          <a:prstGeom prst="rect">
-            <a:avLst/>
-          </a:prstGeom>
-          <a:noFill/>
-        </p:spPr>
-        <p:txBody>
-          <a:bodyPr wrap="square" anchor="t" lIns="18288" rIns="18288" tIns="18288" bIns="18288">
-            <a:spAutoFit/>
-          </a:bodyPr>
-          <a:lstStyle/>
-          <a:p>
-            <a:pPr algn="l">
-              <a:lnSpc>
-                <a:spcPct val="95000"/>
-              </a:lnSpc>
-              <a:spcAft>
-                <a:spcPts val="400"/>
-              </a:spcAft>
-            </a:pPr>
-            <a:r>
-              <a:rPr sz="1200" b="1">
-                <a:solidFill>
-                  <a:srgbClr val="1C1F2E"/>
-                </a:solidFill>
-                <a:latin typeface="Segoe UI"/>
-              </a:rPr>
-              <a:t>Kubernetes</a:t>
-            </a:r>
-          </a:p>
-          <a:p>
-            <a:pPr algn="l">
-              <a:lnSpc>
-                <a:spcPct val="95000"/>
-              </a:lnSpc>
-              <a:spcAft>
-                <a:spcPts val="400"/>
-              </a:spcAft>
-            </a:pPr>
-            <a:r>
-              <a:rPr sz="1000" b="0">
-                <a:solidFill>
-                  <a:srgbClr val="6B7086"/>
-                </a:solidFill>
-                <a:latin typeface="Segoe UI"/>
-              </a:rPr>
-              <a:t>Helm release on 3-node cluster pulling GHCR images, 0 restarts</a:t>
-            </a:r>
-          </a:p>
-        </p:txBody>
-      </p:sp>
-      <p:sp>
-        <p:nvSpPr>
-          <p:cNvPr id="20" name="Rounded Rectangle 19"/>
-          <p:cNvSpPr/>
-          <p:nvPr/>
-        </p:nvSpPr>
-        <p:spPr>
-          <a:xfrm>
-            <a:off x="548640" y="5020055"/>
-            <a:ext cx="292608" cy="292608"/>
-          </a:xfrm>
-          <a:prstGeom prst="roundRect">
-            <a:avLst>
-              <a:gd name="adj" fmla="val 50000"/>
-            </a:avLst>
-          </a:prstGeom>
-          <a:solidFill>
-            <a:srgbClr val="D1FAE5"/>
-          </a:solidFill>
-          <a:ln>
-            <a:noFill/>
-          </a:ln>
-          <a:effectLst/>
-        </p:spPr>
-        <p:style>
-          <a:lnRef idx="1">
-            <a:schemeClr val="accent1"/>
-          </a:lnRef>
-          <a:fillRef idx="3">
-            <a:schemeClr val="accent1"/>
-          </a:fillRef>
-          <a:effectRef idx="2">
-            <a:schemeClr val="accent1"/>
-          </a:effectRef>
-          <a:fontRef idx="minor">
-            <a:schemeClr val="lt1"/>
-          </a:fontRef>
-        </p:style>
-        <p:txBody>
-          <a:bodyPr rtlCol="0" anchor="ctr" wrap="square" lIns="73152" rIns="73152"/>
-          <a:lstStyle/>
-          <a:p>
-            <a:pPr algn="ctr"/>
-            <a:r>
-              <a:rPr sz="1100" b="1">
-                <a:solidFill>
-                  <a:srgbClr val="10B981"/>
-                </a:solidFill>
-                <a:latin typeface="Segoe UI"/>
-              </a:rPr>
-              <a:t>✓</a:t>
-            </a:r>
-          </a:p>
-        </p:txBody>
-      </p:sp>
-      <p:sp>
-        <p:nvSpPr>
-          <p:cNvPr id="21" name="TextBox 20"/>
-          <p:cNvSpPr txBox="1"/>
-          <p:nvPr/>
-        </p:nvSpPr>
-        <p:spPr>
-          <a:xfrm>
-            <a:off x="960120" y="4983479"/>
-            <a:ext cx="5120640" cy="548640"/>
-          </a:xfrm>
-          <a:prstGeom prst="rect">
-            <a:avLst/>
-          </a:prstGeom>
-          <a:noFill/>
-        </p:spPr>
-        <p:txBody>
-          <a:bodyPr wrap="square" anchor="t" lIns="18288" rIns="18288" tIns="18288" bIns="18288">
-            <a:spAutoFit/>
-          </a:bodyPr>
-          <a:lstStyle/>
-          <a:p>
-            <a:pPr algn="l">
-              <a:lnSpc>
-                <a:spcPct val="95000"/>
-              </a:lnSpc>
-              <a:spcAft>
-                <a:spcPts val="400"/>
-              </a:spcAft>
-            </a:pPr>
-            <a:r>
-              <a:rPr sz="1200" b="1">
-                <a:solidFill>
-                  <a:srgbClr val="1C1F2E"/>
-                </a:solidFill>
-                <a:latin typeface="Segoe UI"/>
-              </a:rPr>
-              <a:t>Observability</a:t>
-            </a:r>
-          </a:p>
-          <a:p>
-            <a:pPr algn="l">
-              <a:lnSpc>
-                <a:spcPct val="95000"/>
-              </a:lnSpc>
-              <a:spcAft>
-                <a:spcPts val="400"/>
-              </a:spcAft>
-            </a:pPr>
-            <a:r>
-              <a:rPr sz="1000" b="0">
-                <a:solidFill>
-                  <a:srgbClr val="6B7086"/>
-                </a:solidFill>
-                <a:latin typeface="Segoe UI"/>
-              </a:rPr>
-              <a:t>Prometheus target UP; Grafana panels populated</a:t>
-            </a:r>
-          </a:p>
-        </p:txBody>
-      </p:sp>
-      <p:sp>
-        <p:nvSpPr>
-          <p:cNvPr id="22" name="Rounded Rectangle 21"/>
-          <p:cNvSpPr/>
-          <p:nvPr/>
-        </p:nvSpPr>
-        <p:spPr>
-          <a:xfrm>
-            <a:off x="548640" y="5568696"/>
-            <a:ext cx="292608" cy="292608"/>
-          </a:xfrm>
-          <a:prstGeom prst="roundRect">
-            <a:avLst>
-              <a:gd name="adj" fmla="val 50000"/>
-            </a:avLst>
-          </a:prstGeom>
-          <a:solidFill>
-            <a:srgbClr val="D1FAE5"/>
-          </a:solidFill>
-          <a:ln>
-            <a:noFill/>
-          </a:ln>
-          <a:effectLst/>
-        </p:spPr>
-        <p:style>
-          <a:lnRef idx="1">
-            <a:schemeClr val="accent1"/>
-          </a:lnRef>
-          <a:fillRef idx="3">
-            <a:schemeClr val="accent1"/>
-          </a:fillRef>
-          <a:effectRef idx="2">
-            <a:schemeClr val="accent1"/>
-          </a:effectRef>
-          <a:fontRef idx="minor">
-            <a:schemeClr val="lt1"/>
-          </a:fontRef>
-        </p:style>
-        <p:txBody>
-          <a:bodyPr rtlCol="0" anchor="ctr" wrap="square" lIns="73152" rIns="73152"/>
-          <a:lstStyle/>
-          <a:p>
-            <a:pPr algn="ctr"/>
-            <a:r>
-              <a:rPr sz="1100" b="1">
-                <a:solidFill>
-                  <a:srgbClr val="10B981"/>
-                </a:solidFill>
-                <a:latin typeface="Segoe UI"/>
-              </a:rPr>
-              <a:t>✓</a:t>
-            </a:r>
-          </a:p>
-        </p:txBody>
-      </p:sp>
-      <p:sp>
-        <p:nvSpPr>
-          <p:cNvPr id="23" name="TextBox 22"/>
-          <p:cNvSpPr txBox="1"/>
-          <p:nvPr/>
-        </p:nvSpPr>
-        <p:spPr>
-          <a:xfrm>
-            <a:off x="960120" y="5532120"/>
-            <a:ext cx="5120640" cy="548640"/>
-          </a:xfrm>
-          <a:prstGeom prst="rect">
-            <a:avLst/>
-          </a:prstGeom>
-          <a:noFill/>
-        </p:spPr>
-        <p:txBody>
-          <a:bodyPr wrap="square" anchor="t" lIns="18288" rIns="18288" tIns="18288" bIns="18288">
-            <a:spAutoFit/>
-          </a:bodyPr>
-          <a:lstStyle/>
-          <a:p>
-            <a:pPr algn="l">
-              <a:lnSpc>
-                <a:spcPct val="95000"/>
-              </a:lnSpc>
-              <a:spcAft>
-                <a:spcPts val="400"/>
-              </a:spcAft>
-            </a:pPr>
-            <a:r>
-              <a:rPr sz="1200" b="1">
-                <a:solidFill>
-                  <a:srgbClr val="1C1F2E"/>
-                </a:solidFill>
-                <a:latin typeface="Segoe UI"/>
-              </a:rPr>
-              <a:t>Terraform</a:t>
-            </a:r>
-          </a:p>
-          <a:p>
-            <a:pPr algn="l">
-              <a:lnSpc>
-                <a:spcPct val="95000"/>
-              </a:lnSpc>
-              <a:spcAft>
-                <a:spcPts val="400"/>
-              </a:spcAft>
-            </a:pPr>
-            <a:r>
-              <a:rPr sz="1000" b="0">
-                <a:solidFill>
-                  <a:srgbClr val="6B7086"/>
-                </a:solidFill>
-                <a:latin typeface="Segoe UI"/>
-              </a:rPr>
-              <a:t>init, fmt -check and validate pass</a:t>
+              <a:t>15 / 18</a:t>
             </a:r>
           </a:p>
         </p:txBody>
       </p:sp>
       <p:pic>
         <p:nvPicPr>
-          <p:cNvPr id="24" name="Picture 23" descr="M8-ingress-application.png"/>
+          <p:cNvPr id="7" name="Picture 6" descr="M10-troubleshooting-imagepullbackoff.png"/>
           <p:cNvPicPr>
             <a:picLocks noChangeAspect="1"/>
           </p:cNvPicPr>
@@ -9279,15 +8352,14 @@
         </p:nvPicPr>
         <p:blipFill>
           <a:blip r:embed="rId2"/>
-          <a:srcRect b="171"/>
           <a:stretch>
             <a:fillRect/>
           </a:stretch>
         </p:blipFill>
         <p:spPr>
           <a:xfrm>
-            <a:off x="6309360" y="1691640"/>
-            <a:ext cx="5349240" cy="3337560"/>
+            <a:off x="548640" y="2178538"/>
+            <a:ext cx="5532120" cy="3323882"/>
           </a:xfrm>
           <a:prstGeom prst="rect">
             <a:avLst/>
@@ -9299,115 +8371,35 @@
           </a:ln>
         </p:spPr>
       </p:pic>
-      <p:sp>
-        <p:nvSpPr>
-          <p:cNvPr id="25" name="TextBox 24"/>
-          <p:cNvSpPr txBox="1"/>
-          <p:nvPr/>
-        </p:nvSpPr>
-        <p:spPr>
-          <a:xfrm>
-            <a:off x="6309360" y="5074920"/>
-            <a:ext cx="5349240" cy="274320"/>
-          </a:xfrm>
-          <a:prstGeom prst="rect">
-            <a:avLst/>
-          </a:prstGeom>
-          <a:noFill/>
-        </p:spPr>
-        <p:txBody>
-          <a:bodyPr wrap="square" anchor="t" lIns="18288" rIns="18288" tIns="18288" bIns="18288">
-            <a:spAutoFit/>
-          </a:bodyPr>
-          <a:lstStyle/>
-          <a:p>
-            <a:pPr algn="l">
-              <a:lnSpc>
-                <a:spcPct val="110000"/>
-              </a:lnSpc>
-              <a:spcAft>
-                <a:spcPts val="400"/>
-              </a:spcAft>
-            </a:pPr>
-            <a:r>
-              <a:rPr sz="1000" b="0">
-                <a:solidFill>
-                  <a:srgbClr val="6B7086"/>
-                </a:solidFill>
-                <a:latin typeface="Segoe UI"/>
-              </a:rPr>
-              <a:t>App served through the Ingress (localhost:8081 on the local cluster)</a:t>
-            </a:r>
-          </a:p>
-        </p:txBody>
-      </p:sp>
-      <p:sp>
-        <p:nvSpPr>
-          <p:cNvPr id="26" name="Rounded Rectangle 25"/>
-          <p:cNvSpPr/>
-          <p:nvPr/>
-        </p:nvSpPr>
-        <p:spPr>
-          <a:xfrm>
-            <a:off x="6309360" y="5440680"/>
-            <a:ext cx="5349240" cy="822960"/>
-          </a:xfrm>
-          <a:prstGeom prst="roundRect">
-            <a:avLst>
-              <a:gd name="adj" fmla="val 8000"/>
-            </a:avLst>
-          </a:prstGeom>
-          <a:solidFill>
-            <a:srgbClr val="FEF3C7"/>
-          </a:solidFill>
-          <a:ln>
-            <a:noFill/>
+      <p:pic>
+        <p:nvPicPr>
+          <p:cNvPr id="8" name="Picture 7" descr="M10-troubleshooting-service-selector.png"/>
+          <p:cNvPicPr>
+            <a:picLocks noChangeAspect="1"/>
+          </p:cNvPicPr>
+          <p:nvPr/>
+        </p:nvPicPr>
+        <p:blipFill>
+          <a:blip r:embed="rId3"/>
+          <a:stretch>
+            <a:fillRect/>
+          </a:stretch>
+        </p:blipFill>
+        <p:spPr>
+          <a:xfrm>
+            <a:off x="6263640" y="2172538"/>
+            <a:ext cx="5394960" cy="3335883"/>
+          </a:xfrm>
+          <a:prstGeom prst="rect">
+            <a:avLst/>
+          </a:prstGeom>
+          <a:ln w="12700">
+            <a:solidFill>
+              <a:srgbClr val="E4E6EF"/>
+            </a:solidFill>
           </a:ln>
-          <a:effectLst/>
-        </p:spPr>
-        <p:style>
-          <a:lnRef idx="1">
-            <a:schemeClr val="accent1"/>
-          </a:lnRef>
-          <a:fillRef idx="3">
-            <a:schemeClr val="accent1"/>
-          </a:fillRef>
-          <a:effectRef idx="2">
-            <a:schemeClr val="accent1"/>
-          </a:effectRef>
-          <a:fontRef idx="minor">
-            <a:schemeClr val="lt1"/>
-          </a:fontRef>
-        </p:style>
-        <p:txBody>
-          <a:bodyPr rtlCol="0" anchor="ctr" wrap="square" lIns="73152" rIns="73152"/>
-          <a:lstStyle/>
-          <a:p>
-            <a:pPr algn="l"/>
-            <a:r>
-              <a:rPr sz="1200" b="1">
-                <a:solidFill>
-                  <a:srgbClr val="92400E"/>
-                </a:solidFill>
-                <a:latin typeface="Segoe UI"/>
-              </a:rPr>
-              <a:t>Pending: AWS EKS</a:t>
-            </a:r>
-          </a:p>
-          <a:p>
-            <a:pPr algn="l"/>
-            <a:r>
-              <a:rPr sz="1000" b="0">
-                <a:solidFill>
-                  <a:srgbClr val="92400E"/>
-                </a:solidFill>
-                <a:latin typeface="Segoe UI"/>
-              </a:rPr>
-              <a:t>terraform plan / apply needs AWS credentials; then the same Helm chart deploys with storageClass gp2.</a:t>
-            </a:r>
-          </a:p>
-        </p:txBody>
-      </p:sp>
+        </p:spPr>
+      </p:pic>
     </p:spTree>
   </p:cSld>
   <p:clrMapOvr>
@@ -9515,7 +8507,7 @@
                 </a:solidFill>
                 <a:latin typeface="Segoe UI"/>
               </a:rPr>
-              <a:t>15 • CONCLUSION &amp; NEXT STEPS</a:t>
+              <a:t>15 • VERIFICATION</a:t>
             </a:r>
           </a:p>
         </p:txBody>
@@ -9557,7 +8549,7 @@
                 </a:solidFill>
                 <a:latin typeface="Segoe UI"/>
               </a:rPr>
-              <a:t>From commit to observed workload</a:t>
+              <a:t>Evidence captured on 16 October 2026</a:t>
             </a:r>
           </a:p>
         </p:txBody>
@@ -9570,8 +8562,8 @@
         </p:nvSpPr>
         <p:spPr>
           <a:xfrm>
-            <a:off x="548640" y="6446520"/>
-            <a:ext cx="5486400" cy="274320"/>
+            <a:off x="548640" y="1188720"/>
+            <a:ext cx="11155680" cy="365760"/>
           </a:xfrm>
           <a:prstGeom prst="rect">
             <a:avLst/>
@@ -9593,6 +8585,48 @@
               </a:spcAft>
             </a:pPr>
             <a:r>
+              <a:rPr sz="1400" b="0">
+                <a:solidFill>
+                  <a:srgbClr val="6B7086"/>
+                </a:solidFill>
+                <a:latin typeface="Segoe UI"/>
+              </a:rPr>
+              <a:t>Everything below was run for real; only the AWS EKS deployment still needs cloud credentials.</a:t>
+            </a:r>
+          </a:p>
+        </p:txBody>
+      </p:sp>
+      <p:sp>
+        <p:nvSpPr>
+          <p:cNvPr id="6" name="TextBox 5"/>
+          <p:cNvSpPr txBox="1"/>
+          <p:nvPr/>
+        </p:nvSpPr>
+        <p:spPr>
+          <a:xfrm>
+            <a:off x="548640" y="6446520"/>
+            <a:ext cx="5486400" cy="274320"/>
+          </a:xfrm>
+          <a:prstGeom prst="rect">
+            <a:avLst/>
+          </a:prstGeom>
+          <a:noFill/>
+        </p:spPr>
+        <p:txBody>
+          <a:bodyPr wrap="square" anchor="t" lIns="18288" rIns="18288" tIns="18288" bIns="18288">
+            <a:spAutoFit/>
+          </a:bodyPr>
+          <a:lstStyle/>
+          <a:p>
+            <a:pPr algn="l">
+              <a:lnSpc>
+                <a:spcPct val="110000"/>
+              </a:lnSpc>
+              <a:spcAft>
+                <a:spcPts val="400"/>
+              </a:spcAft>
+            </a:pPr>
+            <a:r>
               <a:rPr sz="900" b="0">
                 <a:solidFill>
                   <a:srgbClr val="6B7086"/>
@@ -9606,7 +8640,7 @@
       </p:sp>
       <p:sp>
         <p:nvSpPr>
-          <p:cNvPr id="6" name="TextBox 5"/>
+          <p:cNvPr id="7" name="TextBox 6"/>
           <p:cNvSpPr txBox="1"/>
           <p:nvPr/>
         </p:nvSpPr>
@@ -9641,7 +8675,1312 @@
                 </a:solidFill>
                 <a:latin typeface="Segoe UI"/>
               </a:rPr>
-              <a:t>16 / 17</a:t>
+              <a:t>16 / 18</a:t>
+            </a:r>
+          </a:p>
+        </p:txBody>
+      </p:sp>
+      <p:sp>
+        <p:nvSpPr>
+          <p:cNvPr id="8" name="Rounded Rectangle 7"/>
+          <p:cNvSpPr/>
+          <p:nvPr/>
+        </p:nvSpPr>
+        <p:spPr>
+          <a:xfrm>
+            <a:off x="548640" y="1728216"/>
+            <a:ext cx="292608" cy="292608"/>
+          </a:xfrm>
+          <a:prstGeom prst="roundRect">
+            <a:avLst>
+              <a:gd name="adj" fmla="val 50000"/>
+            </a:avLst>
+          </a:prstGeom>
+          <a:solidFill>
+            <a:srgbClr val="D1FAE5"/>
+          </a:solidFill>
+          <a:ln>
+            <a:noFill/>
+          </a:ln>
+          <a:effectLst/>
+        </p:spPr>
+        <p:style>
+          <a:lnRef idx="1">
+            <a:schemeClr val="accent1"/>
+          </a:lnRef>
+          <a:fillRef idx="3">
+            <a:schemeClr val="accent1"/>
+          </a:fillRef>
+          <a:effectRef idx="2">
+            <a:schemeClr val="accent1"/>
+          </a:effectRef>
+          <a:fontRef idx="minor">
+            <a:schemeClr val="lt1"/>
+          </a:fontRef>
+        </p:style>
+        <p:txBody>
+          <a:bodyPr rtlCol="0" anchor="ctr" wrap="square" lIns="73152" rIns="73152"/>
+          <a:lstStyle/>
+          <a:p>
+            <a:pPr algn="ctr"/>
+            <a:r>
+              <a:rPr sz="1100" b="1">
+                <a:solidFill>
+                  <a:srgbClr val="10B981"/>
+                </a:solidFill>
+                <a:latin typeface="Segoe UI"/>
+              </a:rPr>
+              <a:t>✓</a:t>
+            </a:r>
+          </a:p>
+        </p:txBody>
+      </p:sp>
+      <p:sp>
+        <p:nvSpPr>
+          <p:cNvPr id="9" name="TextBox 8"/>
+          <p:cNvSpPr txBox="1"/>
+          <p:nvPr/>
+        </p:nvSpPr>
+        <p:spPr>
+          <a:xfrm>
+            <a:off x="960120" y="1691640"/>
+            <a:ext cx="5120640" cy="548640"/>
+          </a:xfrm>
+          <a:prstGeom prst="rect">
+            <a:avLst/>
+          </a:prstGeom>
+          <a:noFill/>
+        </p:spPr>
+        <p:txBody>
+          <a:bodyPr wrap="square" anchor="t" lIns="18288" rIns="18288" tIns="18288" bIns="18288">
+            <a:spAutoFit/>
+          </a:bodyPr>
+          <a:lstStyle/>
+          <a:p>
+            <a:pPr algn="l">
+              <a:lnSpc>
+                <a:spcPct val="95000"/>
+              </a:lnSpc>
+              <a:spcAft>
+                <a:spcPts val="400"/>
+              </a:spcAft>
+            </a:pPr>
+            <a:r>
+              <a:rPr sz="1200" b="1">
+                <a:solidFill>
+                  <a:srgbClr val="1C1F2E"/>
+                </a:solidFill>
+                <a:latin typeface="Segoe UI"/>
+              </a:rPr>
+              <a:t>Application</a:t>
+            </a:r>
+          </a:p>
+          <a:p>
+            <a:pPr algn="l">
+              <a:lnSpc>
+                <a:spcPct val="95000"/>
+              </a:lnSpc>
+              <a:spcAft>
+                <a:spcPts val="400"/>
+              </a:spcAft>
+            </a:pPr>
+            <a:r>
+              <a:rPr sz="1000" b="0">
+                <a:solidFill>
+                  <a:srgbClr val="6B7086"/>
+                </a:solidFill>
+                <a:latin typeface="Segoe UI"/>
+              </a:rPr>
+              <a:t>Todo CRUD, filters and stats through Nginx and the Ingress</a:t>
+            </a:r>
+          </a:p>
+        </p:txBody>
+      </p:sp>
+      <p:sp>
+        <p:nvSpPr>
+          <p:cNvPr id="10" name="Rounded Rectangle 9"/>
+          <p:cNvSpPr/>
+          <p:nvPr/>
+        </p:nvSpPr>
+        <p:spPr>
+          <a:xfrm>
+            <a:off x="548640" y="2276856"/>
+            <a:ext cx="292608" cy="292608"/>
+          </a:xfrm>
+          <a:prstGeom prst="roundRect">
+            <a:avLst>
+              <a:gd name="adj" fmla="val 50000"/>
+            </a:avLst>
+          </a:prstGeom>
+          <a:solidFill>
+            <a:srgbClr val="D1FAE5"/>
+          </a:solidFill>
+          <a:ln>
+            <a:noFill/>
+          </a:ln>
+          <a:effectLst/>
+        </p:spPr>
+        <p:style>
+          <a:lnRef idx="1">
+            <a:schemeClr val="accent1"/>
+          </a:lnRef>
+          <a:fillRef idx="3">
+            <a:schemeClr val="accent1"/>
+          </a:fillRef>
+          <a:effectRef idx="2">
+            <a:schemeClr val="accent1"/>
+          </a:effectRef>
+          <a:fontRef idx="minor">
+            <a:schemeClr val="lt1"/>
+          </a:fontRef>
+        </p:style>
+        <p:txBody>
+          <a:bodyPr rtlCol="0" anchor="ctr" wrap="square" lIns="73152" rIns="73152"/>
+          <a:lstStyle/>
+          <a:p>
+            <a:pPr algn="ctr"/>
+            <a:r>
+              <a:rPr sz="1100" b="1">
+                <a:solidFill>
+                  <a:srgbClr val="10B981"/>
+                </a:solidFill>
+                <a:latin typeface="Segoe UI"/>
+              </a:rPr>
+              <a:t>✓</a:t>
+            </a:r>
+          </a:p>
+        </p:txBody>
+      </p:sp>
+      <p:sp>
+        <p:nvSpPr>
+          <p:cNvPr id="11" name="TextBox 10"/>
+          <p:cNvSpPr txBox="1"/>
+          <p:nvPr/>
+        </p:nvSpPr>
+        <p:spPr>
+          <a:xfrm>
+            <a:off x="960120" y="2240280"/>
+            <a:ext cx="5120640" cy="548640"/>
+          </a:xfrm>
+          <a:prstGeom prst="rect">
+            <a:avLst/>
+          </a:prstGeom>
+          <a:noFill/>
+        </p:spPr>
+        <p:txBody>
+          <a:bodyPr wrap="square" anchor="t" lIns="18288" rIns="18288" tIns="18288" bIns="18288">
+            <a:spAutoFit/>
+          </a:bodyPr>
+          <a:lstStyle/>
+          <a:p>
+            <a:pPr algn="l">
+              <a:lnSpc>
+                <a:spcPct val="95000"/>
+              </a:lnSpc>
+              <a:spcAft>
+                <a:spcPts val="400"/>
+              </a:spcAft>
+            </a:pPr>
+            <a:r>
+              <a:rPr sz="1200" b="1">
+                <a:solidFill>
+                  <a:srgbClr val="1C1F2E"/>
+                </a:solidFill>
+                <a:latin typeface="Segoe UI"/>
+              </a:rPr>
+              <a:t>Tests</a:t>
+            </a:r>
+          </a:p>
+          <a:p>
+            <a:pPr algn="l">
+              <a:lnSpc>
+                <a:spcPct val="95000"/>
+              </a:lnSpc>
+              <a:spcAft>
+                <a:spcPts val="400"/>
+              </a:spcAft>
+            </a:pPr>
+            <a:r>
+              <a:rPr sz="1000" b="0">
+                <a:solidFill>
+                  <a:srgbClr val="6B7086"/>
+                </a:solidFill>
+                <a:latin typeface="Segoe UI"/>
+              </a:rPr>
+              <a:t>28 / 28 pytest; migration matches models; CI on PostgreSQL</a:t>
+            </a:r>
+          </a:p>
+        </p:txBody>
+      </p:sp>
+      <p:sp>
+        <p:nvSpPr>
+          <p:cNvPr id="12" name="Rounded Rectangle 11"/>
+          <p:cNvSpPr/>
+          <p:nvPr/>
+        </p:nvSpPr>
+        <p:spPr>
+          <a:xfrm>
+            <a:off x="548640" y="2825496"/>
+            <a:ext cx="292608" cy="292608"/>
+          </a:xfrm>
+          <a:prstGeom prst="roundRect">
+            <a:avLst>
+              <a:gd name="adj" fmla="val 50000"/>
+            </a:avLst>
+          </a:prstGeom>
+          <a:solidFill>
+            <a:srgbClr val="D1FAE5"/>
+          </a:solidFill>
+          <a:ln>
+            <a:noFill/>
+          </a:ln>
+          <a:effectLst/>
+        </p:spPr>
+        <p:style>
+          <a:lnRef idx="1">
+            <a:schemeClr val="accent1"/>
+          </a:lnRef>
+          <a:fillRef idx="3">
+            <a:schemeClr val="accent1"/>
+          </a:fillRef>
+          <a:effectRef idx="2">
+            <a:schemeClr val="accent1"/>
+          </a:effectRef>
+          <a:fontRef idx="minor">
+            <a:schemeClr val="lt1"/>
+          </a:fontRef>
+        </p:style>
+        <p:txBody>
+          <a:bodyPr rtlCol="0" anchor="ctr" wrap="square" lIns="73152" rIns="73152"/>
+          <a:lstStyle/>
+          <a:p>
+            <a:pPr algn="ctr"/>
+            <a:r>
+              <a:rPr sz="1100" b="1">
+                <a:solidFill>
+                  <a:srgbClr val="10B981"/>
+                </a:solidFill>
+                <a:latin typeface="Segoe UI"/>
+              </a:rPr>
+              <a:t>✓</a:t>
+            </a:r>
+          </a:p>
+        </p:txBody>
+      </p:sp>
+      <p:sp>
+        <p:nvSpPr>
+          <p:cNvPr id="13" name="TextBox 12"/>
+          <p:cNvSpPr txBox="1"/>
+          <p:nvPr/>
+        </p:nvSpPr>
+        <p:spPr>
+          <a:xfrm>
+            <a:off x="960120" y="2788920"/>
+            <a:ext cx="5120640" cy="548640"/>
+          </a:xfrm>
+          <a:prstGeom prst="rect">
+            <a:avLst/>
+          </a:prstGeom>
+          <a:noFill/>
+        </p:spPr>
+        <p:txBody>
+          <a:bodyPr wrap="square" anchor="t" lIns="18288" rIns="18288" tIns="18288" bIns="18288">
+            <a:spAutoFit/>
+          </a:bodyPr>
+          <a:lstStyle/>
+          <a:p>
+            <a:pPr algn="l">
+              <a:lnSpc>
+                <a:spcPct val="95000"/>
+              </a:lnSpc>
+              <a:spcAft>
+                <a:spcPts val="400"/>
+              </a:spcAft>
+            </a:pPr>
+            <a:r>
+              <a:rPr sz="1200" b="1">
+                <a:solidFill>
+                  <a:srgbClr val="1C1F2E"/>
+                </a:solidFill>
+                <a:latin typeface="Segoe UI"/>
+              </a:rPr>
+              <a:t>Security</a:t>
+            </a:r>
+          </a:p>
+          <a:p>
+            <a:pPr algn="l">
+              <a:lnSpc>
+                <a:spcPct val="95000"/>
+              </a:lnSpc>
+              <a:spcAft>
+                <a:spcPts val="400"/>
+              </a:spcAft>
+            </a:pPr>
+            <a:r>
+              <a:rPr sz="1000" b="0">
+                <a:solidFill>
+                  <a:srgbClr val="6B7086"/>
+                </a:solidFill>
+                <a:latin typeface="Segoe UI"/>
+              </a:rPr>
+              <a:t>Trivy 0 HIGH / 0 CRITICAL locally and as a CI gate</a:t>
+            </a:r>
+          </a:p>
+        </p:txBody>
+      </p:sp>
+      <p:sp>
+        <p:nvSpPr>
+          <p:cNvPr id="14" name="Rounded Rectangle 13"/>
+          <p:cNvSpPr/>
+          <p:nvPr/>
+        </p:nvSpPr>
+        <p:spPr>
+          <a:xfrm>
+            <a:off x="548640" y="3374136"/>
+            <a:ext cx="292608" cy="292608"/>
+          </a:xfrm>
+          <a:prstGeom prst="roundRect">
+            <a:avLst>
+              <a:gd name="adj" fmla="val 50000"/>
+            </a:avLst>
+          </a:prstGeom>
+          <a:solidFill>
+            <a:srgbClr val="D1FAE5"/>
+          </a:solidFill>
+          <a:ln>
+            <a:noFill/>
+          </a:ln>
+          <a:effectLst/>
+        </p:spPr>
+        <p:style>
+          <a:lnRef idx="1">
+            <a:schemeClr val="accent1"/>
+          </a:lnRef>
+          <a:fillRef idx="3">
+            <a:schemeClr val="accent1"/>
+          </a:fillRef>
+          <a:effectRef idx="2">
+            <a:schemeClr val="accent1"/>
+          </a:effectRef>
+          <a:fontRef idx="minor">
+            <a:schemeClr val="lt1"/>
+          </a:fontRef>
+        </p:style>
+        <p:txBody>
+          <a:bodyPr rtlCol="0" anchor="ctr" wrap="square" lIns="73152" rIns="73152"/>
+          <a:lstStyle/>
+          <a:p>
+            <a:pPr algn="ctr"/>
+            <a:r>
+              <a:rPr sz="1100" b="1">
+                <a:solidFill>
+                  <a:srgbClr val="10B981"/>
+                </a:solidFill>
+                <a:latin typeface="Segoe UI"/>
+              </a:rPr>
+              <a:t>✓</a:t>
+            </a:r>
+          </a:p>
+        </p:txBody>
+      </p:sp>
+      <p:sp>
+        <p:nvSpPr>
+          <p:cNvPr id="15" name="TextBox 14"/>
+          <p:cNvSpPr txBox="1"/>
+          <p:nvPr/>
+        </p:nvSpPr>
+        <p:spPr>
+          <a:xfrm>
+            <a:off x="960120" y="3337560"/>
+            <a:ext cx="5120640" cy="548640"/>
+          </a:xfrm>
+          <a:prstGeom prst="rect">
+            <a:avLst/>
+          </a:prstGeom>
+          <a:noFill/>
+        </p:spPr>
+        <p:txBody>
+          <a:bodyPr wrap="square" anchor="t" lIns="18288" rIns="18288" tIns="18288" bIns="18288">
+            <a:spAutoFit/>
+          </a:bodyPr>
+          <a:lstStyle/>
+          <a:p>
+            <a:pPr algn="l">
+              <a:lnSpc>
+                <a:spcPct val="95000"/>
+              </a:lnSpc>
+              <a:spcAft>
+                <a:spcPts val="400"/>
+              </a:spcAft>
+            </a:pPr>
+            <a:r>
+              <a:rPr sz="1200" b="1">
+                <a:solidFill>
+                  <a:srgbClr val="1C1F2E"/>
+                </a:solidFill>
+                <a:latin typeface="Segoe UI"/>
+              </a:rPr>
+              <a:t>CI/CD &amp; registry</a:t>
+            </a:r>
+          </a:p>
+          <a:p>
+            <a:pPr algn="l">
+              <a:lnSpc>
+                <a:spcPct val="95000"/>
+              </a:lnSpc>
+              <a:spcAft>
+                <a:spcPts val="400"/>
+              </a:spcAft>
+            </a:pPr>
+            <a:r>
+              <a:rPr sz="1000" b="0">
+                <a:solidFill>
+                  <a:srgbClr val="6B7086"/>
+                </a:solidFill>
+                <a:latin typeface="Segoe UI"/>
+              </a:rPr>
+              <a:t>All 5 jobs green; SHA-tagged images public in GHCR</a:t>
+            </a:r>
+          </a:p>
+        </p:txBody>
+      </p:sp>
+      <p:sp>
+        <p:nvSpPr>
+          <p:cNvPr id="16" name="Rounded Rectangle 15"/>
+          <p:cNvSpPr/>
+          <p:nvPr/>
+        </p:nvSpPr>
+        <p:spPr>
+          <a:xfrm>
+            <a:off x="548640" y="3922776"/>
+            <a:ext cx="292608" cy="292608"/>
+          </a:xfrm>
+          <a:prstGeom prst="roundRect">
+            <a:avLst>
+              <a:gd name="adj" fmla="val 50000"/>
+            </a:avLst>
+          </a:prstGeom>
+          <a:solidFill>
+            <a:srgbClr val="D1FAE5"/>
+          </a:solidFill>
+          <a:ln>
+            <a:noFill/>
+          </a:ln>
+          <a:effectLst/>
+        </p:spPr>
+        <p:style>
+          <a:lnRef idx="1">
+            <a:schemeClr val="accent1"/>
+          </a:lnRef>
+          <a:fillRef idx="3">
+            <a:schemeClr val="accent1"/>
+          </a:fillRef>
+          <a:effectRef idx="2">
+            <a:schemeClr val="accent1"/>
+          </a:effectRef>
+          <a:fontRef idx="minor">
+            <a:schemeClr val="lt1"/>
+          </a:fontRef>
+        </p:style>
+        <p:txBody>
+          <a:bodyPr rtlCol="0" anchor="ctr" wrap="square" lIns="73152" rIns="73152"/>
+          <a:lstStyle/>
+          <a:p>
+            <a:pPr algn="ctr"/>
+            <a:r>
+              <a:rPr sz="1100" b="1">
+                <a:solidFill>
+                  <a:srgbClr val="10B981"/>
+                </a:solidFill>
+                <a:latin typeface="Segoe UI"/>
+              </a:rPr>
+              <a:t>✓</a:t>
+            </a:r>
+          </a:p>
+        </p:txBody>
+      </p:sp>
+      <p:sp>
+        <p:nvSpPr>
+          <p:cNvPr id="17" name="TextBox 16"/>
+          <p:cNvSpPr txBox="1"/>
+          <p:nvPr/>
+        </p:nvSpPr>
+        <p:spPr>
+          <a:xfrm>
+            <a:off x="960120" y="3886200"/>
+            <a:ext cx="5120640" cy="548640"/>
+          </a:xfrm>
+          <a:prstGeom prst="rect">
+            <a:avLst/>
+          </a:prstGeom>
+          <a:noFill/>
+        </p:spPr>
+        <p:txBody>
+          <a:bodyPr wrap="square" anchor="t" lIns="18288" rIns="18288" tIns="18288" bIns="18288">
+            <a:spAutoFit/>
+          </a:bodyPr>
+          <a:lstStyle/>
+          <a:p>
+            <a:pPr algn="l">
+              <a:lnSpc>
+                <a:spcPct val="95000"/>
+              </a:lnSpc>
+              <a:spcAft>
+                <a:spcPts val="400"/>
+              </a:spcAft>
+            </a:pPr>
+            <a:r>
+              <a:rPr sz="1200" b="1">
+                <a:solidFill>
+                  <a:srgbClr val="1C1F2E"/>
+                </a:solidFill>
+                <a:latin typeface="Segoe UI"/>
+              </a:rPr>
+              <a:t>GitOps &amp; HPA</a:t>
+            </a:r>
+          </a:p>
+          <a:p>
+            <a:pPr algn="l">
+              <a:lnSpc>
+                <a:spcPct val="95000"/>
+              </a:lnSpc>
+              <a:spcAft>
+                <a:spcPts val="400"/>
+              </a:spcAft>
+            </a:pPr>
+            <a:r>
+              <a:rPr sz="1000" b="0">
+                <a:solidFill>
+                  <a:srgbClr val="6B7086"/>
+                </a:solidFill>
+                <a:latin typeface="Segoe UI"/>
+              </a:rPr>
+              <a:t>ArgoCD syncs bot-pinned SHAs; HPA scaled 2 → 6 → 2</a:t>
+            </a:r>
+          </a:p>
+        </p:txBody>
+      </p:sp>
+      <p:sp>
+        <p:nvSpPr>
+          <p:cNvPr id="18" name="Rounded Rectangle 17"/>
+          <p:cNvSpPr/>
+          <p:nvPr/>
+        </p:nvSpPr>
+        <p:spPr>
+          <a:xfrm>
+            <a:off x="548640" y="4471416"/>
+            <a:ext cx="292608" cy="292608"/>
+          </a:xfrm>
+          <a:prstGeom prst="roundRect">
+            <a:avLst>
+              <a:gd name="adj" fmla="val 50000"/>
+            </a:avLst>
+          </a:prstGeom>
+          <a:solidFill>
+            <a:srgbClr val="D1FAE5"/>
+          </a:solidFill>
+          <a:ln>
+            <a:noFill/>
+          </a:ln>
+          <a:effectLst/>
+        </p:spPr>
+        <p:style>
+          <a:lnRef idx="1">
+            <a:schemeClr val="accent1"/>
+          </a:lnRef>
+          <a:fillRef idx="3">
+            <a:schemeClr val="accent1"/>
+          </a:fillRef>
+          <a:effectRef idx="2">
+            <a:schemeClr val="accent1"/>
+          </a:effectRef>
+          <a:fontRef idx="minor">
+            <a:schemeClr val="lt1"/>
+          </a:fontRef>
+        </p:style>
+        <p:txBody>
+          <a:bodyPr rtlCol="0" anchor="ctr" wrap="square" lIns="73152" rIns="73152"/>
+          <a:lstStyle/>
+          <a:p>
+            <a:pPr algn="ctr"/>
+            <a:r>
+              <a:rPr sz="1100" b="1">
+                <a:solidFill>
+                  <a:srgbClr val="10B981"/>
+                </a:solidFill>
+                <a:latin typeface="Segoe UI"/>
+              </a:rPr>
+              <a:t>✓</a:t>
+            </a:r>
+          </a:p>
+        </p:txBody>
+      </p:sp>
+      <p:sp>
+        <p:nvSpPr>
+          <p:cNvPr id="19" name="TextBox 18"/>
+          <p:cNvSpPr txBox="1"/>
+          <p:nvPr/>
+        </p:nvSpPr>
+        <p:spPr>
+          <a:xfrm>
+            <a:off x="960120" y="4434840"/>
+            <a:ext cx="5120640" cy="548640"/>
+          </a:xfrm>
+          <a:prstGeom prst="rect">
+            <a:avLst/>
+          </a:prstGeom>
+          <a:noFill/>
+        </p:spPr>
+        <p:txBody>
+          <a:bodyPr wrap="square" anchor="t" lIns="18288" rIns="18288" tIns="18288" bIns="18288">
+            <a:spAutoFit/>
+          </a:bodyPr>
+          <a:lstStyle/>
+          <a:p>
+            <a:pPr algn="l">
+              <a:lnSpc>
+                <a:spcPct val="95000"/>
+              </a:lnSpc>
+              <a:spcAft>
+                <a:spcPts val="400"/>
+              </a:spcAft>
+            </a:pPr>
+            <a:r>
+              <a:rPr sz="1200" b="1">
+                <a:solidFill>
+                  <a:srgbClr val="1C1F2E"/>
+                </a:solidFill>
+                <a:latin typeface="Segoe UI"/>
+              </a:rPr>
+              <a:t>Kubernetes</a:t>
+            </a:r>
+          </a:p>
+          <a:p>
+            <a:pPr algn="l">
+              <a:lnSpc>
+                <a:spcPct val="95000"/>
+              </a:lnSpc>
+              <a:spcAft>
+                <a:spcPts val="400"/>
+              </a:spcAft>
+            </a:pPr>
+            <a:r>
+              <a:rPr sz="1000" b="0">
+                <a:solidFill>
+                  <a:srgbClr val="6B7086"/>
+                </a:solidFill>
+                <a:latin typeface="Segoe UI"/>
+              </a:rPr>
+              <a:t>Helm release on 3-node cluster pulling GHCR images, 0 restarts</a:t>
+            </a:r>
+          </a:p>
+        </p:txBody>
+      </p:sp>
+      <p:sp>
+        <p:nvSpPr>
+          <p:cNvPr id="20" name="Rounded Rectangle 19"/>
+          <p:cNvSpPr/>
+          <p:nvPr/>
+        </p:nvSpPr>
+        <p:spPr>
+          <a:xfrm>
+            <a:off x="548640" y="5020055"/>
+            <a:ext cx="292608" cy="292608"/>
+          </a:xfrm>
+          <a:prstGeom prst="roundRect">
+            <a:avLst>
+              <a:gd name="adj" fmla="val 50000"/>
+            </a:avLst>
+          </a:prstGeom>
+          <a:solidFill>
+            <a:srgbClr val="D1FAE5"/>
+          </a:solidFill>
+          <a:ln>
+            <a:noFill/>
+          </a:ln>
+          <a:effectLst/>
+        </p:spPr>
+        <p:style>
+          <a:lnRef idx="1">
+            <a:schemeClr val="accent1"/>
+          </a:lnRef>
+          <a:fillRef idx="3">
+            <a:schemeClr val="accent1"/>
+          </a:fillRef>
+          <a:effectRef idx="2">
+            <a:schemeClr val="accent1"/>
+          </a:effectRef>
+          <a:fontRef idx="minor">
+            <a:schemeClr val="lt1"/>
+          </a:fontRef>
+        </p:style>
+        <p:txBody>
+          <a:bodyPr rtlCol="0" anchor="ctr" wrap="square" lIns="73152" rIns="73152"/>
+          <a:lstStyle/>
+          <a:p>
+            <a:pPr algn="ctr"/>
+            <a:r>
+              <a:rPr sz="1100" b="1">
+                <a:solidFill>
+                  <a:srgbClr val="10B981"/>
+                </a:solidFill>
+                <a:latin typeface="Segoe UI"/>
+              </a:rPr>
+              <a:t>✓</a:t>
+            </a:r>
+          </a:p>
+        </p:txBody>
+      </p:sp>
+      <p:sp>
+        <p:nvSpPr>
+          <p:cNvPr id="21" name="TextBox 20"/>
+          <p:cNvSpPr txBox="1"/>
+          <p:nvPr/>
+        </p:nvSpPr>
+        <p:spPr>
+          <a:xfrm>
+            <a:off x="960120" y="4983479"/>
+            <a:ext cx="5120640" cy="548640"/>
+          </a:xfrm>
+          <a:prstGeom prst="rect">
+            <a:avLst/>
+          </a:prstGeom>
+          <a:noFill/>
+        </p:spPr>
+        <p:txBody>
+          <a:bodyPr wrap="square" anchor="t" lIns="18288" rIns="18288" tIns="18288" bIns="18288">
+            <a:spAutoFit/>
+          </a:bodyPr>
+          <a:lstStyle/>
+          <a:p>
+            <a:pPr algn="l">
+              <a:lnSpc>
+                <a:spcPct val="95000"/>
+              </a:lnSpc>
+              <a:spcAft>
+                <a:spcPts val="400"/>
+              </a:spcAft>
+            </a:pPr>
+            <a:r>
+              <a:rPr sz="1200" b="1">
+                <a:solidFill>
+                  <a:srgbClr val="1C1F2E"/>
+                </a:solidFill>
+                <a:latin typeface="Segoe UI"/>
+              </a:rPr>
+              <a:t>Observability</a:t>
+            </a:r>
+          </a:p>
+          <a:p>
+            <a:pPr algn="l">
+              <a:lnSpc>
+                <a:spcPct val="95000"/>
+              </a:lnSpc>
+              <a:spcAft>
+                <a:spcPts val="400"/>
+              </a:spcAft>
+            </a:pPr>
+            <a:r>
+              <a:rPr sz="1000" b="0">
+                <a:solidFill>
+                  <a:srgbClr val="6B7086"/>
+                </a:solidFill>
+                <a:latin typeface="Segoe UI"/>
+              </a:rPr>
+              <a:t>Prometheus target UP; Grafana panels populated</a:t>
+            </a:r>
+          </a:p>
+        </p:txBody>
+      </p:sp>
+      <p:sp>
+        <p:nvSpPr>
+          <p:cNvPr id="22" name="Rounded Rectangle 21"/>
+          <p:cNvSpPr/>
+          <p:nvPr/>
+        </p:nvSpPr>
+        <p:spPr>
+          <a:xfrm>
+            <a:off x="548640" y="5568696"/>
+            <a:ext cx="292608" cy="292608"/>
+          </a:xfrm>
+          <a:prstGeom prst="roundRect">
+            <a:avLst>
+              <a:gd name="adj" fmla="val 50000"/>
+            </a:avLst>
+          </a:prstGeom>
+          <a:solidFill>
+            <a:srgbClr val="D1FAE5"/>
+          </a:solidFill>
+          <a:ln>
+            <a:noFill/>
+          </a:ln>
+          <a:effectLst/>
+        </p:spPr>
+        <p:style>
+          <a:lnRef idx="1">
+            <a:schemeClr val="accent1"/>
+          </a:lnRef>
+          <a:fillRef idx="3">
+            <a:schemeClr val="accent1"/>
+          </a:fillRef>
+          <a:effectRef idx="2">
+            <a:schemeClr val="accent1"/>
+          </a:effectRef>
+          <a:fontRef idx="minor">
+            <a:schemeClr val="lt1"/>
+          </a:fontRef>
+        </p:style>
+        <p:txBody>
+          <a:bodyPr rtlCol="0" anchor="ctr" wrap="square" lIns="73152" rIns="73152"/>
+          <a:lstStyle/>
+          <a:p>
+            <a:pPr algn="ctr"/>
+            <a:r>
+              <a:rPr sz="1100" b="1">
+                <a:solidFill>
+                  <a:srgbClr val="10B981"/>
+                </a:solidFill>
+                <a:latin typeface="Segoe UI"/>
+              </a:rPr>
+              <a:t>✓</a:t>
+            </a:r>
+          </a:p>
+        </p:txBody>
+      </p:sp>
+      <p:sp>
+        <p:nvSpPr>
+          <p:cNvPr id="23" name="TextBox 22"/>
+          <p:cNvSpPr txBox="1"/>
+          <p:nvPr/>
+        </p:nvSpPr>
+        <p:spPr>
+          <a:xfrm>
+            <a:off x="960120" y="5532120"/>
+            <a:ext cx="5120640" cy="548640"/>
+          </a:xfrm>
+          <a:prstGeom prst="rect">
+            <a:avLst/>
+          </a:prstGeom>
+          <a:noFill/>
+        </p:spPr>
+        <p:txBody>
+          <a:bodyPr wrap="square" anchor="t" lIns="18288" rIns="18288" tIns="18288" bIns="18288">
+            <a:spAutoFit/>
+          </a:bodyPr>
+          <a:lstStyle/>
+          <a:p>
+            <a:pPr algn="l">
+              <a:lnSpc>
+                <a:spcPct val="95000"/>
+              </a:lnSpc>
+              <a:spcAft>
+                <a:spcPts val="400"/>
+              </a:spcAft>
+            </a:pPr>
+            <a:r>
+              <a:rPr sz="1200" b="1">
+                <a:solidFill>
+                  <a:srgbClr val="1C1F2E"/>
+                </a:solidFill>
+                <a:latin typeface="Segoe UI"/>
+              </a:rPr>
+              <a:t>Terraform</a:t>
+            </a:r>
+          </a:p>
+          <a:p>
+            <a:pPr algn="l">
+              <a:lnSpc>
+                <a:spcPct val="95000"/>
+              </a:lnSpc>
+              <a:spcAft>
+                <a:spcPts val="400"/>
+              </a:spcAft>
+            </a:pPr>
+            <a:r>
+              <a:rPr sz="1000" b="0">
+                <a:solidFill>
+                  <a:srgbClr val="6B7086"/>
+                </a:solidFill>
+                <a:latin typeface="Segoe UI"/>
+              </a:rPr>
+              <a:t>init, fmt -check and validate pass</a:t>
+            </a:r>
+          </a:p>
+        </p:txBody>
+      </p:sp>
+      <p:pic>
+        <p:nvPicPr>
+          <p:cNvPr id="24" name="Picture 23" descr="M8-ingress-application.png"/>
+          <p:cNvPicPr>
+            <a:picLocks noChangeAspect="1"/>
+          </p:cNvPicPr>
+          <p:nvPr/>
+        </p:nvPicPr>
+        <p:blipFill>
+          <a:blip r:embed="rId2"/>
+          <a:srcRect b="171"/>
+          <a:stretch>
+            <a:fillRect/>
+          </a:stretch>
+        </p:blipFill>
+        <p:spPr>
+          <a:xfrm>
+            <a:off x="6309360" y="1691640"/>
+            <a:ext cx="5349240" cy="3337560"/>
+          </a:xfrm>
+          <a:prstGeom prst="rect">
+            <a:avLst/>
+          </a:prstGeom>
+          <a:ln w="12700">
+            <a:solidFill>
+              <a:srgbClr val="E4E6EF"/>
+            </a:solidFill>
+          </a:ln>
+        </p:spPr>
+      </p:pic>
+      <p:sp>
+        <p:nvSpPr>
+          <p:cNvPr id="25" name="TextBox 24"/>
+          <p:cNvSpPr txBox="1"/>
+          <p:nvPr/>
+        </p:nvSpPr>
+        <p:spPr>
+          <a:xfrm>
+            <a:off x="6309360" y="5074920"/>
+            <a:ext cx="5349240" cy="274320"/>
+          </a:xfrm>
+          <a:prstGeom prst="rect">
+            <a:avLst/>
+          </a:prstGeom>
+          <a:noFill/>
+        </p:spPr>
+        <p:txBody>
+          <a:bodyPr wrap="square" anchor="t" lIns="18288" rIns="18288" tIns="18288" bIns="18288">
+            <a:spAutoFit/>
+          </a:bodyPr>
+          <a:lstStyle/>
+          <a:p>
+            <a:pPr algn="l">
+              <a:lnSpc>
+                <a:spcPct val="110000"/>
+              </a:lnSpc>
+              <a:spcAft>
+                <a:spcPts val="400"/>
+              </a:spcAft>
+            </a:pPr>
+            <a:r>
+              <a:rPr sz="1000" b="0">
+                <a:solidFill>
+                  <a:srgbClr val="6B7086"/>
+                </a:solidFill>
+                <a:latin typeface="Segoe UI"/>
+              </a:rPr>
+              <a:t>App served through the Ingress (localhost:8081 on the local cluster)</a:t>
+            </a:r>
+          </a:p>
+        </p:txBody>
+      </p:sp>
+      <p:sp>
+        <p:nvSpPr>
+          <p:cNvPr id="26" name="Rounded Rectangle 25"/>
+          <p:cNvSpPr/>
+          <p:nvPr/>
+        </p:nvSpPr>
+        <p:spPr>
+          <a:xfrm>
+            <a:off x="6309360" y="5440680"/>
+            <a:ext cx="5349240" cy="822960"/>
+          </a:xfrm>
+          <a:prstGeom prst="roundRect">
+            <a:avLst>
+              <a:gd name="adj" fmla="val 8000"/>
+            </a:avLst>
+          </a:prstGeom>
+          <a:solidFill>
+            <a:srgbClr val="FEF3C7"/>
+          </a:solidFill>
+          <a:ln>
+            <a:noFill/>
+          </a:ln>
+          <a:effectLst/>
+        </p:spPr>
+        <p:style>
+          <a:lnRef idx="1">
+            <a:schemeClr val="accent1"/>
+          </a:lnRef>
+          <a:fillRef idx="3">
+            <a:schemeClr val="accent1"/>
+          </a:fillRef>
+          <a:effectRef idx="2">
+            <a:schemeClr val="accent1"/>
+          </a:effectRef>
+          <a:fontRef idx="minor">
+            <a:schemeClr val="lt1"/>
+          </a:fontRef>
+        </p:style>
+        <p:txBody>
+          <a:bodyPr rtlCol="0" anchor="ctr" wrap="square" lIns="73152" rIns="73152"/>
+          <a:lstStyle/>
+          <a:p>
+            <a:pPr algn="l"/>
+            <a:r>
+              <a:rPr sz="1200" b="1">
+                <a:solidFill>
+                  <a:srgbClr val="92400E"/>
+                </a:solidFill>
+                <a:latin typeface="Segoe UI"/>
+              </a:rPr>
+              <a:t>Pending: AWS EKS</a:t>
+            </a:r>
+          </a:p>
+          <a:p>
+            <a:pPr algn="l"/>
+            <a:r>
+              <a:rPr sz="1000" b="0">
+                <a:solidFill>
+                  <a:srgbClr val="92400E"/>
+                </a:solidFill>
+                <a:latin typeface="Segoe UI"/>
+              </a:rPr>
+              <a:t>terraform plan / apply needs AWS credentials; then the same Helm chart deploys with storageClass gp2.</a:t>
+            </a:r>
+          </a:p>
+        </p:txBody>
+      </p:sp>
+    </p:spTree>
+  </p:cSld>
+  <p:clrMapOvr>
+    <a:masterClrMapping/>
+  </p:clrMapOvr>
+</p:sld>
+</file>
+
+<file path=ppt/slides/slide17.xml><?xml version="1.0" encoding="utf-8"?>
+<p:sld xmlns:a="http://schemas.openxmlformats.org/drawingml/2006/main" xmlns:p="http://schemas.openxmlformats.org/presentationml/2006/main" xmlns:r="http://schemas.openxmlformats.org/officeDocument/2006/relationships">
+  <p:cSld>
+    <p:bg>
+      <p:bgPr>
+        <a:solidFill>
+          <a:srgbClr val="F4F5FB"/>
+        </a:solidFill>
+        <a:effectLst/>
+      </p:bgPr>
+    </p:bg>
+    <p:spTree>
+      <p:nvGrpSpPr>
+        <p:cNvPr id="1" name=""/>
+        <p:cNvGrpSpPr/>
+        <p:nvPr/>
+      </p:nvGrpSpPr>
+      <p:grpSpPr/>
+      <p:sp>
+        <p:nvSpPr>
+          <p:cNvPr id="2" name="Rectangle 1"/>
+          <p:cNvSpPr/>
+          <p:nvPr/>
+        </p:nvSpPr>
+        <p:spPr>
+          <a:xfrm>
+            <a:off x="0" y="0"/>
+            <a:ext cx="109728" cy="6858000"/>
+          </a:xfrm>
+          <a:prstGeom prst="rect">
+            <a:avLst/>
+          </a:prstGeom>
+          <a:solidFill>
+            <a:srgbClr val="4F46E5"/>
+          </a:solidFill>
+          <a:ln>
+            <a:noFill/>
+          </a:ln>
+          <a:effectLst/>
+        </p:spPr>
+        <p:style>
+          <a:lnRef idx="1">
+            <a:schemeClr val="accent1"/>
+          </a:lnRef>
+          <a:fillRef idx="3">
+            <a:schemeClr val="accent1"/>
+          </a:fillRef>
+          <a:effectRef idx="2">
+            <a:schemeClr val="accent1"/>
+          </a:effectRef>
+          <a:fontRef idx="minor">
+            <a:schemeClr val="lt1"/>
+          </a:fontRef>
+        </p:style>
+        <p:txBody>
+          <a:bodyPr rtlCol="0" anchor="ctr"/>
+          <a:lstStyle/>
+          <a:p>
+            <a:pPr algn="ctr"/>
+          </a:p>
+        </p:txBody>
+      </p:sp>
+      <p:sp>
+        <p:nvSpPr>
+          <p:cNvPr id="3" name="TextBox 2"/>
+          <p:cNvSpPr txBox="1"/>
+          <p:nvPr/>
+        </p:nvSpPr>
+        <p:spPr>
+          <a:xfrm>
+            <a:off x="548640" y="347472"/>
+            <a:ext cx="8229600" cy="274320"/>
+          </a:xfrm>
+          <a:prstGeom prst="rect">
+            <a:avLst/>
+          </a:prstGeom>
+          <a:noFill/>
+        </p:spPr>
+        <p:txBody>
+          <a:bodyPr wrap="square" anchor="t" lIns="18288" rIns="18288" tIns="18288" bIns="18288">
+            <a:spAutoFit/>
+          </a:bodyPr>
+          <a:lstStyle/>
+          <a:p>
+            <a:pPr algn="l">
+              <a:lnSpc>
+                <a:spcPct val="110000"/>
+              </a:lnSpc>
+              <a:spcAft>
+                <a:spcPts val="400"/>
+              </a:spcAft>
+            </a:pPr>
+            <a:r>
+              <a:rPr sz="1100" b="1">
+                <a:solidFill>
+                  <a:srgbClr val="4F46E5"/>
+                </a:solidFill>
+                <a:latin typeface="Segoe UI"/>
+              </a:rPr>
+              <a:t>16 • CONCLUSION &amp; NEXT STEPS</a:t>
+            </a:r>
+          </a:p>
+        </p:txBody>
+      </p:sp>
+      <p:sp>
+        <p:nvSpPr>
+          <p:cNvPr id="4" name="TextBox 3"/>
+          <p:cNvSpPr txBox="1"/>
+          <p:nvPr/>
+        </p:nvSpPr>
+        <p:spPr>
+          <a:xfrm>
+            <a:off x="548640" y="603504"/>
+            <a:ext cx="11155680" cy="548640"/>
+          </a:xfrm>
+          <a:prstGeom prst="rect">
+            <a:avLst/>
+          </a:prstGeom>
+          <a:noFill/>
+        </p:spPr>
+        <p:txBody>
+          <a:bodyPr wrap="square" anchor="t" lIns="18288" rIns="18288" tIns="18288" bIns="18288">
+            <a:spAutoFit/>
+          </a:bodyPr>
+          <a:lstStyle/>
+          <a:p>
+            <a:pPr algn="l">
+              <a:lnSpc>
+                <a:spcPct val="110000"/>
+              </a:lnSpc>
+              <a:spcAft>
+                <a:spcPts val="400"/>
+              </a:spcAft>
+            </a:pPr>
+            <a:r>
+              <a:rPr sz="2800" b="1">
+                <a:solidFill>
+                  <a:srgbClr val="1C1F2E"/>
+                </a:solidFill>
+                <a:latin typeface="Segoe UI"/>
+              </a:rPr>
+              <a:t>From commit to observed workload</a:t>
+            </a:r>
+          </a:p>
+        </p:txBody>
+      </p:sp>
+      <p:sp>
+        <p:nvSpPr>
+          <p:cNvPr id="5" name="TextBox 4"/>
+          <p:cNvSpPr txBox="1"/>
+          <p:nvPr/>
+        </p:nvSpPr>
+        <p:spPr>
+          <a:xfrm>
+            <a:off x="548640" y="6446520"/>
+            <a:ext cx="5486400" cy="274320"/>
+          </a:xfrm>
+          <a:prstGeom prst="rect">
+            <a:avLst/>
+          </a:prstGeom>
+          <a:noFill/>
+        </p:spPr>
+        <p:txBody>
+          <a:bodyPr wrap="square" anchor="t" lIns="18288" rIns="18288" tIns="18288" bIns="18288">
+            <a:spAutoFit/>
+          </a:bodyPr>
+          <a:lstStyle/>
+          <a:p>
+            <a:pPr algn="l">
+              <a:lnSpc>
+                <a:spcPct val="110000"/>
+              </a:lnSpc>
+              <a:spcAft>
+                <a:spcPts val="400"/>
+              </a:spcAft>
+            </a:pPr>
+            <a:r>
+              <a:rPr sz="900" b="0">
+                <a:solidFill>
+                  <a:srgbClr val="6B7086"/>
+                </a:solidFill>
+                <a:latin typeface="Segoe UI"/>
+              </a:rPr>
+              <a:t>DevTrack Todo  •  Jinesh Gandhi  •  DevOps Capstone</a:t>
+            </a:r>
+          </a:p>
+        </p:txBody>
+      </p:sp>
+      <p:sp>
+        <p:nvSpPr>
+          <p:cNvPr id="6" name="TextBox 5"/>
+          <p:cNvSpPr txBox="1"/>
+          <p:nvPr/>
+        </p:nvSpPr>
+        <p:spPr>
+          <a:xfrm>
+            <a:off x="10698480" y="6446520"/>
+            <a:ext cx="1005840" cy="274320"/>
+          </a:xfrm>
+          <a:prstGeom prst="rect">
+            <a:avLst/>
+          </a:prstGeom>
+          <a:noFill/>
+        </p:spPr>
+        <p:txBody>
+          <a:bodyPr wrap="square" anchor="t" lIns="18288" rIns="18288" tIns="18288" bIns="18288">
+            <a:spAutoFit/>
+          </a:bodyPr>
+          <a:lstStyle/>
+          <a:p>
+            <a:pPr algn="r">
+              <a:lnSpc>
+                <a:spcPct val="110000"/>
+              </a:lnSpc>
+              <a:spcAft>
+                <a:spcPts val="400"/>
+              </a:spcAft>
+            </a:pPr>
+            <a:r>
+              <a:rPr sz="900" b="0">
+                <a:solidFill>
+                  <a:srgbClr val="6B7086"/>
+                </a:solidFill>
+                <a:latin typeface="Segoe UI"/>
+              </a:rPr>
+              <a:t>17 / 18</a:t>
             </a:r>
           </a:p>
         </p:txBody>
@@ -9993,7 +10332,7 @@
                 </a:solidFill>
                 <a:latin typeface="Segoe UI"/>
               </a:rPr>
-              <a:t>Tests, lint, image builds, Trivy scanning, GHCR publishing and GitOps image pinning.</a:t>
+              <a:t>Tests, lint, image builds, Trivy scanning, GHCR publishing and GitOps rollout via ArgoCD.</a:t>
             </a:r>
           </a:p>
         </p:txBody>
@@ -10169,7 +10508,7 @@
                 </a:solidFill>
                 <a:latin typeface="Segoe UI"/>
               </a:rPr>
-              <a:t>Helm release on Kubernetes with Ingress, probes, Prometheus and Grafana; EKS defined in Terraform.</a:t>
+              <a:t>ArgoCD-managed Helm release with Ingress, HPA, probes, Prometheus and Grafana; EKS defined in Terraform.</a:t>
             </a:r>
           </a:p>
         </p:txBody>
@@ -10266,7 +10605,7 @@
                 </a:solidFill>
                 <a:latin typeface="Segoe UI"/>
               </a:rPr>
-              <a:t>Horizontal Pod Autoscaler on backend CPU</a:t>
+              <a:t>Karpenter / Cluster Autoscaler for nodes</a:t>
             </a:r>
           </a:p>
         </p:txBody>
@@ -10596,7 +10935,7 @@
 </p:sld>
 </file>
 
-<file path=ppt/slides/slide17.xml><?xml version="1.0" encoding="utf-8"?>
+<file path=ppt/slides/slide18.xml><?xml version="1.0" encoding="utf-8"?>
 <p:sld xmlns:a="http://schemas.openxmlformats.org/drawingml/2006/main" xmlns:p="http://schemas.openxmlformats.org/presentationml/2006/main" xmlns:r="http://schemas.openxmlformats.org/officeDocument/2006/relationships">
   <p:cSld>
     <p:bg>
@@ -11474,7 +11813,7 @@
                 </a:solidFill>
                 <a:latin typeface="Segoe UI"/>
               </a:rPr>
-              <a:t>2 / 17</a:t>
+              <a:t>2 / 18</a:t>
             </a:r>
           </a:p>
         </p:txBody>
@@ -12852,7 +13191,7 @@
                 </a:solidFill>
                 <a:latin typeface="Segoe UI"/>
               </a:rPr>
-              <a:t>3 / 17</a:t>
+              <a:t>3 / 18</a:t>
             </a:r>
           </a:p>
         </p:txBody>
@@ -13858,7 +14197,7 @@
                 </a:solidFill>
                 <a:latin typeface="Segoe UI"/>
               </a:rPr>
-              <a:t>4 / 17</a:t>
+              <a:t>4 / 18</a:t>
             </a:r>
           </a:p>
         </p:txBody>
@@ -16022,7 +16361,7 @@
                 </a:solidFill>
                 <a:latin typeface="Segoe UI"/>
               </a:rPr>
-              <a:t>5 / 17</a:t>
+              <a:t>5 / 18</a:t>
             </a:r>
           </a:p>
         </p:txBody>
@@ -18316,7 +18655,7 @@
                 </a:solidFill>
                 <a:latin typeface="Segoe UI"/>
               </a:rPr>
-              <a:t>6 / 17</a:t>
+              <a:t>6 / 18</a:t>
             </a:r>
           </a:p>
         </p:txBody>
@@ -19924,7 +20263,7 @@
                 </a:solidFill>
                 <a:latin typeface="Segoe UI"/>
               </a:rPr>
-              <a:t>7 / 17</a:t>
+              <a:t>7 / 18</a:t>
             </a:r>
           </a:p>
         </p:txBody>
@@ -20869,7 +21208,7 @@
                 </a:solidFill>
                 <a:latin typeface="Segoe UI"/>
               </a:rPr>
-              <a:t>8 / 17</a:t>
+              <a:t>8 / 18</a:t>
             </a:r>
           </a:p>
         </p:txBody>
@@ -22437,7 +22776,7 @@
                 </a:solidFill>
                 <a:latin typeface="Segoe UI"/>
               </a:rPr>
-              <a:t>9 / 17</a:t>
+              <a:t>9 / 18</a:t>
             </a:r>
           </a:p>
         </p:txBody>
